--- a/nem-team-day/Reading-the-NEM-Team-Day.pptx
+++ b/nem-team-day/Reading-the-NEM-Team-Day.pptx
@@ -1462,6 +1462,9 @@
                 </c:pt>
                 <c:pt idx="2">
                   <c:v>0.82</c:v>
+                </c:pt>
+                <c:pt idx="3">
+                  <c:v>0.64</c:v>
                 </c:pt>
                 <c:pt idx="4">
                   <c:v>0.67</c:v>

--- a/nem-team-day/Reading-the-NEM-Team-Day.pptx
+++ b/nem-team-day/Reading-the-NEM-Team-Day.pptx
@@ -33,6 +33,7 @@
     <p:sldId id="281" r:id="rId32"/>
     <p:sldId id="282" r:id="rId33"/>
     <p:sldId id="283" r:id="rId34"/>
+    <p:sldId id="284" r:id="rId35"/>
   </p:sldIdLst>
   <p:sldSz cx="12191695" cy="6858000" type="screen4x3"/>
   <p:notesSz cx="6858000" cy="9144000"/>
@@ -14760,7 +14761,7 @@
                 </a:solidFill>
                 <a:latin typeface="Calibri"/>
               </a:rPr>
-              <a:t>The data on the table</a:t>
+              <a:t>Battery build by state — spread, size &amp; duration</a:t>
             </a:r>
           </a:p>
         </p:txBody>
@@ -14773,8 +14774,8 @@
         </p:nvSpPr>
         <p:spPr>
           <a:xfrm>
-            <a:off x="548640" y="1600200"/>
-            <a:ext cx="11064240" cy="4206240"/>
+            <a:off x="548640" y="1389888"/>
+            <a:ext cx="11064240" cy="457200"/>
           </a:xfrm>
           <a:prstGeom prst="rect">
             <a:avLst/>
@@ -14782,343 +14783,7 @@
           <a:noFill/>
         </p:spPr>
         <p:txBody>
-          <a:bodyPr wrap="square" lIns="0" rIns="0" tIns="0" bIns="0">
-            <a:spAutoFit/>
-          </a:bodyPr>
-          <a:lstStyle/>
-          <a:p>
-            <a:pPr>
-              <a:lnSpc>
-                <a:spcPct val="105000"/>
-              </a:lnSpc>
-              <a:spcAft>
-                <a:spcPts val="1100"/>
-              </a:spcAft>
-            </a:pPr>
-            <a:r>
-              <a:rPr sz="1600" b="1">
-                <a:solidFill>
-                  <a:srgbClr val="B21E46"/>
-                </a:solidFill>
-                <a:latin typeface="Calibri"/>
-              </a:rPr>
-              <a:t>▸  </a:t>
-            </a:r>
-            <a:r>
-              <a:rPr sz="1600" b="0">
-                <a:solidFill>
-                  <a:srgbClr val="37424F"/>
-                </a:solidFill>
-                <a:latin typeface="Calibri"/>
-              </a:rPr>
-              <a:t>VIC </a:t>
-            </a:r>
-            <a:r>
-              <a:rPr sz="1600" b="1">
-                <a:solidFill>
-                  <a:srgbClr val="111820"/>
-                </a:solidFill>
-                <a:latin typeface="Calibri"/>
-              </a:rPr>
-              <a:t>solar value factor: 1.06× (2019) → 0.37× (2023–24 trough) → 0.67× (2026 YTD)</a:t>
-            </a:r>
-            <a:r>
-              <a:rPr sz="1600" b="0">
-                <a:solidFill>
-                  <a:srgbClr val="37424F"/>
-                </a:solidFill>
-                <a:latin typeface="Calibri"/>
-              </a:rPr>
-              <a:t>. It cycles.</a:t>
-            </a:r>
-          </a:p>
-          <a:p>
-            <a:pPr>
-              <a:lnSpc>
-                <a:spcPct val="105000"/>
-              </a:lnSpc>
-              <a:spcAft>
-                <a:spcPts val="1100"/>
-              </a:spcAft>
-            </a:pPr>
-            <a:r>
-              <a:rPr sz="1600" b="1">
-                <a:solidFill>
-                  <a:srgbClr val="B21E46"/>
-                </a:solidFill>
-                <a:latin typeface="Calibri"/>
-              </a:rPr>
-              <a:t>▸  </a:t>
-            </a:r>
-            <a:r>
-              <a:rPr sz="1600" b="0">
-                <a:solidFill>
-                  <a:srgbClr val="37424F"/>
-                </a:solidFill>
-                <a:latin typeface="Calibri"/>
-              </a:rPr>
-              <a:t>“</a:t>
-            </a:r>
-            <a:r>
-              <a:rPr sz="1600" b="1">
-                <a:solidFill>
-                  <a:srgbClr val="111820"/>
-                </a:solidFill>
-                <a:latin typeface="Calibri"/>
-              </a:rPr>
-              <a:t>Darkest before dawn</a:t>
-            </a:r>
-            <a:r>
-              <a:rPr sz="1600" b="0">
-                <a:solidFill>
-                  <a:srgbClr val="37424F"/>
-                </a:solidFill>
-                <a:latin typeface="Calibri"/>
-              </a:rPr>
-              <a:t>”: worst while coal floods the midday; as coal exits, evening scarcity returns value.</a:t>
-            </a:r>
-          </a:p>
-          <a:p>
-            <a:pPr>
-              <a:lnSpc>
-                <a:spcPct val="105000"/>
-              </a:lnSpc>
-              <a:spcAft>
-                <a:spcPts val="1100"/>
-              </a:spcAft>
-            </a:pPr>
-            <a:r>
-              <a:rPr sz="1600" b="1">
-                <a:solidFill>
-                  <a:srgbClr val="B21E46"/>
-                </a:solidFill>
-                <a:latin typeface="Calibri"/>
-              </a:rPr>
-              <a:t>▸  </a:t>
-            </a:r>
-            <a:r>
-              <a:rPr sz="1600" b="0">
-                <a:solidFill>
-                  <a:srgbClr val="37424F"/>
-                </a:solidFill>
-                <a:latin typeface="Calibri"/>
-              </a:rPr>
-              <a:t>Batteries: </a:t>
-            </a:r>
-            <a:r>
-              <a:rPr sz="1600" b="1">
-                <a:solidFill>
-                  <a:srgbClr val="111820"/>
-                </a:solidFill>
-                <a:latin typeface="Calibri"/>
-              </a:rPr>
-              <a:t>top-2hr spread ~$500–880 → ~$100–200</a:t>
-            </a:r>
-            <a:r>
-              <a:rPr sz="1600" b="0">
-                <a:solidFill>
-                  <a:srgbClr val="37424F"/>
-                </a:solidFill>
-                <a:latin typeface="Calibri"/>
-              </a:rPr>
-              <a:t> as the fleet grew 4 → 60 — but it spikes in volatile months.</a:t>
-            </a:r>
-          </a:p>
-          <a:p>
-            <a:pPr>
-              <a:lnSpc>
-                <a:spcPct val="105000"/>
-              </a:lnSpc>
-              <a:spcAft>
-                <a:spcPts val="1100"/>
-              </a:spcAft>
-            </a:pPr>
-            <a:r>
-              <a:rPr sz="1600" b="1">
-                <a:solidFill>
-                  <a:srgbClr val="B21E46"/>
-                </a:solidFill>
-                <a:latin typeface="Calibri"/>
-              </a:rPr>
-              <a:t>▸  </a:t>
-            </a:r>
-            <a:r>
-              <a:rPr sz="1600" b="0">
-                <a:solidFill>
-                  <a:srgbClr val="37424F"/>
-                </a:solidFill>
-                <a:latin typeface="Calibri"/>
-              </a:rPr>
-              <a:t>Compression is BESS </a:t>
-            </a:r>
-            <a:r>
-              <a:rPr sz="1600" b="1">
-                <a:solidFill>
-                  <a:srgbClr val="111820"/>
-                </a:solidFill>
-                <a:latin typeface="Calibri"/>
-              </a:rPr>
-              <a:t>and</a:t>
-            </a:r>
-            <a:r>
-              <a:rPr sz="1600" b="0">
-                <a:solidFill>
-                  <a:srgbClr val="37424F"/>
-                </a:solidFill>
-                <a:latin typeface="Calibri"/>
-              </a:rPr>
-              <a:t> benign conditions — coal still in, mild weather, high unit availability.</a:t>
-            </a:r>
-          </a:p>
-          <a:p>
-            <a:pPr>
-              <a:lnSpc>
-                <a:spcPct val="105000"/>
-              </a:lnSpc>
-              <a:spcAft>
-                <a:spcPts val="1100"/>
-              </a:spcAft>
-            </a:pPr>
-            <a:r>
-              <a:rPr sz="1600" b="1">
-                <a:solidFill>
-                  <a:srgbClr val="B21E46"/>
-                </a:solidFill>
-                <a:latin typeface="Calibri"/>
-              </a:rPr>
-              <a:t>▸  </a:t>
-            </a:r>
-            <a:r>
-              <a:rPr sz="1600" b="0">
-                <a:solidFill>
-                  <a:srgbClr val="37424F"/>
-                </a:solidFill>
-                <a:latin typeface="Calibri"/>
-              </a:rPr>
-              <a:t>The fleet: </a:t>
-            </a:r>
-            <a:r>
-              <a:rPr sz="1600" b="1">
-                <a:solidFill>
-                  <a:srgbClr val="111820"/>
-                </a:solidFill>
-                <a:latin typeface="Calibri"/>
-              </a:rPr>
-              <a:t>~65 batteries / 12.7 GW operating; ~19 GW / 65 GWh committed</a:t>
-            </a:r>
-            <a:r>
-              <a:rPr sz="1600" b="0">
-                <a:solidFill>
-                  <a:srgbClr val="37424F"/>
-                </a:solidFill>
-                <a:latin typeface="Calibri"/>
-              </a:rPr>
-              <a:t> and coming.</a:t>
-            </a:r>
-          </a:p>
-          <a:p>
-            <a:pPr>
-              <a:lnSpc>
-                <a:spcPct val="105000"/>
-              </a:lnSpc>
-              <a:spcAft>
-                <a:spcPts val="1100"/>
-              </a:spcAft>
-            </a:pPr>
-            <a:r>
-              <a:rPr sz="1600" b="1">
-                <a:solidFill>
-                  <a:srgbClr val="B21E46"/>
-                </a:solidFill>
-                <a:latin typeface="Calibri"/>
-              </a:rPr>
-              <a:t>▸  </a:t>
-            </a:r>
-            <a:r>
-              <a:rPr sz="1600" b="1">
-                <a:solidFill>
-                  <a:srgbClr val="111820"/>
-                </a:solidFill>
-                <a:latin typeface="Calibri"/>
-              </a:rPr>
-              <a:t>FCAS revenue fell ~90–95%</a:t>
-            </a:r>
-            <a:r>
-              <a:rPr sz="1600" b="0">
-                <a:solidFill>
-                  <a:srgbClr val="37424F"/>
-                </a:solidFill>
-                <a:latin typeface="Calibri"/>
-              </a:rPr>
-              <a:t> in five years — a whole stream competed to near-zero.</a:t>
-            </a:r>
-          </a:p>
-        </p:txBody>
-      </p:sp>
-      <p:sp>
-        <p:nvSpPr>
-          <p:cNvPr id="7" name="Rectangle 6"/>
-          <p:cNvSpPr/>
-          <p:nvPr/>
-        </p:nvSpPr>
-        <p:spPr>
-          <a:xfrm>
-            <a:off x="548640" y="5669280"/>
-            <a:ext cx="11064240" cy="685800"/>
-          </a:xfrm>
-          <a:prstGeom prst="rect">
-            <a:avLst/>
-          </a:prstGeom>
-          <a:solidFill>
-            <a:srgbClr val="F4F6F9"/>
-          </a:solidFill>
-          <a:ln w="9525">
-            <a:solidFill>
-              <a:srgbClr val="D8DEE6"/>
-            </a:solidFill>
-          </a:ln>
-          <a:effectLst/>
-        </p:spPr>
-        <p:style>
-          <a:lnRef idx="1">
-            <a:schemeClr val="accent1"/>
-          </a:lnRef>
-          <a:fillRef idx="3">
-            <a:schemeClr val="accent1"/>
-          </a:fillRef>
-          <a:effectRef idx="2">
-            <a:schemeClr val="accent1"/>
-          </a:effectRef>
-          <a:fontRef idx="minor">
-            <a:schemeClr val="lt1"/>
-          </a:fontRef>
-        </p:style>
-        <p:txBody>
-          <a:bodyPr rtlCol="0" anchor="ctr"/>
-          <a:lstStyle/>
-          <a:p>
-            <a:pPr algn="ctr"/>
-          </a:p>
-        </p:txBody>
-      </p:sp>
-      <p:sp>
-        <p:nvSpPr>
-          <p:cNvPr id="8" name="TextBox 7"/>
-          <p:cNvSpPr txBox="1"/>
-          <p:nvPr/>
-        </p:nvSpPr>
-        <p:spPr>
-          <a:xfrm>
-            <a:off x="731520" y="5779008"/>
-            <a:ext cx="10698480" cy="457200"/>
-          </a:xfrm>
-          <a:prstGeom prst="rect">
-            <a:avLst/>
-          </a:prstGeom>
-          <a:noFill/>
-        </p:spPr>
-        <p:txBody>
-          <a:bodyPr wrap="square" anchor="ctr" lIns="0" rIns="0" tIns="0" bIns="0">
+          <a:bodyPr wrap="square" anchor="t" lIns="0" rIns="0" tIns="0" bIns="0">
             <a:spAutoFit/>
           </a:bodyPr>
           <a:lstStyle/>
@@ -15135,20 +14800,1120 @@
               </a:spcAft>
             </a:pPr>
             <a:r>
-              <a:rPr sz="1350" b="0" i="1">
+              <a:rPr sz="1400" b="0" i="0">
                 <a:solidFill>
                   <a:srgbClr val="37424F"/>
                 </a:solidFill>
                 <a:latin typeface="Calibri"/>
               </a:rPr>
-              <a:t>Value factor is a generation idea; a battery's analog is the spread. Both erode as you build — and both cycle.</a:t>
-            </a:r>
+              <a:t>Where the batteries are, how big and how long they last — against the spread they chase.</a:t>
+            </a:r>
+          </a:p>
+        </p:txBody>
+      </p:sp>
+      <p:graphicFrame>
+        <p:nvGraphicFramePr>
+          <p:cNvPr id="7" name="Table 6"/>
+          <p:cNvGraphicFramePr>
+            <a:graphicFrameLocks noGrp="1"/>
+          </p:cNvGraphicFramePr>
+          <p:nvPr/>
+        </p:nvGraphicFramePr>
+        <p:xfrm>
+          <a:off x="822960" y="1965960"/>
+          <a:ext cx="10515600" cy="2889504"/>
+        </p:xfrm>
+        <a:graphic>
+          <a:graphicData uri="http://schemas.openxmlformats.org/drawingml/2006/table">
+            <a:tbl>
+              <a:tblPr>
+                <a:tableStyleId>{5C22544A-7EE6-4342-B048-85BDC9FD1C3A}</a:tableStyleId>
+              </a:tblPr>
+              <a:tblGrid>
+                <a:gridCol w="1463040"/>
+                <a:gridCol w="1508760"/>
+                <a:gridCol w="1508760"/>
+                <a:gridCol w="1508760"/>
+                <a:gridCol w="1508760"/>
+                <a:gridCol w="1508760"/>
+                <a:gridCol w="1508760"/>
+              </a:tblGrid>
+              <a:tr h="603504">
+                <a:tc>
+                  <a:txBody>
+                    <a:bodyPr wrap="square"/>
+                    <a:lstStyle/>
+                    <a:p>
+                      <a:pPr algn="l"/>
+                      <a:r>
+                        <a:rPr sz="1100" b="1">
+                          <a:solidFill>
+                            <a:srgbClr val="FFFFFF"/>
+                          </a:solidFill>
+                          <a:latin typeface="Calibri"/>
+                        </a:rPr>
+                        <a:t>State</a:t>
+                      </a:r>
+                    </a:p>
+                  </a:txBody>
+                  <a:tcPr marL="82296" marR="45720" marT="18288" marB="18288" anchor="ctr">
+                    <a:solidFill>
+                      <a:srgbClr val="B21E46"/>
+                    </a:solidFill>
+                  </a:tcPr>
+                </a:tc>
+                <a:tc>
+                  <a:txBody>
+                    <a:bodyPr wrap="square"/>
+                    <a:lstStyle/>
+                    <a:p>
+                      <a:pPr algn="ctr"/>
+                      <a:r>
+                        <a:rPr sz="1100" b="1">
+                          <a:solidFill>
+                            <a:srgbClr val="FFFFFF"/>
+                          </a:solidFill>
+                          <a:latin typeface="Calibri"/>
+                        </a:rPr>
+                        <a:t>Spread (tb2)</a:t>
+                      </a:r>
+                    </a:p>
+                  </a:txBody>
+                  <a:tcPr marL="82296" marR="45720" marT="18288" marB="18288" anchor="ctr">
+                    <a:solidFill>
+                      <a:srgbClr val="B21E46"/>
+                    </a:solidFill>
+                  </a:tcPr>
+                </a:tc>
+                <a:tc>
+                  <a:txBody>
+                    <a:bodyPr wrap="square"/>
+                    <a:lstStyle/>
+                    <a:p>
+                      <a:pPr algn="ctr"/>
+                      <a:r>
+                        <a:rPr sz="1100" b="1">
+                          <a:solidFill>
+                            <a:srgbClr val="FFFFFF"/>
+                          </a:solidFill>
+                          <a:latin typeface="Calibri"/>
+                        </a:rPr>
+                        <a:t>Batteries</a:t>
+                      </a:r>
+                    </a:p>
+                  </a:txBody>
+                  <a:tcPr marL="82296" marR="45720" marT="18288" marB="18288" anchor="ctr">
+                    <a:solidFill>
+                      <a:srgbClr val="B21E46"/>
+                    </a:solidFill>
+                  </a:tcPr>
+                </a:tc>
+                <a:tc>
+                  <a:txBody>
+                    <a:bodyPr wrap="square"/>
+                    <a:lstStyle/>
+                    <a:p>
+                      <a:pPr algn="ctr"/>
+                      <a:r>
+                        <a:rPr sz="1100" b="1">
+                          <a:solidFill>
+                            <a:srgbClr val="FFFFFF"/>
+                          </a:solidFill>
+                          <a:latin typeface="Calibri"/>
+                        </a:rPr>
+                        <a:t>Power GW</a:t>
+                      </a:r>
+                    </a:p>
+                  </a:txBody>
+                  <a:tcPr marL="82296" marR="45720" marT="18288" marB="18288" anchor="ctr">
+                    <a:solidFill>
+                      <a:srgbClr val="B21E46"/>
+                    </a:solidFill>
+                  </a:tcPr>
+                </a:tc>
+                <a:tc>
+                  <a:txBody>
+                    <a:bodyPr wrap="square"/>
+                    <a:lstStyle/>
+                    <a:p>
+                      <a:pPr algn="ctr"/>
+                      <a:r>
+                        <a:rPr sz="1100" b="1">
+                          <a:solidFill>
+                            <a:srgbClr val="FFFFFF"/>
+                          </a:solidFill>
+                          <a:latin typeface="Calibri"/>
+                        </a:rPr>
+                        <a:t>Energy GWh</a:t>
+                      </a:r>
+                    </a:p>
+                  </a:txBody>
+                  <a:tcPr marL="82296" marR="45720" marT="18288" marB="18288" anchor="ctr">
+                    <a:solidFill>
+                      <a:srgbClr val="B21E46"/>
+                    </a:solidFill>
+                  </a:tcPr>
+                </a:tc>
+                <a:tc>
+                  <a:txBody>
+                    <a:bodyPr wrap="square"/>
+                    <a:lstStyle/>
+                    <a:p>
+                      <a:pPr algn="ctr"/>
+                      <a:r>
+                        <a:rPr sz="1100" b="1">
+                          <a:solidFill>
+                            <a:srgbClr val="FFFFFF"/>
+                          </a:solidFill>
+                          <a:latin typeface="Calibri"/>
+                        </a:rPr>
+                        <a:t>Duration</a:t>
+                      </a:r>
+                    </a:p>
+                  </a:txBody>
+                  <a:tcPr marL="82296" marR="45720" marT="18288" marB="18288" anchor="ctr">
+                    <a:solidFill>
+                      <a:srgbClr val="B21E46"/>
+                    </a:solidFill>
+                  </a:tcPr>
+                </a:tc>
+                <a:tc>
+                  <a:txBody>
+                    <a:bodyPr wrap="square"/>
+                    <a:lstStyle/>
+                    <a:p>
+                      <a:pPr algn="ctr"/>
+                      <a:r>
+                        <a:rPr sz="1100" b="1">
+                          <a:solidFill>
+                            <a:srgbClr val="FFFFFF"/>
+                          </a:solidFill>
+                          <a:latin typeface="Calibri"/>
+                        </a:rPr>
+                        <a:t>Building GW</a:t>
+                      </a:r>
+                    </a:p>
+                  </a:txBody>
+                  <a:tcPr marL="82296" marR="45720" marT="18288" marB="18288" anchor="ctr">
+                    <a:solidFill>
+                      <a:srgbClr val="B21E46"/>
+                    </a:solidFill>
+                  </a:tcPr>
+                </a:tc>
+              </a:tr>
+              <a:tr h="457200">
+                <a:tc>
+                  <a:txBody>
+                    <a:bodyPr wrap="square"/>
+                    <a:lstStyle/>
+                    <a:p>
+                      <a:pPr algn="l"/>
+                      <a:r>
+                        <a:rPr sz="1250" b="1">
+                          <a:solidFill>
+                            <a:srgbClr val="111820"/>
+                          </a:solidFill>
+                          <a:latin typeface="Calibri"/>
+                        </a:rPr>
+                        <a:t>NSW</a:t>
+                      </a:r>
+                    </a:p>
+                  </a:txBody>
+                  <a:tcPr marL="82296" marR="45720" marT="18288" marB="18288" anchor="ctr">
+                    <a:solidFill>
+                      <a:srgbClr val="FFFFFF"/>
+                    </a:solidFill>
+                  </a:tcPr>
+                </a:tc>
+                <a:tc>
+                  <a:txBody>
+                    <a:bodyPr wrap="square"/>
+                    <a:lstStyle/>
+                    <a:p>
+                      <a:pPr algn="ctr"/>
+                      <a:r>
+                        <a:rPr sz="1250" b="0">
+                          <a:solidFill>
+                            <a:srgbClr val="111820"/>
+                          </a:solidFill>
+                          <a:latin typeface="Calibri"/>
+                        </a:rPr>
+                        <a:t>$276</a:t>
+                      </a:r>
+                    </a:p>
+                  </a:txBody>
+                  <a:tcPr marL="82296" marR="45720" marT="18288" marB="18288" anchor="ctr">
+                    <a:solidFill>
+                      <a:srgbClr val="FFFFFF"/>
+                    </a:solidFill>
+                  </a:tcPr>
+                </a:tc>
+                <a:tc>
+                  <a:txBody>
+                    <a:bodyPr wrap="square"/>
+                    <a:lstStyle/>
+                    <a:p>
+                      <a:pPr algn="ctr"/>
+                      <a:r>
+                        <a:rPr sz="1250" b="0">
+                          <a:solidFill>
+                            <a:srgbClr val="111820"/>
+                          </a:solidFill>
+                          <a:latin typeface="Calibri"/>
+                        </a:rPr>
+                        <a:t>17</a:t>
+                      </a:r>
+                    </a:p>
+                  </a:txBody>
+                  <a:tcPr marL="82296" marR="45720" marT="18288" marB="18288" anchor="ctr">
+                    <a:solidFill>
+                      <a:srgbClr val="FFFFFF"/>
+                    </a:solidFill>
+                  </a:tcPr>
+                </a:tc>
+                <a:tc>
+                  <a:txBody>
+                    <a:bodyPr wrap="square"/>
+                    <a:lstStyle/>
+                    <a:p>
+                      <a:pPr algn="ctr"/>
+                      <a:r>
+                        <a:rPr sz="1250" b="0">
+                          <a:solidFill>
+                            <a:srgbClr val="111820"/>
+                          </a:solidFill>
+                          <a:latin typeface="Calibri"/>
+                        </a:rPr>
+                        <a:t>4.1</a:t>
+                      </a:r>
+                    </a:p>
+                  </a:txBody>
+                  <a:tcPr marL="82296" marR="45720" marT="18288" marB="18288" anchor="ctr">
+                    <a:solidFill>
+                      <a:srgbClr val="FFFFFF"/>
+                    </a:solidFill>
+                  </a:tcPr>
+                </a:tc>
+                <a:tc>
+                  <a:txBody>
+                    <a:bodyPr wrap="square"/>
+                    <a:lstStyle/>
+                    <a:p>
+                      <a:pPr algn="ctr"/>
+                      <a:r>
+                        <a:rPr sz="1250" b="0">
+                          <a:solidFill>
+                            <a:srgbClr val="111820"/>
+                          </a:solidFill>
+                          <a:latin typeface="Calibri"/>
+                        </a:rPr>
+                        <a:t>8.7</a:t>
+                      </a:r>
+                    </a:p>
+                  </a:txBody>
+                  <a:tcPr marL="82296" marR="45720" marT="18288" marB="18288" anchor="ctr">
+                    <a:solidFill>
+                      <a:srgbClr val="FFFFFF"/>
+                    </a:solidFill>
+                  </a:tcPr>
+                </a:tc>
+                <a:tc>
+                  <a:txBody>
+                    <a:bodyPr wrap="square"/>
+                    <a:lstStyle/>
+                    <a:p>
+                      <a:pPr algn="ctr"/>
+                      <a:r>
+                        <a:rPr sz="1250" b="0">
+                          <a:solidFill>
+                            <a:srgbClr val="111820"/>
+                          </a:solidFill>
+                          <a:latin typeface="Calibri"/>
+                        </a:rPr>
+                        <a:t>2.1 hr</a:t>
+                      </a:r>
+                    </a:p>
+                  </a:txBody>
+                  <a:tcPr marL="82296" marR="45720" marT="18288" marB="18288" anchor="ctr">
+                    <a:solidFill>
+                      <a:srgbClr val="FFFFFF"/>
+                    </a:solidFill>
+                  </a:tcPr>
+                </a:tc>
+                <a:tc>
+                  <a:txBody>
+                    <a:bodyPr wrap="square"/>
+                    <a:lstStyle/>
+                    <a:p>
+                      <a:pPr algn="ctr"/>
+                      <a:r>
+                        <a:rPr sz="1250" b="0">
+                          <a:solidFill>
+                            <a:srgbClr val="111820"/>
+                          </a:solidFill>
+                          <a:latin typeface="Calibri"/>
+                        </a:rPr>
+                        <a:t>3.5</a:t>
+                      </a:r>
+                    </a:p>
+                  </a:txBody>
+                  <a:tcPr marL="82296" marR="45720" marT="18288" marB="18288" anchor="ctr">
+                    <a:solidFill>
+                      <a:srgbClr val="FFFFFF"/>
+                    </a:solidFill>
+                  </a:tcPr>
+                </a:tc>
+              </a:tr>
+              <a:tr h="457200">
+                <a:tc>
+                  <a:txBody>
+                    <a:bodyPr wrap="square"/>
+                    <a:lstStyle/>
+                    <a:p>
+                      <a:pPr algn="l"/>
+                      <a:r>
+                        <a:rPr sz="1250" b="1">
+                          <a:solidFill>
+                            <a:srgbClr val="111820"/>
+                          </a:solidFill>
+                          <a:latin typeface="Calibri"/>
+                        </a:rPr>
+                        <a:t>QLD</a:t>
+                      </a:r>
+                    </a:p>
+                  </a:txBody>
+                  <a:tcPr marL="82296" marR="45720" marT="18288" marB="18288" anchor="ctr">
+                    <a:solidFill>
+                      <a:srgbClr val="F4F6F9"/>
+                    </a:solidFill>
+                  </a:tcPr>
+                </a:tc>
+                <a:tc>
+                  <a:txBody>
+                    <a:bodyPr wrap="square"/>
+                    <a:lstStyle/>
+                    <a:p>
+                      <a:pPr algn="ctr"/>
+                      <a:r>
+                        <a:rPr sz="1250" b="0">
+                          <a:solidFill>
+                            <a:srgbClr val="111820"/>
+                          </a:solidFill>
+                          <a:latin typeface="Calibri"/>
+                        </a:rPr>
+                        <a:t>$188</a:t>
+                      </a:r>
+                    </a:p>
+                  </a:txBody>
+                  <a:tcPr marL="82296" marR="45720" marT="18288" marB="18288" anchor="ctr">
+                    <a:solidFill>
+                      <a:srgbClr val="F4F6F9"/>
+                    </a:solidFill>
+                  </a:tcPr>
+                </a:tc>
+                <a:tc>
+                  <a:txBody>
+                    <a:bodyPr wrap="square"/>
+                    <a:lstStyle/>
+                    <a:p>
+                      <a:pPr algn="ctr"/>
+                      <a:r>
+                        <a:rPr sz="1250" b="0">
+                          <a:solidFill>
+                            <a:srgbClr val="111820"/>
+                          </a:solidFill>
+                          <a:latin typeface="Calibri"/>
+                        </a:rPr>
+                        <a:t>16</a:t>
+                      </a:r>
+                    </a:p>
+                  </a:txBody>
+                  <a:tcPr marL="82296" marR="45720" marT="18288" marB="18288" anchor="ctr">
+                    <a:solidFill>
+                      <a:srgbClr val="F4F6F9"/>
+                    </a:solidFill>
+                  </a:tcPr>
+                </a:tc>
+                <a:tc>
+                  <a:txBody>
+                    <a:bodyPr wrap="square"/>
+                    <a:lstStyle/>
+                    <a:p>
+                      <a:pPr algn="ctr"/>
+                      <a:r>
+                        <a:rPr sz="1250" b="0">
+                          <a:solidFill>
+                            <a:srgbClr val="111820"/>
+                          </a:solidFill>
+                          <a:latin typeface="Calibri"/>
+                        </a:rPr>
+                        <a:t>3.8</a:t>
+                      </a:r>
+                    </a:p>
+                  </a:txBody>
+                  <a:tcPr marL="82296" marR="45720" marT="18288" marB="18288" anchor="ctr">
+                    <a:solidFill>
+                      <a:srgbClr val="F4F6F9"/>
+                    </a:solidFill>
+                  </a:tcPr>
+                </a:tc>
+                <a:tc>
+                  <a:txBody>
+                    <a:bodyPr wrap="square"/>
+                    <a:lstStyle/>
+                    <a:p>
+                      <a:pPr algn="ctr"/>
+                      <a:r>
+                        <a:rPr sz="1250" b="0">
+                          <a:solidFill>
+                            <a:srgbClr val="111820"/>
+                          </a:solidFill>
+                          <a:latin typeface="Calibri"/>
+                        </a:rPr>
+                        <a:t>7.5</a:t>
+                      </a:r>
+                    </a:p>
+                  </a:txBody>
+                  <a:tcPr marL="82296" marR="45720" marT="18288" marB="18288" anchor="ctr">
+                    <a:solidFill>
+                      <a:srgbClr val="F4F6F9"/>
+                    </a:solidFill>
+                  </a:tcPr>
+                </a:tc>
+                <a:tc>
+                  <a:txBody>
+                    <a:bodyPr wrap="square"/>
+                    <a:lstStyle/>
+                    <a:p>
+                      <a:pPr algn="ctr"/>
+                      <a:r>
+                        <a:rPr sz="1250" b="0">
+                          <a:solidFill>
+                            <a:srgbClr val="111820"/>
+                          </a:solidFill>
+                          <a:latin typeface="Calibri"/>
+                        </a:rPr>
+                        <a:t>2.0 hr</a:t>
+                      </a:r>
+                    </a:p>
+                  </a:txBody>
+                  <a:tcPr marL="82296" marR="45720" marT="18288" marB="18288" anchor="ctr">
+                    <a:solidFill>
+                      <a:srgbClr val="F4F6F9"/>
+                    </a:solidFill>
+                  </a:tcPr>
+                </a:tc>
+                <a:tc>
+                  <a:txBody>
+                    <a:bodyPr wrap="square"/>
+                    <a:lstStyle/>
+                    <a:p>
+                      <a:pPr algn="ctr"/>
+                      <a:r>
+                        <a:rPr sz="1250" b="0">
+                          <a:solidFill>
+                            <a:srgbClr val="111820"/>
+                          </a:solidFill>
+                          <a:latin typeface="Calibri"/>
+                        </a:rPr>
+                        <a:t>1.1</a:t>
+                      </a:r>
+                    </a:p>
+                  </a:txBody>
+                  <a:tcPr marL="82296" marR="45720" marT="18288" marB="18288" anchor="ctr">
+                    <a:solidFill>
+                      <a:srgbClr val="F4F6F9"/>
+                    </a:solidFill>
+                  </a:tcPr>
+                </a:tc>
+              </a:tr>
+              <a:tr h="457200">
+                <a:tc>
+                  <a:txBody>
+                    <a:bodyPr wrap="square"/>
+                    <a:lstStyle/>
+                    <a:p>
+                      <a:pPr algn="l"/>
+                      <a:r>
+                        <a:rPr sz="1250" b="1">
+                          <a:solidFill>
+                            <a:srgbClr val="111820"/>
+                          </a:solidFill>
+                          <a:latin typeface="Calibri"/>
+                        </a:rPr>
+                        <a:t>VIC</a:t>
+                      </a:r>
+                    </a:p>
+                  </a:txBody>
+                  <a:tcPr marL="82296" marR="45720" marT="18288" marB="18288" anchor="ctr">
+                    <a:solidFill>
+                      <a:srgbClr val="FFFFFF"/>
+                    </a:solidFill>
+                  </a:tcPr>
+                </a:tc>
+                <a:tc>
+                  <a:txBody>
+                    <a:bodyPr wrap="square"/>
+                    <a:lstStyle/>
+                    <a:p>
+                      <a:pPr algn="ctr"/>
+                      <a:r>
+                        <a:rPr sz="1250" b="0">
+                          <a:solidFill>
+                            <a:srgbClr val="111820"/>
+                          </a:solidFill>
+                          <a:latin typeface="Calibri"/>
+                        </a:rPr>
+                        <a:t>$201</a:t>
+                      </a:r>
+                    </a:p>
+                  </a:txBody>
+                  <a:tcPr marL="82296" marR="45720" marT="18288" marB="18288" anchor="ctr">
+                    <a:solidFill>
+                      <a:srgbClr val="FFFFFF"/>
+                    </a:solidFill>
+                  </a:tcPr>
+                </a:tc>
+                <a:tc>
+                  <a:txBody>
+                    <a:bodyPr wrap="square"/>
+                    <a:lstStyle/>
+                    <a:p>
+                      <a:pPr algn="ctr"/>
+                      <a:r>
+                        <a:rPr sz="1250" b="0">
+                          <a:solidFill>
+                            <a:srgbClr val="111820"/>
+                          </a:solidFill>
+                          <a:latin typeface="Calibri"/>
+                        </a:rPr>
+                        <a:t>15</a:t>
+                      </a:r>
+                    </a:p>
+                  </a:txBody>
+                  <a:tcPr marL="82296" marR="45720" marT="18288" marB="18288" anchor="ctr">
+                    <a:solidFill>
+                      <a:srgbClr val="FFFFFF"/>
+                    </a:solidFill>
+                  </a:tcPr>
+                </a:tc>
+                <a:tc>
+                  <a:txBody>
+                    <a:bodyPr wrap="square"/>
+                    <a:lstStyle/>
+                    <a:p>
+                      <a:pPr algn="ctr"/>
+                      <a:r>
+                        <a:rPr sz="1250" b="0">
+                          <a:solidFill>
+                            <a:srgbClr val="111820"/>
+                          </a:solidFill>
+                          <a:latin typeface="Calibri"/>
+                        </a:rPr>
+                        <a:t>2.8</a:t>
+                      </a:r>
+                    </a:p>
+                  </a:txBody>
+                  <a:tcPr marL="82296" marR="45720" marT="18288" marB="18288" anchor="ctr">
+                    <a:solidFill>
+                      <a:srgbClr val="FFFFFF"/>
+                    </a:solidFill>
+                  </a:tcPr>
+                </a:tc>
+                <a:tc>
+                  <a:txBody>
+                    <a:bodyPr wrap="square"/>
+                    <a:lstStyle/>
+                    <a:p>
+                      <a:pPr algn="ctr"/>
+                      <a:r>
+                        <a:rPr sz="1250" b="0">
+                          <a:solidFill>
+                            <a:srgbClr val="111820"/>
+                          </a:solidFill>
+                          <a:latin typeface="Calibri"/>
+                        </a:rPr>
+                        <a:t>4.7</a:t>
+                      </a:r>
+                    </a:p>
+                  </a:txBody>
+                  <a:tcPr marL="82296" marR="45720" marT="18288" marB="18288" anchor="ctr">
+                    <a:solidFill>
+                      <a:srgbClr val="FFFFFF"/>
+                    </a:solidFill>
+                  </a:tcPr>
+                </a:tc>
+                <a:tc>
+                  <a:txBody>
+                    <a:bodyPr wrap="square"/>
+                    <a:lstStyle/>
+                    <a:p>
+                      <a:pPr algn="ctr"/>
+                      <a:r>
+                        <a:rPr sz="1250" b="0">
+                          <a:solidFill>
+                            <a:srgbClr val="111820"/>
+                          </a:solidFill>
+                          <a:latin typeface="Calibri"/>
+                        </a:rPr>
+                        <a:t>1.7 hr</a:t>
+                      </a:r>
+                    </a:p>
+                  </a:txBody>
+                  <a:tcPr marL="82296" marR="45720" marT="18288" marB="18288" anchor="ctr">
+                    <a:solidFill>
+                      <a:srgbClr val="FFFFFF"/>
+                    </a:solidFill>
+                  </a:tcPr>
+                </a:tc>
+                <a:tc>
+                  <a:txBody>
+                    <a:bodyPr wrap="square"/>
+                    <a:lstStyle/>
+                    <a:p>
+                      <a:pPr algn="ctr"/>
+                      <a:r>
+                        <a:rPr sz="1250" b="0">
+                          <a:solidFill>
+                            <a:srgbClr val="111820"/>
+                          </a:solidFill>
+                          <a:latin typeface="Calibri"/>
+                        </a:rPr>
+                        <a:t>2.5</a:t>
+                      </a:r>
+                    </a:p>
+                  </a:txBody>
+                  <a:tcPr marL="82296" marR="45720" marT="18288" marB="18288" anchor="ctr">
+                    <a:solidFill>
+                      <a:srgbClr val="FFFFFF"/>
+                    </a:solidFill>
+                  </a:tcPr>
+                </a:tc>
+              </a:tr>
+              <a:tr h="457200">
+                <a:tc>
+                  <a:txBody>
+                    <a:bodyPr wrap="square"/>
+                    <a:lstStyle/>
+                    <a:p>
+                      <a:pPr algn="l"/>
+                      <a:r>
+                        <a:rPr sz="1250" b="1">
+                          <a:solidFill>
+                            <a:srgbClr val="111820"/>
+                          </a:solidFill>
+                          <a:latin typeface="Calibri"/>
+                        </a:rPr>
+                        <a:t>SA</a:t>
+                      </a:r>
+                    </a:p>
+                  </a:txBody>
+                  <a:tcPr marL="82296" marR="45720" marT="18288" marB="18288" anchor="ctr">
+                    <a:solidFill>
+                      <a:srgbClr val="F4F6F9"/>
+                    </a:solidFill>
+                  </a:tcPr>
+                </a:tc>
+                <a:tc>
+                  <a:txBody>
+                    <a:bodyPr wrap="square"/>
+                    <a:lstStyle/>
+                    <a:p>
+                      <a:pPr algn="ctr"/>
+                      <a:r>
+                        <a:rPr sz="1250" b="0">
+                          <a:solidFill>
+                            <a:srgbClr val="111820"/>
+                          </a:solidFill>
+                          <a:latin typeface="Calibri"/>
+                        </a:rPr>
+                        <a:t>$384</a:t>
+                      </a:r>
+                    </a:p>
+                  </a:txBody>
+                  <a:tcPr marL="82296" marR="45720" marT="18288" marB="18288" anchor="ctr">
+                    <a:solidFill>
+                      <a:srgbClr val="F4F6F9"/>
+                    </a:solidFill>
+                  </a:tcPr>
+                </a:tc>
+                <a:tc>
+                  <a:txBody>
+                    <a:bodyPr wrap="square"/>
+                    <a:lstStyle/>
+                    <a:p>
+                      <a:pPr algn="ctr"/>
+                      <a:r>
+                        <a:rPr sz="1250" b="0">
+                          <a:solidFill>
+                            <a:srgbClr val="111820"/>
+                          </a:solidFill>
+                          <a:latin typeface="Calibri"/>
+                        </a:rPr>
+                        <a:t>17</a:t>
+                      </a:r>
+                    </a:p>
+                  </a:txBody>
+                  <a:tcPr marL="82296" marR="45720" marT="18288" marB="18288" anchor="ctr">
+                    <a:solidFill>
+                      <a:srgbClr val="F4F6F9"/>
+                    </a:solidFill>
+                  </a:tcPr>
+                </a:tc>
+                <a:tc>
+                  <a:txBody>
+                    <a:bodyPr wrap="square"/>
+                    <a:lstStyle/>
+                    <a:p>
+                      <a:pPr algn="ctr"/>
+                      <a:r>
+                        <a:rPr sz="1250" b="0">
+                          <a:solidFill>
+                            <a:srgbClr val="111820"/>
+                          </a:solidFill>
+                          <a:latin typeface="Calibri"/>
+                        </a:rPr>
+                        <a:t>1.7</a:t>
+                      </a:r>
+                    </a:p>
+                  </a:txBody>
+                  <a:tcPr marL="82296" marR="45720" marT="18288" marB="18288" anchor="ctr">
+                    <a:solidFill>
+                      <a:srgbClr val="F4F6F9"/>
+                    </a:solidFill>
+                  </a:tcPr>
+                </a:tc>
+                <a:tc>
+                  <a:txBody>
+                    <a:bodyPr wrap="square"/>
+                    <a:lstStyle/>
+                    <a:p>
+                      <a:pPr algn="ctr"/>
+                      <a:r>
+                        <a:rPr sz="1250" b="0">
+                          <a:solidFill>
+                            <a:srgbClr val="111820"/>
+                          </a:solidFill>
+                          <a:latin typeface="Calibri"/>
+                        </a:rPr>
+                        <a:t>2.9</a:t>
+                      </a:r>
+                    </a:p>
+                  </a:txBody>
+                  <a:tcPr marL="82296" marR="45720" marT="18288" marB="18288" anchor="ctr">
+                    <a:solidFill>
+                      <a:srgbClr val="F4F6F9"/>
+                    </a:solidFill>
+                  </a:tcPr>
+                </a:tc>
+                <a:tc>
+                  <a:txBody>
+                    <a:bodyPr wrap="square"/>
+                    <a:lstStyle/>
+                    <a:p>
+                      <a:pPr algn="ctr"/>
+                      <a:r>
+                        <a:rPr sz="1250" b="0">
+                          <a:solidFill>
+                            <a:srgbClr val="111820"/>
+                          </a:solidFill>
+                          <a:latin typeface="Calibri"/>
+                        </a:rPr>
+                        <a:t>1.7 hr</a:t>
+                      </a:r>
+                    </a:p>
+                  </a:txBody>
+                  <a:tcPr marL="82296" marR="45720" marT="18288" marB="18288" anchor="ctr">
+                    <a:solidFill>
+                      <a:srgbClr val="F4F6F9"/>
+                    </a:solidFill>
+                  </a:tcPr>
+                </a:tc>
+                <a:tc>
+                  <a:txBody>
+                    <a:bodyPr wrap="square"/>
+                    <a:lstStyle/>
+                    <a:p>
+                      <a:pPr algn="ctr"/>
+                      <a:r>
+                        <a:rPr sz="1250" b="0">
+                          <a:solidFill>
+                            <a:srgbClr val="111820"/>
+                          </a:solidFill>
+                          <a:latin typeface="Calibri"/>
+                        </a:rPr>
+                        <a:t>1.0</a:t>
+                      </a:r>
+                    </a:p>
+                  </a:txBody>
+                  <a:tcPr marL="82296" marR="45720" marT="18288" marB="18288" anchor="ctr">
+                    <a:solidFill>
+                      <a:srgbClr val="F4F6F9"/>
+                    </a:solidFill>
+                  </a:tcPr>
+                </a:tc>
+              </a:tr>
+              <a:tr h="457200">
+                <a:tc>
+                  <a:txBody>
+                    <a:bodyPr wrap="square"/>
+                    <a:lstStyle/>
+                    <a:p>
+                      <a:pPr algn="l"/>
+                      <a:r>
+                        <a:rPr sz="1250" b="1">
+                          <a:solidFill>
+                            <a:srgbClr val="111820"/>
+                          </a:solidFill>
+                          <a:latin typeface="Calibri"/>
+                        </a:rPr>
+                        <a:t>NEM</a:t>
+                      </a:r>
+                    </a:p>
+                  </a:txBody>
+                  <a:tcPr marL="82296" marR="45720" marT="18288" marB="18288" anchor="ctr">
+                    <a:solidFill>
+                      <a:srgbClr val="ECE1E5"/>
+                    </a:solidFill>
+                  </a:tcPr>
+                </a:tc>
+                <a:tc>
+                  <a:txBody>
+                    <a:bodyPr wrap="square"/>
+                    <a:lstStyle/>
+                    <a:p>
+                      <a:pPr algn="ctr"/>
+                      <a:r>
+                        <a:rPr sz="1250" b="1">
+                          <a:solidFill>
+                            <a:srgbClr val="111820"/>
+                          </a:solidFill>
+                          <a:latin typeface="Calibri"/>
+                        </a:rPr>
+                        <a:t>—</a:t>
+                      </a:r>
+                    </a:p>
+                  </a:txBody>
+                  <a:tcPr marL="82296" marR="45720" marT="18288" marB="18288" anchor="ctr">
+                    <a:solidFill>
+                      <a:srgbClr val="ECE1E5"/>
+                    </a:solidFill>
+                  </a:tcPr>
+                </a:tc>
+                <a:tc>
+                  <a:txBody>
+                    <a:bodyPr wrap="square"/>
+                    <a:lstStyle/>
+                    <a:p>
+                      <a:pPr algn="ctr"/>
+                      <a:r>
+                        <a:rPr sz="1250" b="1">
+                          <a:solidFill>
+                            <a:srgbClr val="111820"/>
+                          </a:solidFill>
+                          <a:latin typeface="Calibri"/>
+                        </a:rPr>
+                        <a:t>65</a:t>
+                      </a:r>
+                    </a:p>
+                  </a:txBody>
+                  <a:tcPr marL="82296" marR="45720" marT="18288" marB="18288" anchor="ctr">
+                    <a:solidFill>
+                      <a:srgbClr val="ECE1E5"/>
+                    </a:solidFill>
+                  </a:tcPr>
+                </a:tc>
+                <a:tc>
+                  <a:txBody>
+                    <a:bodyPr wrap="square"/>
+                    <a:lstStyle/>
+                    <a:p>
+                      <a:pPr algn="ctr"/>
+                      <a:r>
+                        <a:rPr sz="1250" b="1">
+                          <a:solidFill>
+                            <a:srgbClr val="111820"/>
+                          </a:solidFill>
+                          <a:latin typeface="Calibri"/>
+                        </a:rPr>
+                        <a:t>12.3</a:t>
+                      </a:r>
+                    </a:p>
+                  </a:txBody>
+                  <a:tcPr marL="82296" marR="45720" marT="18288" marB="18288" anchor="ctr">
+                    <a:solidFill>
+                      <a:srgbClr val="ECE1E5"/>
+                    </a:solidFill>
+                  </a:tcPr>
+                </a:tc>
+                <a:tc>
+                  <a:txBody>
+                    <a:bodyPr wrap="square"/>
+                    <a:lstStyle/>
+                    <a:p>
+                      <a:pPr algn="ctr"/>
+                      <a:r>
+                        <a:rPr sz="1250" b="1">
+                          <a:solidFill>
+                            <a:srgbClr val="111820"/>
+                          </a:solidFill>
+                          <a:latin typeface="Calibri"/>
+                        </a:rPr>
+                        <a:t>23.8</a:t>
+                      </a:r>
+                    </a:p>
+                  </a:txBody>
+                  <a:tcPr marL="82296" marR="45720" marT="18288" marB="18288" anchor="ctr">
+                    <a:solidFill>
+                      <a:srgbClr val="ECE1E5"/>
+                    </a:solidFill>
+                  </a:tcPr>
+                </a:tc>
+                <a:tc>
+                  <a:txBody>
+                    <a:bodyPr wrap="square"/>
+                    <a:lstStyle/>
+                    <a:p>
+                      <a:pPr algn="ctr"/>
+                      <a:r>
+                        <a:rPr sz="1250" b="1">
+                          <a:solidFill>
+                            <a:srgbClr val="111820"/>
+                          </a:solidFill>
+                          <a:latin typeface="Calibri"/>
+                        </a:rPr>
+                        <a:t>1.9 hr</a:t>
+                      </a:r>
+                    </a:p>
+                  </a:txBody>
+                  <a:tcPr marL="82296" marR="45720" marT="18288" marB="18288" anchor="ctr">
+                    <a:solidFill>
+                      <a:srgbClr val="ECE1E5"/>
+                    </a:solidFill>
+                  </a:tcPr>
+                </a:tc>
+                <a:tc>
+                  <a:txBody>
+                    <a:bodyPr wrap="square"/>
+                    <a:lstStyle/>
+                    <a:p>
+                      <a:pPr algn="ctr"/>
+                      <a:r>
+                        <a:rPr sz="1250" b="1">
+                          <a:solidFill>
+                            <a:srgbClr val="111820"/>
+                          </a:solidFill>
+                          <a:latin typeface="Calibri"/>
+                        </a:rPr>
+                        <a:t>8.0</a:t>
+                      </a:r>
+                    </a:p>
+                  </a:txBody>
+                  <a:tcPr marL="82296" marR="45720" marT="18288" marB="18288" anchor="ctr">
+                    <a:solidFill>
+                      <a:srgbClr val="ECE1E5"/>
+                    </a:solidFill>
+                  </a:tcPr>
+                </a:tc>
+              </a:tr>
+            </a:tbl>
+          </a:graphicData>
+        </a:graphic>
+      </p:graphicFrame>
+      <p:sp>
+        <p:nvSpPr>
+          <p:cNvPr id="8" name="Rectangle 7"/>
+          <p:cNvSpPr/>
+          <p:nvPr/>
+        </p:nvSpPr>
+        <p:spPr>
+          <a:xfrm>
+            <a:off x="822960" y="5166360"/>
+            <a:ext cx="10515600" cy="1051560"/>
+          </a:xfrm>
+          <a:prstGeom prst="rect">
+            <a:avLst/>
+          </a:prstGeom>
+          <a:solidFill>
+            <a:srgbClr val="F4F6F9"/>
+          </a:solidFill>
+          <a:ln w="9525">
+            <a:solidFill>
+              <a:srgbClr val="B21E46"/>
+            </a:solidFill>
+          </a:ln>
+          <a:effectLst/>
+        </p:spPr>
+        <p:style>
+          <a:lnRef idx="1">
+            <a:schemeClr val="accent1"/>
+          </a:lnRef>
+          <a:fillRef idx="3">
+            <a:schemeClr val="accent1"/>
+          </a:fillRef>
+          <a:effectRef idx="2">
+            <a:schemeClr val="accent1"/>
+          </a:effectRef>
+          <a:fontRef idx="minor">
+            <a:schemeClr val="lt1"/>
+          </a:fontRef>
+        </p:style>
+        <p:txBody>
+          <a:bodyPr rtlCol="0" anchor="ctr"/>
+          <a:lstStyle/>
+          <a:p>
+            <a:pPr algn="ctr"/>
           </a:p>
         </p:txBody>
       </p:sp>
       <p:sp>
         <p:nvSpPr>
           <p:cNvPr id="9" name="TextBox 8"/>
+          <p:cNvSpPr txBox="1"/>
+          <p:nvPr/>
+        </p:nvSpPr>
+        <p:spPr>
+          <a:xfrm>
+            <a:off x="1005840" y="5276088"/>
+            <a:ext cx="10149840" cy="822960"/>
+          </a:xfrm>
+          <a:prstGeom prst="rect">
+            <a:avLst/>
+          </a:prstGeom>
+          <a:noFill/>
+        </p:spPr>
+        <p:txBody>
+          <a:bodyPr wrap="square" anchor="t" lIns="0" rIns="0" tIns="0" bIns="0">
+            <a:spAutoFit/>
+          </a:bodyPr>
+          <a:lstStyle/>
+          <a:p>
+            <a:pPr algn="l">
+              <a:lnSpc>
+                <a:spcPct val="122000"/>
+              </a:lnSpc>
+              <a:spcBef>
+                <a:spcPts val="0"/>
+              </a:spcBef>
+              <a:spcAft>
+                <a:spcPts val="600"/>
+              </a:spcAft>
+            </a:pPr>
+            <a:r>
+              <a:rPr sz="1350" b="0" i="0">
+                <a:solidFill>
+                  <a:srgbClr val="37424F"/>
+                </a:solidFill>
+                <a:latin typeface="Calibri"/>
+              </a:rPr>
+              <a:t>The tell: SA has the widest spread but the smallest, shortest batteries (power / FCAS-focused); NSW &amp; QLD hold the biggest fleets on thinner spreads. The build pipeline is deeper (2.5–3 hr) — the fleet is lengthening as the easy spread compresses.</a:t>
+            </a:r>
+          </a:p>
+        </p:txBody>
+      </p:sp>
+      <p:sp>
+        <p:nvSpPr>
+          <p:cNvPr id="10" name="TextBox 9"/>
           <p:cNvSpPr txBox="1"/>
           <p:nvPr/>
         </p:nvSpPr>
@@ -15382,30 +16147,322 @@
                 </a:solidFill>
                 <a:latin typeface="Calibri"/>
               </a:rPr>
-              <a:t>Provocations — take a position</a:t>
-            </a:r>
-          </a:p>
-        </p:txBody>
-      </p:sp>
-      <p:sp>
-        <p:nvSpPr>
-          <p:cNvPr id="6" name="Rectangle 5"/>
+              <a:t>The data on the table</a:t>
+            </a:r>
+          </a:p>
+        </p:txBody>
+      </p:sp>
+      <p:sp>
+        <p:nvSpPr>
+          <p:cNvPr id="6" name="TextBox 5"/>
+          <p:cNvSpPr txBox="1"/>
+          <p:nvPr/>
+        </p:nvSpPr>
+        <p:spPr>
+          <a:xfrm>
+            <a:off x="548640" y="1600200"/>
+            <a:ext cx="11064240" cy="4206240"/>
+          </a:xfrm>
+          <a:prstGeom prst="rect">
+            <a:avLst/>
+          </a:prstGeom>
+          <a:noFill/>
+        </p:spPr>
+        <p:txBody>
+          <a:bodyPr wrap="square" lIns="0" rIns="0" tIns="0" bIns="0">
+            <a:spAutoFit/>
+          </a:bodyPr>
+          <a:lstStyle/>
+          <a:p>
+            <a:pPr>
+              <a:lnSpc>
+                <a:spcPct val="105000"/>
+              </a:lnSpc>
+              <a:spcAft>
+                <a:spcPts val="1100"/>
+              </a:spcAft>
+            </a:pPr>
+            <a:r>
+              <a:rPr sz="1600" b="1">
+                <a:solidFill>
+                  <a:srgbClr val="B21E46"/>
+                </a:solidFill>
+                <a:latin typeface="Calibri"/>
+              </a:rPr>
+              <a:t>▸  </a:t>
+            </a:r>
+            <a:r>
+              <a:rPr sz="1600" b="0">
+                <a:solidFill>
+                  <a:srgbClr val="37424F"/>
+                </a:solidFill>
+                <a:latin typeface="Calibri"/>
+              </a:rPr>
+              <a:t>VIC </a:t>
+            </a:r>
+            <a:r>
+              <a:rPr sz="1600" b="1">
+                <a:solidFill>
+                  <a:srgbClr val="111820"/>
+                </a:solidFill>
+                <a:latin typeface="Calibri"/>
+              </a:rPr>
+              <a:t>solar value factor: 1.06× (2019) → 0.37× (2023–24 trough) → 0.67× (2026 YTD)</a:t>
+            </a:r>
+            <a:r>
+              <a:rPr sz="1600" b="0">
+                <a:solidFill>
+                  <a:srgbClr val="37424F"/>
+                </a:solidFill>
+                <a:latin typeface="Calibri"/>
+              </a:rPr>
+              <a:t>. It cycles.</a:t>
+            </a:r>
+          </a:p>
+          <a:p>
+            <a:pPr>
+              <a:lnSpc>
+                <a:spcPct val="105000"/>
+              </a:lnSpc>
+              <a:spcAft>
+                <a:spcPts val="1100"/>
+              </a:spcAft>
+            </a:pPr>
+            <a:r>
+              <a:rPr sz="1600" b="1">
+                <a:solidFill>
+                  <a:srgbClr val="B21E46"/>
+                </a:solidFill>
+                <a:latin typeface="Calibri"/>
+              </a:rPr>
+              <a:t>▸  </a:t>
+            </a:r>
+            <a:r>
+              <a:rPr sz="1600" b="0">
+                <a:solidFill>
+                  <a:srgbClr val="37424F"/>
+                </a:solidFill>
+                <a:latin typeface="Calibri"/>
+              </a:rPr>
+              <a:t>“</a:t>
+            </a:r>
+            <a:r>
+              <a:rPr sz="1600" b="1">
+                <a:solidFill>
+                  <a:srgbClr val="111820"/>
+                </a:solidFill>
+                <a:latin typeface="Calibri"/>
+              </a:rPr>
+              <a:t>Darkest before dawn</a:t>
+            </a:r>
+            <a:r>
+              <a:rPr sz="1600" b="0">
+                <a:solidFill>
+                  <a:srgbClr val="37424F"/>
+                </a:solidFill>
+                <a:latin typeface="Calibri"/>
+              </a:rPr>
+              <a:t>”: worst while coal floods the midday; as coal exits, evening scarcity returns value.</a:t>
+            </a:r>
+          </a:p>
+          <a:p>
+            <a:pPr>
+              <a:lnSpc>
+                <a:spcPct val="105000"/>
+              </a:lnSpc>
+              <a:spcAft>
+                <a:spcPts val="1100"/>
+              </a:spcAft>
+            </a:pPr>
+            <a:r>
+              <a:rPr sz="1600" b="1">
+                <a:solidFill>
+                  <a:srgbClr val="B21E46"/>
+                </a:solidFill>
+                <a:latin typeface="Calibri"/>
+              </a:rPr>
+              <a:t>▸  </a:t>
+            </a:r>
+            <a:r>
+              <a:rPr sz="1600" b="0">
+                <a:solidFill>
+                  <a:srgbClr val="37424F"/>
+                </a:solidFill>
+                <a:latin typeface="Calibri"/>
+              </a:rPr>
+              <a:t>Batteries: </a:t>
+            </a:r>
+            <a:r>
+              <a:rPr sz="1600" b="1">
+                <a:solidFill>
+                  <a:srgbClr val="111820"/>
+                </a:solidFill>
+                <a:latin typeface="Calibri"/>
+              </a:rPr>
+              <a:t>top-2hr spread ~$500–880 → ~$100–200</a:t>
+            </a:r>
+            <a:r>
+              <a:rPr sz="1600" b="0">
+                <a:solidFill>
+                  <a:srgbClr val="37424F"/>
+                </a:solidFill>
+                <a:latin typeface="Calibri"/>
+              </a:rPr>
+              <a:t> as the fleet grew 4 → 60 — but it spikes in volatile months.</a:t>
+            </a:r>
+          </a:p>
+          <a:p>
+            <a:pPr>
+              <a:lnSpc>
+                <a:spcPct val="105000"/>
+              </a:lnSpc>
+              <a:spcAft>
+                <a:spcPts val="1100"/>
+              </a:spcAft>
+            </a:pPr>
+            <a:r>
+              <a:rPr sz="1600" b="1">
+                <a:solidFill>
+                  <a:srgbClr val="B21E46"/>
+                </a:solidFill>
+                <a:latin typeface="Calibri"/>
+              </a:rPr>
+              <a:t>▸  </a:t>
+            </a:r>
+            <a:r>
+              <a:rPr sz="1600" b="0">
+                <a:solidFill>
+                  <a:srgbClr val="37424F"/>
+                </a:solidFill>
+                <a:latin typeface="Calibri"/>
+              </a:rPr>
+              <a:t>Compression is BESS </a:t>
+            </a:r>
+            <a:r>
+              <a:rPr sz="1600" b="1">
+                <a:solidFill>
+                  <a:srgbClr val="111820"/>
+                </a:solidFill>
+                <a:latin typeface="Calibri"/>
+              </a:rPr>
+              <a:t>and</a:t>
+            </a:r>
+            <a:r>
+              <a:rPr sz="1600" b="0">
+                <a:solidFill>
+                  <a:srgbClr val="37424F"/>
+                </a:solidFill>
+                <a:latin typeface="Calibri"/>
+              </a:rPr>
+              <a:t> benign conditions — coal still in, mild weather, high unit availability.</a:t>
+            </a:r>
+          </a:p>
+          <a:p>
+            <a:pPr>
+              <a:lnSpc>
+                <a:spcPct val="105000"/>
+              </a:lnSpc>
+              <a:spcAft>
+                <a:spcPts val="1100"/>
+              </a:spcAft>
+            </a:pPr>
+            <a:r>
+              <a:rPr sz="1600" b="1">
+                <a:solidFill>
+                  <a:srgbClr val="B21E46"/>
+                </a:solidFill>
+                <a:latin typeface="Calibri"/>
+              </a:rPr>
+              <a:t>▸  </a:t>
+            </a:r>
+            <a:r>
+              <a:rPr sz="1600" b="0">
+                <a:solidFill>
+                  <a:srgbClr val="37424F"/>
+                </a:solidFill>
+                <a:latin typeface="Calibri"/>
+              </a:rPr>
+              <a:t>The fleet: </a:t>
+            </a:r>
+            <a:r>
+              <a:rPr sz="1600" b="1">
+                <a:solidFill>
+                  <a:srgbClr val="111820"/>
+                </a:solidFill>
+                <a:latin typeface="Calibri"/>
+              </a:rPr>
+              <a:t>~65 batteries / 12.3 GW / 24 GWh operating; ~8 GW / 21 GWh committed</a:t>
+            </a:r>
+            <a:r>
+              <a:rPr sz="1600" b="0">
+                <a:solidFill>
+                  <a:srgbClr val="37424F"/>
+                </a:solidFill>
+                <a:latin typeface="Calibri"/>
+              </a:rPr>
+              <a:t> and building.</a:t>
+            </a:r>
+          </a:p>
+          <a:p>
+            <a:pPr>
+              <a:lnSpc>
+                <a:spcPct val="105000"/>
+              </a:lnSpc>
+              <a:spcAft>
+                <a:spcPts val="1100"/>
+              </a:spcAft>
+            </a:pPr>
+            <a:r>
+              <a:rPr sz="1600" b="1">
+                <a:solidFill>
+                  <a:srgbClr val="B21E46"/>
+                </a:solidFill>
+                <a:latin typeface="Calibri"/>
+              </a:rPr>
+              <a:t>▸  </a:t>
+            </a:r>
+            <a:r>
+              <a:rPr sz="1600" b="1">
+                <a:solidFill>
+                  <a:srgbClr val="111820"/>
+                </a:solidFill>
+                <a:latin typeface="Calibri"/>
+              </a:rPr>
+              <a:t>FCAS revenue fell ~90–95%</a:t>
+            </a:r>
+            <a:r>
+              <a:rPr sz="1600" b="0">
+                <a:solidFill>
+                  <a:srgbClr val="37424F"/>
+                </a:solidFill>
+                <a:latin typeface="Calibri"/>
+              </a:rPr>
+              <a:t> in five years — a whole stream competed to near-zero.</a:t>
+            </a:r>
+          </a:p>
+        </p:txBody>
+      </p:sp>
+      <p:sp>
+        <p:nvSpPr>
+          <p:cNvPr id="7" name="Rectangle 6"/>
           <p:cNvSpPr/>
           <p:nvPr/>
         </p:nvSpPr>
         <p:spPr>
           <a:xfrm>
-            <a:off x="548640" y="1600200"/>
-            <a:ext cx="457200" cy="457200"/>
+            <a:off x="548640" y="5669280"/>
+            <a:ext cx="11064240" cy="685800"/>
           </a:xfrm>
           <a:prstGeom prst="rect">
             <a:avLst/>
           </a:prstGeom>
           <a:solidFill>
-            <a:srgbClr val="B21E46"/>
+            <a:srgbClr val="F4F6F9"/>
           </a:solidFill>
-          <a:ln>
-            <a:noFill/>
+          <a:ln w="9525">
+            <a:solidFill>
+              <a:srgbClr val="D8DEE6"/>
+            </a:solidFill>
           </a:ln>
           <a:effectLst/>
         </p:spPr>
@@ -15433,59 +16490,14 @@
       </p:sp>
       <p:sp>
         <p:nvSpPr>
-          <p:cNvPr id="7" name="TextBox 6"/>
-          <p:cNvSpPr txBox="1"/>
-          <p:nvPr/>
-        </p:nvSpPr>
-        <p:spPr>
-          <a:xfrm>
-            <a:off x="548640" y="1600200"/>
-            <a:ext cx="457200" cy="457200"/>
-          </a:xfrm>
-          <a:prstGeom prst="rect">
-            <a:avLst/>
-          </a:prstGeom>
-          <a:noFill/>
-        </p:spPr>
-        <p:txBody>
-          <a:bodyPr wrap="square" anchor="ctr" lIns="0" rIns="0" tIns="0" bIns="0">
-            <a:spAutoFit/>
-          </a:bodyPr>
-          <a:lstStyle/>
-          <a:p>
-            <a:pPr algn="ctr">
-              <a:lnSpc>
-                <a:spcPct val="106000"/>
-              </a:lnSpc>
-              <a:spcBef>
-                <a:spcPts val="0"/>
-              </a:spcBef>
-              <a:spcAft>
-                <a:spcPts val="600"/>
-              </a:spcAft>
-            </a:pPr>
-            <a:r>
-              <a:rPr sz="1800" b="1" i="0">
-                <a:solidFill>
-                  <a:srgbClr val="FFFFFF"/>
-                </a:solidFill>
-                <a:latin typeface="Calibri"/>
-              </a:rPr>
-              <a:t>A</a:t>
-            </a:r>
-          </a:p>
-        </p:txBody>
-      </p:sp>
-      <p:sp>
-        <p:nvSpPr>
           <p:cNvPr id="8" name="TextBox 7"/>
           <p:cNvSpPr txBox="1"/>
           <p:nvPr/>
         </p:nvSpPr>
         <p:spPr>
           <a:xfrm>
-            <a:off x="1188720" y="1618488"/>
-            <a:ext cx="10332720" cy="731520"/>
+            <a:off x="731520" y="5779008"/>
+            <a:ext cx="10698480" cy="457200"/>
           </a:xfrm>
           <a:prstGeom prst="rect">
             <a:avLst/>
@@ -15510,558 +16522,20 @@
               </a:spcAft>
             </a:pPr>
             <a:r>
-              <a:rPr sz="1600" b="0" i="0">
+              <a:rPr sz="1350" b="0" i="1">
                 <a:solidFill>
                   <a:srgbClr val="37424F"/>
                 </a:solidFill>
                 <a:latin typeface="Calibri"/>
               </a:rPr>
-              <a:t>Is the value-factor trough permanent, or does coal-exit evening scarcity bring it back?</a:t>
-            </a:r>
-          </a:p>
-        </p:txBody>
-      </p:sp>
-      <p:sp>
-        <p:nvSpPr>
-          <p:cNvPr id="9" name="Rectangle 8"/>
-          <p:cNvSpPr/>
-          <p:nvPr/>
-        </p:nvSpPr>
-        <p:spPr>
-          <a:xfrm>
-            <a:off x="548640" y="2441448"/>
-            <a:ext cx="457200" cy="457200"/>
-          </a:xfrm>
-          <a:prstGeom prst="rect">
-            <a:avLst/>
-          </a:prstGeom>
-          <a:solidFill>
-            <a:srgbClr val="B21E46"/>
-          </a:solidFill>
-          <a:ln>
-            <a:noFill/>
-          </a:ln>
-          <a:effectLst/>
-        </p:spPr>
-        <p:style>
-          <a:lnRef idx="1">
-            <a:schemeClr val="accent1"/>
-          </a:lnRef>
-          <a:fillRef idx="3">
-            <a:schemeClr val="accent1"/>
-          </a:fillRef>
-          <a:effectRef idx="2">
-            <a:schemeClr val="accent1"/>
-          </a:effectRef>
-          <a:fontRef idx="minor">
-            <a:schemeClr val="lt1"/>
-          </a:fontRef>
-        </p:style>
-        <p:txBody>
-          <a:bodyPr rtlCol="0" anchor="ctr"/>
-          <a:lstStyle/>
-          <a:p>
-            <a:pPr algn="ctr"/>
-          </a:p>
-        </p:txBody>
-      </p:sp>
-      <p:sp>
-        <p:nvSpPr>
-          <p:cNvPr id="10" name="TextBox 9"/>
-          <p:cNvSpPr txBox="1"/>
-          <p:nvPr/>
-        </p:nvSpPr>
-        <p:spPr>
-          <a:xfrm>
-            <a:off x="548640" y="2441448"/>
-            <a:ext cx="457200" cy="457200"/>
-          </a:xfrm>
-          <a:prstGeom prst="rect">
-            <a:avLst/>
-          </a:prstGeom>
-          <a:noFill/>
-        </p:spPr>
-        <p:txBody>
-          <a:bodyPr wrap="square" anchor="ctr" lIns="0" rIns="0" tIns="0" bIns="0">
-            <a:spAutoFit/>
-          </a:bodyPr>
-          <a:lstStyle/>
-          <a:p>
-            <a:pPr algn="ctr">
-              <a:lnSpc>
-                <a:spcPct val="106000"/>
-              </a:lnSpc>
-              <a:spcBef>
-                <a:spcPts val="0"/>
-              </a:spcBef>
-              <a:spcAft>
-                <a:spcPts val="600"/>
-              </a:spcAft>
-            </a:pPr>
-            <a:r>
-              <a:rPr sz="1800" b="1" i="0">
-                <a:solidFill>
-                  <a:srgbClr val="FFFFFF"/>
-                </a:solidFill>
-                <a:latin typeface="Calibri"/>
-              </a:rPr>
-              <a:t>B</a:t>
-            </a:r>
-          </a:p>
-        </p:txBody>
-      </p:sp>
-      <p:sp>
-        <p:nvSpPr>
-          <p:cNvPr id="11" name="TextBox 10"/>
-          <p:cNvSpPr txBox="1"/>
-          <p:nvPr/>
-        </p:nvSpPr>
-        <p:spPr>
-          <a:xfrm>
-            <a:off x="1188720" y="2459736"/>
-            <a:ext cx="10332720" cy="731520"/>
-          </a:xfrm>
-          <a:prstGeom prst="rect">
-            <a:avLst/>
-          </a:prstGeom>
-          <a:noFill/>
-        </p:spPr>
-        <p:txBody>
-          <a:bodyPr wrap="square" anchor="ctr" lIns="0" rIns="0" tIns="0" bIns="0">
-            <a:spAutoFit/>
-          </a:bodyPr>
-          <a:lstStyle/>
-          <a:p>
-            <a:pPr algn="l">
-              <a:lnSpc>
-                <a:spcPct val="106000"/>
-              </a:lnSpc>
-              <a:spcBef>
-                <a:spcPts val="0"/>
-              </a:spcBef>
-              <a:spcAft>
-                <a:spcPts val="600"/>
-              </a:spcAft>
-            </a:pPr>
-            <a:r>
-              <a:rPr sz="1600" b="0" i="0">
-                <a:solidFill>
-                  <a:srgbClr val="37424F"/>
-                </a:solidFill>
-                <a:latin typeface="Calibri"/>
-              </a:rPr>
-              <a:t>Does that change whether — or when — you build, and whether to firm it?</a:t>
-            </a:r>
-          </a:p>
-        </p:txBody>
-      </p:sp>
-      <p:sp>
-        <p:nvSpPr>
-          <p:cNvPr id="12" name="Rectangle 11"/>
-          <p:cNvSpPr/>
-          <p:nvPr/>
-        </p:nvSpPr>
-        <p:spPr>
-          <a:xfrm>
-            <a:off x="548640" y="3282696"/>
-            <a:ext cx="457200" cy="457200"/>
-          </a:xfrm>
-          <a:prstGeom prst="rect">
-            <a:avLst/>
-          </a:prstGeom>
-          <a:solidFill>
-            <a:srgbClr val="B21E46"/>
-          </a:solidFill>
-          <a:ln>
-            <a:noFill/>
-          </a:ln>
-          <a:effectLst/>
-        </p:spPr>
-        <p:style>
-          <a:lnRef idx="1">
-            <a:schemeClr val="accent1"/>
-          </a:lnRef>
-          <a:fillRef idx="3">
-            <a:schemeClr val="accent1"/>
-          </a:fillRef>
-          <a:effectRef idx="2">
-            <a:schemeClr val="accent1"/>
-          </a:effectRef>
-          <a:fontRef idx="minor">
-            <a:schemeClr val="lt1"/>
-          </a:fontRef>
-        </p:style>
-        <p:txBody>
-          <a:bodyPr rtlCol="0" anchor="ctr"/>
-          <a:lstStyle/>
-          <a:p>
-            <a:pPr algn="ctr"/>
-          </a:p>
-        </p:txBody>
-      </p:sp>
-      <p:sp>
-        <p:nvSpPr>
-          <p:cNvPr id="13" name="TextBox 12"/>
-          <p:cNvSpPr txBox="1"/>
-          <p:nvPr/>
-        </p:nvSpPr>
-        <p:spPr>
-          <a:xfrm>
-            <a:off x="548640" y="3282696"/>
-            <a:ext cx="457200" cy="457200"/>
-          </a:xfrm>
-          <a:prstGeom prst="rect">
-            <a:avLst/>
-          </a:prstGeom>
-          <a:noFill/>
-        </p:spPr>
-        <p:txBody>
-          <a:bodyPr wrap="square" anchor="ctr" lIns="0" rIns="0" tIns="0" bIns="0">
-            <a:spAutoFit/>
-          </a:bodyPr>
-          <a:lstStyle/>
-          <a:p>
-            <a:pPr algn="ctr">
-              <a:lnSpc>
-                <a:spcPct val="106000"/>
-              </a:lnSpc>
-              <a:spcBef>
-                <a:spcPts val="0"/>
-              </a:spcBef>
-              <a:spcAft>
-                <a:spcPts val="600"/>
-              </a:spcAft>
-            </a:pPr>
-            <a:r>
-              <a:rPr sz="1800" b="1" i="0">
-                <a:solidFill>
-                  <a:srgbClr val="FFFFFF"/>
-                </a:solidFill>
-                <a:latin typeface="Calibri"/>
-              </a:rPr>
-              <a:t>C</a:t>
-            </a:r>
-          </a:p>
-        </p:txBody>
-      </p:sp>
-      <p:sp>
-        <p:nvSpPr>
-          <p:cNvPr id="14" name="TextBox 13"/>
-          <p:cNvSpPr txBox="1"/>
-          <p:nvPr/>
-        </p:nvSpPr>
-        <p:spPr>
-          <a:xfrm>
-            <a:off x="1188720" y="3300984"/>
-            <a:ext cx="10332720" cy="731520"/>
-          </a:xfrm>
-          <a:prstGeom prst="rect">
-            <a:avLst/>
-          </a:prstGeom>
-          <a:noFill/>
-        </p:spPr>
-        <p:txBody>
-          <a:bodyPr wrap="square" anchor="ctr" lIns="0" rIns="0" tIns="0" bIns="0">
-            <a:spAutoFit/>
-          </a:bodyPr>
-          <a:lstStyle/>
-          <a:p>
-            <a:pPr algn="l">
-              <a:lnSpc>
-                <a:spcPct val="106000"/>
-              </a:lnSpc>
-              <a:spcBef>
-                <a:spcPts val="0"/>
-              </a:spcBef>
-              <a:spcAft>
-                <a:spcPts val="600"/>
-              </a:spcAft>
-            </a:pPr>
-            <a:r>
-              <a:rPr sz="1600" b="0" i="0">
-                <a:solidFill>
-                  <a:srgbClr val="37424F"/>
-                </a:solidFill>
-                <a:latin typeface="Calibri"/>
-              </a:rPr>
-              <a:t>The battery spread is compressing — is it BESS, benign conditions, or both? What happens next cycle?</a:t>
-            </a:r>
-          </a:p>
-        </p:txBody>
-      </p:sp>
-      <p:sp>
-        <p:nvSpPr>
-          <p:cNvPr id="15" name="Rectangle 14"/>
-          <p:cNvSpPr/>
-          <p:nvPr/>
-        </p:nvSpPr>
-        <p:spPr>
-          <a:xfrm>
-            <a:off x="548640" y="4123944"/>
-            <a:ext cx="457200" cy="457200"/>
-          </a:xfrm>
-          <a:prstGeom prst="rect">
-            <a:avLst/>
-          </a:prstGeom>
-          <a:solidFill>
-            <a:srgbClr val="B21E46"/>
-          </a:solidFill>
-          <a:ln>
-            <a:noFill/>
-          </a:ln>
-          <a:effectLst/>
-        </p:spPr>
-        <p:style>
-          <a:lnRef idx="1">
-            <a:schemeClr val="accent1"/>
-          </a:lnRef>
-          <a:fillRef idx="3">
-            <a:schemeClr val="accent1"/>
-          </a:fillRef>
-          <a:effectRef idx="2">
-            <a:schemeClr val="accent1"/>
-          </a:effectRef>
-          <a:fontRef idx="minor">
-            <a:schemeClr val="lt1"/>
-          </a:fontRef>
-        </p:style>
-        <p:txBody>
-          <a:bodyPr rtlCol="0" anchor="ctr"/>
-          <a:lstStyle/>
-          <a:p>
-            <a:pPr algn="ctr"/>
-          </a:p>
-        </p:txBody>
-      </p:sp>
-      <p:sp>
-        <p:nvSpPr>
-          <p:cNvPr id="16" name="TextBox 15"/>
-          <p:cNvSpPr txBox="1"/>
-          <p:nvPr/>
-        </p:nvSpPr>
-        <p:spPr>
-          <a:xfrm>
-            <a:off x="548640" y="4123944"/>
-            <a:ext cx="457200" cy="457200"/>
-          </a:xfrm>
-          <a:prstGeom prst="rect">
-            <a:avLst/>
-          </a:prstGeom>
-          <a:noFill/>
-        </p:spPr>
-        <p:txBody>
-          <a:bodyPr wrap="square" anchor="ctr" lIns="0" rIns="0" tIns="0" bIns="0">
-            <a:spAutoFit/>
-          </a:bodyPr>
-          <a:lstStyle/>
-          <a:p>
-            <a:pPr algn="ctr">
-              <a:lnSpc>
-                <a:spcPct val="106000"/>
-              </a:lnSpc>
-              <a:spcBef>
-                <a:spcPts val="0"/>
-              </a:spcBef>
-              <a:spcAft>
-                <a:spcPts val="600"/>
-              </a:spcAft>
-            </a:pPr>
-            <a:r>
-              <a:rPr sz="1800" b="1" i="0">
-                <a:solidFill>
-                  <a:srgbClr val="FFFFFF"/>
-                </a:solidFill>
-                <a:latin typeface="Calibri"/>
-              </a:rPr>
-              <a:t>D</a:t>
-            </a:r>
-          </a:p>
-        </p:txBody>
-      </p:sp>
-      <p:sp>
-        <p:nvSpPr>
-          <p:cNvPr id="17" name="TextBox 16"/>
-          <p:cNvSpPr txBox="1"/>
-          <p:nvPr/>
-        </p:nvSpPr>
-        <p:spPr>
-          <a:xfrm>
-            <a:off x="1188720" y="4142232"/>
-            <a:ext cx="10332720" cy="731520"/>
-          </a:xfrm>
-          <a:prstGeom prst="rect">
-            <a:avLst/>
-          </a:prstGeom>
-          <a:noFill/>
-        </p:spPr>
-        <p:txBody>
-          <a:bodyPr wrap="square" anchor="ctr" lIns="0" rIns="0" tIns="0" bIns="0">
-            <a:spAutoFit/>
-          </a:bodyPr>
-          <a:lstStyle/>
-          <a:p>
-            <a:pPr algn="l">
-              <a:lnSpc>
-                <a:spcPct val="106000"/>
-              </a:lnSpc>
-              <a:spcBef>
-                <a:spcPts val="0"/>
-              </a:spcBef>
-              <a:spcAft>
-                <a:spcPts val="600"/>
-              </a:spcAft>
-            </a:pPr>
-            <a:r>
-              <a:rPr sz="1600" b="0" i="0">
-                <a:solidFill>
-                  <a:srgbClr val="37424F"/>
-                </a:solidFill>
-                <a:latin typeface="Calibri"/>
-              </a:rPr>
-              <a:t>Would you build another unfirmed solar farm in this market?</a:t>
-            </a:r>
-          </a:p>
-        </p:txBody>
-      </p:sp>
-      <p:sp>
-        <p:nvSpPr>
-          <p:cNvPr id="18" name="Rectangle 17"/>
-          <p:cNvSpPr/>
-          <p:nvPr/>
-        </p:nvSpPr>
-        <p:spPr>
-          <a:xfrm>
-            <a:off x="548640" y="5532120"/>
-            <a:ext cx="11064240" cy="777240"/>
-          </a:xfrm>
-          <a:prstGeom prst="rect">
-            <a:avLst/>
-          </a:prstGeom>
-          <a:solidFill>
-            <a:srgbClr val="F4F6F9"/>
-          </a:solidFill>
-          <a:ln w="9525">
-            <a:solidFill>
-              <a:srgbClr val="B21E46"/>
-            </a:solidFill>
-          </a:ln>
-          <a:effectLst/>
-        </p:spPr>
-        <p:style>
-          <a:lnRef idx="1">
-            <a:schemeClr val="accent1"/>
-          </a:lnRef>
-          <a:fillRef idx="3">
-            <a:schemeClr val="accent1"/>
-          </a:fillRef>
-          <a:effectRef idx="2">
-            <a:schemeClr val="accent1"/>
-          </a:effectRef>
-          <a:fontRef idx="minor">
-            <a:schemeClr val="lt1"/>
-          </a:fontRef>
-        </p:style>
-        <p:txBody>
-          <a:bodyPr rtlCol="0" anchor="ctr"/>
-          <a:lstStyle/>
-          <a:p>
-            <a:pPr algn="ctr"/>
-          </a:p>
-        </p:txBody>
-      </p:sp>
-      <p:sp>
-        <p:nvSpPr>
-          <p:cNvPr id="19" name="TextBox 18"/>
-          <p:cNvSpPr txBox="1"/>
-          <p:nvPr/>
-        </p:nvSpPr>
-        <p:spPr>
-          <a:xfrm>
-            <a:off x="731520" y="5632704"/>
-            <a:ext cx="10698480" cy="320040"/>
-          </a:xfrm>
-          <a:prstGeom prst="rect">
-            <a:avLst/>
-          </a:prstGeom>
-          <a:noFill/>
-        </p:spPr>
-        <p:txBody>
-          <a:bodyPr wrap="square" anchor="t" lIns="0" rIns="0" tIns="0" bIns="0">
-            <a:spAutoFit/>
-          </a:bodyPr>
-          <a:lstStyle/>
-          <a:p>
-            <a:pPr algn="l">
-              <a:lnSpc>
-                <a:spcPct val="106000"/>
-              </a:lnSpc>
-              <a:spcBef>
-                <a:spcPts val="0"/>
-              </a:spcBef>
-              <a:spcAft>
-                <a:spcPts val="600"/>
-              </a:spcAft>
-            </a:pPr>
-            <a:r>
-              <a:rPr sz="1100" b="1" i="0">
-                <a:solidFill>
-                  <a:srgbClr val="B21E46"/>
-                </a:solidFill>
-                <a:latin typeface="Consolas"/>
-              </a:rPr>
-              <a:t>YOUR HYPOTHESIS</a:t>
-            </a:r>
-          </a:p>
-        </p:txBody>
-      </p:sp>
-      <p:sp>
-        <p:nvSpPr>
-          <p:cNvPr id="20" name="TextBox 19"/>
-          <p:cNvSpPr txBox="1"/>
-          <p:nvPr/>
-        </p:nvSpPr>
-        <p:spPr>
-          <a:xfrm>
-            <a:off x="731520" y="5897880"/>
-            <a:ext cx="10698480" cy="365760"/>
-          </a:xfrm>
-          <a:prstGeom prst="rect">
-            <a:avLst/>
-          </a:prstGeom>
-          <a:noFill/>
-        </p:spPr>
-        <p:txBody>
-          <a:bodyPr wrap="square" anchor="t" lIns="0" rIns="0" tIns="0" bIns="0">
-            <a:spAutoFit/>
-          </a:bodyPr>
-          <a:lstStyle/>
-          <a:p>
-            <a:pPr algn="l">
-              <a:lnSpc>
-                <a:spcPct val="106000"/>
-              </a:lnSpc>
-              <a:spcBef>
-                <a:spcPts val="0"/>
-              </a:spcBef>
-              <a:spcAft>
-                <a:spcPts val="600"/>
-              </a:spcAft>
-            </a:pPr>
-            <a:r>
-              <a:rPr sz="1500" b="0" i="1">
-                <a:solidFill>
-                  <a:srgbClr val="111820"/>
-                </a:solidFill>
-                <a:latin typeface="Calibri"/>
-              </a:rPr>
-              <a:t>Where's the value in 5 years — in energy, or in flexibility?</a:t>
-            </a:r>
-          </a:p>
-        </p:txBody>
-      </p:sp>
-      <p:sp>
-        <p:nvSpPr>
-          <p:cNvPr id="21" name="TextBox 20"/>
+              <a:t>Value factor is a generation idea; a battery's analog is the spread. Both erode as you build — and both cycle.</a:t>
+            </a:r>
+          </a:p>
+        </p:txBody>
+      </p:sp>
+      <p:sp>
+        <p:nvSpPr>
+          <p:cNvPr id="9" name="TextBox 8"/>
           <p:cNvSpPr txBox="1"/>
           <p:nvPr/>
         </p:nvSpPr>
@@ -16137,7 +16611,7 @@
             <a:avLst/>
           </a:prstGeom>
           <a:solidFill>
-            <a:srgbClr val="111820"/>
+            <a:srgbClr val="FFFFFF"/>
           </a:solidFill>
           <a:ln>
             <a:noFill/>
@@ -16175,13 +16649,13 @@
         <p:spPr>
           <a:xfrm>
             <a:off x="0" y="0"/>
-            <a:ext cx="12191695" cy="201168"/>
+            <a:ext cx="146304" cy="6858000"/>
           </a:xfrm>
           <a:prstGeom prst="rect">
             <a:avLst/>
           </a:prstGeom>
           <a:solidFill>
-            <a:srgbClr val="2F7D3A"/>
+            <a:srgbClr val="B21E46"/>
           </a:solidFill>
           <a:ln>
             <a:noFill/>
@@ -16212,57 +16686,13 @@
       </p:sp>
       <p:sp>
         <p:nvSpPr>
-          <p:cNvPr id="4" name="Rectangle 3"/>
-          <p:cNvSpPr/>
-          <p:nvPr/>
-        </p:nvSpPr>
-        <p:spPr>
-          <a:xfrm>
-            <a:off x="841248" y="1170432"/>
-            <a:ext cx="548640" cy="45720"/>
-          </a:xfrm>
-          <a:prstGeom prst="rect">
-            <a:avLst/>
-          </a:prstGeom>
-          <a:solidFill>
-            <a:srgbClr val="2F7D3A"/>
-          </a:solidFill>
-          <a:ln>
-            <a:noFill/>
-          </a:ln>
-          <a:effectLst/>
-        </p:spPr>
-        <p:style>
-          <a:lnRef idx="1">
-            <a:schemeClr val="accent1"/>
-          </a:lnRef>
-          <a:fillRef idx="3">
-            <a:schemeClr val="accent1"/>
-          </a:fillRef>
-          <a:effectRef idx="2">
-            <a:schemeClr val="accent1"/>
-          </a:effectRef>
-          <a:fontRef idx="minor">
-            <a:schemeClr val="lt1"/>
-          </a:fontRef>
-        </p:style>
-        <p:txBody>
-          <a:bodyPr rtlCol="0" anchor="ctr"/>
-          <a:lstStyle/>
-          <a:p>
-            <a:pPr algn="ctr"/>
-          </a:p>
-        </p:txBody>
-      </p:sp>
-      <p:sp>
-        <p:nvSpPr>
-          <p:cNvPr id="5" name="TextBox 4"/>
+          <p:cNvPr id="4" name="TextBox 3"/>
           <p:cNvSpPr txBox="1"/>
           <p:nvPr/>
         </p:nvSpPr>
         <p:spPr>
           <a:xfrm>
-            <a:off x="822960" y="1353312"/>
+            <a:off x="548640" y="411480"/>
             <a:ext cx="9144000" cy="274320"/>
           </a:xfrm>
           <a:prstGeom prst="rect">
@@ -16290,25 +16720,25 @@
             <a:r>
               <a:rPr sz="1200" b="1" i="0">
                 <a:solidFill>
-                  <a:srgbClr val="2F7D3A"/>
+                  <a:srgbClr val="B21E46"/>
                 </a:solidFill>
                 <a:latin typeface="Consolas"/>
               </a:rPr>
-              <a:t>TOPIC 5</a:t>
-            </a:r>
-          </a:p>
-        </p:txBody>
-      </p:sp>
-      <p:sp>
-        <p:nvSpPr>
-          <p:cNvPr id="6" name="TextBox 5"/>
+              <a:t>TOPIC 4 · ECONOMICS</a:t>
+            </a:r>
+          </a:p>
+        </p:txBody>
+      </p:sp>
+      <p:sp>
+        <p:nvSpPr>
+          <p:cNvPr id="5" name="TextBox 4"/>
           <p:cNvSpPr txBox="1"/>
           <p:nvPr/>
         </p:nvSpPr>
         <p:spPr>
           <a:xfrm>
-            <a:off x="777240" y="1691640"/>
-            <a:ext cx="10607040" cy="1097280"/>
+            <a:off x="502920" y="713232"/>
+            <a:ext cx="11155680" cy="640080"/>
           </a:xfrm>
           <a:prstGeom prst="rect">
             <a:avLst/>
@@ -16333,14 +16763,58 @@
               </a:spcAft>
             </a:pPr>
             <a:r>
-              <a:rPr sz="4000" b="1" i="0">
-                <a:solidFill>
-                  <a:srgbClr val="FFFFFF"/>
-                </a:solidFill>
-                <a:latin typeface="Calibri"/>
-              </a:rPr>
-              <a:t>Award vs concrete vs electrons</a:t>
-            </a:r>
+              <a:rPr sz="2800" b="1" i="0">
+                <a:solidFill>
+                  <a:srgbClr val="111820"/>
+                </a:solidFill>
+                <a:latin typeface="Calibri"/>
+              </a:rPr>
+              <a:t>Provocations — take a position</a:t>
+            </a:r>
+          </a:p>
+        </p:txBody>
+      </p:sp>
+      <p:sp>
+        <p:nvSpPr>
+          <p:cNvPr id="6" name="Rectangle 5"/>
+          <p:cNvSpPr/>
+          <p:nvPr/>
+        </p:nvSpPr>
+        <p:spPr>
+          <a:xfrm>
+            <a:off x="548640" y="1600200"/>
+            <a:ext cx="457200" cy="457200"/>
+          </a:xfrm>
+          <a:prstGeom prst="rect">
+            <a:avLst/>
+          </a:prstGeom>
+          <a:solidFill>
+            <a:srgbClr val="B21E46"/>
+          </a:solidFill>
+          <a:ln>
+            <a:noFill/>
+          </a:ln>
+          <a:effectLst/>
+        </p:spPr>
+        <p:style>
+          <a:lnRef idx="1">
+            <a:schemeClr val="accent1"/>
+          </a:lnRef>
+          <a:fillRef idx="3">
+            <a:schemeClr val="accent1"/>
+          </a:fillRef>
+          <a:effectRef idx="2">
+            <a:schemeClr val="accent1"/>
+          </a:effectRef>
+          <a:fontRef idx="minor">
+            <a:schemeClr val="lt1"/>
+          </a:fontRef>
+        </p:style>
+        <p:txBody>
+          <a:bodyPr rtlCol="0" anchor="ctr"/>
+          <a:lstStyle/>
+          <a:p>
+            <a:pPr algn="ctr"/>
           </a:p>
         </p:txBody>
       </p:sp>
@@ -16352,8 +16826,8 @@
         </p:nvSpPr>
         <p:spPr>
           <a:xfrm>
-            <a:off x="822960" y="2697480"/>
-            <a:ext cx="10241280" cy="1188720"/>
+            <a:off x="548640" y="1600200"/>
+            <a:ext cx="457200" cy="457200"/>
           </a:xfrm>
           <a:prstGeom prst="rect">
             <a:avLst/>
@@ -16361,7 +16835,52 @@
           <a:noFill/>
         </p:spPr>
         <p:txBody>
-          <a:bodyPr wrap="square" anchor="t" lIns="0" rIns="0" tIns="0" bIns="0">
+          <a:bodyPr wrap="square" anchor="ctr" lIns="0" rIns="0" tIns="0" bIns="0">
+            <a:spAutoFit/>
+          </a:bodyPr>
+          <a:lstStyle/>
+          <a:p>
+            <a:pPr algn="ctr">
+              <a:lnSpc>
+                <a:spcPct val="106000"/>
+              </a:lnSpc>
+              <a:spcBef>
+                <a:spcPts val="0"/>
+              </a:spcBef>
+              <a:spcAft>
+                <a:spcPts val="600"/>
+              </a:spcAft>
+            </a:pPr>
+            <a:r>
+              <a:rPr sz="1800" b="1" i="0">
+                <a:solidFill>
+                  <a:srgbClr val="FFFFFF"/>
+                </a:solidFill>
+                <a:latin typeface="Calibri"/>
+              </a:rPr>
+              <a:t>A</a:t>
+            </a:r>
+          </a:p>
+        </p:txBody>
+      </p:sp>
+      <p:sp>
+        <p:nvSpPr>
+          <p:cNvPr id="8" name="TextBox 7"/>
+          <p:cNvSpPr txBox="1"/>
+          <p:nvPr/>
+        </p:nvSpPr>
+        <p:spPr>
+          <a:xfrm>
+            <a:off x="1188720" y="1618488"/>
+            <a:ext cx="10332720" cy="731520"/>
+          </a:xfrm>
+          <a:prstGeom prst="rect">
+            <a:avLst/>
+          </a:prstGeom>
+          <a:noFill/>
+        </p:spPr>
+        <p:txBody>
+          <a:bodyPr wrap="square" anchor="ctr" lIns="0" rIns="0" tIns="0" bIns="0">
             <a:spAutoFit/>
           </a:bodyPr>
           <a:lstStyle/>
@@ -16378,38 +16897,36 @@
               </a:spcAft>
             </a:pPr>
             <a:r>
-              <a:rPr sz="2100" b="0" i="0">
-                <a:solidFill>
-                  <a:srgbClr val="C2CAD4"/>
-                </a:solidFill>
-                <a:latin typeface="Calibri"/>
-              </a:rPr>
-              <a:t>Most of the pipeline is a mirage — the gap between proposed, committed and built is enormous.</a:t>
-            </a:r>
-          </a:p>
-        </p:txBody>
-      </p:sp>
-      <p:sp>
-        <p:nvSpPr>
-          <p:cNvPr id="8" name="Rectangle 7"/>
+              <a:rPr sz="1600" b="0" i="0">
+                <a:solidFill>
+                  <a:srgbClr val="37424F"/>
+                </a:solidFill>
+                <a:latin typeface="Calibri"/>
+              </a:rPr>
+              <a:t>Is the value-factor trough permanent, or does coal-exit evening scarcity bring it back?</a:t>
+            </a:r>
+          </a:p>
+        </p:txBody>
+      </p:sp>
+      <p:sp>
+        <p:nvSpPr>
+          <p:cNvPr id="9" name="Rectangle 8"/>
           <p:cNvSpPr/>
           <p:nvPr/>
         </p:nvSpPr>
         <p:spPr>
           <a:xfrm>
-            <a:off x="822960" y="3977639"/>
-            <a:ext cx="10515600" cy="1371600"/>
+            <a:off x="548640" y="2441448"/>
+            <a:ext cx="457200" cy="457200"/>
           </a:xfrm>
           <a:prstGeom prst="rect">
             <a:avLst/>
           </a:prstGeom>
           <a:solidFill>
-            <a:srgbClr val="1C222C"/>
+            <a:srgbClr val="B21E46"/>
           </a:solidFill>
-          <a:ln w="9525">
-            <a:solidFill>
-              <a:srgbClr val="2F7D3A"/>
-            </a:solidFill>
+          <a:ln>
+            <a:noFill/>
           </a:ln>
           <a:effectLst/>
         </p:spPr>
@@ -16437,14 +16954,14 @@
       </p:sp>
       <p:sp>
         <p:nvSpPr>
-          <p:cNvPr id="9" name="TextBox 8"/>
+          <p:cNvPr id="10" name="TextBox 9"/>
           <p:cNvSpPr txBox="1"/>
           <p:nvPr/>
         </p:nvSpPr>
         <p:spPr>
           <a:xfrm>
-            <a:off x="1051560" y="4114800"/>
-            <a:ext cx="10058400" cy="320040"/>
+            <a:off x="548640" y="2441448"/>
+            <a:ext cx="457200" cy="457200"/>
           </a:xfrm>
           <a:prstGeom prst="rect">
             <a:avLst/>
@@ -16452,7 +16969,52 @@
           <a:noFill/>
         </p:spPr>
         <p:txBody>
-          <a:bodyPr wrap="square" anchor="t" lIns="0" rIns="0" tIns="0" bIns="0">
+          <a:bodyPr wrap="square" anchor="ctr" lIns="0" rIns="0" tIns="0" bIns="0">
+            <a:spAutoFit/>
+          </a:bodyPr>
+          <a:lstStyle/>
+          <a:p>
+            <a:pPr algn="ctr">
+              <a:lnSpc>
+                <a:spcPct val="106000"/>
+              </a:lnSpc>
+              <a:spcBef>
+                <a:spcPts val="0"/>
+              </a:spcBef>
+              <a:spcAft>
+                <a:spcPts val="600"/>
+              </a:spcAft>
+            </a:pPr>
+            <a:r>
+              <a:rPr sz="1800" b="1" i="0">
+                <a:solidFill>
+                  <a:srgbClr val="FFFFFF"/>
+                </a:solidFill>
+                <a:latin typeface="Calibri"/>
+              </a:rPr>
+              <a:t>B</a:t>
+            </a:r>
+          </a:p>
+        </p:txBody>
+      </p:sp>
+      <p:sp>
+        <p:nvSpPr>
+          <p:cNvPr id="11" name="TextBox 10"/>
+          <p:cNvSpPr txBox="1"/>
+          <p:nvPr/>
+        </p:nvSpPr>
+        <p:spPr>
+          <a:xfrm>
+            <a:off x="1188720" y="2459736"/>
+            <a:ext cx="10332720" cy="731520"/>
+          </a:xfrm>
+          <a:prstGeom prst="rect">
+            <a:avLst/>
+          </a:prstGeom>
+          <a:noFill/>
+        </p:spPr>
+        <p:txBody>
+          <a:bodyPr wrap="square" anchor="ctr" lIns="0" rIns="0" tIns="0" bIns="0">
             <a:spAutoFit/>
           </a:bodyPr>
           <a:lstStyle/>
@@ -16469,27 +17031,71 @@
               </a:spcAft>
             </a:pPr>
             <a:r>
-              <a:rPr sz="1100" b="1" i="0">
-                <a:solidFill>
-                  <a:srgbClr val="2F7D3A"/>
-                </a:solidFill>
-                <a:latin typeface="Consolas"/>
-              </a:rPr>
-              <a:t>START HERE</a:t>
-            </a:r>
-          </a:p>
-        </p:txBody>
-      </p:sp>
-      <p:sp>
-        <p:nvSpPr>
-          <p:cNvPr id="10" name="TextBox 9"/>
+              <a:rPr sz="1600" b="0" i="0">
+                <a:solidFill>
+                  <a:srgbClr val="37424F"/>
+                </a:solidFill>
+                <a:latin typeface="Calibri"/>
+              </a:rPr>
+              <a:t>Does that change whether — or when — you build, and whether to firm it?</a:t>
+            </a:r>
+          </a:p>
+        </p:txBody>
+      </p:sp>
+      <p:sp>
+        <p:nvSpPr>
+          <p:cNvPr id="12" name="Rectangle 11"/>
+          <p:cNvSpPr/>
+          <p:nvPr/>
+        </p:nvSpPr>
+        <p:spPr>
+          <a:xfrm>
+            <a:off x="548640" y="3282696"/>
+            <a:ext cx="457200" cy="457200"/>
+          </a:xfrm>
+          <a:prstGeom prst="rect">
+            <a:avLst/>
+          </a:prstGeom>
+          <a:solidFill>
+            <a:srgbClr val="B21E46"/>
+          </a:solidFill>
+          <a:ln>
+            <a:noFill/>
+          </a:ln>
+          <a:effectLst/>
+        </p:spPr>
+        <p:style>
+          <a:lnRef idx="1">
+            <a:schemeClr val="accent1"/>
+          </a:lnRef>
+          <a:fillRef idx="3">
+            <a:schemeClr val="accent1"/>
+          </a:fillRef>
+          <a:effectRef idx="2">
+            <a:schemeClr val="accent1"/>
+          </a:effectRef>
+          <a:fontRef idx="minor">
+            <a:schemeClr val="lt1"/>
+          </a:fontRef>
+        </p:style>
+        <p:txBody>
+          <a:bodyPr rtlCol="0" anchor="ctr"/>
+          <a:lstStyle/>
+          <a:p>
+            <a:pPr algn="ctr"/>
+          </a:p>
+        </p:txBody>
+      </p:sp>
+      <p:sp>
+        <p:nvSpPr>
+          <p:cNvPr id="13" name="TextBox 12"/>
           <p:cNvSpPr txBox="1"/>
           <p:nvPr/>
         </p:nvSpPr>
         <p:spPr>
           <a:xfrm>
-            <a:off x="1051560" y="4407408"/>
-            <a:ext cx="10058400" cy="822960"/>
+            <a:off x="548640" y="3282696"/>
+            <a:ext cx="457200" cy="457200"/>
           </a:xfrm>
           <a:prstGeom prst="rect">
             <a:avLst/>
@@ -16497,7 +17103,52 @@
           <a:noFill/>
         </p:spPr>
         <p:txBody>
-          <a:bodyPr wrap="square" anchor="t" lIns="0" rIns="0" tIns="0" bIns="0">
+          <a:bodyPr wrap="square" anchor="ctr" lIns="0" rIns="0" tIns="0" bIns="0">
+            <a:spAutoFit/>
+          </a:bodyPr>
+          <a:lstStyle/>
+          <a:p>
+            <a:pPr algn="ctr">
+              <a:lnSpc>
+                <a:spcPct val="106000"/>
+              </a:lnSpc>
+              <a:spcBef>
+                <a:spcPts val="0"/>
+              </a:spcBef>
+              <a:spcAft>
+                <a:spcPts val="600"/>
+              </a:spcAft>
+            </a:pPr>
+            <a:r>
+              <a:rPr sz="1800" b="1" i="0">
+                <a:solidFill>
+                  <a:srgbClr val="FFFFFF"/>
+                </a:solidFill>
+                <a:latin typeface="Calibri"/>
+              </a:rPr>
+              <a:t>C</a:t>
+            </a:r>
+          </a:p>
+        </p:txBody>
+      </p:sp>
+      <p:sp>
+        <p:nvSpPr>
+          <p:cNvPr id="14" name="TextBox 13"/>
+          <p:cNvSpPr txBox="1"/>
+          <p:nvPr/>
+        </p:nvSpPr>
+        <p:spPr>
+          <a:xfrm>
+            <a:off x="1188720" y="3300984"/>
+            <a:ext cx="10332720" cy="731520"/>
+          </a:xfrm>
+          <a:prstGeom prst="rect">
+            <a:avLst/>
+          </a:prstGeom>
+          <a:noFill/>
+        </p:spPr>
+        <p:txBody>
+          <a:bodyPr wrap="square" anchor="ctr" lIns="0" rIns="0" tIns="0" bIns="0">
             <a:spAutoFit/>
           </a:bodyPr>
           <a:lstStyle/>
@@ -16514,13 +17165,328 @@
               </a:spcAft>
             </a:pPr>
             <a:r>
-              <a:rPr sz="1800" b="0" i="1">
+              <a:rPr sz="1600" b="0" i="0">
+                <a:solidFill>
+                  <a:srgbClr val="37424F"/>
+                </a:solidFill>
+                <a:latin typeface="Calibri"/>
+              </a:rPr>
+              <a:t>The battery spread is compressing — is it BESS, benign conditions, or both? What happens next cycle?</a:t>
+            </a:r>
+          </a:p>
+        </p:txBody>
+      </p:sp>
+      <p:sp>
+        <p:nvSpPr>
+          <p:cNvPr id="15" name="Rectangle 14"/>
+          <p:cNvSpPr/>
+          <p:nvPr/>
+        </p:nvSpPr>
+        <p:spPr>
+          <a:xfrm>
+            <a:off x="548640" y="4123944"/>
+            <a:ext cx="457200" cy="457200"/>
+          </a:xfrm>
+          <a:prstGeom prst="rect">
+            <a:avLst/>
+          </a:prstGeom>
+          <a:solidFill>
+            <a:srgbClr val="B21E46"/>
+          </a:solidFill>
+          <a:ln>
+            <a:noFill/>
+          </a:ln>
+          <a:effectLst/>
+        </p:spPr>
+        <p:style>
+          <a:lnRef idx="1">
+            <a:schemeClr val="accent1"/>
+          </a:lnRef>
+          <a:fillRef idx="3">
+            <a:schemeClr val="accent1"/>
+          </a:fillRef>
+          <a:effectRef idx="2">
+            <a:schemeClr val="accent1"/>
+          </a:effectRef>
+          <a:fontRef idx="minor">
+            <a:schemeClr val="lt1"/>
+          </a:fontRef>
+        </p:style>
+        <p:txBody>
+          <a:bodyPr rtlCol="0" anchor="ctr"/>
+          <a:lstStyle/>
+          <a:p>
+            <a:pPr algn="ctr"/>
+          </a:p>
+        </p:txBody>
+      </p:sp>
+      <p:sp>
+        <p:nvSpPr>
+          <p:cNvPr id="16" name="TextBox 15"/>
+          <p:cNvSpPr txBox="1"/>
+          <p:nvPr/>
+        </p:nvSpPr>
+        <p:spPr>
+          <a:xfrm>
+            <a:off x="548640" y="4123944"/>
+            <a:ext cx="457200" cy="457200"/>
+          </a:xfrm>
+          <a:prstGeom prst="rect">
+            <a:avLst/>
+          </a:prstGeom>
+          <a:noFill/>
+        </p:spPr>
+        <p:txBody>
+          <a:bodyPr wrap="square" anchor="ctr" lIns="0" rIns="0" tIns="0" bIns="0">
+            <a:spAutoFit/>
+          </a:bodyPr>
+          <a:lstStyle/>
+          <a:p>
+            <a:pPr algn="ctr">
+              <a:lnSpc>
+                <a:spcPct val="106000"/>
+              </a:lnSpc>
+              <a:spcBef>
+                <a:spcPts val="0"/>
+              </a:spcBef>
+              <a:spcAft>
+                <a:spcPts val="600"/>
+              </a:spcAft>
+            </a:pPr>
+            <a:r>
+              <a:rPr sz="1800" b="1" i="0">
                 <a:solidFill>
                   <a:srgbClr val="FFFFFF"/>
                 </a:solidFill>
                 <a:latin typeface="Calibri"/>
               </a:rPr>
-              <a:t>Of 105 GW “proposed” in 2022, only ~9 GW got built. Which signals separate the real projects from the mirage?</a:t>
+              <a:t>D</a:t>
+            </a:r>
+          </a:p>
+        </p:txBody>
+      </p:sp>
+      <p:sp>
+        <p:nvSpPr>
+          <p:cNvPr id="17" name="TextBox 16"/>
+          <p:cNvSpPr txBox="1"/>
+          <p:nvPr/>
+        </p:nvSpPr>
+        <p:spPr>
+          <a:xfrm>
+            <a:off x="1188720" y="4142232"/>
+            <a:ext cx="10332720" cy="731520"/>
+          </a:xfrm>
+          <a:prstGeom prst="rect">
+            <a:avLst/>
+          </a:prstGeom>
+          <a:noFill/>
+        </p:spPr>
+        <p:txBody>
+          <a:bodyPr wrap="square" anchor="ctr" lIns="0" rIns="0" tIns="0" bIns="0">
+            <a:spAutoFit/>
+          </a:bodyPr>
+          <a:lstStyle/>
+          <a:p>
+            <a:pPr algn="l">
+              <a:lnSpc>
+                <a:spcPct val="106000"/>
+              </a:lnSpc>
+              <a:spcBef>
+                <a:spcPts val="0"/>
+              </a:spcBef>
+              <a:spcAft>
+                <a:spcPts val="600"/>
+              </a:spcAft>
+            </a:pPr>
+            <a:r>
+              <a:rPr sz="1600" b="0" i="0">
+                <a:solidFill>
+                  <a:srgbClr val="37424F"/>
+                </a:solidFill>
+                <a:latin typeface="Calibri"/>
+              </a:rPr>
+              <a:t>Would you build another unfirmed solar farm in this market?</a:t>
+            </a:r>
+          </a:p>
+        </p:txBody>
+      </p:sp>
+      <p:sp>
+        <p:nvSpPr>
+          <p:cNvPr id="18" name="Rectangle 17"/>
+          <p:cNvSpPr/>
+          <p:nvPr/>
+        </p:nvSpPr>
+        <p:spPr>
+          <a:xfrm>
+            <a:off x="548640" y="5532120"/>
+            <a:ext cx="11064240" cy="777240"/>
+          </a:xfrm>
+          <a:prstGeom prst="rect">
+            <a:avLst/>
+          </a:prstGeom>
+          <a:solidFill>
+            <a:srgbClr val="F4F6F9"/>
+          </a:solidFill>
+          <a:ln w="9525">
+            <a:solidFill>
+              <a:srgbClr val="B21E46"/>
+            </a:solidFill>
+          </a:ln>
+          <a:effectLst/>
+        </p:spPr>
+        <p:style>
+          <a:lnRef idx="1">
+            <a:schemeClr val="accent1"/>
+          </a:lnRef>
+          <a:fillRef idx="3">
+            <a:schemeClr val="accent1"/>
+          </a:fillRef>
+          <a:effectRef idx="2">
+            <a:schemeClr val="accent1"/>
+          </a:effectRef>
+          <a:fontRef idx="minor">
+            <a:schemeClr val="lt1"/>
+          </a:fontRef>
+        </p:style>
+        <p:txBody>
+          <a:bodyPr rtlCol="0" anchor="ctr"/>
+          <a:lstStyle/>
+          <a:p>
+            <a:pPr algn="ctr"/>
+          </a:p>
+        </p:txBody>
+      </p:sp>
+      <p:sp>
+        <p:nvSpPr>
+          <p:cNvPr id="19" name="TextBox 18"/>
+          <p:cNvSpPr txBox="1"/>
+          <p:nvPr/>
+        </p:nvSpPr>
+        <p:spPr>
+          <a:xfrm>
+            <a:off x="731520" y="5632704"/>
+            <a:ext cx="10698480" cy="320040"/>
+          </a:xfrm>
+          <a:prstGeom prst="rect">
+            <a:avLst/>
+          </a:prstGeom>
+          <a:noFill/>
+        </p:spPr>
+        <p:txBody>
+          <a:bodyPr wrap="square" anchor="t" lIns="0" rIns="0" tIns="0" bIns="0">
+            <a:spAutoFit/>
+          </a:bodyPr>
+          <a:lstStyle/>
+          <a:p>
+            <a:pPr algn="l">
+              <a:lnSpc>
+                <a:spcPct val="106000"/>
+              </a:lnSpc>
+              <a:spcBef>
+                <a:spcPts val="0"/>
+              </a:spcBef>
+              <a:spcAft>
+                <a:spcPts val="600"/>
+              </a:spcAft>
+            </a:pPr>
+            <a:r>
+              <a:rPr sz="1100" b="1" i="0">
+                <a:solidFill>
+                  <a:srgbClr val="B21E46"/>
+                </a:solidFill>
+                <a:latin typeface="Consolas"/>
+              </a:rPr>
+              <a:t>YOUR HYPOTHESIS</a:t>
+            </a:r>
+          </a:p>
+        </p:txBody>
+      </p:sp>
+      <p:sp>
+        <p:nvSpPr>
+          <p:cNvPr id="20" name="TextBox 19"/>
+          <p:cNvSpPr txBox="1"/>
+          <p:nvPr/>
+        </p:nvSpPr>
+        <p:spPr>
+          <a:xfrm>
+            <a:off x="731520" y="5897880"/>
+            <a:ext cx="10698480" cy="365760"/>
+          </a:xfrm>
+          <a:prstGeom prst="rect">
+            <a:avLst/>
+          </a:prstGeom>
+          <a:noFill/>
+        </p:spPr>
+        <p:txBody>
+          <a:bodyPr wrap="square" anchor="t" lIns="0" rIns="0" tIns="0" bIns="0">
+            <a:spAutoFit/>
+          </a:bodyPr>
+          <a:lstStyle/>
+          <a:p>
+            <a:pPr algn="l">
+              <a:lnSpc>
+                <a:spcPct val="106000"/>
+              </a:lnSpc>
+              <a:spcBef>
+                <a:spcPts val="0"/>
+              </a:spcBef>
+              <a:spcAft>
+                <a:spcPts val="600"/>
+              </a:spcAft>
+            </a:pPr>
+            <a:r>
+              <a:rPr sz="1500" b="0" i="1">
+                <a:solidFill>
+                  <a:srgbClr val="111820"/>
+                </a:solidFill>
+                <a:latin typeface="Calibri"/>
+              </a:rPr>
+              <a:t>Where's the value in 5 years — in energy, or in flexibility?</a:t>
+            </a:r>
+          </a:p>
+        </p:txBody>
+      </p:sp>
+      <p:sp>
+        <p:nvSpPr>
+          <p:cNvPr id="21" name="TextBox 20"/>
+          <p:cNvSpPr txBox="1"/>
+          <p:nvPr/>
+        </p:nvSpPr>
+        <p:spPr>
+          <a:xfrm>
+            <a:off x="502920" y="6419088"/>
+            <a:ext cx="8229600" cy="274320"/>
+          </a:xfrm>
+          <a:prstGeom prst="rect">
+            <a:avLst/>
+          </a:prstGeom>
+          <a:noFill/>
+        </p:spPr>
+        <p:txBody>
+          <a:bodyPr wrap="square" anchor="t" lIns="0" rIns="0" tIns="0" bIns="0">
+            <a:spAutoFit/>
+          </a:bodyPr>
+          <a:lstStyle/>
+          <a:p>
+            <a:pPr algn="l">
+              <a:lnSpc>
+                <a:spcPct val="106000"/>
+              </a:lnSpc>
+              <a:spcBef>
+                <a:spcPts val="0"/>
+              </a:spcBef>
+              <a:spcAft>
+                <a:spcPts val="600"/>
+              </a:spcAft>
+            </a:pPr>
+            <a:r>
+              <a:rPr sz="900" b="0" i="0">
+                <a:solidFill>
+                  <a:srgbClr val="66717F"/>
+                </a:solidFill>
+                <a:latin typeface="Consolas"/>
+              </a:rPr>
+              <a:t>Reading the NEM · Power Development Team Day · figures from the AusEnergy Lens (AEMO + ISP 2026), as-at Aug 2026</a:t>
             </a:r>
           </a:p>
         </p:txBody>
@@ -16558,7 +17524,7 @@
             <a:avLst/>
           </a:prstGeom>
           <a:solidFill>
-            <a:srgbClr val="FFFFFF"/>
+            <a:srgbClr val="111820"/>
           </a:solidFill>
           <a:ln>
             <a:noFill/>
@@ -16596,7 +17562,7 @@
         <p:spPr>
           <a:xfrm>
             <a:off x="0" y="0"/>
-            <a:ext cx="146304" cy="6858000"/>
+            <a:ext cx="12191695" cy="201168"/>
           </a:xfrm>
           <a:prstGeom prst="rect">
             <a:avLst/>
@@ -16633,13 +17599,57 @@
       </p:sp>
       <p:sp>
         <p:nvSpPr>
-          <p:cNvPr id="4" name="TextBox 3"/>
+          <p:cNvPr id="4" name="Rectangle 3"/>
+          <p:cNvSpPr/>
+          <p:nvPr/>
+        </p:nvSpPr>
+        <p:spPr>
+          <a:xfrm>
+            <a:off x="841248" y="1170432"/>
+            <a:ext cx="548640" cy="45720"/>
+          </a:xfrm>
+          <a:prstGeom prst="rect">
+            <a:avLst/>
+          </a:prstGeom>
+          <a:solidFill>
+            <a:srgbClr val="2F7D3A"/>
+          </a:solidFill>
+          <a:ln>
+            <a:noFill/>
+          </a:ln>
+          <a:effectLst/>
+        </p:spPr>
+        <p:style>
+          <a:lnRef idx="1">
+            <a:schemeClr val="accent1"/>
+          </a:lnRef>
+          <a:fillRef idx="3">
+            <a:schemeClr val="accent1"/>
+          </a:fillRef>
+          <a:effectRef idx="2">
+            <a:schemeClr val="accent1"/>
+          </a:effectRef>
+          <a:fontRef idx="minor">
+            <a:schemeClr val="lt1"/>
+          </a:fontRef>
+        </p:style>
+        <p:txBody>
+          <a:bodyPr rtlCol="0" anchor="ctr"/>
+          <a:lstStyle/>
+          <a:p>
+            <a:pPr algn="ctr"/>
+          </a:p>
+        </p:txBody>
+      </p:sp>
+      <p:sp>
+        <p:nvSpPr>
+          <p:cNvPr id="5" name="TextBox 4"/>
           <p:cNvSpPr txBox="1"/>
           <p:nvPr/>
         </p:nvSpPr>
         <p:spPr>
           <a:xfrm>
-            <a:off x="548640" y="411480"/>
+            <a:off x="822960" y="1353312"/>
             <a:ext cx="9144000" cy="274320"/>
           </a:xfrm>
           <a:prstGeom prst="rect">
@@ -16671,21 +17681,21 @@
                 </a:solidFill>
                 <a:latin typeface="Consolas"/>
               </a:rPr>
-              <a:t>TOPIC 5 · PIPELINE</a:t>
-            </a:r>
-          </a:p>
-        </p:txBody>
-      </p:sp>
-      <p:sp>
-        <p:nvSpPr>
-          <p:cNvPr id="5" name="TextBox 4"/>
+              <a:t>TOPIC 5</a:t>
+            </a:r>
+          </a:p>
+        </p:txBody>
+      </p:sp>
+      <p:sp>
+        <p:nvSpPr>
+          <p:cNvPr id="6" name="TextBox 5"/>
           <p:cNvSpPr txBox="1"/>
           <p:nvPr/>
         </p:nvSpPr>
         <p:spPr>
           <a:xfrm>
-            <a:off x="502920" y="713232"/>
-            <a:ext cx="11155680" cy="640080"/>
+            <a:off x="777240" y="1691640"/>
+            <a:ext cx="10607040" cy="1097280"/>
           </a:xfrm>
           <a:prstGeom prst="rect">
             <a:avLst/>
@@ -16710,91 +17720,27 @@
               </a:spcAft>
             </a:pPr>
             <a:r>
-              <a:rPr sz="2800" b="1" i="0">
-                <a:solidFill>
-                  <a:srgbClr val="111820"/>
-                </a:solidFill>
-                <a:latin typeface="Calibri"/>
-              </a:rPr>
-              <a:t>The long view — the mirage growing</a:t>
-            </a:r>
-          </a:p>
-        </p:txBody>
-      </p:sp>
-      <p:graphicFrame>
-        <p:nvGraphicFramePr>
-          <p:cNvPr id="6" name="Chart 5"/>
-          <p:cNvGraphicFramePr>
-            <a:graphicFrameLocks noGrp="1"/>
-          </p:cNvGraphicFramePr>
-          <p:nvPr/>
-        </p:nvGraphicFramePr>
-        <p:xfrm>
-          <a:off x="548640" y="1554480"/>
-          <a:ext cx="11064240" cy="4114800"/>
-        </p:xfrm>
-        <a:graphic>
-          <a:graphicData uri="http://schemas.openxmlformats.org/drawingml/2006/chart">
-            <c:chart xmlns:c="http://schemas.openxmlformats.org/drawingml/2006/chart" r:id="rId2"/>
-          </a:graphicData>
-        </a:graphic>
-      </p:graphicFrame>
-      <p:sp>
-        <p:nvSpPr>
-          <p:cNvPr id="7" name="Rectangle 6"/>
-          <p:cNvSpPr/>
-          <p:nvPr/>
-        </p:nvSpPr>
-        <p:spPr>
-          <a:xfrm>
-            <a:off x="548640" y="5806440"/>
-            <a:ext cx="11064240" cy="566928"/>
-          </a:xfrm>
-          <a:prstGeom prst="rect">
-            <a:avLst/>
-          </a:prstGeom>
-          <a:solidFill>
-            <a:srgbClr val="F4F6F9"/>
-          </a:solidFill>
-          <a:ln w="9525">
-            <a:solidFill>
-              <a:srgbClr val="2F7D3A"/>
-            </a:solidFill>
-          </a:ln>
-          <a:effectLst/>
-        </p:spPr>
-        <p:style>
-          <a:lnRef idx="1">
-            <a:schemeClr val="accent1"/>
-          </a:lnRef>
-          <a:fillRef idx="3">
-            <a:schemeClr val="accent1"/>
-          </a:fillRef>
-          <a:effectRef idx="2">
-            <a:schemeClr val="accent1"/>
-          </a:effectRef>
-          <a:fontRef idx="minor">
-            <a:schemeClr val="lt1"/>
-          </a:fontRef>
-        </p:style>
-        <p:txBody>
-          <a:bodyPr rtlCol="0" anchor="ctr"/>
-          <a:lstStyle/>
-          <a:p>
-            <a:pPr algn="ctr"/>
-          </a:p>
-        </p:txBody>
-      </p:sp>
-      <p:sp>
-        <p:nvSpPr>
-          <p:cNvPr id="8" name="TextBox 7"/>
+              <a:rPr sz="4000" b="1" i="0">
+                <a:solidFill>
+                  <a:srgbClr val="FFFFFF"/>
+                </a:solidFill>
+                <a:latin typeface="Calibri"/>
+              </a:rPr>
+              <a:t>Award vs concrete vs electrons</a:t>
+            </a:r>
+          </a:p>
+        </p:txBody>
+      </p:sp>
+      <p:sp>
+        <p:nvSpPr>
+          <p:cNvPr id="7" name="TextBox 6"/>
           <p:cNvSpPr txBox="1"/>
           <p:nvPr/>
         </p:nvSpPr>
         <p:spPr>
           <a:xfrm>
-            <a:off x="731520" y="5852160"/>
-            <a:ext cx="10698480" cy="457200"/>
+            <a:off x="822960" y="2697480"/>
+            <a:ext cx="10241280" cy="1188720"/>
           </a:xfrm>
           <a:prstGeom prst="rect">
             <a:avLst/>
@@ -16802,7 +17748,7 @@
           <a:noFill/>
         </p:spPr>
         <p:txBody>
-          <a:bodyPr wrap="square" anchor="ctr" lIns="0" rIns="0" tIns="0" bIns="0">
+          <a:bodyPr wrap="square" anchor="t" lIns="0" rIns="0" tIns="0" bIns="0">
             <a:spAutoFit/>
           </a:bodyPr>
           <a:lstStyle/>
@@ -16819,23 +17765,60 @@
               </a:spcAft>
             </a:pPr>
             <a:r>
-              <a:rPr sz="1200" b="1" i="0">
-                <a:solidFill>
-                  <a:srgbClr val="2F7D3A"/>
-                </a:solidFill>
-                <a:latin typeface="Consolas"/>
-              </a:rPr>
-              <a:t>Takeaway  </a:t>
-            </a:r>
-            <a:r>
-              <a:rPr sz="1400" b="0" i="0">
-                <a:solidFill>
-                  <a:srgbClr val="37424F"/>
-                </a:solidFill>
-                <a:latin typeface="Calibri"/>
-              </a:rPr>
-              <a:t>Proposed capacity multiplied ~7× to 346 GW while committed and built crawled — the gap is the mirage.</a:t>
-            </a:r>
+              <a:rPr sz="2100" b="0" i="0">
+                <a:solidFill>
+                  <a:srgbClr val="C2CAD4"/>
+                </a:solidFill>
+                <a:latin typeface="Calibri"/>
+              </a:rPr>
+              <a:t>Most of the pipeline is a mirage — the gap between proposed, committed and built is enormous.</a:t>
+            </a:r>
+          </a:p>
+        </p:txBody>
+      </p:sp>
+      <p:sp>
+        <p:nvSpPr>
+          <p:cNvPr id="8" name="Rectangle 7"/>
+          <p:cNvSpPr/>
+          <p:nvPr/>
+        </p:nvSpPr>
+        <p:spPr>
+          <a:xfrm>
+            <a:off x="822960" y="3977639"/>
+            <a:ext cx="10515600" cy="1371600"/>
+          </a:xfrm>
+          <a:prstGeom prst="rect">
+            <a:avLst/>
+          </a:prstGeom>
+          <a:solidFill>
+            <a:srgbClr val="1C222C"/>
+          </a:solidFill>
+          <a:ln w="9525">
+            <a:solidFill>
+              <a:srgbClr val="2F7D3A"/>
+            </a:solidFill>
+          </a:ln>
+          <a:effectLst/>
+        </p:spPr>
+        <p:style>
+          <a:lnRef idx="1">
+            <a:schemeClr val="accent1"/>
+          </a:lnRef>
+          <a:fillRef idx="3">
+            <a:schemeClr val="accent1"/>
+          </a:fillRef>
+          <a:effectRef idx="2">
+            <a:schemeClr val="accent1"/>
+          </a:effectRef>
+          <a:fontRef idx="minor">
+            <a:schemeClr val="lt1"/>
+          </a:fontRef>
+        </p:style>
+        <p:txBody>
+          <a:bodyPr rtlCol="0" anchor="ctr"/>
+          <a:lstStyle/>
+          <a:p>
+            <a:pPr algn="ctr"/>
           </a:p>
         </p:txBody>
       </p:sp>
@@ -16847,8 +17830,8 @@
         </p:nvSpPr>
         <p:spPr>
           <a:xfrm>
-            <a:off x="502920" y="6419088"/>
-            <a:ext cx="8229600" cy="274320"/>
+            <a:off x="1051560" y="4114800"/>
+            <a:ext cx="10058400" cy="320040"/>
           </a:xfrm>
           <a:prstGeom prst="rect">
             <a:avLst/>
@@ -16873,13 +17856,58 @@
               </a:spcAft>
             </a:pPr>
             <a:r>
-              <a:rPr sz="900" b="0" i="0">
-                <a:solidFill>
-                  <a:srgbClr val="66717F"/>
+              <a:rPr sz="1100" b="1" i="0">
+                <a:solidFill>
+                  <a:srgbClr val="2F7D3A"/>
                 </a:solidFill>
                 <a:latin typeface="Consolas"/>
               </a:rPr>
-              <a:t>Reading the NEM · Power Development Team Day · figures from the AusEnergy Lens (AEMO + ISP 2026), as-at Aug 2026</a:t>
+              <a:t>START HERE</a:t>
+            </a:r>
+          </a:p>
+        </p:txBody>
+      </p:sp>
+      <p:sp>
+        <p:nvSpPr>
+          <p:cNvPr id="10" name="TextBox 9"/>
+          <p:cNvSpPr txBox="1"/>
+          <p:nvPr/>
+        </p:nvSpPr>
+        <p:spPr>
+          <a:xfrm>
+            <a:off x="1051560" y="4407408"/>
+            <a:ext cx="10058400" cy="822960"/>
+          </a:xfrm>
+          <a:prstGeom prst="rect">
+            <a:avLst/>
+          </a:prstGeom>
+          <a:noFill/>
+        </p:spPr>
+        <p:txBody>
+          <a:bodyPr wrap="square" anchor="t" lIns="0" rIns="0" tIns="0" bIns="0">
+            <a:spAutoFit/>
+          </a:bodyPr>
+          <a:lstStyle/>
+          <a:p>
+            <a:pPr algn="l">
+              <a:lnSpc>
+                <a:spcPct val="106000"/>
+              </a:lnSpc>
+              <a:spcBef>
+                <a:spcPts val="0"/>
+              </a:spcBef>
+              <a:spcAft>
+                <a:spcPts val="600"/>
+              </a:spcAft>
+            </a:pPr>
+            <a:r>
+              <a:rPr sz="1800" b="0" i="1">
+                <a:solidFill>
+                  <a:srgbClr val="FFFFFF"/>
+                </a:solidFill>
+                <a:latin typeface="Calibri"/>
+              </a:rPr>
+              <a:t>Of 105 GW “proposed” in 2022, only ~9 GW got built. Which signals separate the real projects from the mirage?</a:t>
             </a:r>
           </a:p>
         </p:txBody>
@@ -17075,292 +18103,29 @@
                 </a:solidFill>
                 <a:latin typeface="Calibri"/>
               </a:rPr>
-              <a:t>The data on the table</a:t>
-            </a:r>
-          </a:p>
-        </p:txBody>
-      </p:sp>
-      <p:sp>
-        <p:nvSpPr>
-          <p:cNvPr id="6" name="TextBox 5"/>
-          <p:cNvSpPr txBox="1"/>
-          <p:nvPr/>
-        </p:nvSpPr>
-        <p:spPr>
-          <a:xfrm>
-            <a:off x="548640" y="1600200"/>
-            <a:ext cx="11064240" cy="4206240"/>
-          </a:xfrm>
-          <a:prstGeom prst="rect">
-            <a:avLst/>
-          </a:prstGeom>
-          <a:noFill/>
-        </p:spPr>
-        <p:txBody>
-          <a:bodyPr wrap="square" lIns="0" rIns="0" tIns="0" bIns="0">
-            <a:spAutoFit/>
-          </a:bodyPr>
-          <a:lstStyle/>
-          <a:p>
-            <a:pPr>
-              <a:lnSpc>
-                <a:spcPct val="105000"/>
-              </a:lnSpc>
-              <a:spcAft>
-                <a:spcPts val="1100"/>
-              </a:spcAft>
-            </a:pPr>
-            <a:r>
-              <a:rPr sz="1600" b="1">
-                <a:solidFill>
-                  <a:srgbClr val="2F7D3A"/>
-                </a:solidFill>
-                <a:latin typeface="Calibri"/>
-              </a:rPr>
-              <a:t>▸  </a:t>
-            </a:r>
-            <a:r>
-              <a:rPr sz="1600" b="1">
-                <a:solidFill>
-                  <a:srgbClr val="111820"/>
-                </a:solidFill>
-                <a:latin typeface="Calibri"/>
-              </a:rPr>
-              <a:t>Proposed 346 GW vs committed ~13 GW vs built ~70 GW</a:t>
-            </a:r>
-            <a:r>
-              <a:rPr sz="1600" b="0">
-                <a:solidFill>
-                  <a:srgbClr val="37424F"/>
-                </a:solidFill>
-                <a:latin typeface="Calibri"/>
-              </a:rPr>
-              <a:t> (2026) — a ~19:1 funnel.</a:t>
-            </a:r>
-          </a:p>
-          <a:p>
-            <a:pPr>
-              <a:lnSpc>
-                <a:spcPct val="105000"/>
-              </a:lnSpc>
-              <a:spcAft>
-                <a:spcPts val="1100"/>
-              </a:spcAft>
-            </a:pPr>
-            <a:r>
-              <a:rPr sz="1600" b="1">
-                <a:solidFill>
-                  <a:srgbClr val="2F7D3A"/>
-                </a:solidFill>
-                <a:latin typeface="Calibri"/>
-              </a:rPr>
-              <a:t>▸  </a:t>
-            </a:r>
-            <a:r>
-              <a:rPr sz="1600" b="0">
-                <a:solidFill>
-                  <a:srgbClr val="37424F"/>
-                </a:solidFill>
-                <a:latin typeface="Calibri"/>
-              </a:rPr>
-              <a:t>Back-test: of </a:t>
-            </a:r>
-            <a:r>
-              <a:rPr sz="1600" b="1">
-                <a:solidFill>
-                  <a:srgbClr val="111820"/>
-                </a:solidFill>
-                <a:latin typeface="Calibri"/>
-              </a:rPr>
-              <a:t>105.7 GW proposed in 2022, only ~9.6 GW built, 52.6 GW dropped</a:t>
-            </a:r>
-            <a:r>
-              <a:rPr sz="1600" b="0">
-                <a:solidFill>
-                  <a:srgbClr val="37424F"/>
-                </a:solidFill>
-                <a:latin typeface="Calibri"/>
-              </a:rPr>
-              <a:t> by 2026 (~9% conversion).</a:t>
-            </a:r>
-          </a:p>
-          <a:p>
-            <a:pPr>
-              <a:lnSpc>
-                <a:spcPct val="105000"/>
-              </a:lnSpc>
-              <a:spcAft>
-                <a:spcPts val="1100"/>
-              </a:spcAft>
-            </a:pPr>
-            <a:r>
-              <a:rPr sz="1600" b="1">
-                <a:solidFill>
-                  <a:srgbClr val="2F7D3A"/>
-                </a:solidFill>
-                <a:latin typeface="Calibri"/>
-              </a:rPr>
-              <a:t>▸  </a:t>
-            </a:r>
-            <a:r>
-              <a:rPr sz="1600" b="0">
-                <a:solidFill>
-                  <a:srgbClr val="37424F"/>
-                </a:solidFill>
-                <a:latin typeface="Calibri"/>
-              </a:rPr>
-              <a:t>Even “</a:t>
-            </a:r>
-            <a:r>
-              <a:rPr sz="1600" b="1">
-                <a:solidFill>
-                  <a:srgbClr val="111820"/>
-                </a:solidFill>
-                <a:latin typeface="Calibri"/>
-              </a:rPr>
-              <a:t>Committed</a:t>
-            </a:r>
-            <a:r>
-              <a:rPr sz="1600" b="0">
-                <a:solidFill>
-                  <a:srgbClr val="37424F"/>
-                </a:solidFill>
-                <a:latin typeface="Calibri"/>
-              </a:rPr>
-              <a:t>” isn't concrete: Snowy 2.0 has been committed 4+ years and still isn't built.</a:t>
-            </a:r>
-          </a:p>
-          <a:p>
-            <a:pPr>
-              <a:lnSpc>
-                <a:spcPct val="105000"/>
-              </a:lnSpc>
-              <a:spcAft>
-                <a:spcPts val="1100"/>
-              </a:spcAft>
-            </a:pPr>
-            <a:r>
-              <a:rPr sz="1600" b="1">
-                <a:solidFill>
-                  <a:srgbClr val="2F7D3A"/>
-                </a:solidFill>
-                <a:latin typeface="Calibri"/>
-              </a:rPr>
-              <a:t>▸  </a:t>
-            </a:r>
-            <a:r>
-              <a:rPr sz="1600" b="1">
-                <a:solidFill>
-                  <a:srgbClr val="111820"/>
-                </a:solidFill>
-                <a:latin typeface="Calibri"/>
-              </a:rPr>
-              <a:t>CIS: ~32 GW contracted, just 0.29 GW operating</a:t>
-            </a:r>
-            <a:r>
-              <a:rPr sz="1600" b="0">
-                <a:solidFill>
-                  <a:srgbClr val="37424F"/>
-                </a:solidFill>
-                <a:latin typeface="Calibri"/>
-              </a:rPr>
-              <a:t> — a floor price is not a built asset.</a:t>
-            </a:r>
-          </a:p>
-          <a:p>
-            <a:pPr>
-              <a:lnSpc>
-                <a:spcPct val="105000"/>
-              </a:lnSpc>
-              <a:spcAft>
-                <a:spcPts val="1100"/>
-              </a:spcAft>
-            </a:pPr>
-            <a:r>
-              <a:rPr sz="1600" b="1">
-                <a:solidFill>
-                  <a:srgbClr val="2F7D3A"/>
-                </a:solidFill>
-                <a:latin typeface="Calibri"/>
-              </a:rPr>
-              <a:t>▸  </a:t>
-            </a:r>
-            <a:r>
-              <a:rPr sz="1600" b="0">
-                <a:solidFill>
-                  <a:srgbClr val="37424F"/>
-                </a:solidFill>
-                <a:latin typeface="Calibri"/>
-              </a:rPr>
-              <a:t>Only </a:t>
-            </a:r>
-            <a:r>
-              <a:rPr sz="1600" b="1">
-                <a:solidFill>
-                  <a:srgbClr val="111820"/>
-                </a:solidFill>
-                <a:latin typeface="Calibri"/>
-              </a:rPr>
-              <a:t>3 major transmission lines</a:t>
-            </a:r>
-            <a:r>
-              <a:rPr sz="1600" b="0">
-                <a:solidFill>
-                  <a:srgbClr val="37424F"/>
-                </a:solidFill>
-                <a:latin typeface="Calibri"/>
-              </a:rPr>
-              <a:t> are in construction; ~30% of projects draw a full EPBC assessment.</a:t>
-            </a:r>
-          </a:p>
-          <a:p>
-            <a:pPr>
-              <a:lnSpc>
-                <a:spcPct val="105000"/>
-              </a:lnSpc>
-              <a:spcAft>
-                <a:spcPts val="1100"/>
-              </a:spcAft>
-            </a:pPr>
-            <a:r>
-              <a:rPr sz="1600" b="1">
-                <a:solidFill>
-                  <a:srgbClr val="2F7D3A"/>
-                </a:solidFill>
-                <a:latin typeface="Calibri"/>
-              </a:rPr>
-              <a:t>▸  </a:t>
-            </a:r>
-            <a:r>
-              <a:rPr sz="1600" b="0">
-                <a:solidFill>
-                  <a:srgbClr val="37424F"/>
-                </a:solidFill>
-                <a:latin typeface="Calibri"/>
-              </a:rPr>
-              <a:t>Commissioning takes real time: </a:t>
-            </a:r>
-            <a:r>
-              <a:rPr sz="1600" b="1">
-                <a:solidFill>
-                  <a:srgbClr val="111820"/>
-                </a:solidFill>
-                <a:latin typeface="Calibri"/>
-              </a:rPr>
-              <a:t>wind ~10 months, batteries ~7</a:t>
-            </a:r>
-            <a:r>
-              <a:rPr sz="1600" b="0">
-                <a:solidFill>
-                  <a:srgbClr val="37424F"/>
-                </a:solidFill>
-                <a:latin typeface="Calibri"/>
-              </a:rPr>
-              <a:t> from first energisation.</a:t>
-            </a:r>
-          </a:p>
-        </p:txBody>
-      </p:sp>
+              <a:t>The long view — the mirage growing</a:t>
+            </a:r>
+          </a:p>
+        </p:txBody>
+      </p:sp>
+      <p:graphicFrame>
+        <p:nvGraphicFramePr>
+          <p:cNvPr id="6" name="Chart 5"/>
+          <p:cNvGraphicFramePr>
+            <a:graphicFrameLocks noGrp="1"/>
+          </p:cNvGraphicFramePr>
+          <p:nvPr/>
+        </p:nvGraphicFramePr>
+        <p:xfrm>
+          <a:off x="548640" y="1554480"/>
+          <a:ext cx="11064240" cy="4114800"/>
+        </p:xfrm>
+        <a:graphic>
+          <a:graphicData uri="http://schemas.openxmlformats.org/drawingml/2006/chart">
+            <c:chart xmlns:c="http://schemas.openxmlformats.org/drawingml/2006/chart" r:id="rId2"/>
+          </a:graphicData>
+        </a:graphic>
+      </p:graphicFrame>
       <p:sp>
         <p:nvSpPr>
           <p:cNvPr id="7" name="Rectangle 6"/>
@@ -17369,8 +18134,8 @@
         </p:nvSpPr>
         <p:spPr>
           <a:xfrm>
-            <a:off x="548640" y="5669280"/>
-            <a:ext cx="11064240" cy="685800"/>
+            <a:off x="548640" y="5806440"/>
+            <a:ext cx="11064240" cy="566928"/>
           </a:xfrm>
           <a:prstGeom prst="rect">
             <a:avLst/>
@@ -17380,7 +18145,7 @@
           </a:solidFill>
           <a:ln w="9525">
             <a:solidFill>
-              <a:srgbClr val="D8DEE6"/>
+              <a:srgbClr val="2F7D3A"/>
             </a:solidFill>
           </a:ln>
           <a:effectLst/>
@@ -17415,7 +18180,7 @@
         </p:nvSpPr>
         <p:spPr>
           <a:xfrm>
-            <a:off x="731520" y="5779008"/>
+            <a:off x="731520" y="5852160"/>
             <a:ext cx="10698480" cy="457200"/>
           </a:xfrm>
           <a:prstGeom prst="rect">
@@ -17441,13 +18206,22 @@
               </a:spcAft>
             </a:pPr>
             <a:r>
-              <a:rPr sz="1350" b="0" i="1">
+              <a:rPr sz="1200" b="1" i="0">
+                <a:solidFill>
+                  <a:srgbClr val="2F7D3A"/>
+                </a:solidFill>
+                <a:latin typeface="Consolas"/>
+              </a:rPr>
+              <a:t>Takeaway  </a:t>
+            </a:r>
+            <a:r>
+              <a:rPr sz="1400" b="0" i="0">
                 <a:solidFill>
                   <a:srgbClr val="37424F"/>
                 </a:solidFill>
                 <a:latin typeface="Calibri"/>
               </a:rPr>
-              <a:t>The back-test is the crown jewel: “Committed” is a probability, not a promise — and the data can price it.</a:t>
+              <a:t>Proposed capacity multiplied ~7× to 346 GW while committed and built crawled — the gap is the mirage.</a:t>
             </a:r>
           </a:p>
         </p:txBody>
@@ -17688,30 +18462,313 @@
                 </a:solidFill>
                 <a:latin typeface="Calibri"/>
               </a:rPr>
-              <a:t>Provocations — take a position</a:t>
-            </a:r>
-          </a:p>
-        </p:txBody>
-      </p:sp>
-      <p:sp>
-        <p:nvSpPr>
-          <p:cNvPr id="6" name="Rectangle 5"/>
+              <a:t>The data on the table</a:t>
+            </a:r>
+          </a:p>
+        </p:txBody>
+      </p:sp>
+      <p:sp>
+        <p:nvSpPr>
+          <p:cNvPr id="6" name="TextBox 5"/>
+          <p:cNvSpPr txBox="1"/>
+          <p:nvPr/>
+        </p:nvSpPr>
+        <p:spPr>
+          <a:xfrm>
+            <a:off x="548640" y="1600200"/>
+            <a:ext cx="11064240" cy="4206240"/>
+          </a:xfrm>
+          <a:prstGeom prst="rect">
+            <a:avLst/>
+          </a:prstGeom>
+          <a:noFill/>
+        </p:spPr>
+        <p:txBody>
+          <a:bodyPr wrap="square" lIns="0" rIns="0" tIns="0" bIns="0">
+            <a:spAutoFit/>
+          </a:bodyPr>
+          <a:lstStyle/>
+          <a:p>
+            <a:pPr>
+              <a:lnSpc>
+                <a:spcPct val="105000"/>
+              </a:lnSpc>
+              <a:spcAft>
+                <a:spcPts val="1100"/>
+              </a:spcAft>
+            </a:pPr>
+            <a:r>
+              <a:rPr sz="1600" b="1">
+                <a:solidFill>
+                  <a:srgbClr val="2F7D3A"/>
+                </a:solidFill>
+                <a:latin typeface="Calibri"/>
+              </a:rPr>
+              <a:t>▸  </a:t>
+            </a:r>
+            <a:r>
+              <a:rPr sz="1600" b="1">
+                <a:solidFill>
+                  <a:srgbClr val="111820"/>
+                </a:solidFill>
+                <a:latin typeface="Calibri"/>
+              </a:rPr>
+              <a:t>Proposed 346 GW vs committed ~13 GW vs built ~70 GW</a:t>
+            </a:r>
+            <a:r>
+              <a:rPr sz="1600" b="0">
+                <a:solidFill>
+                  <a:srgbClr val="37424F"/>
+                </a:solidFill>
+                <a:latin typeface="Calibri"/>
+              </a:rPr>
+              <a:t> (2026) — a ~19:1 funnel.</a:t>
+            </a:r>
+          </a:p>
+          <a:p>
+            <a:pPr>
+              <a:lnSpc>
+                <a:spcPct val="105000"/>
+              </a:lnSpc>
+              <a:spcAft>
+                <a:spcPts val="1100"/>
+              </a:spcAft>
+            </a:pPr>
+            <a:r>
+              <a:rPr sz="1600" b="1">
+                <a:solidFill>
+                  <a:srgbClr val="2F7D3A"/>
+                </a:solidFill>
+                <a:latin typeface="Calibri"/>
+              </a:rPr>
+              <a:t>▸  </a:t>
+            </a:r>
+            <a:r>
+              <a:rPr sz="1600" b="0">
+                <a:solidFill>
+                  <a:srgbClr val="37424F"/>
+                </a:solidFill>
+                <a:latin typeface="Calibri"/>
+              </a:rPr>
+              <a:t>Back-test: of </a:t>
+            </a:r>
+            <a:r>
+              <a:rPr sz="1600" b="1">
+                <a:solidFill>
+                  <a:srgbClr val="111820"/>
+                </a:solidFill>
+                <a:latin typeface="Calibri"/>
+              </a:rPr>
+              <a:t>105.7 GW proposed in 2022, only ~9.6 GW built, 52.6 GW dropped</a:t>
+            </a:r>
+            <a:r>
+              <a:rPr sz="1600" b="0">
+                <a:solidFill>
+                  <a:srgbClr val="37424F"/>
+                </a:solidFill>
+                <a:latin typeface="Calibri"/>
+              </a:rPr>
+              <a:t> by 2026 (~9% conversion).</a:t>
+            </a:r>
+          </a:p>
+          <a:p>
+            <a:pPr>
+              <a:lnSpc>
+                <a:spcPct val="105000"/>
+              </a:lnSpc>
+              <a:spcAft>
+                <a:spcPts val="1100"/>
+              </a:spcAft>
+            </a:pPr>
+            <a:r>
+              <a:rPr sz="1600" b="1">
+                <a:solidFill>
+                  <a:srgbClr val="2F7D3A"/>
+                </a:solidFill>
+                <a:latin typeface="Calibri"/>
+              </a:rPr>
+              <a:t>▸  </a:t>
+            </a:r>
+            <a:r>
+              <a:rPr sz="1600" b="0">
+                <a:solidFill>
+                  <a:srgbClr val="37424F"/>
+                </a:solidFill>
+                <a:latin typeface="Calibri"/>
+              </a:rPr>
+              <a:t>Even “</a:t>
+            </a:r>
+            <a:r>
+              <a:rPr sz="1600" b="1">
+                <a:solidFill>
+                  <a:srgbClr val="111820"/>
+                </a:solidFill>
+                <a:latin typeface="Calibri"/>
+              </a:rPr>
+              <a:t>Committed</a:t>
+            </a:r>
+            <a:r>
+              <a:rPr sz="1600" b="0">
+                <a:solidFill>
+                  <a:srgbClr val="37424F"/>
+                </a:solidFill>
+                <a:latin typeface="Calibri"/>
+              </a:rPr>
+              <a:t>” isn't concrete: Snowy 2.0 has been committed 4+ years and still isn't built.</a:t>
+            </a:r>
+          </a:p>
+          <a:p>
+            <a:pPr>
+              <a:lnSpc>
+                <a:spcPct val="105000"/>
+              </a:lnSpc>
+              <a:spcAft>
+                <a:spcPts val="1100"/>
+              </a:spcAft>
+            </a:pPr>
+            <a:r>
+              <a:rPr sz="1600" b="1">
+                <a:solidFill>
+                  <a:srgbClr val="2F7D3A"/>
+                </a:solidFill>
+                <a:latin typeface="Calibri"/>
+              </a:rPr>
+              <a:t>▸  </a:t>
+            </a:r>
+            <a:r>
+              <a:rPr sz="1600" b="1">
+                <a:solidFill>
+                  <a:srgbClr val="111820"/>
+                </a:solidFill>
+                <a:latin typeface="Calibri"/>
+              </a:rPr>
+              <a:t>CIS: ~32 GW contracted, just 0.29 GW operating</a:t>
+            </a:r>
+            <a:r>
+              <a:rPr sz="1600" b="0">
+                <a:solidFill>
+                  <a:srgbClr val="37424F"/>
+                </a:solidFill>
+                <a:latin typeface="Calibri"/>
+              </a:rPr>
+              <a:t> — a floor price is not a built asset.</a:t>
+            </a:r>
+          </a:p>
+          <a:p>
+            <a:pPr>
+              <a:lnSpc>
+                <a:spcPct val="105000"/>
+              </a:lnSpc>
+              <a:spcAft>
+                <a:spcPts val="1100"/>
+              </a:spcAft>
+            </a:pPr>
+            <a:r>
+              <a:rPr sz="1600" b="1">
+                <a:solidFill>
+                  <a:srgbClr val="2F7D3A"/>
+                </a:solidFill>
+                <a:latin typeface="Calibri"/>
+              </a:rPr>
+              <a:t>▸  </a:t>
+            </a:r>
+            <a:r>
+              <a:rPr sz="1600" b="0">
+                <a:solidFill>
+                  <a:srgbClr val="37424F"/>
+                </a:solidFill>
+                <a:latin typeface="Calibri"/>
+              </a:rPr>
+              <a:t>Only </a:t>
+            </a:r>
+            <a:r>
+              <a:rPr sz="1600" b="1">
+                <a:solidFill>
+                  <a:srgbClr val="111820"/>
+                </a:solidFill>
+                <a:latin typeface="Calibri"/>
+              </a:rPr>
+              <a:t>3 major transmission lines</a:t>
+            </a:r>
+            <a:r>
+              <a:rPr sz="1600" b="0">
+                <a:solidFill>
+                  <a:srgbClr val="37424F"/>
+                </a:solidFill>
+                <a:latin typeface="Calibri"/>
+              </a:rPr>
+              <a:t> are in construction; ~30% of projects draw a full EPBC assessment.</a:t>
+            </a:r>
+          </a:p>
+          <a:p>
+            <a:pPr>
+              <a:lnSpc>
+                <a:spcPct val="105000"/>
+              </a:lnSpc>
+              <a:spcAft>
+                <a:spcPts val="1100"/>
+              </a:spcAft>
+            </a:pPr>
+            <a:r>
+              <a:rPr sz="1600" b="1">
+                <a:solidFill>
+                  <a:srgbClr val="2F7D3A"/>
+                </a:solidFill>
+                <a:latin typeface="Calibri"/>
+              </a:rPr>
+              <a:t>▸  </a:t>
+            </a:r>
+            <a:r>
+              <a:rPr sz="1600" b="0">
+                <a:solidFill>
+                  <a:srgbClr val="37424F"/>
+                </a:solidFill>
+                <a:latin typeface="Calibri"/>
+              </a:rPr>
+              <a:t>Commissioning takes real time: </a:t>
+            </a:r>
+            <a:r>
+              <a:rPr sz="1600" b="1">
+                <a:solidFill>
+                  <a:srgbClr val="111820"/>
+                </a:solidFill>
+                <a:latin typeface="Calibri"/>
+              </a:rPr>
+              <a:t>wind ~10 months, batteries ~7</a:t>
+            </a:r>
+            <a:r>
+              <a:rPr sz="1600" b="0">
+                <a:solidFill>
+                  <a:srgbClr val="37424F"/>
+                </a:solidFill>
+                <a:latin typeface="Calibri"/>
+              </a:rPr>
+              <a:t> from first energisation.</a:t>
+            </a:r>
+          </a:p>
+        </p:txBody>
+      </p:sp>
+      <p:sp>
+        <p:nvSpPr>
+          <p:cNvPr id="7" name="Rectangle 6"/>
           <p:cNvSpPr/>
           <p:nvPr/>
         </p:nvSpPr>
         <p:spPr>
           <a:xfrm>
-            <a:off x="548640" y="1600200"/>
-            <a:ext cx="457200" cy="457200"/>
+            <a:off x="548640" y="5669280"/>
+            <a:ext cx="11064240" cy="685800"/>
           </a:xfrm>
           <a:prstGeom prst="rect">
             <a:avLst/>
           </a:prstGeom>
           <a:solidFill>
-            <a:srgbClr val="2F7D3A"/>
+            <a:srgbClr val="F4F6F9"/>
           </a:solidFill>
-          <a:ln>
-            <a:noFill/>
+          <a:ln w="9525">
+            <a:solidFill>
+              <a:srgbClr val="D8DEE6"/>
+            </a:solidFill>
           </a:ln>
           <a:effectLst/>
         </p:spPr>
@@ -17739,59 +18796,14 @@
       </p:sp>
       <p:sp>
         <p:nvSpPr>
-          <p:cNvPr id="7" name="TextBox 6"/>
-          <p:cNvSpPr txBox="1"/>
-          <p:nvPr/>
-        </p:nvSpPr>
-        <p:spPr>
-          <a:xfrm>
-            <a:off x="548640" y="1600200"/>
-            <a:ext cx="457200" cy="457200"/>
-          </a:xfrm>
-          <a:prstGeom prst="rect">
-            <a:avLst/>
-          </a:prstGeom>
-          <a:noFill/>
-        </p:spPr>
-        <p:txBody>
-          <a:bodyPr wrap="square" anchor="ctr" lIns="0" rIns="0" tIns="0" bIns="0">
-            <a:spAutoFit/>
-          </a:bodyPr>
-          <a:lstStyle/>
-          <a:p>
-            <a:pPr algn="ctr">
-              <a:lnSpc>
-                <a:spcPct val="106000"/>
-              </a:lnSpc>
-              <a:spcBef>
-                <a:spcPts val="0"/>
-              </a:spcBef>
-              <a:spcAft>
-                <a:spcPts val="600"/>
-              </a:spcAft>
-            </a:pPr>
-            <a:r>
-              <a:rPr sz="1800" b="1" i="0">
-                <a:solidFill>
-                  <a:srgbClr val="FFFFFF"/>
-                </a:solidFill>
-                <a:latin typeface="Calibri"/>
-              </a:rPr>
-              <a:t>A</a:t>
-            </a:r>
-          </a:p>
-        </p:txBody>
-      </p:sp>
-      <p:sp>
-        <p:nvSpPr>
           <p:cNvPr id="8" name="TextBox 7"/>
           <p:cNvSpPr txBox="1"/>
           <p:nvPr/>
         </p:nvSpPr>
         <p:spPr>
           <a:xfrm>
-            <a:off x="1188720" y="1618488"/>
-            <a:ext cx="10332720" cy="731520"/>
+            <a:off x="731520" y="5779008"/>
+            <a:ext cx="10698480" cy="457200"/>
           </a:xfrm>
           <a:prstGeom prst="rect">
             <a:avLst/>
@@ -17816,558 +18828,20 @@
               </a:spcAft>
             </a:pPr>
             <a:r>
-              <a:rPr sz="1600" b="0" i="0">
+              <a:rPr sz="1350" b="0" i="1">
                 <a:solidFill>
                   <a:srgbClr val="37424F"/>
                 </a:solidFill>
                 <a:latin typeface="Calibri"/>
               </a:rPr>
-              <a:t>Which gate kills the most megawatts — connection, transmission, offtake, or planning?</a:t>
-            </a:r>
-          </a:p>
-        </p:txBody>
-      </p:sp>
-      <p:sp>
-        <p:nvSpPr>
-          <p:cNvPr id="9" name="Rectangle 8"/>
-          <p:cNvSpPr/>
-          <p:nvPr/>
-        </p:nvSpPr>
-        <p:spPr>
-          <a:xfrm>
-            <a:off x="548640" y="2441448"/>
-            <a:ext cx="457200" cy="457200"/>
-          </a:xfrm>
-          <a:prstGeom prst="rect">
-            <a:avLst/>
-          </a:prstGeom>
-          <a:solidFill>
-            <a:srgbClr val="2F7D3A"/>
-          </a:solidFill>
-          <a:ln>
-            <a:noFill/>
-          </a:ln>
-          <a:effectLst/>
-        </p:spPr>
-        <p:style>
-          <a:lnRef idx="1">
-            <a:schemeClr val="accent1"/>
-          </a:lnRef>
-          <a:fillRef idx="3">
-            <a:schemeClr val="accent1"/>
-          </a:fillRef>
-          <a:effectRef idx="2">
-            <a:schemeClr val="accent1"/>
-          </a:effectRef>
-          <a:fontRef idx="minor">
-            <a:schemeClr val="lt1"/>
-          </a:fontRef>
-        </p:style>
-        <p:txBody>
-          <a:bodyPr rtlCol="0" anchor="ctr"/>
-          <a:lstStyle/>
-          <a:p>
-            <a:pPr algn="ctr"/>
-          </a:p>
-        </p:txBody>
-      </p:sp>
-      <p:sp>
-        <p:nvSpPr>
-          <p:cNvPr id="10" name="TextBox 9"/>
-          <p:cNvSpPr txBox="1"/>
-          <p:nvPr/>
-        </p:nvSpPr>
-        <p:spPr>
-          <a:xfrm>
-            <a:off x="548640" y="2441448"/>
-            <a:ext cx="457200" cy="457200"/>
-          </a:xfrm>
-          <a:prstGeom prst="rect">
-            <a:avLst/>
-          </a:prstGeom>
-          <a:noFill/>
-        </p:spPr>
-        <p:txBody>
-          <a:bodyPr wrap="square" anchor="ctr" lIns="0" rIns="0" tIns="0" bIns="0">
-            <a:spAutoFit/>
-          </a:bodyPr>
-          <a:lstStyle/>
-          <a:p>
-            <a:pPr algn="ctr">
-              <a:lnSpc>
-                <a:spcPct val="106000"/>
-              </a:lnSpc>
-              <a:spcBef>
-                <a:spcPts val="0"/>
-              </a:spcBef>
-              <a:spcAft>
-                <a:spcPts val="600"/>
-              </a:spcAft>
-            </a:pPr>
-            <a:r>
-              <a:rPr sz="1800" b="1" i="0">
-                <a:solidFill>
-                  <a:srgbClr val="FFFFFF"/>
-                </a:solidFill>
-                <a:latin typeface="Calibri"/>
-              </a:rPr>
-              <a:t>B</a:t>
-            </a:r>
-          </a:p>
-        </p:txBody>
-      </p:sp>
-      <p:sp>
-        <p:nvSpPr>
-          <p:cNvPr id="11" name="TextBox 10"/>
-          <p:cNvSpPr txBox="1"/>
-          <p:nvPr/>
-        </p:nvSpPr>
-        <p:spPr>
-          <a:xfrm>
-            <a:off x="1188720" y="2459736"/>
-            <a:ext cx="10332720" cy="731520"/>
-          </a:xfrm>
-          <a:prstGeom prst="rect">
-            <a:avLst/>
-          </a:prstGeom>
-          <a:noFill/>
-        </p:spPr>
-        <p:txBody>
-          <a:bodyPr wrap="square" anchor="ctr" lIns="0" rIns="0" tIns="0" bIns="0">
-            <a:spAutoFit/>
-          </a:bodyPr>
-          <a:lstStyle/>
-          <a:p>
-            <a:pPr algn="l">
-              <a:lnSpc>
-                <a:spcPct val="106000"/>
-              </a:lnSpc>
-              <a:spcBef>
-                <a:spcPts val="0"/>
-              </a:spcBef>
-              <a:spcAft>
-                <a:spcPts val="600"/>
-              </a:spcAft>
-            </a:pPr>
-            <a:r>
-              <a:rPr sz="1600" b="0" i="0">
-                <a:solidFill>
-                  <a:srgbClr val="37424F"/>
-                </a:solidFill>
-                <a:latin typeface="Calibri"/>
-              </a:rPr>
-              <a:t>What early signal best separates the real projects from the mirage?</a:t>
-            </a:r>
-          </a:p>
-        </p:txBody>
-      </p:sp>
-      <p:sp>
-        <p:nvSpPr>
-          <p:cNvPr id="12" name="Rectangle 11"/>
-          <p:cNvSpPr/>
-          <p:nvPr/>
-        </p:nvSpPr>
-        <p:spPr>
-          <a:xfrm>
-            <a:off x="548640" y="3282696"/>
-            <a:ext cx="457200" cy="457200"/>
-          </a:xfrm>
-          <a:prstGeom prst="rect">
-            <a:avLst/>
-          </a:prstGeom>
-          <a:solidFill>
-            <a:srgbClr val="2F7D3A"/>
-          </a:solidFill>
-          <a:ln>
-            <a:noFill/>
-          </a:ln>
-          <a:effectLst/>
-        </p:spPr>
-        <p:style>
-          <a:lnRef idx="1">
-            <a:schemeClr val="accent1"/>
-          </a:lnRef>
-          <a:fillRef idx="3">
-            <a:schemeClr val="accent1"/>
-          </a:fillRef>
-          <a:effectRef idx="2">
-            <a:schemeClr val="accent1"/>
-          </a:effectRef>
-          <a:fontRef idx="minor">
-            <a:schemeClr val="lt1"/>
-          </a:fontRef>
-        </p:style>
-        <p:txBody>
-          <a:bodyPr rtlCol="0" anchor="ctr"/>
-          <a:lstStyle/>
-          <a:p>
-            <a:pPr algn="ctr"/>
-          </a:p>
-        </p:txBody>
-      </p:sp>
-      <p:sp>
-        <p:nvSpPr>
-          <p:cNvPr id="13" name="TextBox 12"/>
-          <p:cNvSpPr txBox="1"/>
-          <p:nvPr/>
-        </p:nvSpPr>
-        <p:spPr>
-          <a:xfrm>
-            <a:off x="548640" y="3282696"/>
-            <a:ext cx="457200" cy="457200"/>
-          </a:xfrm>
-          <a:prstGeom prst="rect">
-            <a:avLst/>
-          </a:prstGeom>
-          <a:noFill/>
-        </p:spPr>
-        <p:txBody>
-          <a:bodyPr wrap="square" anchor="ctr" lIns="0" rIns="0" tIns="0" bIns="0">
-            <a:spAutoFit/>
-          </a:bodyPr>
-          <a:lstStyle/>
-          <a:p>
-            <a:pPr algn="ctr">
-              <a:lnSpc>
-                <a:spcPct val="106000"/>
-              </a:lnSpc>
-              <a:spcBef>
-                <a:spcPts val="0"/>
-              </a:spcBef>
-              <a:spcAft>
-                <a:spcPts val="600"/>
-              </a:spcAft>
-            </a:pPr>
-            <a:r>
-              <a:rPr sz="1800" b="1" i="0">
-                <a:solidFill>
-                  <a:srgbClr val="FFFFFF"/>
-                </a:solidFill>
-                <a:latin typeface="Calibri"/>
-              </a:rPr>
-              <a:t>C</a:t>
-            </a:r>
-          </a:p>
-        </p:txBody>
-      </p:sp>
-      <p:sp>
-        <p:nvSpPr>
-          <p:cNvPr id="14" name="TextBox 13"/>
-          <p:cNvSpPr txBox="1"/>
-          <p:nvPr/>
-        </p:nvSpPr>
-        <p:spPr>
-          <a:xfrm>
-            <a:off x="1188720" y="3300984"/>
-            <a:ext cx="10332720" cy="731520"/>
-          </a:xfrm>
-          <a:prstGeom prst="rect">
-            <a:avLst/>
-          </a:prstGeom>
-          <a:noFill/>
-        </p:spPr>
-        <p:txBody>
-          <a:bodyPr wrap="square" anchor="ctr" lIns="0" rIns="0" tIns="0" bIns="0">
-            <a:spAutoFit/>
-          </a:bodyPr>
-          <a:lstStyle/>
-          <a:p>
-            <a:pPr algn="l">
-              <a:lnSpc>
-                <a:spcPct val="106000"/>
-              </a:lnSpc>
-              <a:spcBef>
-                <a:spcPts val="0"/>
-              </a:spcBef>
-              <a:spcAft>
-                <a:spcPts val="600"/>
-              </a:spcAft>
-            </a:pPr>
-            <a:r>
-              <a:rPr sz="1600" b="0" i="0">
-                <a:solidFill>
-                  <a:srgbClr val="37424F"/>
-                </a:solidFill>
-                <a:latin typeface="Calibri"/>
-              </a:rPr>
-              <a:t>Does our screening assume anything remotely as brutal as ~9% proposed-to-built?</a:t>
-            </a:r>
-          </a:p>
-        </p:txBody>
-      </p:sp>
-      <p:sp>
-        <p:nvSpPr>
-          <p:cNvPr id="15" name="Rectangle 14"/>
-          <p:cNvSpPr/>
-          <p:nvPr/>
-        </p:nvSpPr>
-        <p:spPr>
-          <a:xfrm>
-            <a:off x="548640" y="4123944"/>
-            <a:ext cx="457200" cy="457200"/>
-          </a:xfrm>
-          <a:prstGeom prst="rect">
-            <a:avLst/>
-          </a:prstGeom>
-          <a:solidFill>
-            <a:srgbClr val="2F7D3A"/>
-          </a:solidFill>
-          <a:ln>
-            <a:noFill/>
-          </a:ln>
-          <a:effectLst/>
-        </p:spPr>
-        <p:style>
-          <a:lnRef idx="1">
-            <a:schemeClr val="accent1"/>
-          </a:lnRef>
-          <a:fillRef idx="3">
-            <a:schemeClr val="accent1"/>
-          </a:fillRef>
-          <a:effectRef idx="2">
-            <a:schemeClr val="accent1"/>
-          </a:effectRef>
-          <a:fontRef idx="minor">
-            <a:schemeClr val="lt1"/>
-          </a:fontRef>
-        </p:style>
-        <p:txBody>
-          <a:bodyPr rtlCol="0" anchor="ctr"/>
-          <a:lstStyle/>
-          <a:p>
-            <a:pPr algn="ctr"/>
-          </a:p>
-        </p:txBody>
-      </p:sp>
-      <p:sp>
-        <p:nvSpPr>
-          <p:cNvPr id="16" name="TextBox 15"/>
-          <p:cNvSpPr txBox="1"/>
-          <p:nvPr/>
-        </p:nvSpPr>
-        <p:spPr>
-          <a:xfrm>
-            <a:off x="548640" y="4123944"/>
-            <a:ext cx="457200" cy="457200"/>
-          </a:xfrm>
-          <a:prstGeom prst="rect">
-            <a:avLst/>
-          </a:prstGeom>
-          <a:noFill/>
-        </p:spPr>
-        <p:txBody>
-          <a:bodyPr wrap="square" anchor="ctr" lIns="0" rIns="0" tIns="0" bIns="0">
-            <a:spAutoFit/>
-          </a:bodyPr>
-          <a:lstStyle/>
-          <a:p>
-            <a:pPr algn="ctr">
-              <a:lnSpc>
-                <a:spcPct val="106000"/>
-              </a:lnSpc>
-              <a:spcBef>
-                <a:spcPts val="0"/>
-              </a:spcBef>
-              <a:spcAft>
-                <a:spcPts val="600"/>
-              </a:spcAft>
-            </a:pPr>
-            <a:r>
-              <a:rPr sz="1800" b="1" i="0">
-                <a:solidFill>
-                  <a:srgbClr val="FFFFFF"/>
-                </a:solidFill>
-                <a:latin typeface="Calibri"/>
-              </a:rPr>
-              <a:t>D</a:t>
-            </a:r>
-          </a:p>
-        </p:txBody>
-      </p:sp>
-      <p:sp>
-        <p:nvSpPr>
-          <p:cNvPr id="17" name="TextBox 16"/>
-          <p:cNvSpPr txBox="1"/>
-          <p:nvPr/>
-        </p:nvSpPr>
-        <p:spPr>
-          <a:xfrm>
-            <a:off x="1188720" y="4142232"/>
-            <a:ext cx="10332720" cy="731520"/>
-          </a:xfrm>
-          <a:prstGeom prst="rect">
-            <a:avLst/>
-          </a:prstGeom>
-          <a:noFill/>
-        </p:spPr>
-        <p:txBody>
-          <a:bodyPr wrap="square" anchor="ctr" lIns="0" rIns="0" tIns="0" bIns="0">
-            <a:spAutoFit/>
-          </a:bodyPr>
-          <a:lstStyle/>
-          <a:p>
-            <a:pPr algn="l">
-              <a:lnSpc>
-                <a:spcPct val="106000"/>
-              </a:lnSpc>
-              <a:spcBef>
-                <a:spcPts val="0"/>
-              </a:spcBef>
-              <a:spcAft>
-                <a:spcPts val="600"/>
-              </a:spcAft>
-            </a:pPr>
-            <a:r>
-              <a:rPr sz="1600" b="0" i="0">
-                <a:solidFill>
-                  <a:srgbClr val="37424F"/>
-                </a:solidFill>
-                <a:latin typeface="Calibri"/>
-              </a:rPr>
-              <a:t>If you could unlock one transmission line, which frees the most generation?</a:t>
-            </a:r>
-          </a:p>
-        </p:txBody>
-      </p:sp>
-      <p:sp>
-        <p:nvSpPr>
-          <p:cNvPr id="18" name="Rectangle 17"/>
-          <p:cNvSpPr/>
-          <p:nvPr/>
-        </p:nvSpPr>
-        <p:spPr>
-          <a:xfrm>
-            <a:off x="548640" y="5532120"/>
-            <a:ext cx="11064240" cy="777240"/>
-          </a:xfrm>
-          <a:prstGeom prst="rect">
-            <a:avLst/>
-          </a:prstGeom>
-          <a:solidFill>
-            <a:srgbClr val="F4F6F9"/>
-          </a:solidFill>
-          <a:ln w="9525">
-            <a:solidFill>
-              <a:srgbClr val="2F7D3A"/>
-            </a:solidFill>
-          </a:ln>
-          <a:effectLst/>
-        </p:spPr>
-        <p:style>
-          <a:lnRef idx="1">
-            <a:schemeClr val="accent1"/>
-          </a:lnRef>
-          <a:fillRef idx="3">
-            <a:schemeClr val="accent1"/>
-          </a:fillRef>
-          <a:effectRef idx="2">
-            <a:schemeClr val="accent1"/>
-          </a:effectRef>
-          <a:fontRef idx="minor">
-            <a:schemeClr val="lt1"/>
-          </a:fontRef>
-        </p:style>
-        <p:txBody>
-          <a:bodyPr rtlCol="0" anchor="ctr"/>
-          <a:lstStyle/>
-          <a:p>
-            <a:pPr algn="ctr"/>
-          </a:p>
-        </p:txBody>
-      </p:sp>
-      <p:sp>
-        <p:nvSpPr>
-          <p:cNvPr id="19" name="TextBox 18"/>
-          <p:cNvSpPr txBox="1"/>
-          <p:nvPr/>
-        </p:nvSpPr>
-        <p:spPr>
-          <a:xfrm>
-            <a:off x="731520" y="5632704"/>
-            <a:ext cx="10698480" cy="320040"/>
-          </a:xfrm>
-          <a:prstGeom prst="rect">
-            <a:avLst/>
-          </a:prstGeom>
-          <a:noFill/>
-        </p:spPr>
-        <p:txBody>
-          <a:bodyPr wrap="square" anchor="t" lIns="0" rIns="0" tIns="0" bIns="0">
-            <a:spAutoFit/>
-          </a:bodyPr>
-          <a:lstStyle/>
-          <a:p>
-            <a:pPr algn="l">
-              <a:lnSpc>
-                <a:spcPct val="106000"/>
-              </a:lnSpc>
-              <a:spcBef>
-                <a:spcPts val="0"/>
-              </a:spcBef>
-              <a:spcAft>
-                <a:spcPts val="600"/>
-              </a:spcAft>
-            </a:pPr>
-            <a:r>
-              <a:rPr sz="1100" b="1" i="0">
-                <a:solidFill>
-                  <a:srgbClr val="2F7D3A"/>
-                </a:solidFill>
-                <a:latin typeface="Consolas"/>
-              </a:rPr>
-              <a:t>YOUR HYPOTHESIS</a:t>
-            </a:r>
-          </a:p>
-        </p:txBody>
-      </p:sp>
-      <p:sp>
-        <p:nvSpPr>
-          <p:cNvPr id="20" name="TextBox 19"/>
-          <p:cNvSpPr txBox="1"/>
-          <p:nvPr/>
-        </p:nvSpPr>
-        <p:spPr>
-          <a:xfrm>
-            <a:off x="731520" y="5897880"/>
-            <a:ext cx="10698480" cy="365760"/>
-          </a:xfrm>
-          <a:prstGeom prst="rect">
-            <a:avLst/>
-          </a:prstGeom>
-          <a:noFill/>
-        </p:spPr>
-        <p:txBody>
-          <a:bodyPr wrap="square" anchor="t" lIns="0" rIns="0" tIns="0" bIns="0">
-            <a:spAutoFit/>
-          </a:bodyPr>
-          <a:lstStyle/>
-          <a:p>
-            <a:pPr algn="l">
-              <a:lnSpc>
-                <a:spcPct val="106000"/>
-              </a:lnSpc>
-              <a:spcBef>
-                <a:spcPts val="0"/>
-              </a:spcBef>
-              <a:spcAft>
-                <a:spcPts val="600"/>
-              </a:spcAft>
-            </a:pPr>
-            <a:r>
-              <a:rPr sz="1500" b="0" i="1">
-                <a:solidFill>
-                  <a:srgbClr val="111820"/>
-                </a:solidFill>
-                <a:latin typeface="Calibri"/>
-              </a:rPr>
-              <a:t>What's the one signal you'll check before believing a “pipeline” number?</a:t>
-            </a:r>
-          </a:p>
-        </p:txBody>
-      </p:sp>
-      <p:sp>
-        <p:nvSpPr>
-          <p:cNvPr id="21" name="TextBox 20"/>
+              <a:t>The back-test is the crown jewel: “Committed” is a probability, not a promise — and the data can price it.</a:t>
+            </a:r>
+          </a:p>
+        </p:txBody>
+      </p:sp>
+      <p:sp>
+        <p:nvSpPr>
+          <p:cNvPr id="9" name="TextBox 8"/>
           <p:cNvSpPr txBox="1"/>
           <p:nvPr/>
         </p:nvSpPr>
@@ -18487,7 +18961,7 @@
             <a:avLst/>
           </a:prstGeom>
           <a:solidFill>
-            <a:srgbClr val="0D7D74"/>
+            <a:srgbClr val="2F7D3A"/>
           </a:solidFill>
           <a:ln>
             <a:noFill/>
@@ -18524,7 +18998,7 @@
         </p:nvSpPr>
         <p:spPr>
           <a:xfrm>
-            <a:off x="548640" y="457200"/>
+            <a:off x="548640" y="411480"/>
             <a:ext cx="9144000" cy="274320"/>
           </a:xfrm>
           <a:prstGeom prst="rect">
@@ -18552,11 +19026,11 @@
             <a:r>
               <a:rPr sz="1200" b="1" i="0">
                 <a:solidFill>
-                  <a:srgbClr val="0D7D74"/>
+                  <a:srgbClr val="2F7D3A"/>
                 </a:solidFill>
                 <a:latin typeface="Consolas"/>
               </a:rPr>
-              <a:t>REPORT BACK</a:t>
+              <a:t>TOPIC 5 · PIPELINE</a:t>
             </a:r>
           </a:p>
         </p:txBody>
@@ -18569,8 +19043,8 @@
         </p:nvSpPr>
         <p:spPr>
           <a:xfrm>
-            <a:off x="502920" y="777240"/>
-            <a:ext cx="10972800" cy="822960"/>
+            <a:off x="502920" y="713232"/>
+            <a:ext cx="11155680" cy="640080"/>
           </a:xfrm>
           <a:prstGeom prst="rect">
             <a:avLst/>
@@ -18595,13 +19069,13 @@
               </a:spcAft>
             </a:pPr>
             <a:r>
-              <a:rPr sz="3400" b="1" i="0">
+              <a:rPr sz="2800" b="1" i="0">
                 <a:solidFill>
                   <a:srgbClr val="111820"/>
                 </a:solidFill>
                 <a:latin typeface="Calibri"/>
               </a:rPr>
-              <a:t>Three things — not a summary</a:t>
+              <a:t>Provocations — take a position</a:t>
             </a:r>
           </a:p>
         </p:txBody>
@@ -18614,19 +19088,17 @@
         </p:nvSpPr>
         <p:spPr>
           <a:xfrm>
-            <a:off x="548640" y="1828800"/>
-            <a:ext cx="3566160" cy="2011680"/>
+            <a:off x="548640" y="1600200"/>
+            <a:ext cx="457200" cy="457200"/>
           </a:xfrm>
           <a:prstGeom prst="rect">
             <a:avLst/>
           </a:prstGeom>
           <a:solidFill>
-            <a:srgbClr val="F4F6F9"/>
+            <a:srgbClr val="2F7D3A"/>
           </a:solidFill>
-          <a:ln w="9525">
-            <a:solidFill>
-              <a:srgbClr val="4A4BD6"/>
-            </a:solidFill>
+          <a:ln>
+            <a:noFill/>
           </a:ln>
           <a:effectLst/>
         </p:spPr>
@@ -18654,45 +19126,46 @@
       </p:sp>
       <p:sp>
         <p:nvSpPr>
-          <p:cNvPr id="7" name="Rectangle 6"/>
-          <p:cNvSpPr/>
-          <p:nvPr/>
-        </p:nvSpPr>
-        <p:spPr>
-          <a:xfrm>
-            <a:off x="548640" y="1828800"/>
-            <a:ext cx="3566160" cy="109728"/>
-          </a:xfrm>
-          <a:prstGeom prst="rect">
-            <a:avLst/>
-          </a:prstGeom>
-          <a:solidFill>
-            <a:srgbClr val="4A4BD6"/>
-          </a:solidFill>
-          <a:ln>
-            <a:noFill/>
-          </a:ln>
-          <a:effectLst/>
-        </p:spPr>
-        <p:style>
-          <a:lnRef idx="1">
-            <a:schemeClr val="accent1"/>
-          </a:lnRef>
-          <a:fillRef idx="3">
-            <a:schemeClr val="accent1"/>
-          </a:fillRef>
-          <a:effectRef idx="2">
-            <a:schemeClr val="accent1"/>
-          </a:effectRef>
-          <a:fontRef idx="minor">
-            <a:schemeClr val="lt1"/>
-          </a:fontRef>
-        </p:style>
-        <p:txBody>
-          <a:bodyPr rtlCol="0" anchor="ctr"/>
-          <a:lstStyle/>
-          <a:p>
-            <a:pPr algn="ctr"/>
+          <p:cNvPr id="7" name="TextBox 6"/>
+          <p:cNvSpPr txBox="1"/>
+          <p:nvPr/>
+        </p:nvSpPr>
+        <p:spPr>
+          <a:xfrm>
+            <a:off x="548640" y="1600200"/>
+            <a:ext cx="457200" cy="457200"/>
+          </a:xfrm>
+          <a:prstGeom prst="rect">
+            <a:avLst/>
+          </a:prstGeom>
+          <a:noFill/>
+        </p:spPr>
+        <p:txBody>
+          <a:bodyPr wrap="square" anchor="ctr" lIns="0" rIns="0" tIns="0" bIns="0">
+            <a:spAutoFit/>
+          </a:bodyPr>
+          <a:lstStyle/>
+          <a:p>
+            <a:pPr algn="ctr">
+              <a:lnSpc>
+                <a:spcPct val="106000"/>
+              </a:lnSpc>
+              <a:spcBef>
+                <a:spcPts val="0"/>
+              </a:spcBef>
+              <a:spcAft>
+                <a:spcPts val="600"/>
+              </a:spcAft>
+            </a:pPr>
+            <a:r>
+              <a:rPr sz="1800" b="1" i="0">
+                <a:solidFill>
+                  <a:srgbClr val="FFFFFF"/>
+                </a:solidFill>
+                <a:latin typeface="Calibri"/>
+              </a:rPr>
+              <a:t>A</a:t>
+            </a:r>
           </a:p>
         </p:txBody>
       </p:sp>
@@ -18704,8 +19177,8 @@
         </p:nvSpPr>
         <p:spPr>
           <a:xfrm>
-            <a:off x="822960" y="2148840"/>
-            <a:ext cx="3017520" cy="457200"/>
+            <a:off x="1188720" y="1618488"/>
+            <a:ext cx="10332720" cy="731520"/>
           </a:xfrm>
           <a:prstGeom prst="rect">
             <a:avLst/>
@@ -18713,7 +19186,7 @@
           <a:noFill/>
         </p:spPr>
         <p:txBody>
-          <a:bodyPr wrap="square" anchor="t" lIns="0" rIns="0" tIns="0" bIns="0">
+          <a:bodyPr wrap="square" anchor="ctr" lIns="0" rIns="0" tIns="0" bIns="0">
             <a:spAutoFit/>
           </a:bodyPr>
           <a:lstStyle/>
@@ -18730,27 +19203,71 @@
               </a:spcAft>
             </a:pPr>
             <a:r>
-              <a:rPr sz="2000" b="1" i="0">
-                <a:solidFill>
-                  <a:srgbClr val="111820"/>
-                </a:solidFill>
-                <a:latin typeface="Calibri"/>
-              </a:rPr>
-              <a:t>The call</a:t>
-            </a:r>
-          </a:p>
-        </p:txBody>
-      </p:sp>
-      <p:sp>
-        <p:nvSpPr>
-          <p:cNvPr id="9" name="TextBox 8"/>
+              <a:rPr sz="1600" b="0" i="0">
+                <a:solidFill>
+                  <a:srgbClr val="37424F"/>
+                </a:solidFill>
+                <a:latin typeface="Calibri"/>
+              </a:rPr>
+              <a:t>Which gate kills the most megawatts — connection, transmission, offtake, or planning?</a:t>
+            </a:r>
+          </a:p>
+        </p:txBody>
+      </p:sp>
+      <p:sp>
+        <p:nvSpPr>
+          <p:cNvPr id="9" name="Rectangle 8"/>
+          <p:cNvSpPr/>
+          <p:nvPr/>
+        </p:nvSpPr>
+        <p:spPr>
+          <a:xfrm>
+            <a:off x="548640" y="2441448"/>
+            <a:ext cx="457200" cy="457200"/>
+          </a:xfrm>
+          <a:prstGeom prst="rect">
+            <a:avLst/>
+          </a:prstGeom>
+          <a:solidFill>
+            <a:srgbClr val="2F7D3A"/>
+          </a:solidFill>
+          <a:ln>
+            <a:noFill/>
+          </a:ln>
+          <a:effectLst/>
+        </p:spPr>
+        <p:style>
+          <a:lnRef idx="1">
+            <a:schemeClr val="accent1"/>
+          </a:lnRef>
+          <a:fillRef idx="3">
+            <a:schemeClr val="accent1"/>
+          </a:fillRef>
+          <a:effectRef idx="2">
+            <a:schemeClr val="accent1"/>
+          </a:effectRef>
+          <a:fontRef idx="minor">
+            <a:schemeClr val="lt1"/>
+          </a:fontRef>
+        </p:style>
+        <p:txBody>
+          <a:bodyPr rtlCol="0" anchor="ctr"/>
+          <a:lstStyle/>
+          <a:p>
+            <a:pPr algn="ctr"/>
+          </a:p>
+        </p:txBody>
+      </p:sp>
+      <p:sp>
+        <p:nvSpPr>
+          <p:cNvPr id="10" name="TextBox 9"/>
           <p:cNvSpPr txBox="1"/>
           <p:nvPr/>
         </p:nvSpPr>
         <p:spPr>
           <a:xfrm>
-            <a:off x="822960" y="2697480"/>
-            <a:ext cx="3063240" cy="1005840"/>
+            <a:off x="548640" y="2441448"/>
+            <a:ext cx="457200" cy="457200"/>
           </a:xfrm>
           <a:prstGeom prst="rect">
             <a:avLst/>
@@ -18758,7 +19275,52 @@
           <a:noFill/>
         </p:spPr>
         <p:txBody>
-          <a:bodyPr wrap="square" anchor="t" lIns="0" rIns="0" tIns="0" bIns="0">
+          <a:bodyPr wrap="square" anchor="ctr" lIns="0" rIns="0" tIns="0" bIns="0">
+            <a:spAutoFit/>
+          </a:bodyPr>
+          <a:lstStyle/>
+          <a:p>
+            <a:pPr algn="ctr">
+              <a:lnSpc>
+                <a:spcPct val="106000"/>
+              </a:lnSpc>
+              <a:spcBef>
+                <a:spcPts val="0"/>
+              </a:spcBef>
+              <a:spcAft>
+                <a:spcPts val="600"/>
+              </a:spcAft>
+            </a:pPr>
+            <a:r>
+              <a:rPr sz="1800" b="1" i="0">
+                <a:solidFill>
+                  <a:srgbClr val="FFFFFF"/>
+                </a:solidFill>
+                <a:latin typeface="Calibri"/>
+              </a:rPr>
+              <a:t>B</a:t>
+            </a:r>
+          </a:p>
+        </p:txBody>
+      </p:sp>
+      <p:sp>
+        <p:nvSpPr>
+          <p:cNvPr id="11" name="TextBox 10"/>
+          <p:cNvSpPr txBox="1"/>
+          <p:nvPr/>
+        </p:nvSpPr>
+        <p:spPr>
+          <a:xfrm>
+            <a:off x="1188720" y="2459736"/>
+            <a:ext cx="10332720" cy="731520"/>
+          </a:xfrm>
+          <a:prstGeom prst="rect">
+            <a:avLst/>
+          </a:prstGeom>
+          <a:noFill/>
+        </p:spPr>
+        <p:txBody>
+          <a:bodyPr wrap="square" anchor="ctr" lIns="0" rIns="0" tIns="0" bIns="0">
             <a:spAutoFit/>
           </a:bodyPr>
           <a:lstStyle/>
@@ -18775,38 +19337,36 @@
               </a:spcAft>
             </a:pPr>
             <a:r>
-              <a:rPr sz="1450" b="0" i="0">
+              <a:rPr sz="1600" b="0" i="0">
                 <a:solidFill>
                   <a:srgbClr val="37424F"/>
                 </a:solidFill>
                 <a:latin typeface="Calibri"/>
               </a:rPr>
-              <a:t>Your position on the question — a view, not a recap.</a:t>
-            </a:r>
-          </a:p>
-        </p:txBody>
-      </p:sp>
-      <p:sp>
-        <p:nvSpPr>
-          <p:cNvPr id="10" name="Rectangle 9"/>
+              <a:t>What early signal best separates the real projects from the mirage?</a:t>
+            </a:r>
+          </a:p>
+        </p:txBody>
+      </p:sp>
+      <p:sp>
+        <p:nvSpPr>
+          <p:cNvPr id="12" name="Rectangle 11"/>
           <p:cNvSpPr/>
           <p:nvPr/>
         </p:nvSpPr>
         <p:spPr>
           <a:xfrm>
-            <a:off x="4297679" y="1828800"/>
-            <a:ext cx="3566160" cy="2011680"/>
+            <a:off x="548640" y="3282696"/>
+            <a:ext cx="457200" cy="457200"/>
           </a:xfrm>
           <a:prstGeom prst="rect">
             <a:avLst/>
           </a:prstGeom>
           <a:solidFill>
-            <a:srgbClr val="F4F6F9"/>
+            <a:srgbClr val="2F7D3A"/>
           </a:solidFill>
-          <a:ln w="9525">
-            <a:solidFill>
-              <a:srgbClr val="0D7D74"/>
-            </a:solidFill>
+          <a:ln>
+            <a:noFill/>
           </a:ln>
           <a:effectLst/>
         </p:spPr>
@@ -18834,58 +19394,14 @@
       </p:sp>
       <p:sp>
         <p:nvSpPr>
-          <p:cNvPr id="11" name="Rectangle 10"/>
-          <p:cNvSpPr/>
-          <p:nvPr/>
-        </p:nvSpPr>
-        <p:spPr>
-          <a:xfrm>
-            <a:off x="4297679" y="1828800"/>
-            <a:ext cx="3566160" cy="109728"/>
-          </a:xfrm>
-          <a:prstGeom prst="rect">
-            <a:avLst/>
-          </a:prstGeom>
-          <a:solidFill>
-            <a:srgbClr val="0D7D74"/>
-          </a:solidFill>
-          <a:ln>
-            <a:noFill/>
-          </a:ln>
-          <a:effectLst/>
-        </p:spPr>
-        <p:style>
-          <a:lnRef idx="1">
-            <a:schemeClr val="accent1"/>
-          </a:lnRef>
-          <a:fillRef idx="3">
-            <a:schemeClr val="accent1"/>
-          </a:fillRef>
-          <a:effectRef idx="2">
-            <a:schemeClr val="accent1"/>
-          </a:effectRef>
-          <a:fontRef idx="minor">
-            <a:schemeClr val="lt1"/>
-          </a:fontRef>
-        </p:style>
-        <p:txBody>
-          <a:bodyPr rtlCol="0" anchor="ctr"/>
-          <a:lstStyle/>
-          <a:p>
-            <a:pPr algn="ctr"/>
-          </a:p>
-        </p:txBody>
-      </p:sp>
-      <p:sp>
-        <p:nvSpPr>
-          <p:cNvPr id="12" name="TextBox 11"/>
+          <p:cNvPr id="13" name="TextBox 12"/>
           <p:cNvSpPr txBox="1"/>
           <p:nvPr/>
         </p:nvSpPr>
         <p:spPr>
           <a:xfrm>
-            <a:off x="4571999" y="2148840"/>
-            <a:ext cx="3017520" cy="457200"/>
+            <a:off x="548640" y="3282696"/>
+            <a:ext cx="457200" cy="457200"/>
           </a:xfrm>
           <a:prstGeom prst="rect">
             <a:avLst/>
@@ -18893,7 +19409,52 @@
           <a:noFill/>
         </p:spPr>
         <p:txBody>
-          <a:bodyPr wrap="square" anchor="t" lIns="0" rIns="0" tIns="0" bIns="0">
+          <a:bodyPr wrap="square" anchor="ctr" lIns="0" rIns="0" tIns="0" bIns="0">
+            <a:spAutoFit/>
+          </a:bodyPr>
+          <a:lstStyle/>
+          <a:p>
+            <a:pPr algn="ctr">
+              <a:lnSpc>
+                <a:spcPct val="106000"/>
+              </a:lnSpc>
+              <a:spcBef>
+                <a:spcPts val="0"/>
+              </a:spcBef>
+              <a:spcAft>
+                <a:spcPts val="600"/>
+              </a:spcAft>
+            </a:pPr>
+            <a:r>
+              <a:rPr sz="1800" b="1" i="0">
+                <a:solidFill>
+                  <a:srgbClr val="FFFFFF"/>
+                </a:solidFill>
+                <a:latin typeface="Calibri"/>
+              </a:rPr>
+              <a:t>C</a:t>
+            </a:r>
+          </a:p>
+        </p:txBody>
+      </p:sp>
+      <p:sp>
+        <p:nvSpPr>
+          <p:cNvPr id="14" name="TextBox 13"/>
+          <p:cNvSpPr txBox="1"/>
+          <p:nvPr/>
+        </p:nvSpPr>
+        <p:spPr>
+          <a:xfrm>
+            <a:off x="1188720" y="3300984"/>
+            <a:ext cx="10332720" cy="731520"/>
+          </a:xfrm>
+          <a:prstGeom prst="rect">
+            <a:avLst/>
+          </a:prstGeom>
+          <a:noFill/>
+        </p:spPr>
+        <p:txBody>
+          <a:bodyPr wrap="square" anchor="ctr" lIns="0" rIns="0" tIns="0" bIns="0">
             <a:spAutoFit/>
           </a:bodyPr>
           <a:lstStyle/>
@@ -18910,27 +19471,71 @@
               </a:spcAft>
             </a:pPr>
             <a:r>
-              <a:rPr sz="2000" b="1" i="0">
-                <a:solidFill>
-                  <a:srgbClr val="111820"/>
-                </a:solidFill>
-                <a:latin typeface="Calibri"/>
-              </a:rPr>
-              <a:t>The number</a:t>
-            </a:r>
-          </a:p>
-        </p:txBody>
-      </p:sp>
-      <p:sp>
-        <p:nvSpPr>
-          <p:cNvPr id="13" name="TextBox 12"/>
+              <a:rPr sz="1600" b="0" i="0">
+                <a:solidFill>
+                  <a:srgbClr val="37424F"/>
+                </a:solidFill>
+                <a:latin typeface="Calibri"/>
+              </a:rPr>
+              <a:t>Does our screening assume anything remotely as brutal as ~9% proposed-to-built?</a:t>
+            </a:r>
+          </a:p>
+        </p:txBody>
+      </p:sp>
+      <p:sp>
+        <p:nvSpPr>
+          <p:cNvPr id="15" name="Rectangle 14"/>
+          <p:cNvSpPr/>
+          <p:nvPr/>
+        </p:nvSpPr>
+        <p:spPr>
+          <a:xfrm>
+            <a:off x="548640" y="4123944"/>
+            <a:ext cx="457200" cy="457200"/>
+          </a:xfrm>
+          <a:prstGeom prst="rect">
+            <a:avLst/>
+          </a:prstGeom>
+          <a:solidFill>
+            <a:srgbClr val="2F7D3A"/>
+          </a:solidFill>
+          <a:ln>
+            <a:noFill/>
+          </a:ln>
+          <a:effectLst/>
+        </p:spPr>
+        <p:style>
+          <a:lnRef idx="1">
+            <a:schemeClr val="accent1"/>
+          </a:lnRef>
+          <a:fillRef idx="3">
+            <a:schemeClr val="accent1"/>
+          </a:fillRef>
+          <a:effectRef idx="2">
+            <a:schemeClr val="accent1"/>
+          </a:effectRef>
+          <a:fontRef idx="minor">
+            <a:schemeClr val="lt1"/>
+          </a:fontRef>
+        </p:style>
+        <p:txBody>
+          <a:bodyPr rtlCol="0" anchor="ctr"/>
+          <a:lstStyle/>
+          <a:p>
+            <a:pPr algn="ctr"/>
+          </a:p>
+        </p:txBody>
+      </p:sp>
+      <p:sp>
+        <p:nvSpPr>
+          <p:cNvPr id="16" name="TextBox 15"/>
           <p:cNvSpPr txBox="1"/>
           <p:nvPr/>
         </p:nvSpPr>
         <p:spPr>
           <a:xfrm>
-            <a:off x="4571999" y="2697480"/>
-            <a:ext cx="3063240" cy="1005840"/>
+            <a:off x="548640" y="4123944"/>
+            <a:ext cx="457200" cy="457200"/>
           </a:xfrm>
           <a:prstGeom prst="rect">
             <a:avLst/>
@@ -18938,7 +19543,52 @@
           <a:noFill/>
         </p:spPr>
         <p:txBody>
-          <a:bodyPr wrap="square" anchor="t" lIns="0" rIns="0" tIns="0" bIns="0">
+          <a:bodyPr wrap="square" anchor="ctr" lIns="0" rIns="0" tIns="0" bIns="0">
+            <a:spAutoFit/>
+          </a:bodyPr>
+          <a:lstStyle/>
+          <a:p>
+            <a:pPr algn="ctr">
+              <a:lnSpc>
+                <a:spcPct val="106000"/>
+              </a:lnSpc>
+              <a:spcBef>
+                <a:spcPts val="0"/>
+              </a:spcBef>
+              <a:spcAft>
+                <a:spcPts val="600"/>
+              </a:spcAft>
+            </a:pPr>
+            <a:r>
+              <a:rPr sz="1800" b="1" i="0">
+                <a:solidFill>
+                  <a:srgbClr val="FFFFFF"/>
+                </a:solidFill>
+                <a:latin typeface="Calibri"/>
+              </a:rPr>
+              <a:t>D</a:t>
+            </a:r>
+          </a:p>
+        </p:txBody>
+      </p:sp>
+      <p:sp>
+        <p:nvSpPr>
+          <p:cNvPr id="17" name="TextBox 16"/>
+          <p:cNvSpPr txBox="1"/>
+          <p:nvPr/>
+        </p:nvSpPr>
+        <p:spPr>
+          <a:xfrm>
+            <a:off x="1188720" y="4142232"/>
+            <a:ext cx="10332720" cy="731520"/>
+          </a:xfrm>
+          <a:prstGeom prst="rect">
+            <a:avLst/>
+          </a:prstGeom>
+          <a:noFill/>
+        </p:spPr>
+        <p:txBody>
+          <a:bodyPr wrap="square" anchor="ctr" lIns="0" rIns="0" tIns="0" bIns="0">
             <a:spAutoFit/>
           </a:bodyPr>
           <a:lstStyle/>
@@ -18955,27 +19605,27 @@
               </a:spcAft>
             </a:pPr>
             <a:r>
-              <a:rPr sz="1450" b="0" i="0">
+              <a:rPr sz="1600" b="0" i="0">
                 <a:solidFill>
                   <a:srgbClr val="37424F"/>
                 </a:solidFill>
                 <a:latin typeface="Calibri"/>
               </a:rPr>
-              <a:t>The single figure that changed your mind.</a:t>
-            </a:r>
-          </a:p>
-        </p:txBody>
-      </p:sp>
-      <p:sp>
-        <p:nvSpPr>
-          <p:cNvPr id="14" name="Rectangle 13"/>
+              <a:t>If you could unlock one transmission line, which frees the most generation?</a:t>
+            </a:r>
+          </a:p>
+        </p:txBody>
+      </p:sp>
+      <p:sp>
+        <p:nvSpPr>
+          <p:cNvPr id="18" name="Rectangle 17"/>
           <p:cNvSpPr/>
           <p:nvPr/>
         </p:nvSpPr>
         <p:spPr>
           <a:xfrm>
-            <a:off x="8046718" y="1828800"/>
-            <a:ext cx="3566160" cy="2011680"/>
+            <a:off x="548640" y="5532120"/>
+            <a:ext cx="11064240" cy="777240"/>
           </a:xfrm>
           <a:prstGeom prst="rect">
             <a:avLst/>
@@ -18985,7 +19635,7 @@
           </a:solidFill>
           <a:ln w="9525">
             <a:solidFill>
-              <a:srgbClr val="B4571F"/>
+              <a:srgbClr val="2F7D3A"/>
             </a:solidFill>
           </a:ln>
           <a:effectLst/>
@@ -19014,58 +19664,14 @@
       </p:sp>
       <p:sp>
         <p:nvSpPr>
-          <p:cNvPr id="15" name="Rectangle 14"/>
-          <p:cNvSpPr/>
-          <p:nvPr/>
-        </p:nvSpPr>
-        <p:spPr>
-          <a:xfrm>
-            <a:off x="8046718" y="1828800"/>
-            <a:ext cx="3566160" cy="109728"/>
-          </a:xfrm>
-          <a:prstGeom prst="rect">
-            <a:avLst/>
-          </a:prstGeom>
-          <a:solidFill>
-            <a:srgbClr val="B4571F"/>
-          </a:solidFill>
-          <a:ln>
-            <a:noFill/>
-          </a:ln>
-          <a:effectLst/>
-        </p:spPr>
-        <p:style>
-          <a:lnRef idx="1">
-            <a:schemeClr val="accent1"/>
-          </a:lnRef>
-          <a:fillRef idx="3">
-            <a:schemeClr val="accent1"/>
-          </a:fillRef>
-          <a:effectRef idx="2">
-            <a:schemeClr val="accent1"/>
-          </a:effectRef>
-          <a:fontRef idx="minor">
-            <a:schemeClr val="lt1"/>
-          </a:fontRef>
-        </p:style>
-        <p:txBody>
-          <a:bodyPr rtlCol="0" anchor="ctr"/>
-          <a:lstStyle/>
-          <a:p>
-            <a:pPr algn="ctr"/>
-          </a:p>
-        </p:txBody>
-      </p:sp>
-      <p:sp>
-        <p:nvSpPr>
-          <p:cNvPr id="16" name="TextBox 15"/>
+          <p:cNvPr id="19" name="TextBox 18"/>
           <p:cNvSpPr txBox="1"/>
           <p:nvPr/>
         </p:nvSpPr>
         <p:spPr>
           <a:xfrm>
-            <a:off x="8321038" y="2148840"/>
-            <a:ext cx="3017520" cy="457200"/>
+            <a:off x="731520" y="5632704"/>
+            <a:ext cx="10698480" cy="320040"/>
           </a:xfrm>
           <a:prstGeom prst="rect">
             <a:avLst/>
@@ -19090,27 +19696,27 @@
               </a:spcAft>
             </a:pPr>
             <a:r>
-              <a:rPr sz="2000" b="1" i="0">
-                <a:solidFill>
-                  <a:srgbClr val="111820"/>
-                </a:solidFill>
-                <a:latin typeface="Calibri"/>
-              </a:rPr>
-              <a:t>The surprise</a:t>
-            </a:r>
-          </a:p>
-        </p:txBody>
-      </p:sp>
-      <p:sp>
-        <p:nvSpPr>
-          <p:cNvPr id="17" name="TextBox 16"/>
+              <a:rPr sz="1100" b="1" i="0">
+                <a:solidFill>
+                  <a:srgbClr val="2F7D3A"/>
+                </a:solidFill>
+                <a:latin typeface="Consolas"/>
+              </a:rPr>
+              <a:t>YOUR HYPOTHESIS</a:t>
+            </a:r>
+          </a:p>
+        </p:txBody>
+      </p:sp>
+      <p:sp>
+        <p:nvSpPr>
+          <p:cNvPr id="20" name="TextBox 19"/>
           <p:cNvSpPr txBox="1"/>
           <p:nvPr/>
         </p:nvSpPr>
         <p:spPr>
           <a:xfrm>
-            <a:off x="8321038" y="2697480"/>
-            <a:ext cx="3063240" cy="1005840"/>
+            <a:off x="731520" y="5897880"/>
+            <a:ext cx="10698480" cy="365760"/>
           </a:xfrm>
           <a:prstGeom prst="rect">
             <a:avLst/>
@@ -19135,27 +19741,27 @@
               </a:spcAft>
             </a:pPr>
             <a:r>
-              <a:rPr sz="1450" b="0" i="0">
-                <a:solidFill>
-                  <a:srgbClr val="37424F"/>
-                </a:solidFill>
-                <a:latin typeface="Calibri"/>
-              </a:rPr>
-              <a:t>The one “I didn't realise that” moment.</a:t>
-            </a:r>
-          </a:p>
-        </p:txBody>
-      </p:sp>
-      <p:sp>
-        <p:nvSpPr>
-          <p:cNvPr id="18" name="TextBox 17"/>
+              <a:rPr sz="1500" b="0" i="1">
+                <a:solidFill>
+                  <a:srgbClr val="111820"/>
+                </a:solidFill>
+                <a:latin typeface="Calibri"/>
+              </a:rPr>
+              <a:t>What's the one signal you'll check before believing a “pipeline” number?</a:t>
+            </a:r>
+          </a:p>
+        </p:txBody>
+      </p:sp>
+      <p:sp>
+        <p:nvSpPr>
+          <p:cNvPr id="21" name="TextBox 20"/>
           <p:cNvSpPr txBox="1"/>
           <p:nvPr/>
         </p:nvSpPr>
         <p:spPr>
           <a:xfrm>
-            <a:off x="548640" y="4297680"/>
-            <a:ext cx="10972800" cy="457200"/>
+            <a:off x="502920" y="6419088"/>
+            <a:ext cx="8229600" cy="274320"/>
           </a:xfrm>
           <a:prstGeom prst="rect">
             <a:avLst/>
@@ -19180,134 +19786,133 @@
               </a:spcAft>
             </a:pPr>
             <a:r>
-              <a:rPr sz="1500" b="1" i="0">
-                <a:solidFill>
-                  <a:srgbClr val="111820"/>
-                </a:solidFill>
-                <a:latin typeface="Calibri"/>
-              </a:rPr>
-              <a:t>Then, as a room:</a:t>
-            </a:r>
-          </a:p>
-        </p:txBody>
-      </p:sp>
-      <p:sp>
-        <p:nvSpPr>
-          <p:cNvPr id="19" name="TextBox 18"/>
+              <a:rPr sz="900" b="0" i="0">
+                <a:solidFill>
+                  <a:srgbClr val="66717F"/>
+                </a:solidFill>
+                <a:latin typeface="Consolas"/>
+              </a:rPr>
+              <a:t>Reading the NEM · Power Development Team Day · figures from the AusEnergy Lens (AEMO + ISP 2026), as-at Aug 2026</a:t>
+            </a:r>
+          </a:p>
+        </p:txBody>
+      </p:sp>
+    </p:spTree>
+  </p:cSld>
+  <p:clrMapOvr>
+    <a:masterClrMapping/>
+  </p:clrMapOvr>
+</p:sld>
+</file>
+
+<file path=ppt/slides/slide28.xml><?xml version="1.0" encoding="utf-8"?>
+<p:sld xmlns:a="http://schemas.openxmlformats.org/drawingml/2006/main" xmlns:p="http://schemas.openxmlformats.org/presentationml/2006/main" xmlns:r="http://schemas.openxmlformats.org/officeDocument/2006/relationships">
+  <p:cSld>
+    <p:spTree>
+      <p:nvGrpSpPr>
+        <p:cNvPr id="1" name=""/>
+        <p:cNvGrpSpPr/>
+        <p:nvPr/>
+      </p:nvGrpSpPr>
+      <p:grpSpPr/>
+      <p:sp>
+        <p:nvSpPr>
+          <p:cNvPr id="2" name="Rectangle 1"/>
+          <p:cNvSpPr/>
+          <p:nvPr/>
+        </p:nvSpPr>
+        <p:spPr>
+          <a:xfrm>
+            <a:off x="0" y="0"/>
+            <a:ext cx="12191695" cy="6858000"/>
+          </a:xfrm>
+          <a:prstGeom prst="rect">
+            <a:avLst/>
+          </a:prstGeom>
+          <a:solidFill>
+            <a:srgbClr val="FFFFFF"/>
+          </a:solidFill>
+          <a:ln>
+            <a:noFill/>
+          </a:ln>
+          <a:effectLst/>
+        </p:spPr>
+        <p:style>
+          <a:lnRef idx="1">
+            <a:schemeClr val="accent1"/>
+          </a:lnRef>
+          <a:fillRef idx="3">
+            <a:schemeClr val="accent1"/>
+          </a:fillRef>
+          <a:effectRef idx="2">
+            <a:schemeClr val="accent1"/>
+          </a:effectRef>
+          <a:fontRef idx="minor">
+            <a:schemeClr val="lt1"/>
+          </a:fontRef>
+        </p:style>
+        <p:txBody>
+          <a:bodyPr rtlCol="0" anchor="ctr"/>
+          <a:lstStyle/>
+          <a:p>
+            <a:pPr algn="ctr"/>
+          </a:p>
+        </p:txBody>
+      </p:sp>
+      <p:sp>
+        <p:nvSpPr>
+          <p:cNvPr id="3" name="Rectangle 2"/>
+          <p:cNvSpPr/>
+          <p:nvPr/>
+        </p:nvSpPr>
+        <p:spPr>
+          <a:xfrm>
+            <a:off x="0" y="0"/>
+            <a:ext cx="146304" cy="6858000"/>
+          </a:xfrm>
+          <a:prstGeom prst="rect">
+            <a:avLst/>
+          </a:prstGeom>
+          <a:solidFill>
+            <a:srgbClr val="0D7D74"/>
+          </a:solidFill>
+          <a:ln>
+            <a:noFill/>
+          </a:ln>
+          <a:effectLst/>
+        </p:spPr>
+        <p:style>
+          <a:lnRef idx="1">
+            <a:schemeClr val="accent1"/>
+          </a:lnRef>
+          <a:fillRef idx="3">
+            <a:schemeClr val="accent1"/>
+          </a:fillRef>
+          <a:effectRef idx="2">
+            <a:schemeClr val="accent1"/>
+          </a:effectRef>
+          <a:fontRef idx="minor">
+            <a:schemeClr val="lt1"/>
+          </a:fontRef>
+        </p:style>
+        <p:txBody>
+          <a:bodyPr rtlCol="0" anchor="ctr"/>
+          <a:lstStyle/>
+          <a:p>
+            <a:pPr algn="ctr"/>
+          </a:p>
+        </p:txBody>
+      </p:sp>
+      <p:sp>
+        <p:nvSpPr>
+          <p:cNvPr id="4" name="TextBox 3"/>
           <p:cNvSpPr txBox="1"/>
           <p:nvPr/>
         </p:nvSpPr>
         <p:spPr>
           <a:xfrm>
-            <a:off x="548640" y="4709160"/>
-            <a:ext cx="11064240" cy="1371600"/>
-          </a:xfrm>
-          <a:prstGeom prst="rect">
-            <a:avLst/>
-          </a:prstGeom>
-          <a:noFill/>
-        </p:spPr>
-        <p:txBody>
-          <a:bodyPr wrap="square" lIns="0" rIns="0" tIns="0" bIns="0">
-            <a:spAutoFit/>
-          </a:bodyPr>
-          <a:lstStyle/>
-          <a:p>
-            <a:pPr>
-              <a:lnSpc>
-                <a:spcPct val="105000"/>
-              </a:lnSpc>
-              <a:spcAft>
-                <a:spcPts val="800"/>
-              </a:spcAft>
-            </a:pPr>
-            <a:r>
-              <a:rPr sz="1500" b="1">
-                <a:solidFill>
-                  <a:srgbClr val="0D7D74"/>
-                </a:solidFill>
-                <a:latin typeface="Calibri"/>
-              </a:rPr>
-              <a:t>▸  </a:t>
-            </a:r>
-            <a:r>
-              <a:rPr sz="1500" b="0">
-                <a:solidFill>
-                  <a:srgbClr val="37424F"/>
-                </a:solidFill>
-                <a:latin typeface="Calibri"/>
-              </a:rPr>
-              <a:t>Is 100% renewable the right target — or do we plan for ~90% + firm gas?</a:t>
-            </a:r>
-          </a:p>
-          <a:p>
-            <a:pPr>
-              <a:lnSpc>
-                <a:spcPct val="105000"/>
-              </a:lnSpc>
-              <a:spcAft>
-                <a:spcPts val="800"/>
-              </a:spcAft>
-            </a:pPr>
-            <a:r>
-              <a:rPr sz="1500" b="1">
-                <a:solidFill>
-                  <a:srgbClr val="0D7D74"/>
-                </a:solidFill>
-                <a:latin typeface="Calibri"/>
-              </a:rPr>
-              <a:t>▸  </a:t>
-            </a:r>
-            <a:r>
-              <a:rPr sz="1500" b="0">
-                <a:solidFill>
-                  <a:srgbClr val="37424F"/>
-                </a:solidFill>
-                <a:latin typeface="Calibri"/>
-              </a:rPr>
-              <a:t>Would you build another unfirmed solar farm in this market?</a:t>
-            </a:r>
-          </a:p>
-          <a:p>
-            <a:pPr>
-              <a:lnSpc>
-                <a:spcPct val="105000"/>
-              </a:lnSpc>
-              <a:spcAft>
-                <a:spcPts val="800"/>
-              </a:spcAft>
-            </a:pPr>
-            <a:r>
-              <a:rPr sz="1500" b="1">
-                <a:solidFill>
-                  <a:srgbClr val="0D7D74"/>
-                </a:solidFill>
-                <a:latin typeface="Calibri"/>
-              </a:rPr>
-              <a:t>▸  </a:t>
-            </a:r>
-            <a:r>
-              <a:rPr sz="1500" b="0">
-                <a:solidFill>
-                  <a:srgbClr val="37424F"/>
-                </a:solidFill>
-                <a:latin typeface="Calibri"/>
-              </a:rPr>
-              <a:t>Heatwave, broken boiler, or data-centre boom — what's the biggest risk to the grid we're building for?</a:t>
-            </a:r>
-          </a:p>
-        </p:txBody>
-      </p:sp>
-      <p:sp>
-        <p:nvSpPr>
-          <p:cNvPr id="20" name="TextBox 19"/>
-          <p:cNvSpPr txBox="1"/>
-          <p:nvPr/>
-        </p:nvSpPr>
-        <p:spPr>
-          <a:xfrm>
-            <a:off x="502920" y="6419088"/>
-            <a:ext cx="8229600" cy="274320"/>
+            <a:off x="548640" y="457200"/>
+            <a:ext cx="9144000" cy="274320"/>
           </a:xfrm>
           <a:prstGeom prst="rect">
             <a:avLst/>
@@ -19332,6 +19937,788 @@
               </a:spcAft>
             </a:pPr>
             <a:r>
+              <a:rPr sz="1200" b="1" i="0">
+                <a:solidFill>
+                  <a:srgbClr val="0D7D74"/>
+                </a:solidFill>
+                <a:latin typeface="Consolas"/>
+              </a:rPr>
+              <a:t>REPORT BACK</a:t>
+            </a:r>
+          </a:p>
+        </p:txBody>
+      </p:sp>
+      <p:sp>
+        <p:nvSpPr>
+          <p:cNvPr id="5" name="TextBox 4"/>
+          <p:cNvSpPr txBox="1"/>
+          <p:nvPr/>
+        </p:nvSpPr>
+        <p:spPr>
+          <a:xfrm>
+            <a:off x="502920" y="777240"/>
+            <a:ext cx="10972800" cy="822960"/>
+          </a:xfrm>
+          <a:prstGeom prst="rect">
+            <a:avLst/>
+          </a:prstGeom>
+          <a:noFill/>
+        </p:spPr>
+        <p:txBody>
+          <a:bodyPr wrap="square" anchor="t" lIns="0" rIns="0" tIns="0" bIns="0">
+            <a:spAutoFit/>
+          </a:bodyPr>
+          <a:lstStyle/>
+          <a:p>
+            <a:pPr algn="l">
+              <a:lnSpc>
+                <a:spcPct val="106000"/>
+              </a:lnSpc>
+              <a:spcBef>
+                <a:spcPts val="0"/>
+              </a:spcBef>
+              <a:spcAft>
+                <a:spcPts val="600"/>
+              </a:spcAft>
+            </a:pPr>
+            <a:r>
+              <a:rPr sz="3400" b="1" i="0">
+                <a:solidFill>
+                  <a:srgbClr val="111820"/>
+                </a:solidFill>
+                <a:latin typeface="Calibri"/>
+              </a:rPr>
+              <a:t>Three things — not a summary</a:t>
+            </a:r>
+          </a:p>
+        </p:txBody>
+      </p:sp>
+      <p:sp>
+        <p:nvSpPr>
+          <p:cNvPr id="6" name="Rectangle 5"/>
+          <p:cNvSpPr/>
+          <p:nvPr/>
+        </p:nvSpPr>
+        <p:spPr>
+          <a:xfrm>
+            <a:off x="548640" y="1828800"/>
+            <a:ext cx="3566160" cy="2011680"/>
+          </a:xfrm>
+          <a:prstGeom prst="rect">
+            <a:avLst/>
+          </a:prstGeom>
+          <a:solidFill>
+            <a:srgbClr val="F4F6F9"/>
+          </a:solidFill>
+          <a:ln w="9525">
+            <a:solidFill>
+              <a:srgbClr val="4A4BD6"/>
+            </a:solidFill>
+          </a:ln>
+          <a:effectLst/>
+        </p:spPr>
+        <p:style>
+          <a:lnRef idx="1">
+            <a:schemeClr val="accent1"/>
+          </a:lnRef>
+          <a:fillRef idx="3">
+            <a:schemeClr val="accent1"/>
+          </a:fillRef>
+          <a:effectRef idx="2">
+            <a:schemeClr val="accent1"/>
+          </a:effectRef>
+          <a:fontRef idx="minor">
+            <a:schemeClr val="lt1"/>
+          </a:fontRef>
+        </p:style>
+        <p:txBody>
+          <a:bodyPr rtlCol="0" anchor="ctr"/>
+          <a:lstStyle/>
+          <a:p>
+            <a:pPr algn="ctr"/>
+          </a:p>
+        </p:txBody>
+      </p:sp>
+      <p:sp>
+        <p:nvSpPr>
+          <p:cNvPr id="7" name="Rectangle 6"/>
+          <p:cNvSpPr/>
+          <p:nvPr/>
+        </p:nvSpPr>
+        <p:spPr>
+          <a:xfrm>
+            <a:off x="548640" y="1828800"/>
+            <a:ext cx="3566160" cy="109728"/>
+          </a:xfrm>
+          <a:prstGeom prst="rect">
+            <a:avLst/>
+          </a:prstGeom>
+          <a:solidFill>
+            <a:srgbClr val="4A4BD6"/>
+          </a:solidFill>
+          <a:ln>
+            <a:noFill/>
+          </a:ln>
+          <a:effectLst/>
+        </p:spPr>
+        <p:style>
+          <a:lnRef idx="1">
+            <a:schemeClr val="accent1"/>
+          </a:lnRef>
+          <a:fillRef idx="3">
+            <a:schemeClr val="accent1"/>
+          </a:fillRef>
+          <a:effectRef idx="2">
+            <a:schemeClr val="accent1"/>
+          </a:effectRef>
+          <a:fontRef idx="minor">
+            <a:schemeClr val="lt1"/>
+          </a:fontRef>
+        </p:style>
+        <p:txBody>
+          <a:bodyPr rtlCol="0" anchor="ctr"/>
+          <a:lstStyle/>
+          <a:p>
+            <a:pPr algn="ctr"/>
+          </a:p>
+        </p:txBody>
+      </p:sp>
+      <p:sp>
+        <p:nvSpPr>
+          <p:cNvPr id="8" name="TextBox 7"/>
+          <p:cNvSpPr txBox="1"/>
+          <p:nvPr/>
+        </p:nvSpPr>
+        <p:spPr>
+          <a:xfrm>
+            <a:off x="822960" y="2148840"/>
+            <a:ext cx="3017520" cy="457200"/>
+          </a:xfrm>
+          <a:prstGeom prst="rect">
+            <a:avLst/>
+          </a:prstGeom>
+          <a:noFill/>
+        </p:spPr>
+        <p:txBody>
+          <a:bodyPr wrap="square" anchor="t" lIns="0" rIns="0" tIns="0" bIns="0">
+            <a:spAutoFit/>
+          </a:bodyPr>
+          <a:lstStyle/>
+          <a:p>
+            <a:pPr algn="l">
+              <a:lnSpc>
+                <a:spcPct val="106000"/>
+              </a:lnSpc>
+              <a:spcBef>
+                <a:spcPts val="0"/>
+              </a:spcBef>
+              <a:spcAft>
+                <a:spcPts val="600"/>
+              </a:spcAft>
+            </a:pPr>
+            <a:r>
+              <a:rPr sz="2000" b="1" i="0">
+                <a:solidFill>
+                  <a:srgbClr val="111820"/>
+                </a:solidFill>
+                <a:latin typeface="Calibri"/>
+              </a:rPr>
+              <a:t>The call</a:t>
+            </a:r>
+          </a:p>
+        </p:txBody>
+      </p:sp>
+      <p:sp>
+        <p:nvSpPr>
+          <p:cNvPr id="9" name="TextBox 8"/>
+          <p:cNvSpPr txBox="1"/>
+          <p:nvPr/>
+        </p:nvSpPr>
+        <p:spPr>
+          <a:xfrm>
+            <a:off x="822960" y="2697480"/>
+            <a:ext cx="3063240" cy="1005840"/>
+          </a:xfrm>
+          <a:prstGeom prst="rect">
+            <a:avLst/>
+          </a:prstGeom>
+          <a:noFill/>
+        </p:spPr>
+        <p:txBody>
+          <a:bodyPr wrap="square" anchor="t" lIns="0" rIns="0" tIns="0" bIns="0">
+            <a:spAutoFit/>
+          </a:bodyPr>
+          <a:lstStyle/>
+          <a:p>
+            <a:pPr algn="l">
+              <a:lnSpc>
+                <a:spcPct val="106000"/>
+              </a:lnSpc>
+              <a:spcBef>
+                <a:spcPts val="0"/>
+              </a:spcBef>
+              <a:spcAft>
+                <a:spcPts val="600"/>
+              </a:spcAft>
+            </a:pPr>
+            <a:r>
+              <a:rPr sz="1450" b="0" i="0">
+                <a:solidFill>
+                  <a:srgbClr val="37424F"/>
+                </a:solidFill>
+                <a:latin typeface="Calibri"/>
+              </a:rPr>
+              <a:t>Your position on the question — a view, not a recap.</a:t>
+            </a:r>
+          </a:p>
+        </p:txBody>
+      </p:sp>
+      <p:sp>
+        <p:nvSpPr>
+          <p:cNvPr id="10" name="Rectangle 9"/>
+          <p:cNvSpPr/>
+          <p:nvPr/>
+        </p:nvSpPr>
+        <p:spPr>
+          <a:xfrm>
+            <a:off x="4297679" y="1828800"/>
+            <a:ext cx="3566160" cy="2011680"/>
+          </a:xfrm>
+          <a:prstGeom prst="rect">
+            <a:avLst/>
+          </a:prstGeom>
+          <a:solidFill>
+            <a:srgbClr val="F4F6F9"/>
+          </a:solidFill>
+          <a:ln w="9525">
+            <a:solidFill>
+              <a:srgbClr val="0D7D74"/>
+            </a:solidFill>
+          </a:ln>
+          <a:effectLst/>
+        </p:spPr>
+        <p:style>
+          <a:lnRef idx="1">
+            <a:schemeClr val="accent1"/>
+          </a:lnRef>
+          <a:fillRef idx="3">
+            <a:schemeClr val="accent1"/>
+          </a:fillRef>
+          <a:effectRef idx="2">
+            <a:schemeClr val="accent1"/>
+          </a:effectRef>
+          <a:fontRef idx="minor">
+            <a:schemeClr val="lt1"/>
+          </a:fontRef>
+        </p:style>
+        <p:txBody>
+          <a:bodyPr rtlCol="0" anchor="ctr"/>
+          <a:lstStyle/>
+          <a:p>
+            <a:pPr algn="ctr"/>
+          </a:p>
+        </p:txBody>
+      </p:sp>
+      <p:sp>
+        <p:nvSpPr>
+          <p:cNvPr id="11" name="Rectangle 10"/>
+          <p:cNvSpPr/>
+          <p:nvPr/>
+        </p:nvSpPr>
+        <p:spPr>
+          <a:xfrm>
+            <a:off x="4297679" y="1828800"/>
+            <a:ext cx="3566160" cy="109728"/>
+          </a:xfrm>
+          <a:prstGeom prst="rect">
+            <a:avLst/>
+          </a:prstGeom>
+          <a:solidFill>
+            <a:srgbClr val="0D7D74"/>
+          </a:solidFill>
+          <a:ln>
+            <a:noFill/>
+          </a:ln>
+          <a:effectLst/>
+        </p:spPr>
+        <p:style>
+          <a:lnRef idx="1">
+            <a:schemeClr val="accent1"/>
+          </a:lnRef>
+          <a:fillRef idx="3">
+            <a:schemeClr val="accent1"/>
+          </a:fillRef>
+          <a:effectRef idx="2">
+            <a:schemeClr val="accent1"/>
+          </a:effectRef>
+          <a:fontRef idx="minor">
+            <a:schemeClr val="lt1"/>
+          </a:fontRef>
+        </p:style>
+        <p:txBody>
+          <a:bodyPr rtlCol="0" anchor="ctr"/>
+          <a:lstStyle/>
+          <a:p>
+            <a:pPr algn="ctr"/>
+          </a:p>
+        </p:txBody>
+      </p:sp>
+      <p:sp>
+        <p:nvSpPr>
+          <p:cNvPr id="12" name="TextBox 11"/>
+          <p:cNvSpPr txBox="1"/>
+          <p:nvPr/>
+        </p:nvSpPr>
+        <p:spPr>
+          <a:xfrm>
+            <a:off x="4571999" y="2148840"/>
+            <a:ext cx="3017520" cy="457200"/>
+          </a:xfrm>
+          <a:prstGeom prst="rect">
+            <a:avLst/>
+          </a:prstGeom>
+          <a:noFill/>
+        </p:spPr>
+        <p:txBody>
+          <a:bodyPr wrap="square" anchor="t" lIns="0" rIns="0" tIns="0" bIns="0">
+            <a:spAutoFit/>
+          </a:bodyPr>
+          <a:lstStyle/>
+          <a:p>
+            <a:pPr algn="l">
+              <a:lnSpc>
+                <a:spcPct val="106000"/>
+              </a:lnSpc>
+              <a:spcBef>
+                <a:spcPts val="0"/>
+              </a:spcBef>
+              <a:spcAft>
+                <a:spcPts val="600"/>
+              </a:spcAft>
+            </a:pPr>
+            <a:r>
+              <a:rPr sz="2000" b="1" i="0">
+                <a:solidFill>
+                  <a:srgbClr val="111820"/>
+                </a:solidFill>
+                <a:latin typeface="Calibri"/>
+              </a:rPr>
+              <a:t>The number</a:t>
+            </a:r>
+          </a:p>
+        </p:txBody>
+      </p:sp>
+      <p:sp>
+        <p:nvSpPr>
+          <p:cNvPr id="13" name="TextBox 12"/>
+          <p:cNvSpPr txBox="1"/>
+          <p:nvPr/>
+        </p:nvSpPr>
+        <p:spPr>
+          <a:xfrm>
+            <a:off x="4571999" y="2697480"/>
+            <a:ext cx="3063240" cy="1005840"/>
+          </a:xfrm>
+          <a:prstGeom prst="rect">
+            <a:avLst/>
+          </a:prstGeom>
+          <a:noFill/>
+        </p:spPr>
+        <p:txBody>
+          <a:bodyPr wrap="square" anchor="t" lIns="0" rIns="0" tIns="0" bIns="0">
+            <a:spAutoFit/>
+          </a:bodyPr>
+          <a:lstStyle/>
+          <a:p>
+            <a:pPr algn="l">
+              <a:lnSpc>
+                <a:spcPct val="106000"/>
+              </a:lnSpc>
+              <a:spcBef>
+                <a:spcPts val="0"/>
+              </a:spcBef>
+              <a:spcAft>
+                <a:spcPts val="600"/>
+              </a:spcAft>
+            </a:pPr>
+            <a:r>
+              <a:rPr sz="1450" b="0" i="0">
+                <a:solidFill>
+                  <a:srgbClr val="37424F"/>
+                </a:solidFill>
+                <a:latin typeface="Calibri"/>
+              </a:rPr>
+              <a:t>The single figure that changed your mind.</a:t>
+            </a:r>
+          </a:p>
+        </p:txBody>
+      </p:sp>
+      <p:sp>
+        <p:nvSpPr>
+          <p:cNvPr id="14" name="Rectangle 13"/>
+          <p:cNvSpPr/>
+          <p:nvPr/>
+        </p:nvSpPr>
+        <p:spPr>
+          <a:xfrm>
+            <a:off x="8046718" y="1828800"/>
+            <a:ext cx="3566160" cy="2011680"/>
+          </a:xfrm>
+          <a:prstGeom prst="rect">
+            <a:avLst/>
+          </a:prstGeom>
+          <a:solidFill>
+            <a:srgbClr val="F4F6F9"/>
+          </a:solidFill>
+          <a:ln w="9525">
+            <a:solidFill>
+              <a:srgbClr val="B4571F"/>
+            </a:solidFill>
+          </a:ln>
+          <a:effectLst/>
+        </p:spPr>
+        <p:style>
+          <a:lnRef idx="1">
+            <a:schemeClr val="accent1"/>
+          </a:lnRef>
+          <a:fillRef idx="3">
+            <a:schemeClr val="accent1"/>
+          </a:fillRef>
+          <a:effectRef idx="2">
+            <a:schemeClr val="accent1"/>
+          </a:effectRef>
+          <a:fontRef idx="minor">
+            <a:schemeClr val="lt1"/>
+          </a:fontRef>
+        </p:style>
+        <p:txBody>
+          <a:bodyPr rtlCol="0" anchor="ctr"/>
+          <a:lstStyle/>
+          <a:p>
+            <a:pPr algn="ctr"/>
+          </a:p>
+        </p:txBody>
+      </p:sp>
+      <p:sp>
+        <p:nvSpPr>
+          <p:cNvPr id="15" name="Rectangle 14"/>
+          <p:cNvSpPr/>
+          <p:nvPr/>
+        </p:nvSpPr>
+        <p:spPr>
+          <a:xfrm>
+            <a:off x="8046718" y="1828800"/>
+            <a:ext cx="3566160" cy="109728"/>
+          </a:xfrm>
+          <a:prstGeom prst="rect">
+            <a:avLst/>
+          </a:prstGeom>
+          <a:solidFill>
+            <a:srgbClr val="B4571F"/>
+          </a:solidFill>
+          <a:ln>
+            <a:noFill/>
+          </a:ln>
+          <a:effectLst/>
+        </p:spPr>
+        <p:style>
+          <a:lnRef idx="1">
+            <a:schemeClr val="accent1"/>
+          </a:lnRef>
+          <a:fillRef idx="3">
+            <a:schemeClr val="accent1"/>
+          </a:fillRef>
+          <a:effectRef idx="2">
+            <a:schemeClr val="accent1"/>
+          </a:effectRef>
+          <a:fontRef idx="minor">
+            <a:schemeClr val="lt1"/>
+          </a:fontRef>
+        </p:style>
+        <p:txBody>
+          <a:bodyPr rtlCol="0" anchor="ctr"/>
+          <a:lstStyle/>
+          <a:p>
+            <a:pPr algn="ctr"/>
+          </a:p>
+        </p:txBody>
+      </p:sp>
+      <p:sp>
+        <p:nvSpPr>
+          <p:cNvPr id="16" name="TextBox 15"/>
+          <p:cNvSpPr txBox="1"/>
+          <p:nvPr/>
+        </p:nvSpPr>
+        <p:spPr>
+          <a:xfrm>
+            <a:off x="8321038" y="2148840"/>
+            <a:ext cx="3017520" cy="457200"/>
+          </a:xfrm>
+          <a:prstGeom prst="rect">
+            <a:avLst/>
+          </a:prstGeom>
+          <a:noFill/>
+        </p:spPr>
+        <p:txBody>
+          <a:bodyPr wrap="square" anchor="t" lIns="0" rIns="0" tIns="0" bIns="0">
+            <a:spAutoFit/>
+          </a:bodyPr>
+          <a:lstStyle/>
+          <a:p>
+            <a:pPr algn="l">
+              <a:lnSpc>
+                <a:spcPct val="106000"/>
+              </a:lnSpc>
+              <a:spcBef>
+                <a:spcPts val="0"/>
+              </a:spcBef>
+              <a:spcAft>
+                <a:spcPts val="600"/>
+              </a:spcAft>
+            </a:pPr>
+            <a:r>
+              <a:rPr sz="2000" b="1" i="0">
+                <a:solidFill>
+                  <a:srgbClr val="111820"/>
+                </a:solidFill>
+                <a:latin typeface="Calibri"/>
+              </a:rPr>
+              <a:t>The surprise</a:t>
+            </a:r>
+          </a:p>
+        </p:txBody>
+      </p:sp>
+      <p:sp>
+        <p:nvSpPr>
+          <p:cNvPr id="17" name="TextBox 16"/>
+          <p:cNvSpPr txBox="1"/>
+          <p:nvPr/>
+        </p:nvSpPr>
+        <p:spPr>
+          <a:xfrm>
+            <a:off x="8321038" y="2697480"/>
+            <a:ext cx="3063240" cy="1005840"/>
+          </a:xfrm>
+          <a:prstGeom prst="rect">
+            <a:avLst/>
+          </a:prstGeom>
+          <a:noFill/>
+        </p:spPr>
+        <p:txBody>
+          <a:bodyPr wrap="square" anchor="t" lIns="0" rIns="0" tIns="0" bIns="0">
+            <a:spAutoFit/>
+          </a:bodyPr>
+          <a:lstStyle/>
+          <a:p>
+            <a:pPr algn="l">
+              <a:lnSpc>
+                <a:spcPct val="106000"/>
+              </a:lnSpc>
+              <a:spcBef>
+                <a:spcPts val="0"/>
+              </a:spcBef>
+              <a:spcAft>
+                <a:spcPts val="600"/>
+              </a:spcAft>
+            </a:pPr>
+            <a:r>
+              <a:rPr sz="1450" b="0" i="0">
+                <a:solidFill>
+                  <a:srgbClr val="37424F"/>
+                </a:solidFill>
+                <a:latin typeface="Calibri"/>
+              </a:rPr>
+              <a:t>The one “I didn't realise that” moment.</a:t>
+            </a:r>
+          </a:p>
+        </p:txBody>
+      </p:sp>
+      <p:sp>
+        <p:nvSpPr>
+          <p:cNvPr id="18" name="TextBox 17"/>
+          <p:cNvSpPr txBox="1"/>
+          <p:nvPr/>
+        </p:nvSpPr>
+        <p:spPr>
+          <a:xfrm>
+            <a:off x="548640" y="4297680"/>
+            <a:ext cx="10972800" cy="457200"/>
+          </a:xfrm>
+          <a:prstGeom prst="rect">
+            <a:avLst/>
+          </a:prstGeom>
+          <a:noFill/>
+        </p:spPr>
+        <p:txBody>
+          <a:bodyPr wrap="square" anchor="t" lIns="0" rIns="0" tIns="0" bIns="0">
+            <a:spAutoFit/>
+          </a:bodyPr>
+          <a:lstStyle/>
+          <a:p>
+            <a:pPr algn="l">
+              <a:lnSpc>
+                <a:spcPct val="106000"/>
+              </a:lnSpc>
+              <a:spcBef>
+                <a:spcPts val="0"/>
+              </a:spcBef>
+              <a:spcAft>
+                <a:spcPts val="600"/>
+              </a:spcAft>
+            </a:pPr>
+            <a:r>
+              <a:rPr sz="1500" b="1" i="0">
+                <a:solidFill>
+                  <a:srgbClr val="111820"/>
+                </a:solidFill>
+                <a:latin typeface="Calibri"/>
+              </a:rPr>
+              <a:t>Then, as a room:</a:t>
+            </a:r>
+          </a:p>
+        </p:txBody>
+      </p:sp>
+      <p:sp>
+        <p:nvSpPr>
+          <p:cNvPr id="19" name="TextBox 18"/>
+          <p:cNvSpPr txBox="1"/>
+          <p:nvPr/>
+        </p:nvSpPr>
+        <p:spPr>
+          <a:xfrm>
+            <a:off x="548640" y="4709160"/>
+            <a:ext cx="11064240" cy="1371600"/>
+          </a:xfrm>
+          <a:prstGeom prst="rect">
+            <a:avLst/>
+          </a:prstGeom>
+          <a:noFill/>
+        </p:spPr>
+        <p:txBody>
+          <a:bodyPr wrap="square" lIns="0" rIns="0" tIns="0" bIns="0">
+            <a:spAutoFit/>
+          </a:bodyPr>
+          <a:lstStyle/>
+          <a:p>
+            <a:pPr>
+              <a:lnSpc>
+                <a:spcPct val="105000"/>
+              </a:lnSpc>
+              <a:spcAft>
+                <a:spcPts val="800"/>
+              </a:spcAft>
+            </a:pPr>
+            <a:r>
+              <a:rPr sz="1500" b="1">
+                <a:solidFill>
+                  <a:srgbClr val="0D7D74"/>
+                </a:solidFill>
+                <a:latin typeface="Calibri"/>
+              </a:rPr>
+              <a:t>▸  </a:t>
+            </a:r>
+            <a:r>
+              <a:rPr sz="1500" b="0">
+                <a:solidFill>
+                  <a:srgbClr val="37424F"/>
+                </a:solidFill>
+                <a:latin typeface="Calibri"/>
+              </a:rPr>
+              <a:t>Is 100% renewable the right target — or do we plan for ~90% + firm gas?</a:t>
+            </a:r>
+          </a:p>
+          <a:p>
+            <a:pPr>
+              <a:lnSpc>
+                <a:spcPct val="105000"/>
+              </a:lnSpc>
+              <a:spcAft>
+                <a:spcPts val="800"/>
+              </a:spcAft>
+            </a:pPr>
+            <a:r>
+              <a:rPr sz="1500" b="1">
+                <a:solidFill>
+                  <a:srgbClr val="0D7D74"/>
+                </a:solidFill>
+                <a:latin typeface="Calibri"/>
+              </a:rPr>
+              <a:t>▸  </a:t>
+            </a:r>
+            <a:r>
+              <a:rPr sz="1500" b="0">
+                <a:solidFill>
+                  <a:srgbClr val="37424F"/>
+                </a:solidFill>
+                <a:latin typeface="Calibri"/>
+              </a:rPr>
+              <a:t>Would you build another unfirmed solar farm in this market?</a:t>
+            </a:r>
+          </a:p>
+          <a:p>
+            <a:pPr>
+              <a:lnSpc>
+                <a:spcPct val="105000"/>
+              </a:lnSpc>
+              <a:spcAft>
+                <a:spcPts val="800"/>
+              </a:spcAft>
+            </a:pPr>
+            <a:r>
+              <a:rPr sz="1500" b="1">
+                <a:solidFill>
+                  <a:srgbClr val="0D7D74"/>
+                </a:solidFill>
+                <a:latin typeface="Calibri"/>
+              </a:rPr>
+              <a:t>▸  </a:t>
+            </a:r>
+            <a:r>
+              <a:rPr sz="1500" b="0">
+                <a:solidFill>
+                  <a:srgbClr val="37424F"/>
+                </a:solidFill>
+                <a:latin typeface="Calibri"/>
+              </a:rPr>
+              <a:t>Heatwave, broken boiler, or data-centre boom — what's the biggest risk to the grid we're building for?</a:t>
+            </a:r>
+          </a:p>
+        </p:txBody>
+      </p:sp>
+      <p:sp>
+        <p:nvSpPr>
+          <p:cNvPr id="20" name="TextBox 19"/>
+          <p:cNvSpPr txBox="1"/>
+          <p:nvPr/>
+        </p:nvSpPr>
+        <p:spPr>
+          <a:xfrm>
+            <a:off x="502920" y="6419088"/>
+            <a:ext cx="8229600" cy="274320"/>
+          </a:xfrm>
+          <a:prstGeom prst="rect">
+            <a:avLst/>
+          </a:prstGeom>
+          <a:noFill/>
+        </p:spPr>
+        <p:txBody>
+          <a:bodyPr wrap="square" anchor="t" lIns="0" rIns="0" tIns="0" bIns="0">
+            <a:spAutoFit/>
+          </a:bodyPr>
+          <a:lstStyle/>
+          <a:p>
+            <a:pPr algn="l">
+              <a:lnSpc>
+                <a:spcPct val="106000"/>
+              </a:lnSpc>
+              <a:spcBef>
+                <a:spcPts val="0"/>
+              </a:spcBef>
+              <a:spcAft>
+                <a:spcPts val="600"/>
+              </a:spcAft>
+            </a:pPr>
+            <a:r>
               <a:rPr sz="900" b="0" i="0">
                 <a:solidFill>
                   <a:srgbClr val="66717F"/>
@@ -19351,7 +20738,7 @@
 </p:sld>
 </file>
 
-<file path=ppt/slides/slide28.xml><?xml version="1.0" encoding="utf-8"?>
+<file path=ppt/slides/slide29.xml><?xml version="1.0" encoding="utf-8"?>
 <p:sld xmlns:a="http://schemas.openxmlformats.org/drawingml/2006/main" xmlns:p="http://schemas.openxmlformats.org/presentationml/2006/main" xmlns:r="http://schemas.openxmlformats.org/officeDocument/2006/relationships">
   <p:cSld>
     <p:spTree>

--- a/nem-team-day/Reading-the-NEM-Team-Day.pptx
+++ b/nem-team-day/Reading-the-NEM-Team-Day.pptx
@@ -34,6 +34,7 @@
     <p:sldId id="282" r:id="rId33"/>
     <p:sldId id="283" r:id="rId34"/>
     <p:sldId id="284" r:id="rId35"/>
+    <p:sldId id="285" r:id="rId36"/>
   </p:sldIdLst>
   <p:sldSz cx="12191695" cy="6858000" type="screen4x3"/>
   <p:notesSz cx="6858000" cy="9144000"/>
@@ -1794,6 +1795,493 @@
 </file>
 
 <file path=ppt/charts/chart6.xml><?xml version="1.0" encoding="utf-8"?>
+<c:chartSpace xmlns:c="http://schemas.openxmlformats.org/drawingml/2006/chart" xmlns:a="http://schemas.openxmlformats.org/drawingml/2006/main" xmlns:r="http://schemas.openxmlformats.org/officeDocument/2006/relationships">
+  <c:date1904 val="0"/>
+  <c:chart>
+    <c:autoTitleDeleted val="1"/>
+    <c:plotArea>
+      <c:lineChart>
+        <c:grouping val="standard"/>
+        <c:varyColors val="0"/>
+        <c:ser>
+          <c:idx val="0"/>
+          <c:order val="0"/>
+          <c:tx>
+            <c:strRef>
+              <c:f>Sheet1!$B$1</c:f>
+              <c:strCache>
+                <c:ptCount val="1"/>
+                <c:pt idx="0">
+                  <c:v>SA</c:v>
+                </c:pt>
+              </c:strCache>
+            </c:strRef>
+          </c:tx>
+          <c:spPr>
+            <a:ln w="28575">
+              <a:solidFill>
+                <a:srgbClr val="D98A2B"/>
+              </a:solidFill>
+            </a:ln>
+          </c:spPr>
+          <c:marker>
+            <c:symbol val="none"/>
+          </c:marker>
+          <c:cat>
+            <c:strRef>
+              <c:f>Sheet1!$A$2:$A$9</c:f>
+              <c:strCache>
+                <c:ptCount val="8"/>
+                <c:pt idx="0">
+                  <c:v>Jul-24</c:v>
+                </c:pt>
+                <c:pt idx="1">
+                  <c:v>Oct-24</c:v>
+                </c:pt>
+                <c:pt idx="2">
+                  <c:v>Jan-25</c:v>
+                </c:pt>
+                <c:pt idx="3">
+                  <c:v>Apr-25</c:v>
+                </c:pt>
+                <c:pt idx="4">
+                  <c:v>Jul-25</c:v>
+                </c:pt>
+                <c:pt idx="5">
+                  <c:v>Oct-25</c:v>
+                </c:pt>
+                <c:pt idx="6">
+                  <c:v>Jan-26</c:v>
+                </c:pt>
+                <c:pt idx="7">
+                  <c:v>Apr-26</c:v>
+                </c:pt>
+              </c:strCache>
+            </c:strRef>
+          </c:cat>
+          <c:val>
+            <c:numRef>
+              <c:f>Sheet1!$B$2:$B$9</c:f>
+              <c:numCache>
+                <c:formatCode>"$"0</c:formatCode>
+                <c:ptCount val="8"/>
+                <c:pt idx="0">
+                  <c:v>890</c:v>
+                </c:pt>
+                <c:pt idx="1">
+                  <c:v>345</c:v>
+                </c:pt>
+                <c:pt idx="2">
+                  <c:v>382</c:v>
+                </c:pt>
+                <c:pt idx="3">
+                  <c:v>517</c:v>
+                </c:pt>
+                <c:pt idx="4">
+                  <c:v>376</c:v>
+                </c:pt>
+                <c:pt idx="5">
+                  <c:v>234</c:v>
+                </c:pt>
+                <c:pt idx="6">
+                  <c:v>526</c:v>
+                </c:pt>
+                <c:pt idx="7">
+                  <c:v>278</c:v>
+                </c:pt>
+              </c:numCache>
+            </c:numRef>
+          </c:val>
+          <c:smooth val="0"/>
+        </c:ser>
+        <c:ser>
+          <c:idx val="1"/>
+          <c:order val="1"/>
+          <c:tx>
+            <c:strRef>
+              <c:f>Sheet1!$C$1</c:f>
+              <c:strCache>
+                <c:ptCount val="1"/>
+                <c:pt idx="0">
+                  <c:v>NSW</c:v>
+                </c:pt>
+              </c:strCache>
+            </c:strRef>
+          </c:tx>
+          <c:spPr>
+            <a:ln w="28575">
+              <a:solidFill>
+                <a:srgbClr val="3B82C4"/>
+              </a:solidFill>
+            </a:ln>
+          </c:spPr>
+          <c:marker>
+            <c:symbol val="none"/>
+          </c:marker>
+          <c:cat>
+            <c:strRef>
+              <c:f>Sheet1!$A$2:$A$9</c:f>
+              <c:strCache>
+                <c:ptCount val="8"/>
+                <c:pt idx="0">
+                  <c:v>Jul-24</c:v>
+                </c:pt>
+                <c:pt idx="1">
+                  <c:v>Oct-24</c:v>
+                </c:pt>
+                <c:pt idx="2">
+                  <c:v>Jan-25</c:v>
+                </c:pt>
+                <c:pt idx="3">
+                  <c:v>Apr-25</c:v>
+                </c:pt>
+                <c:pt idx="4">
+                  <c:v>Jul-25</c:v>
+                </c:pt>
+                <c:pt idx="5">
+                  <c:v>Oct-25</c:v>
+                </c:pt>
+                <c:pt idx="6">
+                  <c:v>Jan-26</c:v>
+                </c:pt>
+                <c:pt idx="7">
+                  <c:v>Apr-26</c:v>
+                </c:pt>
+              </c:strCache>
+            </c:strRef>
+          </c:cat>
+          <c:val>
+            <c:numRef>
+              <c:f>Sheet1!$C$2:$C$9</c:f>
+              <c:numCache>
+                <c:formatCode>"$"0</c:formatCode>
+                <c:ptCount val="8"/>
+                <c:pt idx="0">
+                  <c:v>439</c:v>
+                </c:pt>
+                <c:pt idx="1">
+                  <c:v>761</c:v>
+                </c:pt>
+                <c:pt idx="2">
+                  <c:v>318</c:v>
+                </c:pt>
+                <c:pt idx="3">
+                  <c:v>685</c:v>
+                </c:pt>
+                <c:pt idx="4">
+                  <c:v>210</c:v>
+                </c:pt>
+                <c:pt idx="5">
+                  <c:v>321</c:v>
+                </c:pt>
+                <c:pt idx="6">
+                  <c:v>203</c:v>
+                </c:pt>
+                <c:pt idx="7">
+                  <c:v>90</c:v>
+                </c:pt>
+              </c:numCache>
+            </c:numRef>
+          </c:val>
+          <c:smooth val="0"/>
+        </c:ser>
+        <c:ser>
+          <c:idx val="2"/>
+          <c:order val="2"/>
+          <c:tx>
+            <c:strRef>
+              <c:f>Sheet1!$D$1</c:f>
+              <c:strCache>
+                <c:ptCount val="1"/>
+                <c:pt idx="0">
+                  <c:v>QLD</c:v>
+                </c:pt>
+              </c:strCache>
+            </c:strRef>
+          </c:tx>
+          <c:spPr>
+            <a:ln w="28575">
+              <a:solidFill>
+                <a:srgbClr val="C1494A"/>
+              </a:solidFill>
+            </a:ln>
+          </c:spPr>
+          <c:marker>
+            <c:symbol val="none"/>
+          </c:marker>
+          <c:cat>
+            <c:strRef>
+              <c:f>Sheet1!$A$2:$A$9</c:f>
+              <c:strCache>
+                <c:ptCount val="8"/>
+                <c:pt idx="0">
+                  <c:v>Jul-24</c:v>
+                </c:pt>
+                <c:pt idx="1">
+                  <c:v>Oct-24</c:v>
+                </c:pt>
+                <c:pt idx="2">
+                  <c:v>Jan-25</c:v>
+                </c:pt>
+                <c:pt idx="3">
+                  <c:v>Apr-25</c:v>
+                </c:pt>
+                <c:pt idx="4">
+                  <c:v>Jul-25</c:v>
+                </c:pt>
+                <c:pt idx="5">
+                  <c:v>Oct-25</c:v>
+                </c:pt>
+                <c:pt idx="6">
+                  <c:v>Jan-26</c:v>
+                </c:pt>
+                <c:pt idx="7">
+                  <c:v>Apr-26</c:v>
+                </c:pt>
+              </c:strCache>
+            </c:strRef>
+          </c:cat>
+          <c:val>
+            <c:numRef>
+              <c:f>Sheet1!$D$2:$D$9</c:f>
+              <c:numCache>
+                <c:formatCode>"$"0</c:formatCode>
+                <c:ptCount val="8"/>
+                <c:pt idx="0">
+                  <c:v>409</c:v>
+                </c:pt>
+                <c:pt idx="1">
+                  <c:v>603</c:v>
+                </c:pt>
+                <c:pt idx="2">
+                  <c:v>321</c:v>
+                </c:pt>
+                <c:pt idx="3">
+                  <c:v>460</c:v>
+                </c:pt>
+                <c:pt idx="4">
+                  <c:v>200</c:v>
+                </c:pt>
+                <c:pt idx="5">
+                  <c:v>165</c:v>
+                </c:pt>
+                <c:pt idx="6">
+                  <c:v>130</c:v>
+                </c:pt>
+                <c:pt idx="7">
+                  <c:v>99</c:v>
+                </c:pt>
+              </c:numCache>
+            </c:numRef>
+          </c:val>
+          <c:smooth val="0"/>
+        </c:ser>
+        <c:ser>
+          <c:idx val="3"/>
+          <c:order val="3"/>
+          <c:tx>
+            <c:strRef>
+              <c:f>Sheet1!$E$1</c:f>
+              <c:strCache>
+                <c:ptCount val="1"/>
+                <c:pt idx="0">
+                  <c:v>VIC</c:v>
+                </c:pt>
+              </c:strCache>
+            </c:strRef>
+          </c:tx>
+          <c:spPr>
+            <a:ln w="28575">
+              <a:solidFill>
+                <a:srgbClr val="7A5BD0"/>
+              </a:solidFill>
+            </a:ln>
+          </c:spPr>
+          <c:marker>
+            <c:symbol val="none"/>
+          </c:marker>
+          <c:cat>
+            <c:strRef>
+              <c:f>Sheet1!$A$2:$A$9</c:f>
+              <c:strCache>
+                <c:ptCount val="8"/>
+                <c:pt idx="0">
+                  <c:v>Jul-24</c:v>
+                </c:pt>
+                <c:pt idx="1">
+                  <c:v>Oct-24</c:v>
+                </c:pt>
+                <c:pt idx="2">
+                  <c:v>Jan-25</c:v>
+                </c:pt>
+                <c:pt idx="3">
+                  <c:v>Apr-25</c:v>
+                </c:pt>
+                <c:pt idx="4">
+                  <c:v>Jul-25</c:v>
+                </c:pt>
+                <c:pt idx="5">
+                  <c:v>Oct-25</c:v>
+                </c:pt>
+                <c:pt idx="6">
+                  <c:v>Jan-26</c:v>
+                </c:pt>
+                <c:pt idx="7">
+                  <c:v>Apr-26</c:v>
+                </c:pt>
+              </c:strCache>
+            </c:strRef>
+          </c:cat>
+          <c:val>
+            <c:numRef>
+              <c:f>Sheet1!$E$2:$E$9</c:f>
+              <c:numCache>
+                <c:formatCode>"$"0</c:formatCode>
+                <c:ptCount val="8"/>
+                <c:pt idx="0">
+                  <c:v>422</c:v>
+                </c:pt>
+                <c:pt idx="1">
+                  <c:v>234</c:v>
+                </c:pt>
+                <c:pt idx="2">
+                  <c:v>219</c:v>
+                </c:pt>
+                <c:pt idx="3">
+                  <c:v>516</c:v>
+                </c:pt>
+                <c:pt idx="4">
+                  <c:v>203</c:v>
+                </c:pt>
+                <c:pt idx="5">
+                  <c:v>157</c:v>
+                </c:pt>
+                <c:pt idx="6">
+                  <c:v>126</c:v>
+                </c:pt>
+                <c:pt idx="7">
+                  <c:v>99</c:v>
+                </c:pt>
+              </c:numCache>
+            </c:numRef>
+          </c:val>
+          <c:smooth val="0"/>
+        </c:ser>
+        <c:marker val="1"/>
+        <c:smooth val="0"/>
+        <c:axId val="2118791784"/>
+        <c:axId val="2140495176"/>
+      </c:lineChart>
+      <c:catAx>
+        <c:axId val="2118791784"/>
+        <c:scaling>
+          <c:orientation val="minMax"/>
+        </c:scaling>
+        <c:delete val="0"/>
+        <c:axPos val="b"/>
+        <c:majorTickMark val="none"/>
+        <c:minorTickMark val="none"/>
+        <c:tickLblPos val="nextTo"/>
+        <c:spPr>
+          <a:ln>
+            <a:solidFill>
+              <a:srgbClr val="D8DEE6"/>
+            </a:solidFill>
+          </a:ln>
+        </c:spPr>
+        <c:txPr>
+          <a:bodyPr/>
+          <a:lstStyle/>
+          <a:p>
+            <a:pPr>
+              <a:defRPr sz="900">
+                <a:latin typeface="Calibri"/>
+              </a:defRPr>
+            </a:pPr>
+          </a:p>
+        </c:txPr>
+        <c:crossAx val="2140495176"/>
+        <c:crosses val="autoZero"/>
+        <c:auto val="1"/>
+        <c:lblAlgn val="ctr"/>
+        <c:lblOffset val="100"/>
+        <c:noMultiLvlLbl val="0"/>
+      </c:catAx>
+      <c:valAx>
+        <c:axId val="2140495176"/>
+        <c:scaling/>
+        <c:delete val="0"/>
+        <c:axPos val="l"/>
+        <c:majorGridlines>
+          <c:spPr>
+            <a:ln>
+              <a:solidFill>
+                <a:srgbClr val="EAEEF2"/>
+              </a:solidFill>
+            </a:ln>
+          </c:spPr>
+        </c:majorGridlines>
+        <c:numFmt formatCode="&quot;$&quot;0" sourceLinked="0"/>
+        <c:majorTickMark val="none"/>
+        <c:minorTickMark val="none"/>
+        <c:tickLblPos val="nextTo"/>
+        <c:spPr>
+          <a:ln>
+            <a:noFill/>
+          </a:ln>
+        </c:spPr>
+        <c:txPr>
+          <a:bodyPr/>
+          <a:lstStyle/>
+          <a:p>
+            <a:pPr>
+              <a:defRPr sz="900">
+                <a:latin typeface="Calibri"/>
+              </a:defRPr>
+            </a:pPr>
+          </a:p>
+        </c:txPr>
+        <c:crossAx val="2118791784"/>
+        <c:crosses val="autoZero"/>
+      </c:valAx>
+    </c:plotArea>
+    <c:legend>
+      <c:legendPos val="b"/>
+      <c:layout/>
+      <c:overlay val="0"/>
+      <c:txPr>
+        <a:bodyPr/>
+        <a:lstStyle/>
+        <a:p>
+          <a:pPr>
+            <a:defRPr sz="1000">
+              <a:latin typeface="Calibri"/>
+            </a:defRPr>
+          </a:pPr>
+        </a:p>
+      </c:txPr>
+    </c:legend>
+    <c:plotVisOnly val="1"/>
+    <c:dispBlanksAs val="gap"/>
+    <c:showDLblsOverMax val="0"/>
+  </c:chart>
+  <c:txPr>
+    <a:bodyPr/>
+    <a:lstStyle/>
+    <a:p>
+      <a:pPr>
+        <a:defRPr sz="1800"/>
+      </a:pPr>
+      <a:endParaRPr lang="en-US"/>
+    </a:p>
+  </c:txPr>
+  <c:externalData r:id="rId1">
+    <c:autoUpdate val="0"/>
+  </c:externalData>
+</c:chartSpace>
+</file>
+
+<file path=ppt/charts/chart7.xml><?xml version="1.0" encoding="utf-8"?>
 <c:chartSpace xmlns:c="http://schemas.openxmlformats.org/drawingml/2006/chart" xmlns:a="http://schemas.openxmlformats.org/drawingml/2006/main" xmlns:r="http://schemas.openxmlformats.org/officeDocument/2006/relationships">
   <c:date1904 val="0"/>
   <c:chart>
@@ -16147,301 +16635,29 @@
                 </a:solidFill>
                 <a:latin typeface="Calibri"/>
               </a:rPr>
-              <a:t>The data on the table</a:t>
-            </a:r>
-          </a:p>
-        </p:txBody>
-      </p:sp>
-      <p:sp>
-        <p:nvSpPr>
-          <p:cNvPr id="6" name="TextBox 5"/>
-          <p:cNvSpPr txBox="1"/>
-          <p:nvPr/>
-        </p:nvSpPr>
-        <p:spPr>
-          <a:xfrm>
-            <a:off x="548640" y="1600200"/>
-            <a:ext cx="11064240" cy="4206240"/>
-          </a:xfrm>
-          <a:prstGeom prst="rect">
-            <a:avLst/>
-          </a:prstGeom>
-          <a:noFill/>
-        </p:spPr>
-        <p:txBody>
-          <a:bodyPr wrap="square" lIns="0" rIns="0" tIns="0" bIns="0">
-            <a:spAutoFit/>
-          </a:bodyPr>
-          <a:lstStyle/>
-          <a:p>
-            <a:pPr>
-              <a:lnSpc>
-                <a:spcPct val="105000"/>
-              </a:lnSpc>
-              <a:spcAft>
-                <a:spcPts val="1100"/>
-              </a:spcAft>
-            </a:pPr>
-            <a:r>
-              <a:rPr sz="1600" b="1">
-                <a:solidFill>
-                  <a:srgbClr val="B21E46"/>
-                </a:solidFill>
-                <a:latin typeface="Calibri"/>
-              </a:rPr>
-              <a:t>▸  </a:t>
-            </a:r>
-            <a:r>
-              <a:rPr sz="1600" b="0">
-                <a:solidFill>
-                  <a:srgbClr val="37424F"/>
-                </a:solidFill>
-                <a:latin typeface="Calibri"/>
-              </a:rPr>
-              <a:t>VIC </a:t>
-            </a:r>
-            <a:r>
-              <a:rPr sz="1600" b="1">
-                <a:solidFill>
-                  <a:srgbClr val="111820"/>
-                </a:solidFill>
-                <a:latin typeface="Calibri"/>
-              </a:rPr>
-              <a:t>solar value factor: 1.06× (2019) → 0.37× (2023–24 trough) → 0.67× (2026 YTD)</a:t>
-            </a:r>
-            <a:r>
-              <a:rPr sz="1600" b="0">
-                <a:solidFill>
-                  <a:srgbClr val="37424F"/>
-                </a:solidFill>
-                <a:latin typeface="Calibri"/>
-              </a:rPr>
-              <a:t>. It cycles.</a:t>
-            </a:r>
-          </a:p>
-          <a:p>
-            <a:pPr>
-              <a:lnSpc>
-                <a:spcPct val="105000"/>
-              </a:lnSpc>
-              <a:spcAft>
-                <a:spcPts val="1100"/>
-              </a:spcAft>
-            </a:pPr>
-            <a:r>
-              <a:rPr sz="1600" b="1">
-                <a:solidFill>
-                  <a:srgbClr val="B21E46"/>
-                </a:solidFill>
-                <a:latin typeface="Calibri"/>
-              </a:rPr>
-              <a:t>▸  </a:t>
-            </a:r>
-            <a:r>
-              <a:rPr sz="1600" b="0">
-                <a:solidFill>
-                  <a:srgbClr val="37424F"/>
-                </a:solidFill>
-                <a:latin typeface="Calibri"/>
-              </a:rPr>
-              <a:t>“</a:t>
-            </a:r>
-            <a:r>
-              <a:rPr sz="1600" b="1">
-                <a:solidFill>
-                  <a:srgbClr val="111820"/>
-                </a:solidFill>
-                <a:latin typeface="Calibri"/>
-              </a:rPr>
-              <a:t>Darkest before dawn</a:t>
-            </a:r>
-            <a:r>
-              <a:rPr sz="1600" b="0">
-                <a:solidFill>
-                  <a:srgbClr val="37424F"/>
-                </a:solidFill>
-                <a:latin typeface="Calibri"/>
-              </a:rPr>
-              <a:t>”: worst while coal floods the midday; as coal exits, evening scarcity returns value.</a:t>
-            </a:r>
-          </a:p>
-          <a:p>
-            <a:pPr>
-              <a:lnSpc>
-                <a:spcPct val="105000"/>
-              </a:lnSpc>
-              <a:spcAft>
-                <a:spcPts val="1100"/>
-              </a:spcAft>
-            </a:pPr>
-            <a:r>
-              <a:rPr sz="1600" b="1">
-                <a:solidFill>
-                  <a:srgbClr val="B21E46"/>
-                </a:solidFill>
-                <a:latin typeface="Calibri"/>
-              </a:rPr>
-              <a:t>▸  </a:t>
-            </a:r>
-            <a:r>
-              <a:rPr sz="1600" b="0">
-                <a:solidFill>
-                  <a:srgbClr val="37424F"/>
-                </a:solidFill>
-                <a:latin typeface="Calibri"/>
-              </a:rPr>
-              <a:t>Batteries: </a:t>
-            </a:r>
-            <a:r>
-              <a:rPr sz="1600" b="1">
-                <a:solidFill>
-                  <a:srgbClr val="111820"/>
-                </a:solidFill>
-                <a:latin typeface="Calibri"/>
-              </a:rPr>
-              <a:t>top-2hr spread ~$500–880 → ~$100–200</a:t>
-            </a:r>
-            <a:r>
-              <a:rPr sz="1600" b="0">
-                <a:solidFill>
-                  <a:srgbClr val="37424F"/>
-                </a:solidFill>
-                <a:latin typeface="Calibri"/>
-              </a:rPr>
-              <a:t> as the fleet grew 4 → 60 — but it spikes in volatile months.</a:t>
-            </a:r>
-          </a:p>
-          <a:p>
-            <a:pPr>
-              <a:lnSpc>
-                <a:spcPct val="105000"/>
-              </a:lnSpc>
-              <a:spcAft>
-                <a:spcPts val="1100"/>
-              </a:spcAft>
-            </a:pPr>
-            <a:r>
-              <a:rPr sz="1600" b="1">
-                <a:solidFill>
-                  <a:srgbClr val="B21E46"/>
-                </a:solidFill>
-                <a:latin typeface="Calibri"/>
-              </a:rPr>
-              <a:t>▸  </a:t>
-            </a:r>
-            <a:r>
-              <a:rPr sz="1600" b="0">
-                <a:solidFill>
-                  <a:srgbClr val="37424F"/>
-                </a:solidFill>
-                <a:latin typeface="Calibri"/>
-              </a:rPr>
-              <a:t>Compression is BESS </a:t>
-            </a:r>
-            <a:r>
-              <a:rPr sz="1600" b="1">
-                <a:solidFill>
-                  <a:srgbClr val="111820"/>
-                </a:solidFill>
-                <a:latin typeface="Calibri"/>
-              </a:rPr>
-              <a:t>and</a:t>
-            </a:r>
-            <a:r>
-              <a:rPr sz="1600" b="0">
-                <a:solidFill>
-                  <a:srgbClr val="37424F"/>
-                </a:solidFill>
-                <a:latin typeface="Calibri"/>
-              </a:rPr>
-              <a:t> benign conditions — coal still in, mild weather, high unit availability.</a:t>
-            </a:r>
-          </a:p>
-          <a:p>
-            <a:pPr>
-              <a:lnSpc>
-                <a:spcPct val="105000"/>
-              </a:lnSpc>
-              <a:spcAft>
-                <a:spcPts val="1100"/>
-              </a:spcAft>
-            </a:pPr>
-            <a:r>
-              <a:rPr sz="1600" b="1">
-                <a:solidFill>
-                  <a:srgbClr val="B21E46"/>
-                </a:solidFill>
-                <a:latin typeface="Calibri"/>
-              </a:rPr>
-              <a:t>▸  </a:t>
-            </a:r>
-            <a:r>
-              <a:rPr sz="1600" b="0">
-                <a:solidFill>
-                  <a:srgbClr val="37424F"/>
-                </a:solidFill>
-                <a:latin typeface="Calibri"/>
-              </a:rPr>
-              <a:t>The fleet: </a:t>
-            </a:r>
-            <a:r>
-              <a:rPr sz="1600" b="1">
-                <a:solidFill>
-                  <a:srgbClr val="111820"/>
-                </a:solidFill>
-                <a:latin typeface="Calibri"/>
-              </a:rPr>
-              <a:t>~65 batteries / 12.3 GW / 24 GWh operating; ~8 GW / 21 GWh committed</a:t>
-            </a:r>
-            <a:r>
-              <a:rPr sz="1600" b="0">
-                <a:solidFill>
-                  <a:srgbClr val="37424F"/>
-                </a:solidFill>
-                <a:latin typeface="Calibri"/>
-              </a:rPr>
-              <a:t> and building.</a:t>
-            </a:r>
-          </a:p>
-          <a:p>
-            <a:pPr>
-              <a:lnSpc>
-                <a:spcPct val="105000"/>
-              </a:lnSpc>
-              <a:spcAft>
-                <a:spcPts val="1100"/>
-              </a:spcAft>
-            </a:pPr>
-            <a:r>
-              <a:rPr sz="1600" b="1">
-                <a:solidFill>
-                  <a:srgbClr val="B21E46"/>
-                </a:solidFill>
-                <a:latin typeface="Calibri"/>
-              </a:rPr>
-              <a:t>▸  </a:t>
-            </a:r>
-            <a:r>
-              <a:rPr sz="1600" b="1">
-                <a:solidFill>
-                  <a:srgbClr val="111820"/>
-                </a:solidFill>
-                <a:latin typeface="Calibri"/>
-              </a:rPr>
-              <a:t>FCAS revenue fell ~90–95%</a:t>
-            </a:r>
-            <a:r>
-              <a:rPr sz="1600" b="0">
-                <a:solidFill>
-                  <a:srgbClr val="37424F"/>
-                </a:solidFill>
-                <a:latin typeface="Calibri"/>
-              </a:rPr>
-              <a:t> in five years — a whole stream competed to near-zero.</a:t>
-            </a:r>
-          </a:p>
-        </p:txBody>
-      </p:sp>
+              <a:t>Battery spread by state, over time</a:t>
+            </a:r>
+          </a:p>
+        </p:txBody>
+      </p:sp>
+      <p:graphicFrame>
+        <p:nvGraphicFramePr>
+          <p:cNvPr id="6" name="Chart 5"/>
+          <p:cNvGraphicFramePr>
+            <a:graphicFrameLocks noGrp="1"/>
+          </p:cNvGraphicFramePr>
+          <p:nvPr/>
+        </p:nvGraphicFramePr>
+        <p:xfrm>
+          <a:off x="548640" y="1554480"/>
+          <a:ext cx="11064240" cy="4114800"/>
+        </p:xfrm>
+        <a:graphic>
+          <a:graphicData uri="http://schemas.openxmlformats.org/drawingml/2006/chart">
+            <c:chart xmlns:c="http://schemas.openxmlformats.org/drawingml/2006/chart" r:id="rId2"/>
+          </a:graphicData>
+        </a:graphic>
+      </p:graphicFrame>
       <p:sp>
         <p:nvSpPr>
           <p:cNvPr id="7" name="Rectangle 6"/>
@@ -16450,8 +16666,8 @@
         </p:nvSpPr>
         <p:spPr>
           <a:xfrm>
-            <a:off x="548640" y="5669280"/>
-            <a:ext cx="11064240" cy="685800"/>
+            <a:off x="548640" y="5806440"/>
+            <a:ext cx="11064240" cy="566928"/>
           </a:xfrm>
           <a:prstGeom prst="rect">
             <a:avLst/>
@@ -16461,7 +16677,7 @@
           </a:solidFill>
           <a:ln w="9525">
             <a:solidFill>
-              <a:srgbClr val="D8DEE6"/>
+              <a:srgbClr val="B21E46"/>
             </a:solidFill>
           </a:ln>
           <a:effectLst/>
@@ -16496,7 +16712,7 @@
         </p:nvSpPr>
         <p:spPr>
           <a:xfrm>
-            <a:off x="731520" y="5779008"/>
+            <a:off x="731520" y="5852160"/>
             <a:ext cx="10698480" cy="457200"/>
           </a:xfrm>
           <a:prstGeom prst="rect">
@@ -16522,13 +16738,22 @@
               </a:spcAft>
             </a:pPr>
             <a:r>
-              <a:rPr sz="1350" b="0" i="1">
+              <a:rPr sz="1200" b="1" i="0">
+                <a:solidFill>
+                  <a:srgbClr val="B21E46"/>
+                </a:solidFill>
+                <a:latin typeface="Consolas"/>
+              </a:rPr>
+              <a:t>Takeaway  </a:t>
+            </a:r>
+            <a:r>
+              <a:rPr sz="1400" b="0" i="0">
                 <a:solidFill>
                   <a:srgbClr val="37424F"/>
                 </a:solidFill>
                 <a:latin typeface="Calibri"/>
               </a:rPr>
-              <a:t>Value factor is a generation idea; a battery's analog is the spread. Both erode as you build — and both cycle.</a:t>
+              <a:t>SA stays the widest and most volatile; NSW, QLD and VIC have converged toward ~$100 as their fleets filled in.</a:t>
             </a:r>
           </a:p>
         </p:txBody>
@@ -16769,30 +16994,322 @@
                 </a:solidFill>
                 <a:latin typeface="Calibri"/>
               </a:rPr>
-              <a:t>Provocations — take a position</a:t>
-            </a:r>
-          </a:p>
-        </p:txBody>
-      </p:sp>
-      <p:sp>
-        <p:nvSpPr>
-          <p:cNvPr id="6" name="Rectangle 5"/>
+              <a:t>The data on the table</a:t>
+            </a:r>
+          </a:p>
+        </p:txBody>
+      </p:sp>
+      <p:sp>
+        <p:nvSpPr>
+          <p:cNvPr id="6" name="TextBox 5"/>
+          <p:cNvSpPr txBox="1"/>
+          <p:nvPr/>
+        </p:nvSpPr>
+        <p:spPr>
+          <a:xfrm>
+            <a:off x="548640" y="1600200"/>
+            <a:ext cx="11064240" cy="4206240"/>
+          </a:xfrm>
+          <a:prstGeom prst="rect">
+            <a:avLst/>
+          </a:prstGeom>
+          <a:noFill/>
+        </p:spPr>
+        <p:txBody>
+          <a:bodyPr wrap="square" lIns="0" rIns="0" tIns="0" bIns="0">
+            <a:spAutoFit/>
+          </a:bodyPr>
+          <a:lstStyle/>
+          <a:p>
+            <a:pPr>
+              <a:lnSpc>
+                <a:spcPct val="105000"/>
+              </a:lnSpc>
+              <a:spcAft>
+                <a:spcPts val="1100"/>
+              </a:spcAft>
+            </a:pPr>
+            <a:r>
+              <a:rPr sz="1600" b="1">
+                <a:solidFill>
+                  <a:srgbClr val="B21E46"/>
+                </a:solidFill>
+                <a:latin typeface="Calibri"/>
+              </a:rPr>
+              <a:t>▸  </a:t>
+            </a:r>
+            <a:r>
+              <a:rPr sz="1600" b="0">
+                <a:solidFill>
+                  <a:srgbClr val="37424F"/>
+                </a:solidFill>
+                <a:latin typeface="Calibri"/>
+              </a:rPr>
+              <a:t>VIC </a:t>
+            </a:r>
+            <a:r>
+              <a:rPr sz="1600" b="1">
+                <a:solidFill>
+                  <a:srgbClr val="111820"/>
+                </a:solidFill>
+                <a:latin typeface="Calibri"/>
+              </a:rPr>
+              <a:t>solar value factor: 1.06× (2019) → 0.37× (2023–24 trough) → 0.67× (2026 YTD)</a:t>
+            </a:r>
+            <a:r>
+              <a:rPr sz="1600" b="0">
+                <a:solidFill>
+                  <a:srgbClr val="37424F"/>
+                </a:solidFill>
+                <a:latin typeface="Calibri"/>
+              </a:rPr>
+              <a:t>. It cycles.</a:t>
+            </a:r>
+          </a:p>
+          <a:p>
+            <a:pPr>
+              <a:lnSpc>
+                <a:spcPct val="105000"/>
+              </a:lnSpc>
+              <a:spcAft>
+                <a:spcPts val="1100"/>
+              </a:spcAft>
+            </a:pPr>
+            <a:r>
+              <a:rPr sz="1600" b="1">
+                <a:solidFill>
+                  <a:srgbClr val="B21E46"/>
+                </a:solidFill>
+                <a:latin typeface="Calibri"/>
+              </a:rPr>
+              <a:t>▸  </a:t>
+            </a:r>
+            <a:r>
+              <a:rPr sz="1600" b="0">
+                <a:solidFill>
+                  <a:srgbClr val="37424F"/>
+                </a:solidFill>
+                <a:latin typeface="Calibri"/>
+              </a:rPr>
+              <a:t>“</a:t>
+            </a:r>
+            <a:r>
+              <a:rPr sz="1600" b="1">
+                <a:solidFill>
+                  <a:srgbClr val="111820"/>
+                </a:solidFill>
+                <a:latin typeface="Calibri"/>
+              </a:rPr>
+              <a:t>Darkest before dawn</a:t>
+            </a:r>
+            <a:r>
+              <a:rPr sz="1600" b="0">
+                <a:solidFill>
+                  <a:srgbClr val="37424F"/>
+                </a:solidFill>
+                <a:latin typeface="Calibri"/>
+              </a:rPr>
+              <a:t>”: worst while coal floods the midday; as coal exits, evening scarcity returns value.</a:t>
+            </a:r>
+          </a:p>
+          <a:p>
+            <a:pPr>
+              <a:lnSpc>
+                <a:spcPct val="105000"/>
+              </a:lnSpc>
+              <a:spcAft>
+                <a:spcPts val="1100"/>
+              </a:spcAft>
+            </a:pPr>
+            <a:r>
+              <a:rPr sz="1600" b="1">
+                <a:solidFill>
+                  <a:srgbClr val="B21E46"/>
+                </a:solidFill>
+                <a:latin typeface="Calibri"/>
+              </a:rPr>
+              <a:t>▸  </a:t>
+            </a:r>
+            <a:r>
+              <a:rPr sz="1600" b="0">
+                <a:solidFill>
+                  <a:srgbClr val="37424F"/>
+                </a:solidFill>
+                <a:latin typeface="Calibri"/>
+              </a:rPr>
+              <a:t>Batteries: </a:t>
+            </a:r>
+            <a:r>
+              <a:rPr sz="1600" b="1">
+                <a:solidFill>
+                  <a:srgbClr val="111820"/>
+                </a:solidFill>
+                <a:latin typeface="Calibri"/>
+              </a:rPr>
+              <a:t>top-2hr spread ~$500–880 → ~$100–200</a:t>
+            </a:r>
+            <a:r>
+              <a:rPr sz="1600" b="0">
+                <a:solidFill>
+                  <a:srgbClr val="37424F"/>
+                </a:solidFill>
+                <a:latin typeface="Calibri"/>
+              </a:rPr>
+              <a:t> as the fleet grew 4 → 60 — but it spikes in volatile months.</a:t>
+            </a:r>
+          </a:p>
+          <a:p>
+            <a:pPr>
+              <a:lnSpc>
+                <a:spcPct val="105000"/>
+              </a:lnSpc>
+              <a:spcAft>
+                <a:spcPts val="1100"/>
+              </a:spcAft>
+            </a:pPr>
+            <a:r>
+              <a:rPr sz="1600" b="1">
+                <a:solidFill>
+                  <a:srgbClr val="B21E46"/>
+                </a:solidFill>
+                <a:latin typeface="Calibri"/>
+              </a:rPr>
+              <a:t>▸  </a:t>
+            </a:r>
+            <a:r>
+              <a:rPr sz="1600" b="0">
+                <a:solidFill>
+                  <a:srgbClr val="37424F"/>
+                </a:solidFill>
+                <a:latin typeface="Calibri"/>
+              </a:rPr>
+              <a:t>Compression is BESS </a:t>
+            </a:r>
+            <a:r>
+              <a:rPr sz="1600" b="1">
+                <a:solidFill>
+                  <a:srgbClr val="111820"/>
+                </a:solidFill>
+                <a:latin typeface="Calibri"/>
+              </a:rPr>
+              <a:t>and</a:t>
+            </a:r>
+            <a:r>
+              <a:rPr sz="1600" b="0">
+                <a:solidFill>
+                  <a:srgbClr val="37424F"/>
+                </a:solidFill>
+                <a:latin typeface="Calibri"/>
+              </a:rPr>
+              <a:t> benign conditions — coal still in, mild weather, high unit availability.</a:t>
+            </a:r>
+          </a:p>
+          <a:p>
+            <a:pPr>
+              <a:lnSpc>
+                <a:spcPct val="105000"/>
+              </a:lnSpc>
+              <a:spcAft>
+                <a:spcPts val="1100"/>
+              </a:spcAft>
+            </a:pPr>
+            <a:r>
+              <a:rPr sz="1600" b="1">
+                <a:solidFill>
+                  <a:srgbClr val="B21E46"/>
+                </a:solidFill>
+                <a:latin typeface="Calibri"/>
+              </a:rPr>
+              <a:t>▸  </a:t>
+            </a:r>
+            <a:r>
+              <a:rPr sz="1600" b="0">
+                <a:solidFill>
+                  <a:srgbClr val="37424F"/>
+                </a:solidFill>
+                <a:latin typeface="Calibri"/>
+              </a:rPr>
+              <a:t>The fleet: </a:t>
+            </a:r>
+            <a:r>
+              <a:rPr sz="1600" b="1">
+                <a:solidFill>
+                  <a:srgbClr val="111820"/>
+                </a:solidFill>
+                <a:latin typeface="Calibri"/>
+              </a:rPr>
+              <a:t>~65 batteries / 12.3 GW / 24 GWh operating; ~8 GW / 21 GWh committed</a:t>
+            </a:r>
+            <a:r>
+              <a:rPr sz="1600" b="0">
+                <a:solidFill>
+                  <a:srgbClr val="37424F"/>
+                </a:solidFill>
+                <a:latin typeface="Calibri"/>
+              </a:rPr>
+              <a:t> and building.</a:t>
+            </a:r>
+          </a:p>
+          <a:p>
+            <a:pPr>
+              <a:lnSpc>
+                <a:spcPct val="105000"/>
+              </a:lnSpc>
+              <a:spcAft>
+                <a:spcPts val="1100"/>
+              </a:spcAft>
+            </a:pPr>
+            <a:r>
+              <a:rPr sz="1600" b="1">
+                <a:solidFill>
+                  <a:srgbClr val="B21E46"/>
+                </a:solidFill>
+                <a:latin typeface="Calibri"/>
+              </a:rPr>
+              <a:t>▸  </a:t>
+            </a:r>
+            <a:r>
+              <a:rPr sz="1600" b="1">
+                <a:solidFill>
+                  <a:srgbClr val="111820"/>
+                </a:solidFill>
+                <a:latin typeface="Calibri"/>
+              </a:rPr>
+              <a:t>FCAS revenue fell ~90–95%</a:t>
+            </a:r>
+            <a:r>
+              <a:rPr sz="1600" b="0">
+                <a:solidFill>
+                  <a:srgbClr val="37424F"/>
+                </a:solidFill>
+                <a:latin typeface="Calibri"/>
+              </a:rPr>
+              <a:t> in five years — a whole stream competed to near-zero.</a:t>
+            </a:r>
+          </a:p>
+        </p:txBody>
+      </p:sp>
+      <p:sp>
+        <p:nvSpPr>
+          <p:cNvPr id="7" name="Rectangle 6"/>
           <p:cNvSpPr/>
           <p:nvPr/>
         </p:nvSpPr>
         <p:spPr>
           <a:xfrm>
-            <a:off x="548640" y="1600200"/>
-            <a:ext cx="457200" cy="457200"/>
+            <a:off x="548640" y="5669280"/>
+            <a:ext cx="11064240" cy="685800"/>
           </a:xfrm>
           <a:prstGeom prst="rect">
             <a:avLst/>
           </a:prstGeom>
           <a:solidFill>
-            <a:srgbClr val="B21E46"/>
+            <a:srgbClr val="F4F6F9"/>
           </a:solidFill>
-          <a:ln>
-            <a:noFill/>
+          <a:ln w="9525">
+            <a:solidFill>
+              <a:srgbClr val="D8DEE6"/>
+            </a:solidFill>
           </a:ln>
           <a:effectLst/>
         </p:spPr>
@@ -16820,59 +17337,14 @@
       </p:sp>
       <p:sp>
         <p:nvSpPr>
-          <p:cNvPr id="7" name="TextBox 6"/>
-          <p:cNvSpPr txBox="1"/>
-          <p:nvPr/>
-        </p:nvSpPr>
-        <p:spPr>
-          <a:xfrm>
-            <a:off x="548640" y="1600200"/>
-            <a:ext cx="457200" cy="457200"/>
-          </a:xfrm>
-          <a:prstGeom prst="rect">
-            <a:avLst/>
-          </a:prstGeom>
-          <a:noFill/>
-        </p:spPr>
-        <p:txBody>
-          <a:bodyPr wrap="square" anchor="ctr" lIns="0" rIns="0" tIns="0" bIns="0">
-            <a:spAutoFit/>
-          </a:bodyPr>
-          <a:lstStyle/>
-          <a:p>
-            <a:pPr algn="ctr">
-              <a:lnSpc>
-                <a:spcPct val="106000"/>
-              </a:lnSpc>
-              <a:spcBef>
-                <a:spcPts val="0"/>
-              </a:spcBef>
-              <a:spcAft>
-                <a:spcPts val="600"/>
-              </a:spcAft>
-            </a:pPr>
-            <a:r>
-              <a:rPr sz="1800" b="1" i="0">
-                <a:solidFill>
-                  <a:srgbClr val="FFFFFF"/>
-                </a:solidFill>
-                <a:latin typeface="Calibri"/>
-              </a:rPr>
-              <a:t>A</a:t>
-            </a:r>
-          </a:p>
-        </p:txBody>
-      </p:sp>
-      <p:sp>
-        <p:nvSpPr>
           <p:cNvPr id="8" name="TextBox 7"/>
           <p:cNvSpPr txBox="1"/>
           <p:nvPr/>
         </p:nvSpPr>
         <p:spPr>
           <a:xfrm>
-            <a:off x="1188720" y="1618488"/>
-            <a:ext cx="10332720" cy="731520"/>
+            <a:off x="731520" y="5779008"/>
+            <a:ext cx="10698480" cy="457200"/>
           </a:xfrm>
           <a:prstGeom prst="rect">
             <a:avLst/>
@@ -16897,558 +17369,20 @@
               </a:spcAft>
             </a:pPr>
             <a:r>
-              <a:rPr sz="1600" b="0" i="0">
+              <a:rPr sz="1350" b="0" i="1">
                 <a:solidFill>
                   <a:srgbClr val="37424F"/>
                 </a:solidFill>
                 <a:latin typeface="Calibri"/>
               </a:rPr>
-              <a:t>Is the value-factor trough permanent, or does coal-exit evening scarcity bring it back?</a:t>
-            </a:r>
-          </a:p>
-        </p:txBody>
-      </p:sp>
-      <p:sp>
-        <p:nvSpPr>
-          <p:cNvPr id="9" name="Rectangle 8"/>
-          <p:cNvSpPr/>
-          <p:nvPr/>
-        </p:nvSpPr>
-        <p:spPr>
-          <a:xfrm>
-            <a:off x="548640" y="2441448"/>
-            <a:ext cx="457200" cy="457200"/>
-          </a:xfrm>
-          <a:prstGeom prst="rect">
-            <a:avLst/>
-          </a:prstGeom>
-          <a:solidFill>
-            <a:srgbClr val="B21E46"/>
-          </a:solidFill>
-          <a:ln>
-            <a:noFill/>
-          </a:ln>
-          <a:effectLst/>
-        </p:spPr>
-        <p:style>
-          <a:lnRef idx="1">
-            <a:schemeClr val="accent1"/>
-          </a:lnRef>
-          <a:fillRef idx="3">
-            <a:schemeClr val="accent1"/>
-          </a:fillRef>
-          <a:effectRef idx="2">
-            <a:schemeClr val="accent1"/>
-          </a:effectRef>
-          <a:fontRef idx="minor">
-            <a:schemeClr val="lt1"/>
-          </a:fontRef>
-        </p:style>
-        <p:txBody>
-          <a:bodyPr rtlCol="0" anchor="ctr"/>
-          <a:lstStyle/>
-          <a:p>
-            <a:pPr algn="ctr"/>
-          </a:p>
-        </p:txBody>
-      </p:sp>
-      <p:sp>
-        <p:nvSpPr>
-          <p:cNvPr id="10" name="TextBox 9"/>
-          <p:cNvSpPr txBox="1"/>
-          <p:nvPr/>
-        </p:nvSpPr>
-        <p:spPr>
-          <a:xfrm>
-            <a:off x="548640" y="2441448"/>
-            <a:ext cx="457200" cy="457200"/>
-          </a:xfrm>
-          <a:prstGeom prst="rect">
-            <a:avLst/>
-          </a:prstGeom>
-          <a:noFill/>
-        </p:spPr>
-        <p:txBody>
-          <a:bodyPr wrap="square" anchor="ctr" lIns="0" rIns="0" tIns="0" bIns="0">
-            <a:spAutoFit/>
-          </a:bodyPr>
-          <a:lstStyle/>
-          <a:p>
-            <a:pPr algn="ctr">
-              <a:lnSpc>
-                <a:spcPct val="106000"/>
-              </a:lnSpc>
-              <a:spcBef>
-                <a:spcPts val="0"/>
-              </a:spcBef>
-              <a:spcAft>
-                <a:spcPts val="600"/>
-              </a:spcAft>
-            </a:pPr>
-            <a:r>
-              <a:rPr sz="1800" b="1" i="0">
-                <a:solidFill>
-                  <a:srgbClr val="FFFFFF"/>
-                </a:solidFill>
-                <a:latin typeface="Calibri"/>
-              </a:rPr>
-              <a:t>B</a:t>
-            </a:r>
-          </a:p>
-        </p:txBody>
-      </p:sp>
-      <p:sp>
-        <p:nvSpPr>
-          <p:cNvPr id="11" name="TextBox 10"/>
-          <p:cNvSpPr txBox="1"/>
-          <p:nvPr/>
-        </p:nvSpPr>
-        <p:spPr>
-          <a:xfrm>
-            <a:off x="1188720" y="2459736"/>
-            <a:ext cx="10332720" cy="731520"/>
-          </a:xfrm>
-          <a:prstGeom prst="rect">
-            <a:avLst/>
-          </a:prstGeom>
-          <a:noFill/>
-        </p:spPr>
-        <p:txBody>
-          <a:bodyPr wrap="square" anchor="ctr" lIns="0" rIns="0" tIns="0" bIns="0">
-            <a:spAutoFit/>
-          </a:bodyPr>
-          <a:lstStyle/>
-          <a:p>
-            <a:pPr algn="l">
-              <a:lnSpc>
-                <a:spcPct val="106000"/>
-              </a:lnSpc>
-              <a:spcBef>
-                <a:spcPts val="0"/>
-              </a:spcBef>
-              <a:spcAft>
-                <a:spcPts val="600"/>
-              </a:spcAft>
-            </a:pPr>
-            <a:r>
-              <a:rPr sz="1600" b="0" i="0">
-                <a:solidFill>
-                  <a:srgbClr val="37424F"/>
-                </a:solidFill>
-                <a:latin typeface="Calibri"/>
-              </a:rPr>
-              <a:t>Does that change whether — or when — you build, and whether to firm it?</a:t>
-            </a:r>
-          </a:p>
-        </p:txBody>
-      </p:sp>
-      <p:sp>
-        <p:nvSpPr>
-          <p:cNvPr id="12" name="Rectangle 11"/>
-          <p:cNvSpPr/>
-          <p:nvPr/>
-        </p:nvSpPr>
-        <p:spPr>
-          <a:xfrm>
-            <a:off x="548640" y="3282696"/>
-            <a:ext cx="457200" cy="457200"/>
-          </a:xfrm>
-          <a:prstGeom prst="rect">
-            <a:avLst/>
-          </a:prstGeom>
-          <a:solidFill>
-            <a:srgbClr val="B21E46"/>
-          </a:solidFill>
-          <a:ln>
-            <a:noFill/>
-          </a:ln>
-          <a:effectLst/>
-        </p:spPr>
-        <p:style>
-          <a:lnRef idx="1">
-            <a:schemeClr val="accent1"/>
-          </a:lnRef>
-          <a:fillRef idx="3">
-            <a:schemeClr val="accent1"/>
-          </a:fillRef>
-          <a:effectRef idx="2">
-            <a:schemeClr val="accent1"/>
-          </a:effectRef>
-          <a:fontRef idx="minor">
-            <a:schemeClr val="lt1"/>
-          </a:fontRef>
-        </p:style>
-        <p:txBody>
-          <a:bodyPr rtlCol="0" anchor="ctr"/>
-          <a:lstStyle/>
-          <a:p>
-            <a:pPr algn="ctr"/>
-          </a:p>
-        </p:txBody>
-      </p:sp>
-      <p:sp>
-        <p:nvSpPr>
-          <p:cNvPr id="13" name="TextBox 12"/>
-          <p:cNvSpPr txBox="1"/>
-          <p:nvPr/>
-        </p:nvSpPr>
-        <p:spPr>
-          <a:xfrm>
-            <a:off x="548640" y="3282696"/>
-            <a:ext cx="457200" cy="457200"/>
-          </a:xfrm>
-          <a:prstGeom prst="rect">
-            <a:avLst/>
-          </a:prstGeom>
-          <a:noFill/>
-        </p:spPr>
-        <p:txBody>
-          <a:bodyPr wrap="square" anchor="ctr" lIns="0" rIns="0" tIns="0" bIns="0">
-            <a:spAutoFit/>
-          </a:bodyPr>
-          <a:lstStyle/>
-          <a:p>
-            <a:pPr algn="ctr">
-              <a:lnSpc>
-                <a:spcPct val="106000"/>
-              </a:lnSpc>
-              <a:spcBef>
-                <a:spcPts val="0"/>
-              </a:spcBef>
-              <a:spcAft>
-                <a:spcPts val="600"/>
-              </a:spcAft>
-            </a:pPr>
-            <a:r>
-              <a:rPr sz="1800" b="1" i="0">
-                <a:solidFill>
-                  <a:srgbClr val="FFFFFF"/>
-                </a:solidFill>
-                <a:latin typeface="Calibri"/>
-              </a:rPr>
-              <a:t>C</a:t>
-            </a:r>
-          </a:p>
-        </p:txBody>
-      </p:sp>
-      <p:sp>
-        <p:nvSpPr>
-          <p:cNvPr id="14" name="TextBox 13"/>
-          <p:cNvSpPr txBox="1"/>
-          <p:nvPr/>
-        </p:nvSpPr>
-        <p:spPr>
-          <a:xfrm>
-            <a:off x="1188720" y="3300984"/>
-            <a:ext cx="10332720" cy="731520"/>
-          </a:xfrm>
-          <a:prstGeom prst="rect">
-            <a:avLst/>
-          </a:prstGeom>
-          <a:noFill/>
-        </p:spPr>
-        <p:txBody>
-          <a:bodyPr wrap="square" anchor="ctr" lIns="0" rIns="0" tIns="0" bIns="0">
-            <a:spAutoFit/>
-          </a:bodyPr>
-          <a:lstStyle/>
-          <a:p>
-            <a:pPr algn="l">
-              <a:lnSpc>
-                <a:spcPct val="106000"/>
-              </a:lnSpc>
-              <a:spcBef>
-                <a:spcPts val="0"/>
-              </a:spcBef>
-              <a:spcAft>
-                <a:spcPts val="600"/>
-              </a:spcAft>
-            </a:pPr>
-            <a:r>
-              <a:rPr sz="1600" b="0" i="0">
-                <a:solidFill>
-                  <a:srgbClr val="37424F"/>
-                </a:solidFill>
-                <a:latin typeface="Calibri"/>
-              </a:rPr>
-              <a:t>The battery spread is compressing — is it BESS, benign conditions, or both? What happens next cycle?</a:t>
-            </a:r>
-          </a:p>
-        </p:txBody>
-      </p:sp>
-      <p:sp>
-        <p:nvSpPr>
-          <p:cNvPr id="15" name="Rectangle 14"/>
-          <p:cNvSpPr/>
-          <p:nvPr/>
-        </p:nvSpPr>
-        <p:spPr>
-          <a:xfrm>
-            <a:off x="548640" y="4123944"/>
-            <a:ext cx="457200" cy="457200"/>
-          </a:xfrm>
-          <a:prstGeom prst="rect">
-            <a:avLst/>
-          </a:prstGeom>
-          <a:solidFill>
-            <a:srgbClr val="B21E46"/>
-          </a:solidFill>
-          <a:ln>
-            <a:noFill/>
-          </a:ln>
-          <a:effectLst/>
-        </p:spPr>
-        <p:style>
-          <a:lnRef idx="1">
-            <a:schemeClr val="accent1"/>
-          </a:lnRef>
-          <a:fillRef idx="3">
-            <a:schemeClr val="accent1"/>
-          </a:fillRef>
-          <a:effectRef idx="2">
-            <a:schemeClr val="accent1"/>
-          </a:effectRef>
-          <a:fontRef idx="minor">
-            <a:schemeClr val="lt1"/>
-          </a:fontRef>
-        </p:style>
-        <p:txBody>
-          <a:bodyPr rtlCol="0" anchor="ctr"/>
-          <a:lstStyle/>
-          <a:p>
-            <a:pPr algn="ctr"/>
-          </a:p>
-        </p:txBody>
-      </p:sp>
-      <p:sp>
-        <p:nvSpPr>
-          <p:cNvPr id="16" name="TextBox 15"/>
-          <p:cNvSpPr txBox="1"/>
-          <p:nvPr/>
-        </p:nvSpPr>
-        <p:spPr>
-          <a:xfrm>
-            <a:off x="548640" y="4123944"/>
-            <a:ext cx="457200" cy="457200"/>
-          </a:xfrm>
-          <a:prstGeom prst="rect">
-            <a:avLst/>
-          </a:prstGeom>
-          <a:noFill/>
-        </p:spPr>
-        <p:txBody>
-          <a:bodyPr wrap="square" anchor="ctr" lIns="0" rIns="0" tIns="0" bIns="0">
-            <a:spAutoFit/>
-          </a:bodyPr>
-          <a:lstStyle/>
-          <a:p>
-            <a:pPr algn="ctr">
-              <a:lnSpc>
-                <a:spcPct val="106000"/>
-              </a:lnSpc>
-              <a:spcBef>
-                <a:spcPts val="0"/>
-              </a:spcBef>
-              <a:spcAft>
-                <a:spcPts val="600"/>
-              </a:spcAft>
-            </a:pPr>
-            <a:r>
-              <a:rPr sz="1800" b="1" i="0">
-                <a:solidFill>
-                  <a:srgbClr val="FFFFFF"/>
-                </a:solidFill>
-                <a:latin typeface="Calibri"/>
-              </a:rPr>
-              <a:t>D</a:t>
-            </a:r>
-          </a:p>
-        </p:txBody>
-      </p:sp>
-      <p:sp>
-        <p:nvSpPr>
-          <p:cNvPr id="17" name="TextBox 16"/>
-          <p:cNvSpPr txBox="1"/>
-          <p:nvPr/>
-        </p:nvSpPr>
-        <p:spPr>
-          <a:xfrm>
-            <a:off x="1188720" y="4142232"/>
-            <a:ext cx="10332720" cy="731520"/>
-          </a:xfrm>
-          <a:prstGeom prst="rect">
-            <a:avLst/>
-          </a:prstGeom>
-          <a:noFill/>
-        </p:spPr>
-        <p:txBody>
-          <a:bodyPr wrap="square" anchor="ctr" lIns="0" rIns="0" tIns="0" bIns="0">
-            <a:spAutoFit/>
-          </a:bodyPr>
-          <a:lstStyle/>
-          <a:p>
-            <a:pPr algn="l">
-              <a:lnSpc>
-                <a:spcPct val="106000"/>
-              </a:lnSpc>
-              <a:spcBef>
-                <a:spcPts val="0"/>
-              </a:spcBef>
-              <a:spcAft>
-                <a:spcPts val="600"/>
-              </a:spcAft>
-            </a:pPr>
-            <a:r>
-              <a:rPr sz="1600" b="0" i="0">
-                <a:solidFill>
-                  <a:srgbClr val="37424F"/>
-                </a:solidFill>
-                <a:latin typeface="Calibri"/>
-              </a:rPr>
-              <a:t>Would you build another unfirmed solar farm in this market?</a:t>
-            </a:r>
-          </a:p>
-        </p:txBody>
-      </p:sp>
-      <p:sp>
-        <p:nvSpPr>
-          <p:cNvPr id="18" name="Rectangle 17"/>
-          <p:cNvSpPr/>
-          <p:nvPr/>
-        </p:nvSpPr>
-        <p:spPr>
-          <a:xfrm>
-            <a:off x="548640" y="5532120"/>
-            <a:ext cx="11064240" cy="777240"/>
-          </a:xfrm>
-          <a:prstGeom prst="rect">
-            <a:avLst/>
-          </a:prstGeom>
-          <a:solidFill>
-            <a:srgbClr val="F4F6F9"/>
-          </a:solidFill>
-          <a:ln w="9525">
-            <a:solidFill>
-              <a:srgbClr val="B21E46"/>
-            </a:solidFill>
-          </a:ln>
-          <a:effectLst/>
-        </p:spPr>
-        <p:style>
-          <a:lnRef idx="1">
-            <a:schemeClr val="accent1"/>
-          </a:lnRef>
-          <a:fillRef idx="3">
-            <a:schemeClr val="accent1"/>
-          </a:fillRef>
-          <a:effectRef idx="2">
-            <a:schemeClr val="accent1"/>
-          </a:effectRef>
-          <a:fontRef idx="minor">
-            <a:schemeClr val="lt1"/>
-          </a:fontRef>
-        </p:style>
-        <p:txBody>
-          <a:bodyPr rtlCol="0" anchor="ctr"/>
-          <a:lstStyle/>
-          <a:p>
-            <a:pPr algn="ctr"/>
-          </a:p>
-        </p:txBody>
-      </p:sp>
-      <p:sp>
-        <p:nvSpPr>
-          <p:cNvPr id="19" name="TextBox 18"/>
-          <p:cNvSpPr txBox="1"/>
-          <p:nvPr/>
-        </p:nvSpPr>
-        <p:spPr>
-          <a:xfrm>
-            <a:off x="731520" y="5632704"/>
-            <a:ext cx="10698480" cy="320040"/>
-          </a:xfrm>
-          <a:prstGeom prst="rect">
-            <a:avLst/>
-          </a:prstGeom>
-          <a:noFill/>
-        </p:spPr>
-        <p:txBody>
-          <a:bodyPr wrap="square" anchor="t" lIns="0" rIns="0" tIns="0" bIns="0">
-            <a:spAutoFit/>
-          </a:bodyPr>
-          <a:lstStyle/>
-          <a:p>
-            <a:pPr algn="l">
-              <a:lnSpc>
-                <a:spcPct val="106000"/>
-              </a:lnSpc>
-              <a:spcBef>
-                <a:spcPts val="0"/>
-              </a:spcBef>
-              <a:spcAft>
-                <a:spcPts val="600"/>
-              </a:spcAft>
-            </a:pPr>
-            <a:r>
-              <a:rPr sz="1100" b="1" i="0">
-                <a:solidFill>
-                  <a:srgbClr val="B21E46"/>
-                </a:solidFill>
-                <a:latin typeface="Consolas"/>
-              </a:rPr>
-              <a:t>YOUR HYPOTHESIS</a:t>
-            </a:r>
-          </a:p>
-        </p:txBody>
-      </p:sp>
-      <p:sp>
-        <p:nvSpPr>
-          <p:cNvPr id="20" name="TextBox 19"/>
-          <p:cNvSpPr txBox="1"/>
-          <p:nvPr/>
-        </p:nvSpPr>
-        <p:spPr>
-          <a:xfrm>
-            <a:off x="731520" y="5897880"/>
-            <a:ext cx="10698480" cy="365760"/>
-          </a:xfrm>
-          <a:prstGeom prst="rect">
-            <a:avLst/>
-          </a:prstGeom>
-          <a:noFill/>
-        </p:spPr>
-        <p:txBody>
-          <a:bodyPr wrap="square" anchor="t" lIns="0" rIns="0" tIns="0" bIns="0">
-            <a:spAutoFit/>
-          </a:bodyPr>
-          <a:lstStyle/>
-          <a:p>
-            <a:pPr algn="l">
-              <a:lnSpc>
-                <a:spcPct val="106000"/>
-              </a:lnSpc>
-              <a:spcBef>
-                <a:spcPts val="0"/>
-              </a:spcBef>
-              <a:spcAft>
-                <a:spcPts val="600"/>
-              </a:spcAft>
-            </a:pPr>
-            <a:r>
-              <a:rPr sz="1500" b="0" i="1">
-                <a:solidFill>
-                  <a:srgbClr val="111820"/>
-                </a:solidFill>
-                <a:latin typeface="Calibri"/>
-              </a:rPr>
-              <a:t>Where's the value in 5 years — in energy, or in flexibility?</a:t>
-            </a:r>
-          </a:p>
-        </p:txBody>
-      </p:sp>
-      <p:sp>
-        <p:nvSpPr>
-          <p:cNvPr id="21" name="TextBox 20"/>
+              <a:t>Value factor is a generation idea; a battery's analog is the spread. Both erode as you build — and both cycle.</a:t>
+            </a:r>
+          </a:p>
+        </p:txBody>
+      </p:sp>
+      <p:sp>
+        <p:nvSpPr>
+          <p:cNvPr id="9" name="TextBox 8"/>
           <p:cNvSpPr txBox="1"/>
           <p:nvPr/>
         </p:nvSpPr>
@@ -17524,7 +17458,7 @@
             <a:avLst/>
           </a:prstGeom>
           <a:solidFill>
-            <a:srgbClr val="111820"/>
+            <a:srgbClr val="FFFFFF"/>
           </a:solidFill>
           <a:ln>
             <a:noFill/>
@@ -17562,13 +17496,13 @@
         <p:spPr>
           <a:xfrm>
             <a:off x="0" y="0"/>
-            <a:ext cx="12191695" cy="201168"/>
+            <a:ext cx="146304" cy="6858000"/>
           </a:xfrm>
           <a:prstGeom prst="rect">
             <a:avLst/>
           </a:prstGeom>
           <a:solidFill>
-            <a:srgbClr val="2F7D3A"/>
+            <a:srgbClr val="B21E46"/>
           </a:solidFill>
           <a:ln>
             <a:noFill/>
@@ -17599,57 +17533,13 @@
       </p:sp>
       <p:sp>
         <p:nvSpPr>
-          <p:cNvPr id="4" name="Rectangle 3"/>
-          <p:cNvSpPr/>
-          <p:nvPr/>
-        </p:nvSpPr>
-        <p:spPr>
-          <a:xfrm>
-            <a:off x="841248" y="1170432"/>
-            <a:ext cx="548640" cy="45720"/>
-          </a:xfrm>
-          <a:prstGeom prst="rect">
-            <a:avLst/>
-          </a:prstGeom>
-          <a:solidFill>
-            <a:srgbClr val="2F7D3A"/>
-          </a:solidFill>
-          <a:ln>
-            <a:noFill/>
-          </a:ln>
-          <a:effectLst/>
-        </p:spPr>
-        <p:style>
-          <a:lnRef idx="1">
-            <a:schemeClr val="accent1"/>
-          </a:lnRef>
-          <a:fillRef idx="3">
-            <a:schemeClr val="accent1"/>
-          </a:fillRef>
-          <a:effectRef idx="2">
-            <a:schemeClr val="accent1"/>
-          </a:effectRef>
-          <a:fontRef idx="minor">
-            <a:schemeClr val="lt1"/>
-          </a:fontRef>
-        </p:style>
-        <p:txBody>
-          <a:bodyPr rtlCol="0" anchor="ctr"/>
-          <a:lstStyle/>
-          <a:p>
-            <a:pPr algn="ctr"/>
-          </a:p>
-        </p:txBody>
-      </p:sp>
-      <p:sp>
-        <p:nvSpPr>
-          <p:cNvPr id="5" name="TextBox 4"/>
+          <p:cNvPr id="4" name="TextBox 3"/>
           <p:cNvSpPr txBox="1"/>
           <p:nvPr/>
         </p:nvSpPr>
         <p:spPr>
           <a:xfrm>
-            <a:off x="822960" y="1353312"/>
+            <a:off x="548640" y="411480"/>
             <a:ext cx="9144000" cy="274320"/>
           </a:xfrm>
           <a:prstGeom prst="rect">
@@ -17677,25 +17567,25 @@
             <a:r>
               <a:rPr sz="1200" b="1" i="0">
                 <a:solidFill>
-                  <a:srgbClr val="2F7D3A"/>
+                  <a:srgbClr val="B21E46"/>
                 </a:solidFill>
                 <a:latin typeface="Consolas"/>
               </a:rPr>
-              <a:t>TOPIC 5</a:t>
-            </a:r>
-          </a:p>
-        </p:txBody>
-      </p:sp>
-      <p:sp>
-        <p:nvSpPr>
-          <p:cNvPr id="6" name="TextBox 5"/>
+              <a:t>TOPIC 4 · ECONOMICS</a:t>
+            </a:r>
+          </a:p>
+        </p:txBody>
+      </p:sp>
+      <p:sp>
+        <p:nvSpPr>
+          <p:cNvPr id="5" name="TextBox 4"/>
           <p:cNvSpPr txBox="1"/>
           <p:nvPr/>
         </p:nvSpPr>
         <p:spPr>
           <a:xfrm>
-            <a:off x="777240" y="1691640"/>
-            <a:ext cx="10607040" cy="1097280"/>
+            <a:off x="502920" y="713232"/>
+            <a:ext cx="11155680" cy="640080"/>
           </a:xfrm>
           <a:prstGeom prst="rect">
             <a:avLst/>
@@ -17720,14 +17610,58 @@
               </a:spcAft>
             </a:pPr>
             <a:r>
-              <a:rPr sz="4000" b="1" i="0">
-                <a:solidFill>
-                  <a:srgbClr val="FFFFFF"/>
-                </a:solidFill>
-                <a:latin typeface="Calibri"/>
-              </a:rPr>
-              <a:t>Award vs concrete vs electrons</a:t>
-            </a:r>
+              <a:rPr sz="2800" b="1" i="0">
+                <a:solidFill>
+                  <a:srgbClr val="111820"/>
+                </a:solidFill>
+                <a:latin typeface="Calibri"/>
+              </a:rPr>
+              <a:t>Provocations — take a position</a:t>
+            </a:r>
+          </a:p>
+        </p:txBody>
+      </p:sp>
+      <p:sp>
+        <p:nvSpPr>
+          <p:cNvPr id="6" name="Rectangle 5"/>
+          <p:cNvSpPr/>
+          <p:nvPr/>
+        </p:nvSpPr>
+        <p:spPr>
+          <a:xfrm>
+            <a:off x="548640" y="1600200"/>
+            <a:ext cx="457200" cy="457200"/>
+          </a:xfrm>
+          <a:prstGeom prst="rect">
+            <a:avLst/>
+          </a:prstGeom>
+          <a:solidFill>
+            <a:srgbClr val="B21E46"/>
+          </a:solidFill>
+          <a:ln>
+            <a:noFill/>
+          </a:ln>
+          <a:effectLst/>
+        </p:spPr>
+        <p:style>
+          <a:lnRef idx="1">
+            <a:schemeClr val="accent1"/>
+          </a:lnRef>
+          <a:fillRef idx="3">
+            <a:schemeClr val="accent1"/>
+          </a:fillRef>
+          <a:effectRef idx="2">
+            <a:schemeClr val="accent1"/>
+          </a:effectRef>
+          <a:fontRef idx="minor">
+            <a:schemeClr val="lt1"/>
+          </a:fontRef>
+        </p:style>
+        <p:txBody>
+          <a:bodyPr rtlCol="0" anchor="ctr"/>
+          <a:lstStyle/>
+          <a:p>
+            <a:pPr algn="ctr"/>
           </a:p>
         </p:txBody>
       </p:sp>
@@ -17739,8 +17673,8 @@
         </p:nvSpPr>
         <p:spPr>
           <a:xfrm>
-            <a:off x="822960" y="2697480"/>
-            <a:ext cx="10241280" cy="1188720"/>
+            <a:off x="548640" y="1600200"/>
+            <a:ext cx="457200" cy="457200"/>
           </a:xfrm>
           <a:prstGeom prst="rect">
             <a:avLst/>
@@ -17748,7 +17682,52 @@
           <a:noFill/>
         </p:spPr>
         <p:txBody>
-          <a:bodyPr wrap="square" anchor="t" lIns="0" rIns="0" tIns="0" bIns="0">
+          <a:bodyPr wrap="square" anchor="ctr" lIns="0" rIns="0" tIns="0" bIns="0">
+            <a:spAutoFit/>
+          </a:bodyPr>
+          <a:lstStyle/>
+          <a:p>
+            <a:pPr algn="ctr">
+              <a:lnSpc>
+                <a:spcPct val="106000"/>
+              </a:lnSpc>
+              <a:spcBef>
+                <a:spcPts val="0"/>
+              </a:spcBef>
+              <a:spcAft>
+                <a:spcPts val="600"/>
+              </a:spcAft>
+            </a:pPr>
+            <a:r>
+              <a:rPr sz="1800" b="1" i="0">
+                <a:solidFill>
+                  <a:srgbClr val="FFFFFF"/>
+                </a:solidFill>
+                <a:latin typeface="Calibri"/>
+              </a:rPr>
+              <a:t>A</a:t>
+            </a:r>
+          </a:p>
+        </p:txBody>
+      </p:sp>
+      <p:sp>
+        <p:nvSpPr>
+          <p:cNvPr id="8" name="TextBox 7"/>
+          <p:cNvSpPr txBox="1"/>
+          <p:nvPr/>
+        </p:nvSpPr>
+        <p:spPr>
+          <a:xfrm>
+            <a:off x="1188720" y="1618488"/>
+            <a:ext cx="10332720" cy="731520"/>
+          </a:xfrm>
+          <a:prstGeom prst="rect">
+            <a:avLst/>
+          </a:prstGeom>
+          <a:noFill/>
+        </p:spPr>
+        <p:txBody>
+          <a:bodyPr wrap="square" anchor="ctr" lIns="0" rIns="0" tIns="0" bIns="0">
             <a:spAutoFit/>
           </a:bodyPr>
           <a:lstStyle/>
@@ -17765,38 +17744,36 @@
               </a:spcAft>
             </a:pPr>
             <a:r>
-              <a:rPr sz="2100" b="0" i="0">
-                <a:solidFill>
-                  <a:srgbClr val="C2CAD4"/>
-                </a:solidFill>
-                <a:latin typeface="Calibri"/>
-              </a:rPr>
-              <a:t>Most of the pipeline is a mirage — the gap between proposed, committed and built is enormous.</a:t>
-            </a:r>
-          </a:p>
-        </p:txBody>
-      </p:sp>
-      <p:sp>
-        <p:nvSpPr>
-          <p:cNvPr id="8" name="Rectangle 7"/>
+              <a:rPr sz="1600" b="0" i="0">
+                <a:solidFill>
+                  <a:srgbClr val="37424F"/>
+                </a:solidFill>
+                <a:latin typeface="Calibri"/>
+              </a:rPr>
+              <a:t>Is the value-factor trough permanent, or does coal-exit evening scarcity bring it back?</a:t>
+            </a:r>
+          </a:p>
+        </p:txBody>
+      </p:sp>
+      <p:sp>
+        <p:nvSpPr>
+          <p:cNvPr id="9" name="Rectangle 8"/>
           <p:cNvSpPr/>
           <p:nvPr/>
         </p:nvSpPr>
         <p:spPr>
           <a:xfrm>
-            <a:off x="822960" y="3977639"/>
-            <a:ext cx="10515600" cy="1371600"/>
+            <a:off x="548640" y="2441448"/>
+            <a:ext cx="457200" cy="457200"/>
           </a:xfrm>
           <a:prstGeom prst="rect">
             <a:avLst/>
           </a:prstGeom>
           <a:solidFill>
-            <a:srgbClr val="1C222C"/>
+            <a:srgbClr val="B21E46"/>
           </a:solidFill>
-          <a:ln w="9525">
-            <a:solidFill>
-              <a:srgbClr val="2F7D3A"/>
-            </a:solidFill>
+          <a:ln>
+            <a:noFill/>
           </a:ln>
           <a:effectLst/>
         </p:spPr>
@@ -17824,14 +17801,14 @@
       </p:sp>
       <p:sp>
         <p:nvSpPr>
-          <p:cNvPr id="9" name="TextBox 8"/>
+          <p:cNvPr id="10" name="TextBox 9"/>
           <p:cNvSpPr txBox="1"/>
           <p:nvPr/>
         </p:nvSpPr>
         <p:spPr>
           <a:xfrm>
-            <a:off x="1051560" y="4114800"/>
-            <a:ext cx="10058400" cy="320040"/>
+            <a:off x="548640" y="2441448"/>
+            <a:ext cx="457200" cy="457200"/>
           </a:xfrm>
           <a:prstGeom prst="rect">
             <a:avLst/>
@@ -17839,7 +17816,52 @@
           <a:noFill/>
         </p:spPr>
         <p:txBody>
-          <a:bodyPr wrap="square" anchor="t" lIns="0" rIns="0" tIns="0" bIns="0">
+          <a:bodyPr wrap="square" anchor="ctr" lIns="0" rIns="0" tIns="0" bIns="0">
+            <a:spAutoFit/>
+          </a:bodyPr>
+          <a:lstStyle/>
+          <a:p>
+            <a:pPr algn="ctr">
+              <a:lnSpc>
+                <a:spcPct val="106000"/>
+              </a:lnSpc>
+              <a:spcBef>
+                <a:spcPts val="0"/>
+              </a:spcBef>
+              <a:spcAft>
+                <a:spcPts val="600"/>
+              </a:spcAft>
+            </a:pPr>
+            <a:r>
+              <a:rPr sz="1800" b="1" i="0">
+                <a:solidFill>
+                  <a:srgbClr val="FFFFFF"/>
+                </a:solidFill>
+                <a:latin typeface="Calibri"/>
+              </a:rPr>
+              <a:t>B</a:t>
+            </a:r>
+          </a:p>
+        </p:txBody>
+      </p:sp>
+      <p:sp>
+        <p:nvSpPr>
+          <p:cNvPr id="11" name="TextBox 10"/>
+          <p:cNvSpPr txBox="1"/>
+          <p:nvPr/>
+        </p:nvSpPr>
+        <p:spPr>
+          <a:xfrm>
+            <a:off x="1188720" y="2459736"/>
+            <a:ext cx="10332720" cy="731520"/>
+          </a:xfrm>
+          <a:prstGeom prst="rect">
+            <a:avLst/>
+          </a:prstGeom>
+          <a:noFill/>
+        </p:spPr>
+        <p:txBody>
+          <a:bodyPr wrap="square" anchor="ctr" lIns="0" rIns="0" tIns="0" bIns="0">
             <a:spAutoFit/>
           </a:bodyPr>
           <a:lstStyle/>
@@ -17856,27 +17878,71 @@
               </a:spcAft>
             </a:pPr>
             <a:r>
-              <a:rPr sz="1100" b="1" i="0">
-                <a:solidFill>
-                  <a:srgbClr val="2F7D3A"/>
-                </a:solidFill>
-                <a:latin typeface="Consolas"/>
-              </a:rPr>
-              <a:t>START HERE</a:t>
-            </a:r>
-          </a:p>
-        </p:txBody>
-      </p:sp>
-      <p:sp>
-        <p:nvSpPr>
-          <p:cNvPr id="10" name="TextBox 9"/>
+              <a:rPr sz="1600" b="0" i="0">
+                <a:solidFill>
+                  <a:srgbClr val="37424F"/>
+                </a:solidFill>
+                <a:latin typeface="Calibri"/>
+              </a:rPr>
+              <a:t>Does that change whether — or when — you build, and whether to firm it?</a:t>
+            </a:r>
+          </a:p>
+        </p:txBody>
+      </p:sp>
+      <p:sp>
+        <p:nvSpPr>
+          <p:cNvPr id="12" name="Rectangle 11"/>
+          <p:cNvSpPr/>
+          <p:nvPr/>
+        </p:nvSpPr>
+        <p:spPr>
+          <a:xfrm>
+            <a:off x="548640" y="3282696"/>
+            <a:ext cx="457200" cy="457200"/>
+          </a:xfrm>
+          <a:prstGeom prst="rect">
+            <a:avLst/>
+          </a:prstGeom>
+          <a:solidFill>
+            <a:srgbClr val="B21E46"/>
+          </a:solidFill>
+          <a:ln>
+            <a:noFill/>
+          </a:ln>
+          <a:effectLst/>
+        </p:spPr>
+        <p:style>
+          <a:lnRef idx="1">
+            <a:schemeClr val="accent1"/>
+          </a:lnRef>
+          <a:fillRef idx="3">
+            <a:schemeClr val="accent1"/>
+          </a:fillRef>
+          <a:effectRef idx="2">
+            <a:schemeClr val="accent1"/>
+          </a:effectRef>
+          <a:fontRef idx="minor">
+            <a:schemeClr val="lt1"/>
+          </a:fontRef>
+        </p:style>
+        <p:txBody>
+          <a:bodyPr rtlCol="0" anchor="ctr"/>
+          <a:lstStyle/>
+          <a:p>
+            <a:pPr algn="ctr"/>
+          </a:p>
+        </p:txBody>
+      </p:sp>
+      <p:sp>
+        <p:nvSpPr>
+          <p:cNvPr id="13" name="TextBox 12"/>
           <p:cNvSpPr txBox="1"/>
           <p:nvPr/>
         </p:nvSpPr>
         <p:spPr>
           <a:xfrm>
-            <a:off x="1051560" y="4407408"/>
-            <a:ext cx="10058400" cy="822960"/>
+            <a:off x="548640" y="3282696"/>
+            <a:ext cx="457200" cy="457200"/>
           </a:xfrm>
           <a:prstGeom prst="rect">
             <a:avLst/>
@@ -17884,7 +17950,52 @@
           <a:noFill/>
         </p:spPr>
         <p:txBody>
-          <a:bodyPr wrap="square" anchor="t" lIns="0" rIns="0" tIns="0" bIns="0">
+          <a:bodyPr wrap="square" anchor="ctr" lIns="0" rIns="0" tIns="0" bIns="0">
+            <a:spAutoFit/>
+          </a:bodyPr>
+          <a:lstStyle/>
+          <a:p>
+            <a:pPr algn="ctr">
+              <a:lnSpc>
+                <a:spcPct val="106000"/>
+              </a:lnSpc>
+              <a:spcBef>
+                <a:spcPts val="0"/>
+              </a:spcBef>
+              <a:spcAft>
+                <a:spcPts val="600"/>
+              </a:spcAft>
+            </a:pPr>
+            <a:r>
+              <a:rPr sz="1800" b="1" i="0">
+                <a:solidFill>
+                  <a:srgbClr val="FFFFFF"/>
+                </a:solidFill>
+                <a:latin typeface="Calibri"/>
+              </a:rPr>
+              <a:t>C</a:t>
+            </a:r>
+          </a:p>
+        </p:txBody>
+      </p:sp>
+      <p:sp>
+        <p:nvSpPr>
+          <p:cNvPr id="14" name="TextBox 13"/>
+          <p:cNvSpPr txBox="1"/>
+          <p:nvPr/>
+        </p:nvSpPr>
+        <p:spPr>
+          <a:xfrm>
+            <a:off x="1188720" y="3300984"/>
+            <a:ext cx="10332720" cy="731520"/>
+          </a:xfrm>
+          <a:prstGeom prst="rect">
+            <a:avLst/>
+          </a:prstGeom>
+          <a:noFill/>
+        </p:spPr>
+        <p:txBody>
+          <a:bodyPr wrap="square" anchor="ctr" lIns="0" rIns="0" tIns="0" bIns="0">
             <a:spAutoFit/>
           </a:bodyPr>
           <a:lstStyle/>
@@ -17901,13 +18012,328 @@
               </a:spcAft>
             </a:pPr>
             <a:r>
-              <a:rPr sz="1800" b="0" i="1">
+              <a:rPr sz="1600" b="0" i="0">
+                <a:solidFill>
+                  <a:srgbClr val="37424F"/>
+                </a:solidFill>
+                <a:latin typeface="Calibri"/>
+              </a:rPr>
+              <a:t>The battery spread is compressing — is it BESS, benign conditions, or both? What happens next cycle?</a:t>
+            </a:r>
+          </a:p>
+        </p:txBody>
+      </p:sp>
+      <p:sp>
+        <p:nvSpPr>
+          <p:cNvPr id="15" name="Rectangle 14"/>
+          <p:cNvSpPr/>
+          <p:nvPr/>
+        </p:nvSpPr>
+        <p:spPr>
+          <a:xfrm>
+            <a:off x="548640" y="4123944"/>
+            <a:ext cx="457200" cy="457200"/>
+          </a:xfrm>
+          <a:prstGeom prst="rect">
+            <a:avLst/>
+          </a:prstGeom>
+          <a:solidFill>
+            <a:srgbClr val="B21E46"/>
+          </a:solidFill>
+          <a:ln>
+            <a:noFill/>
+          </a:ln>
+          <a:effectLst/>
+        </p:spPr>
+        <p:style>
+          <a:lnRef idx="1">
+            <a:schemeClr val="accent1"/>
+          </a:lnRef>
+          <a:fillRef idx="3">
+            <a:schemeClr val="accent1"/>
+          </a:fillRef>
+          <a:effectRef idx="2">
+            <a:schemeClr val="accent1"/>
+          </a:effectRef>
+          <a:fontRef idx="minor">
+            <a:schemeClr val="lt1"/>
+          </a:fontRef>
+        </p:style>
+        <p:txBody>
+          <a:bodyPr rtlCol="0" anchor="ctr"/>
+          <a:lstStyle/>
+          <a:p>
+            <a:pPr algn="ctr"/>
+          </a:p>
+        </p:txBody>
+      </p:sp>
+      <p:sp>
+        <p:nvSpPr>
+          <p:cNvPr id="16" name="TextBox 15"/>
+          <p:cNvSpPr txBox="1"/>
+          <p:nvPr/>
+        </p:nvSpPr>
+        <p:spPr>
+          <a:xfrm>
+            <a:off x="548640" y="4123944"/>
+            <a:ext cx="457200" cy="457200"/>
+          </a:xfrm>
+          <a:prstGeom prst="rect">
+            <a:avLst/>
+          </a:prstGeom>
+          <a:noFill/>
+        </p:spPr>
+        <p:txBody>
+          <a:bodyPr wrap="square" anchor="ctr" lIns="0" rIns="0" tIns="0" bIns="0">
+            <a:spAutoFit/>
+          </a:bodyPr>
+          <a:lstStyle/>
+          <a:p>
+            <a:pPr algn="ctr">
+              <a:lnSpc>
+                <a:spcPct val="106000"/>
+              </a:lnSpc>
+              <a:spcBef>
+                <a:spcPts val="0"/>
+              </a:spcBef>
+              <a:spcAft>
+                <a:spcPts val="600"/>
+              </a:spcAft>
+            </a:pPr>
+            <a:r>
+              <a:rPr sz="1800" b="1" i="0">
                 <a:solidFill>
                   <a:srgbClr val="FFFFFF"/>
                 </a:solidFill>
                 <a:latin typeface="Calibri"/>
               </a:rPr>
-              <a:t>Of 105 GW “proposed” in 2022, only ~9 GW got built. Which signals separate the real projects from the mirage?</a:t>
+              <a:t>D</a:t>
+            </a:r>
+          </a:p>
+        </p:txBody>
+      </p:sp>
+      <p:sp>
+        <p:nvSpPr>
+          <p:cNvPr id="17" name="TextBox 16"/>
+          <p:cNvSpPr txBox="1"/>
+          <p:nvPr/>
+        </p:nvSpPr>
+        <p:spPr>
+          <a:xfrm>
+            <a:off x="1188720" y="4142232"/>
+            <a:ext cx="10332720" cy="731520"/>
+          </a:xfrm>
+          <a:prstGeom prst="rect">
+            <a:avLst/>
+          </a:prstGeom>
+          <a:noFill/>
+        </p:spPr>
+        <p:txBody>
+          <a:bodyPr wrap="square" anchor="ctr" lIns="0" rIns="0" tIns="0" bIns="0">
+            <a:spAutoFit/>
+          </a:bodyPr>
+          <a:lstStyle/>
+          <a:p>
+            <a:pPr algn="l">
+              <a:lnSpc>
+                <a:spcPct val="106000"/>
+              </a:lnSpc>
+              <a:spcBef>
+                <a:spcPts val="0"/>
+              </a:spcBef>
+              <a:spcAft>
+                <a:spcPts val="600"/>
+              </a:spcAft>
+            </a:pPr>
+            <a:r>
+              <a:rPr sz="1600" b="0" i="0">
+                <a:solidFill>
+                  <a:srgbClr val="37424F"/>
+                </a:solidFill>
+                <a:latin typeface="Calibri"/>
+              </a:rPr>
+              <a:t>Would you build another unfirmed solar farm in this market?</a:t>
+            </a:r>
+          </a:p>
+        </p:txBody>
+      </p:sp>
+      <p:sp>
+        <p:nvSpPr>
+          <p:cNvPr id="18" name="Rectangle 17"/>
+          <p:cNvSpPr/>
+          <p:nvPr/>
+        </p:nvSpPr>
+        <p:spPr>
+          <a:xfrm>
+            <a:off x="548640" y="5532120"/>
+            <a:ext cx="11064240" cy="777240"/>
+          </a:xfrm>
+          <a:prstGeom prst="rect">
+            <a:avLst/>
+          </a:prstGeom>
+          <a:solidFill>
+            <a:srgbClr val="F4F6F9"/>
+          </a:solidFill>
+          <a:ln w="9525">
+            <a:solidFill>
+              <a:srgbClr val="B21E46"/>
+            </a:solidFill>
+          </a:ln>
+          <a:effectLst/>
+        </p:spPr>
+        <p:style>
+          <a:lnRef idx="1">
+            <a:schemeClr val="accent1"/>
+          </a:lnRef>
+          <a:fillRef idx="3">
+            <a:schemeClr val="accent1"/>
+          </a:fillRef>
+          <a:effectRef idx="2">
+            <a:schemeClr val="accent1"/>
+          </a:effectRef>
+          <a:fontRef idx="minor">
+            <a:schemeClr val="lt1"/>
+          </a:fontRef>
+        </p:style>
+        <p:txBody>
+          <a:bodyPr rtlCol="0" anchor="ctr"/>
+          <a:lstStyle/>
+          <a:p>
+            <a:pPr algn="ctr"/>
+          </a:p>
+        </p:txBody>
+      </p:sp>
+      <p:sp>
+        <p:nvSpPr>
+          <p:cNvPr id="19" name="TextBox 18"/>
+          <p:cNvSpPr txBox="1"/>
+          <p:nvPr/>
+        </p:nvSpPr>
+        <p:spPr>
+          <a:xfrm>
+            <a:off x="731520" y="5632704"/>
+            <a:ext cx="10698480" cy="320040"/>
+          </a:xfrm>
+          <a:prstGeom prst="rect">
+            <a:avLst/>
+          </a:prstGeom>
+          <a:noFill/>
+        </p:spPr>
+        <p:txBody>
+          <a:bodyPr wrap="square" anchor="t" lIns="0" rIns="0" tIns="0" bIns="0">
+            <a:spAutoFit/>
+          </a:bodyPr>
+          <a:lstStyle/>
+          <a:p>
+            <a:pPr algn="l">
+              <a:lnSpc>
+                <a:spcPct val="106000"/>
+              </a:lnSpc>
+              <a:spcBef>
+                <a:spcPts val="0"/>
+              </a:spcBef>
+              <a:spcAft>
+                <a:spcPts val="600"/>
+              </a:spcAft>
+            </a:pPr>
+            <a:r>
+              <a:rPr sz="1100" b="1" i="0">
+                <a:solidFill>
+                  <a:srgbClr val="B21E46"/>
+                </a:solidFill>
+                <a:latin typeface="Consolas"/>
+              </a:rPr>
+              <a:t>YOUR HYPOTHESIS</a:t>
+            </a:r>
+          </a:p>
+        </p:txBody>
+      </p:sp>
+      <p:sp>
+        <p:nvSpPr>
+          <p:cNvPr id="20" name="TextBox 19"/>
+          <p:cNvSpPr txBox="1"/>
+          <p:nvPr/>
+        </p:nvSpPr>
+        <p:spPr>
+          <a:xfrm>
+            <a:off x="731520" y="5897880"/>
+            <a:ext cx="10698480" cy="365760"/>
+          </a:xfrm>
+          <a:prstGeom prst="rect">
+            <a:avLst/>
+          </a:prstGeom>
+          <a:noFill/>
+        </p:spPr>
+        <p:txBody>
+          <a:bodyPr wrap="square" anchor="t" lIns="0" rIns="0" tIns="0" bIns="0">
+            <a:spAutoFit/>
+          </a:bodyPr>
+          <a:lstStyle/>
+          <a:p>
+            <a:pPr algn="l">
+              <a:lnSpc>
+                <a:spcPct val="106000"/>
+              </a:lnSpc>
+              <a:spcBef>
+                <a:spcPts val="0"/>
+              </a:spcBef>
+              <a:spcAft>
+                <a:spcPts val="600"/>
+              </a:spcAft>
+            </a:pPr>
+            <a:r>
+              <a:rPr sz="1500" b="0" i="1">
+                <a:solidFill>
+                  <a:srgbClr val="111820"/>
+                </a:solidFill>
+                <a:latin typeface="Calibri"/>
+              </a:rPr>
+              <a:t>Where's the value in 5 years — in energy, or in flexibility?</a:t>
+            </a:r>
+          </a:p>
+        </p:txBody>
+      </p:sp>
+      <p:sp>
+        <p:nvSpPr>
+          <p:cNvPr id="21" name="TextBox 20"/>
+          <p:cNvSpPr txBox="1"/>
+          <p:nvPr/>
+        </p:nvSpPr>
+        <p:spPr>
+          <a:xfrm>
+            <a:off x="502920" y="6419088"/>
+            <a:ext cx="8229600" cy="274320"/>
+          </a:xfrm>
+          <a:prstGeom prst="rect">
+            <a:avLst/>
+          </a:prstGeom>
+          <a:noFill/>
+        </p:spPr>
+        <p:txBody>
+          <a:bodyPr wrap="square" anchor="t" lIns="0" rIns="0" tIns="0" bIns="0">
+            <a:spAutoFit/>
+          </a:bodyPr>
+          <a:lstStyle/>
+          <a:p>
+            <a:pPr algn="l">
+              <a:lnSpc>
+                <a:spcPct val="106000"/>
+              </a:lnSpc>
+              <a:spcBef>
+                <a:spcPts val="0"/>
+              </a:spcBef>
+              <a:spcAft>
+                <a:spcPts val="600"/>
+              </a:spcAft>
+            </a:pPr>
+            <a:r>
+              <a:rPr sz="900" b="0" i="0">
+                <a:solidFill>
+                  <a:srgbClr val="66717F"/>
+                </a:solidFill>
+                <a:latin typeface="Consolas"/>
+              </a:rPr>
+              <a:t>Reading the NEM · Power Development Team Day · figures from the AusEnergy Lens (AEMO + ISP 2026), as-at Aug 2026</a:t>
             </a:r>
           </a:p>
         </p:txBody>
@@ -17945,7 +18371,7 @@
             <a:avLst/>
           </a:prstGeom>
           <a:solidFill>
-            <a:srgbClr val="FFFFFF"/>
+            <a:srgbClr val="111820"/>
           </a:solidFill>
           <a:ln>
             <a:noFill/>
@@ -17983,7 +18409,7 @@
         <p:spPr>
           <a:xfrm>
             <a:off x="0" y="0"/>
-            <a:ext cx="146304" cy="6858000"/>
+            <a:ext cx="12191695" cy="201168"/>
           </a:xfrm>
           <a:prstGeom prst="rect">
             <a:avLst/>
@@ -18020,13 +18446,57 @@
       </p:sp>
       <p:sp>
         <p:nvSpPr>
-          <p:cNvPr id="4" name="TextBox 3"/>
+          <p:cNvPr id="4" name="Rectangle 3"/>
+          <p:cNvSpPr/>
+          <p:nvPr/>
+        </p:nvSpPr>
+        <p:spPr>
+          <a:xfrm>
+            <a:off x="841248" y="1170432"/>
+            <a:ext cx="548640" cy="45720"/>
+          </a:xfrm>
+          <a:prstGeom prst="rect">
+            <a:avLst/>
+          </a:prstGeom>
+          <a:solidFill>
+            <a:srgbClr val="2F7D3A"/>
+          </a:solidFill>
+          <a:ln>
+            <a:noFill/>
+          </a:ln>
+          <a:effectLst/>
+        </p:spPr>
+        <p:style>
+          <a:lnRef idx="1">
+            <a:schemeClr val="accent1"/>
+          </a:lnRef>
+          <a:fillRef idx="3">
+            <a:schemeClr val="accent1"/>
+          </a:fillRef>
+          <a:effectRef idx="2">
+            <a:schemeClr val="accent1"/>
+          </a:effectRef>
+          <a:fontRef idx="minor">
+            <a:schemeClr val="lt1"/>
+          </a:fontRef>
+        </p:style>
+        <p:txBody>
+          <a:bodyPr rtlCol="0" anchor="ctr"/>
+          <a:lstStyle/>
+          <a:p>
+            <a:pPr algn="ctr"/>
+          </a:p>
+        </p:txBody>
+      </p:sp>
+      <p:sp>
+        <p:nvSpPr>
+          <p:cNvPr id="5" name="TextBox 4"/>
           <p:cNvSpPr txBox="1"/>
           <p:nvPr/>
         </p:nvSpPr>
         <p:spPr>
           <a:xfrm>
-            <a:off x="548640" y="411480"/>
+            <a:off x="822960" y="1353312"/>
             <a:ext cx="9144000" cy="274320"/>
           </a:xfrm>
           <a:prstGeom prst="rect">
@@ -18058,21 +18528,21 @@
                 </a:solidFill>
                 <a:latin typeface="Consolas"/>
               </a:rPr>
-              <a:t>TOPIC 5 · PIPELINE</a:t>
-            </a:r>
-          </a:p>
-        </p:txBody>
-      </p:sp>
-      <p:sp>
-        <p:nvSpPr>
-          <p:cNvPr id="5" name="TextBox 4"/>
+              <a:t>TOPIC 5</a:t>
+            </a:r>
+          </a:p>
+        </p:txBody>
+      </p:sp>
+      <p:sp>
+        <p:nvSpPr>
+          <p:cNvPr id="6" name="TextBox 5"/>
           <p:cNvSpPr txBox="1"/>
           <p:nvPr/>
         </p:nvSpPr>
         <p:spPr>
           <a:xfrm>
-            <a:off x="502920" y="713232"/>
-            <a:ext cx="11155680" cy="640080"/>
+            <a:off x="777240" y="1691640"/>
+            <a:ext cx="10607040" cy="1097280"/>
           </a:xfrm>
           <a:prstGeom prst="rect">
             <a:avLst/>
@@ -18097,91 +18567,27 @@
               </a:spcAft>
             </a:pPr>
             <a:r>
-              <a:rPr sz="2800" b="1" i="0">
-                <a:solidFill>
-                  <a:srgbClr val="111820"/>
-                </a:solidFill>
-                <a:latin typeface="Calibri"/>
-              </a:rPr>
-              <a:t>The long view — the mirage growing</a:t>
-            </a:r>
-          </a:p>
-        </p:txBody>
-      </p:sp>
-      <p:graphicFrame>
-        <p:nvGraphicFramePr>
-          <p:cNvPr id="6" name="Chart 5"/>
-          <p:cNvGraphicFramePr>
-            <a:graphicFrameLocks noGrp="1"/>
-          </p:cNvGraphicFramePr>
-          <p:nvPr/>
-        </p:nvGraphicFramePr>
-        <p:xfrm>
-          <a:off x="548640" y="1554480"/>
-          <a:ext cx="11064240" cy="4114800"/>
-        </p:xfrm>
-        <a:graphic>
-          <a:graphicData uri="http://schemas.openxmlformats.org/drawingml/2006/chart">
-            <c:chart xmlns:c="http://schemas.openxmlformats.org/drawingml/2006/chart" r:id="rId2"/>
-          </a:graphicData>
-        </a:graphic>
-      </p:graphicFrame>
-      <p:sp>
-        <p:nvSpPr>
-          <p:cNvPr id="7" name="Rectangle 6"/>
-          <p:cNvSpPr/>
-          <p:nvPr/>
-        </p:nvSpPr>
-        <p:spPr>
-          <a:xfrm>
-            <a:off x="548640" y="5806440"/>
-            <a:ext cx="11064240" cy="566928"/>
-          </a:xfrm>
-          <a:prstGeom prst="rect">
-            <a:avLst/>
-          </a:prstGeom>
-          <a:solidFill>
-            <a:srgbClr val="F4F6F9"/>
-          </a:solidFill>
-          <a:ln w="9525">
-            <a:solidFill>
-              <a:srgbClr val="2F7D3A"/>
-            </a:solidFill>
-          </a:ln>
-          <a:effectLst/>
-        </p:spPr>
-        <p:style>
-          <a:lnRef idx="1">
-            <a:schemeClr val="accent1"/>
-          </a:lnRef>
-          <a:fillRef idx="3">
-            <a:schemeClr val="accent1"/>
-          </a:fillRef>
-          <a:effectRef idx="2">
-            <a:schemeClr val="accent1"/>
-          </a:effectRef>
-          <a:fontRef idx="minor">
-            <a:schemeClr val="lt1"/>
-          </a:fontRef>
-        </p:style>
-        <p:txBody>
-          <a:bodyPr rtlCol="0" anchor="ctr"/>
-          <a:lstStyle/>
-          <a:p>
-            <a:pPr algn="ctr"/>
-          </a:p>
-        </p:txBody>
-      </p:sp>
-      <p:sp>
-        <p:nvSpPr>
-          <p:cNvPr id="8" name="TextBox 7"/>
+              <a:rPr sz="4000" b="1" i="0">
+                <a:solidFill>
+                  <a:srgbClr val="FFFFFF"/>
+                </a:solidFill>
+                <a:latin typeface="Calibri"/>
+              </a:rPr>
+              <a:t>Award vs concrete vs electrons</a:t>
+            </a:r>
+          </a:p>
+        </p:txBody>
+      </p:sp>
+      <p:sp>
+        <p:nvSpPr>
+          <p:cNvPr id="7" name="TextBox 6"/>
           <p:cNvSpPr txBox="1"/>
           <p:nvPr/>
         </p:nvSpPr>
         <p:spPr>
           <a:xfrm>
-            <a:off x="731520" y="5852160"/>
-            <a:ext cx="10698480" cy="457200"/>
+            <a:off x="822960" y="2697480"/>
+            <a:ext cx="10241280" cy="1188720"/>
           </a:xfrm>
           <a:prstGeom prst="rect">
             <a:avLst/>
@@ -18189,7 +18595,7 @@
           <a:noFill/>
         </p:spPr>
         <p:txBody>
-          <a:bodyPr wrap="square" anchor="ctr" lIns="0" rIns="0" tIns="0" bIns="0">
+          <a:bodyPr wrap="square" anchor="t" lIns="0" rIns="0" tIns="0" bIns="0">
             <a:spAutoFit/>
           </a:bodyPr>
           <a:lstStyle/>
@@ -18206,23 +18612,60 @@
               </a:spcAft>
             </a:pPr>
             <a:r>
-              <a:rPr sz="1200" b="1" i="0">
-                <a:solidFill>
-                  <a:srgbClr val="2F7D3A"/>
-                </a:solidFill>
-                <a:latin typeface="Consolas"/>
-              </a:rPr>
-              <a:t>Takeaway  </a:t>
-            </a:r>
-            <a:r>
-              <a:rPr sz="1400" b="0" i="0">
-                <a:solidFill>
-                  <a:srgbClr val="37424F"/>
-                </a:solidFill>
-                <a:latin typeface="Calibri"/>
-              </a:rPr>
-              <a:t>Proposed capacity multiplied ~7× to 346 GW while committed and built crawled — the gap is the mirage.</a:t>
-            </a:r>
+              <a:rPr sz="2100" b="0" i="0">
+                <a:solidFill>
+                  <a:srgbClr val="C2CAD4"/>
+                </a:solidFill>
+                <a:latin typeface="Calibri"/>
+              </a:rPr>
+              <a:t>Most of the pipeline is a mirage — the gap between proposed, committed and built is enormous.</a:t>
+            </a:r>
+          </a:p>
+        </p:txBody>
+      </p:sp>
+      <p:sp>
+        <p:nvSpPr>
+          <p:cNvPr id="8" name="Rectangle 7"/>
+          <p:cNvSpPr/>
+          <p:nvPr/>
+        </p:nvSpPr>
+        <p:spPr>
+          <a:xfrm>
+            <a:off x="822960" y="3977639"/>
+            <a:ext cx="10515600" cy="1371600"/>
+          </a:xfrm>
+          <a:prstGeom prst="rect">
+            <a:avLst/>
+          </a:prstGeom>
+          <a:solidFill>
+            <a:srgbClr val="1C222C"/>
+          </a:solidFill>
+          <a:ln w="9525">
+            <a:solidFill>
+              <a:srgbClr val="2F7D3A"/>
+            </a:solidFill>
+          </a:ln>
+          <a:effectLst/>
+        </p:spPr>
+        <p:style>
+          <a:lnRef idx="1">
+            <a:schemeClr val="accent1"/>
+          </a:lnRef>
+          <a:fillRef idx="3">
+            <a:schemeClr val="accent1"/>
+          </a:fillRef>
+          <a:effectRef idx="2">
+            <a:schemeClr val="accent1"/>
+          </a:effectRef>
+          <a:fontRef idx="minor">
+            <a:schemeClr val="lt1"/>
+          </a:fontRef>
+        </p:style>
+        <p:txBody>
+          <a:bodyPr rtlCol="0" anchor="ctr"/>
+          <a:lstStyle/>
+          <a:p>
+            <a:pPr algn="ctr"/>
           </a:p>
         </p:txBody>
       </p:sp>
@@ -18234,8 +18677,8 @@
         </p:nvSpPr>
         <p:spPr>
           <a:xfrm>
-            <a:off x="502920" y="6419088"/>
-            <a:ext cx="8229600" cy="274320"/>
+            <a:off x="1051560" y="4114800"/>
+            <a:ext cx="10058400" cy="320040"/>
           </a:xfrm>
           <a:prstGeom prst="rect">
             <a:avLst/>
@@ -18260,13 +18703,58 @@
               </a:spcAft>
             </a:pPr>
             <a:r>
-              <a:rPr sz="900" b="0" i="0">
-                <a:solidFill>
-                  <a:srgbClr val="66717F"/>
+              <a:rPr sz="1100" b="1" i="0">
+                <a:solidFill>
+                  <a:srgbClr val="2F7D3A"/>
                 </a:solidFill>
                 <a:latin typeface="Consolas"/>
               </a:rPr>
-              <a:t>Reading the NEM · Power Development Team Day · figures from the AusEnergy Lens (AEMO + ISP 2026), as-at Aug 2026</a:t>
+              <a:t>START HERE</a:t>
+            </a:r>
+          </a:p>
+        </p:txBody>
+      </p:sp>
+      <p:sp>
+        <p:nvSpPr>
+          <p:cNvPr id="10" name="TextBox 9"/>
+          <p:cNvSpPr txBox="1"/>
+          <p:nvPr/>
+        </p:nvSpPr>
+        <p:spPr>
+          <a:xfrm>
+            <a:off x="1051560" y="4407408"/>
+            <a:ext cx="10058400" cy="822960"/>
+          </a:xfrm>
+          <a:prstGeom prst="rect">
+            <a:avLst/>
+          </a:prstGeom>
+          <a:noFill/>
+        </p:spPr>
+        <p:txBody>
+          <a:bodyPr wrap="square" anchor="t" lIns="0" rIns="0" tIns="0" bIns="0">
+            <a:spAutoFit/>
+          </a:bodyPr>
+          <a:lstStyle/>
+          <a:p>
+            <a:pPr algn="l">
+              <a:lnSpc>
+                <a:spcPct val="106000"/>
+              </a:lnSpc>
+              <a:spcBef>
+                <a:spcPts val="0"/>
+              </a:spcBef>
+              <a:spcAft>
+                <a:spcPts val="600"/>
+              </a:spcAft>
+            </a:pPr>
+            <a:r>
+              <a:rPr sz="1800" b="0" i="1">
+                <a:solidFill>
+                  <a:srgbClr val="FFFFFF"/>
+                </a:solidFill>
+                <a:latin typeface="Calibri"/>
+              </a:rPr>
+              <a:t>Of 105 GW “proposed” in 2022, only ~9 GW got built. Which signals separate the real projects from the mirage?</a:t>
             </a:r>
           </a:p>
         </p:txBody>
@@ -18462,292 +18950,29 @@
                 </a:solidFill>
                 <a:latin typeface="Calibri"/>
               </a:rPr>
-              <a:t>The data on the table</a:t>
-            </a:r>
-          </a:p>
-        </p:txBody>
-      </p:sp>
-      <p:sp>
-        <p:nvSpPr>
-          <p:cNvPr id="6" name="TextBox 5"/>
-          <p:cNvSpPr txBox="1"/>
-          <p:nvPr/>
-        </p:nvSpPr>
-        <p:spPr>
-          <a:xfrm>
-            <a:off x="548640" y="1600200"/>
-            <a:ext cx="11064240" cy="4206240"/>
-          </a:xfrm>
-          <a:prstGeom prst="rect">
-            <a:avLst/>
-          </a:prstGeom>
-          <a:noFill/>
-        </p:spPr>
-        <p:txBody>
-          <a:bodyPr wrap="square" lIns="0" rIns="0" tIns="0" bIns="0">
-            <a:spAutoFit/>
-          </a:bodyPr>
-          <a:lstStyle/>
-          <a:p>
-            <a:pPr>
-              <a:lnSpc>
-                <a:spcPct val="105000"/>
-              </a:lnSpc>
-              <a:spcAft>
-                <a:spcPts val="1100"/>
-              </a:spcAft>
-            </a:pPr>
-            <a:r>
-              <a:rPr sz="1600" b="1">
-                <a:solidFill>
-                  <a:srgbClr val="2F7D3A"/>
-                </a:solidFill>
-                <a:latin typeface="Calibri"/>
-              </a:rPr>
-              <a:t>▸  </a:t>
-            </a:r>
-            <a:r>
-              <a:rPr sz="1600" b="1">
-                <a:solidFill>
-                  <a:srgbClr val="111820"/>
-                </a:solidFill>
-                <a:latin typeface="Calibri"/>
-              </a:rPr>
-              <a:t>Proposed 346 GW vs committed ~13 GW vs built ~70 GW</a:t>
-            </a:r>
-            <a:r>
-              <a:rPr sz="1600" b="0">
-                <a:solidFill>
-                  <a:srgbClr val="37424F"/>
-                </a:solidFill>
-                <a:latin typeface="Calibri"/>
-              </a:rPr>
-              <a:t> (2026) — a ~19:1 funnel.</a:t>
-            </a:r>
-          </a:p>
-          <a:p>
-            <a:pPr>
-              <a:lnSpc>
-                <a:spcPct val="105000"/>
-              </a:lnSpc>
-              <a:spcAft>
-                <a:spcPts val="1100"/>
-              </a:spcAft>
-            </a:pPr>
-            <a:r>
-              <a:rPr sz="1600" b="1">
-                <a:solidFill>
-                  <a:srgbClr val="2F7D3A"/>
-                </a:solidFill>
-                <a:latin typeface="Calibri"/>
-              </a:rPr>
-              <a:t>▸  </a:t>
-            </a:r>
-            <a:r>
-              <a:rPr sz="1600" b="0">
-                <a:solidFill>
-                  <a:srgbClr val="37424F"/>
-                </a:solidFill>
-                <a:latin typeface="Calibri"/>
-              </a:rPr>
-              <a:t>Back-test: of </a:t>
-            </a:r>
-            <a:r>
-              <a:rPr sz="1600" b="1">
-                <a:solidFill>
-                  <a:srgbClr val="111820"/>
-                </a:solidFill>
-                <a:latin typeface="Calibri"/>
-              </a:rPr>
-              <a:t>105.7 GW proposed in 2022, only ~9.6 GW built, 52.6 GW dropped</a:t>
-            </a:r>
-            <a:r>
-              <a:rPr sz="1600" b="0">
-                <a:solidFill>
-                  <a:srgbClr val="37424F"/>
-                </a:solidFill>
-                <a:latin typeface="Calibri"/>
-              </a:rPr>
-              <a:t> by 2026 (~9% conversion).</a:t>
-            </a:r>
-          </a:p>
-          <a:p>
-            <a:pPr>
-              <a:lnSpc>
-                <a:spcPct val="105000"/>
-              </a:lnSpc>
-              <a:spcAft>
-                <a:spcPts val="1100"/>
-              </a:spcAft>
-            </a:pPr>
-            <a:r>
-              <a:rPr sz="1600" b="1">
-                <a:solidFill>
-                  <a:srgbClr val="2F7D3A"/>
-                </a:solidFill>
-                <a:latin typeface="Calibri"/>
-              </a:rPr>
-              <a:t>▸  </a:t>
-            </a:r>
-            <a:r>
-              <a:rPr sz="1600" b="0">
-                <a:solidFill>
-                  <a:srgbClr val="37424F"/>
-                </a:solidFill>
-                <a:latin typeface="Calibri"/>
-              </a:rPr>
-              <a:t>Even “</a:t>
-            </a:r>
-            <a:r>
-              <a:rPr sz="1600" b="1">
-                <a:solidFill>
-                  <a:srgbClr val="111820"/>
-                </a:solidFill>
-                <a:latin typeface="Calibri"/>
-              </a:rPr>
-              <a:t>Committed</a:t>
-            </a:r>
-            <a:r>
-              <a:rPr sz="1600" b="0">
-                <a:solidFill>
-                  <a:srgbClr val="37424F"/>
-                </a:solidFill>
-                <a:latin typeface="Calibri"/>
-              </a:rPr>
-              <a:t>” isn't concrete: Snowy 2.0 has been committed 4+ years and still isn't built.</a:t>
-            </a:r>
-          </a:p>
-          <a:p>
-            <a:pPr>
-              <a:lnSpc>
-                <a:spcPct val="105000"/>
-              </a:lnSpc>
-              <a:spcAft>
-                <a:spcPts val="1100"/>
-              </a:spcAft>
-            </a:pPr>
-            <a:r>
-              <a:rPr sz="1600" b="1">
-                <a:solidFill>
-                  <a:srgbClr val="2F7D3A"/>
-                </a:solidFill>
-                <a:latin typeface="Calibri"/>
-              </a:rPr>
-              <a:t>▸  </a:t>
-            </a:r>
-            <a:r>
-              <a:rPr sz="1600" b="1">
-                <a:solidFill>
-                  <a:srgbClr val="111820"/>
-                </a:solidFill>
-                <a:latin typeface="Calibri"/>
-              </a:rPr>
-              <a:t>CIS: ~32 GW contracted, just 0.29 GW operating</a:t>
-            </a:r>
-            <a:r>
-              <a:rPr sz="1600" b="0">
-                <a:solidFill>
-                  <a:srgbClr val="37424F"/>
-                </a:solidFill>
-                <a:latin typeface="Calibri"/>
-              </a:rPr>
-              <a:t> — a floor price is not a built asset.</a:t>
-            </a:r>
-          </a:p>
-          <a:p>
-            <a:pPr>
-              <a:lnSpc>
-                <a:spcPct val="105000"/>
-              </a:lnSpc>
-              <a:spcAft>
-                <a:spcPts val="1100"/>
-              </a:spcAft>
-            </a:pPr>
-            <a:r>
-              <a:rPr sz="1600" b="1">
-                <a:solidFill>
-                  <a:srgbClr val="2F7D3A"/>
-                </a:solidFill>
-                <a:latin typeface="Calibri"/>
-              </a:rPr>
-              <a:t>▸  </a:t>
-            </a:r>
-            <a:r>
-              <a:rPr sz="1600" b="0">
-                <a:solidFill>
-                  <a:srgbClr val="37424F"/>
-                </a:solidFill>
-                <a:latin typeface="Calibri"/>
-              </a:rPr>
-              <a:t>Only </a:t>
-            </a:r>
-            <a:r>
-              <a:rPr sz="1600" b="1">
-                <a:solidFill>
-                  <a:srgbClr val="111820"/>
-                </a:solidFill>
-                <a:latin typeface="Calibri"/>
-              </a:rPr>
-              <a:t>3 major transmission lines</a:t>
-            </a:r>
-            <a:r>
-              <a:rPr sz="1600" b="0">
-                <a:solidFill>
-                  <a:srgbClr val="37424F"/>
-                </a:solidFill>
-                <a:latin typeface="Calibri"/>
-              </a:rPr>
-              <a:t> are in construction; ~30% of projects draw a full EPBC assessment.</a:t>
-            </a:r>
-          </a:p>
-          <a:p>
-            <a:pPr>
-              <a:lnSpc>
-                <a:spcPct val="105000"/>
-              </a:lnSpc>
-              <a:spcAft>
-                <a:spcPts val="1100"/>
-              </a:spcAft>
-            </a:pPr>
-            <a:r>
-              <a:rPr sz="1600" b="1">
-                <a:solidFill>
-                  <a:srgbClr val="2F7D3A"/>
-                </a:solidFill>
-                <a:latin typeface="Calibri"/>
-              </a:rPr>
-              <a:t>▸  </a:t>
-            </a:r>
-            <a:r>
-              <a:rPr sz="1600" b="0">
-                <a:solidFill>
-                  <a:srgbClr val="37424F"/>
-                </a:solidFill>
-                <a:latin typeface="Calibri"/>
-              </a:rPr>
-              <a:t>Commissioning takes real time: </a:t>
-            </a:r>
-            <a:r>
-              <a:rPr sz="1600" b="1">
-                <a:solidFill>
-                  <a:srgbClr val="111820"/>
-                </a:solidFill>
-                <a:latin typeface="Calibri"/>
-              </a:rPr>
-              <a:t>wind ~10 months, batteries ~7</a:t>
-            </a:r>
-            <a:r>
-              <a:rPr sz="1600" b="0">
-                <a:solidFill>
-                  <a:srgbClr val="37424F"/>
-                </a:solidFill>
-                <a:latin typeface="Calibri"/>
-              </a:rPr>
-              <a:t> from first energisation.</a:t>
-            </a:r>
-          </a:p>
-        </p:txBody>
-      </p:sp>
+              <a:t>The long view — the mirage growing</a:t>
+            </a:r>
+          </a:p>
+        </p:txBody>
+      </p:sp>
+      <p:graphicFrame>
+        <p:nvGraphicFramePr>
+          <p:cNvPr id="6" name="Chart 5"/>
+          <p:cNvGraphicFramePr>
+            <a:graphicFrameLocks noGrp="1"/>
+          </p:cNvGraphicFramePr>
+          <p:nvPr/>
+        </p:nvGraphicFramePr>
+        <p:xfrm>
+          <a:off x="548640" y="1554480"/>
+          <a:ext cx="11064240" cy="4114800"/>
+        </p:xfrm>
+        <a:graphic>
+          <a:graphicData uri="http://schemas.openxmlformats.org/drawingml/2006/chart">
+            <c:chart xmlns:c="http://schemas.openxmlformats.org/drawingml/2006/chart" r:id="rId2"/>
+          </a:graphicData>
+        </a:graphic>
+      </p:graphicFrame>
       <p:sp>
         <p:nvSpPr>
           <p:cNvPr id="7" name="Rectangle 6"/>
@@ -18756,8 +18981,8 @@
         </p:nvSpPr>
         <p:spPr>
           <a:xfrm>
-            <a:off x="548640" y="5669280"/>
-            <a:ext cx="11064240" cy="685800"/>
+            <a:off x="548640" y="5806440"/>
+            <a:ext cx="11064240" cy="566928"/>
           </a:xfrm>
           <a:prstGeom prst="rect">
             <a:avLst/>
@@ -18767,7 +18992,7 @@
           </a:solidFill>
           <a:ln w="9525">
             <a:solidFill>
-              <a:srgbClr val="D8DEE6"/>
+              <a:srgbClr val="2F7D3A"/>
             </a:solidFill>
           </a:ln>
           <a:effectLst/>
@@ -18802,7 +19027,7 @@
         </p:nvSpPr>
         <p:spPr>
           <a:xfrm>
-            <a:off x="731520" y="5779008"/>
+            <a:off x="731520" y="5852160"/>
             <a:ext cx="10698480" cy="457200"/>
           </a:xfrm>
           <a:prstGeom prst="rect">
@@ -18828,13 +19053,22 @@
               </a:spcAft>
             </a:pPr>
             <a:r>
-              <a:rPr sz="1350" b="0" i="1">
+              <a:rPr sz="1200" b="1" i="0">
+                <a:solidFill>
+                  <a:srgbClr val="2F7D3A"/>
+                </a:solidFill>
+                <a:latin typeface="Consolas"/>
+              </a:rPr>
+              <a:t>Takeaway  </a:t>
+            </a:r>
+            <a:r>
+              <a:rPr sz="1400" b="0" i="0">
                 <a:solidFill>
                   <a:srgbClr val="37424F"/>
                 </a:solidFill>
                 <a:latin typeface="Calibri"/>
               </a:rPr>
-              <a:t>The back-test is the crown jewel: “Committed” is a probability, not a promise — and the data can price it.</a:t>
+              <a:t>Proposed capacity multiplied ~7× to 346 GW while committed and built crawled — the gap is the mirage.</a:t>
             </a:r>
           </a:p>
         </p:txBody>
@@ -19075,30 +19309,313 @@
                 </a:solidFill>
                 <a:latin typeface="Calibri"/>
               </a:rPr>
-              <a:t>Provocations — take a position</a:t>
-            </a:r>
-          </a:p>
-        </p:txBody>
-      </p:sp>
-      <p:sp>
-        <p:nvSpPr>
-          <p:cNvPr id="6" name="Rectangle 5"/>
+              <a:t>The data on the table</a:t>
+            </a:r>
+          </a:p>
+        </p:txBody>
+      </p:sp>
+      <p:sp>
+        <p:nvSpPr>
+          <p:cNvPr id="6" name="TextBox 5"/>
+          <p:cNvSpPr txBox="1"/>
+          <p:nvPr/>
+        </p:nvSpPr>
+        <p:spPr>
+          <a:xfrm>
+            <a:off x="548640" y="1600200"/>
+            <a:ext cx="11064240" cy="4206240"/>
+          </a:xfrm>
+          <a:prstGeom prst="rect">
+            <a:avLst/>
+          </a:prstGeom>
+          <a:noFill/>
+        </p:spPr>
+        <p:txBody>
+          <a:bodyPr wrap="square" lIns="0" rIns="0" tIns="0" bIns="0">
+            <a:spAutoFit/>
+          </a:bodyPr>
+          <a:lstStyle/>
+          <a:p>
+            <a:pPr>
+              <a:lnSpc>
+                <a:spcPct val="105000"/>
+              </a:lnSpc>
+              <a:spcAft>
+                <a:spcPts val="1100"/>
+              </a:spcAft>
+            </a:pPr>
+            <a:r>
+              <a:rPr sz="1600" b="1">
+                <a:solidFill>
+                  <a:srgbClr val="2F7D3A"/>
+                </a:solidFill>
+                <a:latin typeface="Calibri"/>
+              </a:rPr>
+              <a:t>▸  </a:t>
+            </a:r>
+            <a:r>
+              <a:rPr sz="1600" b="1">
+                <a:solidFill>
+                  <a:srgbClr val="111820"/>
+                </a:solidFill>
+                <a:latin typeface="Calibri"/>
+              </a:rPr>
+              <a:t>Proposed 346 GW vs committed ~13 GW vs built ~70 GW</a:t>
+            </a:r>
+            <a:r>
+              <a:rPr sz="1600" b="0">
+                <a:solidFill>
+                  <a:srgbClr val="37424F"/>
+                </a:solidFill>
+                <a:latin typeface="Calibri"/>
+              </a:rPr>
+              <a:t> (2026) — a ~19:1 funnel.</a:t>
+            </a:r>
+          </a:p>
+          <a:p>
+            <a:pPr>
+              <a:lnSpc>
+                <a:spcPct val="105000"/>
+              </a:lnSpc>
+              <a:spcAft>
+                <a:spcPts val="1100"/>
+              </a:spcAft>
+            </a:pPr>
+            <a:r>
+              <a:rPr sz="1600" b="1">
+                <a:solidFill>
+                  <a:srgbClr val="2F7D3A"/>
+                </a:solidFill>
+                <a:latin typeface="Calibri"/>
+              </a:rPr>
+              <a:t>▸  </a:t>
+            </a:r>
+            <a:r>
+              <a:rPr sz="1600" b="0">
+                <a:solidFill>
+                  <a:srgbClr val="37424F"/>
+                </a:solidFill>
+                <a:latin typeface="Calibri"/>
+              </a:rPr>
+              <a:t>Back-test: of </a:t>
+            </a:r>
+            <a:r>
+              <a:rPr sz="1600" b="1">
+                <a:solidFill>
+                  <a:srgbClr val="111820"/>
+                </a:solidFill>
+                <a:latin typeface="Calibri"/>
+              </a:rPr>
+              <a:t>105.7 GW proposed in 2022, only ~9.6 GW built, 52.6 GW dropped</a:t>
+            </a:r>
+            <a:r>
+              <a:rPr sz="1600" b="0">
+                <a:solidFill>
+                  <a:srgbClr val="37424F"/>
+                </a:solidFill>
+                <a:latin typeface="Calibri"/>
+              </a:rPr>
+              <a:t> by 2026 (~9% conversion).</a:t>
+            </a:r>
+          </a:p>
+          <a:p>
+            <a:pPr>
+              <a:lnSpc>
+                <a:spcPct val="105000"/>
+              </a:lnSpc>
+              <a:spcAft>
+                <a:spcPts val="1100"/>
+              </a:spcAft>
+            </a:pPr>
+            <a:r>
+              <a:rPr sz="1600" b="1">
+                <a:solidFill>
+                  <a:srgbClr val="2F7D3A"/>
+                </a:solidFill>
+                <a:latin typeface="Calibri"/>
+              </a:rPr>
+              <a:t>▸  </a:t>
+            </a:r>
+            <a:r>
+              <a:rPr sz="1600" b="0">
+                <a:solidFill>
+                  <a:srgbClr val="37424F"/>
+                </a:solidFill>
+                <a:latin typeface="Calibri"/>
+              </a:rPr>
+              <a:t>Even “</a:t>
+            </a:r>
+            <a:r>
+              <a:rPr sz="1600" b="1">
+                <a:solidFill>
+                  <a:srgbClr val="111820"/>
+                </a:solidFill>
+                <a:latin typeface="Calibri"/>
+              </a:rPr>
+              <a:t>Committed</a:t>
+            </a:r>
+            <a:r>
+              <a:rPr sz="1600" b="0">
+                <a:solidFill>
+                  <a:srgbClr val="37424F"/>
+                </a:solidFill>
+                <a:latin typeface="Calibri"/>
+              </a:rPr>
+              <a:t>” isn't concrete: Snowy 2.0 has been committed 4+ years and still isn't built.</a:t>
+            </a:r>
+          </a:p>
+          <a:p>
+            <a:pPr>
+              <a:lnSpc>
+                <a:spcPct val="105000"/>
+              </a:lnSpc>
+              <a:spcAft>
+                <a:spcPts val="1100"/>
+              </a:spcAft>
+            </a:pPr>
+            <a:r>
+              <a:rPr sz="1600" b="1">
+                <a:solidFill>
+                  <a:srgbClr val="2F7D3A"/>
+                </a:solidFill>
+                <a:latin typeface="Calibri"/>
+              </a:rPr>
+              <a:t>▸  </a:t>
+            </a:r>
+            <a:r>
+              <a:rPr sz="1600" b="1">
+                <a:solidFill>
+                  <a:srgbClr val="111820"/>
+                </a:solidFill>
+                <a:latin typeface="Calibri"/>
+              </a:rPr>
+              <a:t>CIS: ~32 GW contracted, just 0.29 GW operating</a:t>
+            </a:r>
+            <a:r>
+              <a:rPr sz="1600" b="0">
+                <a:solidFill>
+                  <a:srgbClr val="37424F"/>
+                </a:solidFill>
+                <a:latin typeface="Calibri"/>
+              </a:rPr>
+              <a:t> — a floor price is not a built asset.</a:t>
+            </a:r>
+          </a:p>
+          <a:p>
+            <a:pPr>
+              <a:lnSpc>
+                <a:spcPct val="105000"/>
+              </a:lnSpc>
+              <a:spcAft>
+                <a:spcPts val="1100"/>
+              </a:spcAft>
+            </a:pPr>
+            <a:r>
+              <a:rPr sz="1600" b="1">
+                <a:solidFill>
+                  <a:srgbClr val="2F7D3A"/>
+                </a:solidFill>
+                <a:latin typeface="Calibri"/>
+              </a:rPr>
+              <a:t>▸  </a:t>
+            </a:r>
+            <a:r>
+              <a:rPr sz="1600" b="0">
+                <a:solidFill>
+                  <a:srgbClr val="37424F"/>
+                </a:solidFill>
+                <a:latin typeface="Calibri"/>
+              </a:rPr>
+              <a:t>Only </a:t>
+            </a:r>
+            <a:r>
+              <a:rPr sz="1600" b="1">
+                <a:solidFill>
+                  <a:srgbClr val="111820"/>
+                </a:solidFill>
+                <a:latin typeface="Calibri"/>
+              </a:rPr>
+              <a:t>3 major transmission lines</a:t>
+            </a:r>
+            <a:r>
+              <a:rPr sz="1600" b="0">
+                <a:solidFill>
+                  <a:srgbClr val="37424F"/>
+                </a:solidFill>
+                <a:latin typeface="Calibri"/>
+              </a:rPr>
+              <a:t> are in construction; ~30% of projects draw a full EPBC assessment.</a:t>
+            </a:r>
+          </a:p>
+          <a:p>
+            <a:pPr>
+              <a:lnSpc>
+                <a:spcPct val="105000"/>
+              </a:lnSpc>
+              <a:spcAft>
+                <a:spcPts val="1100"/>
+              </a:spcAft>
+            </a:pPr>
+            <a:r>
+              <a:rPr sz="1600" b="1">
+                <a:solidFill>
+                  <a:srgbClr val="2F7D3A"/>
+                </a:solidFill>
+                <a:latin typeface="Calibri"/>
+              </a:rPr>
+              <a:t>▸  </a:t>
+            </a:r>
+            <a:r>
+              <a:rPr sz="1600" b="0">
+                <a:solidFill>
+                  <a:srgbClr val="37424F"/>
+                </a:solidFill>
+                <a:latin typeface="Calibri"/>
+              </a:rPr>
+              <a:t>Commissioning takes real time: </a:t>
+            </a:r>
+            <a:r>
+              <a:rPr sz="1600" b="1">
+                <a:solidFill>
+                  <a:srgbClr val="111820"/>
+                </a:solidFill>
+                <a:latin typeface="Calibri"/>
+              </a:rPr>
+              <a:t>wind ~10 months, batteries ~7</a:t>
+            </a:r>
+            <a:r>
+              <a:rPr sz="1600" b="0">
+                <a:solidFill>
+                  <a:srgbClr val="37424F"/>
+                </a:solidFill>
+                <a:latin typeface="Calibri"/>
+              </a:rPr>
+              <a:t> from first energisation.</a:t>
+            </a:r>
+          </a:p>
+        </p:txBody>
+      </p:sp>
+      <p:sp>
+        <p:nvSpPr>
+          <p:cNvPr id="7" name="Rectangle 6"/>
           <p:cNvSpPr/>
           <p:nvPr/>
         </p:nvSpPr>
         <p:spPr>
           <a:xfrm>
-            <a:off x="548640" y="1600200"/>
-            <a:ext cx="457200" cy="457200"/>
+            <a:off x="548640" y="5669280"/>
+            <a:ext cx="11064240" cy="685800"/>
           </a:xfrm>
           <a:prstGeom prst="rect">
             <a:avLst/>
           </a:prstGeom>
           <a:solidFill>
-            <a:srgbClr val="2F7D3A"/>
+            <a:srgbClr val="F4F6F9"/>
           </a:solidFill>
-          <a:ln>
-            <a:noFill/>
+          <a:ln w="9525">
+            <a:solidFill>
+              <a:srgbClr val="D8DEE6"/>
+            </a:solidFill>
           </a:ln>
           <a:effectLst/>
         </p:spPr>
@@ -19126,59 +19643,14 @@
       </p:sp>
       <p:sp>
         <p:nvSpPr>
-          <p:cNvPr id="7" name="TextBox 6"/>
-          <p:cNvSpPr txBox="1"/>
-          <p:nvPr/>
-        </p:nvSpPr>
-        <p:spPr>
-          <a:xfrm>
-            <a:off x="548640" y="1600200"/>
-            <a:ext cx="457200" cy="457200"/>
-          </a:xfrm>
-          <a:prstGeom prst="rect">
-            <a:avLst/>
-          </a:prstGeom>
-          <a:noFill/>
-        </p:spPr>
-        <p:txBody>
-          <a:bodyPr wrap="square" anchor="ctr" lIns="0" rIns="0" tIns="0" bIns="0">
-            <a:spAutoFit/>
-          </a:bodyPr>
-          <a:lstStyle/>
-          <a:p>
-            <a:pPr algn="ctr">
-              <a:lnSpc>
-                <a:spcPct val="106000"/>
-              </a:lnSpc>
-              <a:spcBef>
-                <a:spcPts val="0"/>
-              </a:spcBef>
-              <a:spcAft>
-                <a:spcPts val="600"/>
-              </a:spcAft>
-            </a:pPr>
-            <a:r>
-              <a:rPr sz="1800" b="1" i="0">
-                <a:solidFill>
-                  <a:srgbClr val="FFFFFF"/>
-                </a:solidFill>
-                <a:latin typeface="Calibri"/>
-              </a:rPr>
-              <a:t>A</a:t>
-            </a:r>
-          </a:p>
-        </p:txBody>
-      </p:sp>
-      <p:sp>
-        <p:nvSpPr>
           <p:cNvPr id="8" name="TextBox 7"/>
           <p:cNvSpPr txBox="1"/>
           <p:nvPr/>
         </p:nvSpPr>
         <p:spPr>
           <a:xfrm>
-            <a:off x="1188720" y="1618488"/>
-            <a:ext cx="10332720" cy="731520"/>
+            <a:off x="731520" y="5779008"/>
+            <a:ext cx="10698480" cy="457200"/>
           </a:xfrm>
           <a:prstGeom prst="rect">
             <a:avLst/>
@@ -19203,558 +19675,20 @@
               </a:spcAft>
             </a:pPr>
             <a:r>
-              <a:rPr sz="1600" b="0" i="0">
+              <a:rPr sz="1350" b="0" i="1">
                 <a:solidFill>
                   <a:srgbClr val="37424F"/>
                 </a:solidFill>
                 <a:latin typeface="Calibri"/>
               </a:rPr>
-              <a:t>Which gate kills the most megawatts — connection, transmission, offtake, or planning?</a:t>
-            </a:r>
-          </a:p>
-        </p:txBody>
-      </p:sp>
-      <p:sp>
-        <p:nvSpPr>
-          <p:cNvPr id="9" name="Rectangle 8"/>
-          <p:cNvSpPr/>
-          <p:nvPr/>
-        </p:nvSpPr>
-        <p:spPr>
-          <a:xfrm>
-            <a:off x="548640" y="2441448"/>
-            <a:ext cx="457200" cy="457200"/>
-          </a:xfrm>
-          <a:prstGeom prst="rect">
-            <a:avLst/>
-          </a:prstGeom>
-          <a:solidFill>
-            <a:srgbClr val="2F7D3A"/>
-          </a:solidFill>
-          <a:ln>
-            <a:noFill/>
-          </a:ln>
-          <a:effectLst/>
-        </p:spPr>
-        <p:style>
-          <a:lnRef idx="1">
-            <a:schemeClr val="accent1"/>
-          </a:lnRef>
-          <a:fillRef idx="3">
-            <a:schemeClr val="accent1"/>
-          </a:fillRef>
-          <a:effectRef idx="2">
-            <a:schemeClr val="accent1"/>
-          </a:effectRef>
-          <a:fontRef idx="minor">
-            <a:schemeClr val="lt1"/>
-          </a:fontRef>
-        </p:style>
-        <p:txBody>
-          <a:bodyPr rtlCol="0" anchor="ctr"/>
-          <a:lstStyle/>
-          <a:p>
-            <a:pPr algn="ctr"/>
-          </a:p>
-        </p:txBody>
-      </p:sp>
-      <p:sp>
-        <p:nvSpPr>
-          <p:cNvPr id="10" name="TextBox 9"/>
-          <p:cNvSpPr txBox="1"/>
-          <p:nvPr/>
-        </p:nvSpPr>
-        <p:spPr>
-          <a:xfrm>
-            <a:off x="548640" y="2441448"/>
-            <a:ext cx="457200" cy="457200"/>
-          </a:xfrm>
-          <a:prstGeom prst="rect">
-            <a:avLst/>
-          </a:prstGeom>
-          <a:noFill/>
-        </p:spPr>
-        <p:txBody>
-          <a:bodyPr wrap="square" anchor="ctr" lIns="0" rIns="0" tIns="0" bIns="0">
-            <a:spAutoFit/>
-          </a:bodyPr>
-          <a:lstStyle/>
-          <a:p>
-            <a:pPr algn="ctr">
-              <a:lnSpc>
-                <a:spcPct val="106000"/>
-              </a:lnSpc>
-              <a:spcBef>
-                <a:spcPts val="0"/>
-              </a:spcBef>
-              <a:spcAft>
-                <a:spcPts val="600"/>
-              </a:spcAft>
-            </a:pPr>
-            <a:r>
-              <a:rPr sz="1800" b="1" i="0">
-                <a:solidFill>
-                  <a:srgbClr val="FFFFFF"/>
-                </a:solidFill>
-                <a:latin typeface="Calibri"/>
-              </a:rPr>
-              <a:t>B</a:t>
-            </a:r>
-          </a:p>
-        </p:txBody>
-      </p:sp>
-      <p:sp>
-        <p:nvSpPr>
-          <p:cNvPr id="11" name="TextBox 10"/>
-          <p:cNvSpPr txBox="1"/>
-          <p:nvPr/>
-        </p:nvSpPr>
-        <p:spPr>
-          <a:xfrm>
-            <a:off x="1188720" y="2459736"/>
-            <a:ext cx="10332720" cy="731520"/>
-          </a:xfrm>
-          <a:prstGeom prst="rect">
-            <a:avLst/>
-          </a:prstGeom>
-          <a:noFill/>
-        </p:spPr>
-        <p:txBody>
-          <a:bodyPr wrap="square" anchor="ctr" lIns="0" rIns="0" tIns="0" bIns="0">
-            <a:spAutoFit/>
-          </a:bodyPr>
-          <a:lstStyle/>
-          <a:p>
-            <a:pPr algn="l">
-              <a:lnSpc>
-                <a:spcPct val="106000"/>
-              </a:lnSpc>
-              <a:spcBef>
-                <a:spcPts val="0"/>
-              </a:spcBef>
-              <a:spcAft>
-                <a:spcPts val="600"/>
-              </a:spcAft>
-            </a:pPr>
-            <a:r>
-              <a:rPr sz="1600" b="0" i="0">
-                <a:solidFill>
-                  <a:srgbClr val="37424F"/>
-                </a:solidFill>
-                <a:latin typeface="Calibri"/>
-              </a:rPr>
-              <a:t>What early signal best separates the real projects from the mirage?</a:t>
-            </a:r>
-          </a:p>
-        </p:txBody>
-      </p:sp>
-      <p:sp>
-        <p:nvSpPr>
-          <p:cNvPr id="12" name="Rectangle 11"/>
-          <p:cNvSpPr/>
-          <p:nvPr/>
-        </p:nvSpPr>
-        <p:spPr>
-          <a:xfrm>
-            <a:off x="548640" y="3282696"/>
-            <a:ext cx="457200" cy="457200"/>
-          </a:xfrm>
-          <a:prstGeom prst="rect">
-            <a:avLst/>
-          </a:prstGeom>
-          <a:solidFill>
-            <a:srgbClr val="2F7D3A"/>
-          </a:solidFill>
-          <a:ln>
-            <a:noFill/>
-          </a:ln>
-          <a:effectLst/>
-        </p:spPr>
-        <p:style>
-          <a:lnRef idx="1">
-            <a:schemeClr val="accent1"/>
-          </a:lnRef>
-          <a:fillRef idx="3">
-            <a:schemeClr val="accent1"/>
-          </a:fillRef>
-          <a:effectRef idx="2">
-            <a:schemeClr val="accent1"/>
-          </a:effectRef>
-          <a:fontRef idx="minor">
-            <a:schemeClr val="lt1"/>
-          </a:fontRef>
-        </p:style>
-        <p:txBody>
-          <a:bodyPr rtlCol="0" anchor="ctr"/>
-          <a:lstStyle/>
-          <a:p>
-            <a:pPr algn="ctr"/>
-          </a:p>
-        </p:txBody>
-      </p:sp>
-      <p:sp>
-        <p:nvSpPr>
-          <p:cNvPr id="13" name="TextBox 12"/>
-          <p:cNvSpPr txBox="1"/>
-          <p:nvPr/>
-        </p:nvSpPr>
-        <p:spPr>
-          <a:xfrm>
-            <a:off x="548640" y="3282696"/>
-            <a:ext cx="457200" cy="457200"/>
-          </a:xfrm>
-          <a:prstGeom prst="rect">
-            <a:avLst/>
-          </a:prstGeom>
-          <a:noFill/>
-        </p:spPr>
-        <p:txBody>
-          <a:bodyPr wrap="square" anchor="ctr" lIns="0" rIns="0" tIns="0" bIns="0">
-            <a:spAutoFit/>
-          </a:bodyPr>
-          <a:lstStyle/>
-          <a:p>
-            <a:pPr algn="ctr">
-              <a:lnSpc>
-                <a:spcPct val="106000"/>
-              </a:lnSpc>
-              <a:spcBef>
-                <a:spcPts val="0"/>
-              </a:spcBef>
-              <a:spcAft>
-                <a:spcPts val="600"/>
-              </a:spcAft>
-            </a:pPr>
-            <a:r>
-              <a:rPr sz="1800" b="1" i="0">
-                <a:solidFill>
-                  <a:srgbClr val="FFFFFF"/>
-                </a:solidFill>
-                <a:latin typeface="Calibri"/>
-              </a:rPr>
-              <a:t>C</a:t>
-            </a:r>
-          </a:p>
-        </p:txBody>
-      </p:sp>
-      <p:sp>
-        <p:nvSpPr>
-          <p:cNvPr id="14" name="TextBox 13"/>
-          <p:cNvSpPr txBox="1"/>
-          <p:nvPr/>
-        </p:nvSpPr>
-        <p:spPr>
-          <a:xfrm>
-            <a:off x="1188720" y="3300984"/>
-            <a:ext cx="10332720" cy="731520"/>
-          </a:xfrm>
-          <a:prstGeom prst="rect">
-            <a:avLst/>
-          </a:prstGeom>
-          <a:noFill/>
-        </p:spPr>
-        <p:txBody>
-          <a:bodyPr wrap="square" anchor="ctr" lIns="0" rIns="0" tIns="0" bIns="0">
-            <a:spAutoFit/>
-          </a:bodyPr>
-          <a:lstStyle/>
-          <a:p>
-            <a:pPr algn="l">
-              <a:lnSpc>
-                <a:spcPct val="106000"/>
-              </a:lnSpc>
-              <a:spcBef>
-                <a:spcPts val="0"/>
-              </a:spcBef>
-              <a:spcAft>
-                <a:spcPts val="600"/>
-              </a:spcAft>
-            </a:pPr>
-            <a:r>
-              <a:rPr sz="1600" b="0" i="0">
-                <a:solidFill>
-                  <a:srgbClr val="37424F"/>
-                </a:solidFill>
-                <a:latin typeface="Calibri"/>
-              </a:rPr>
-              <a:t>Does our screening assume anything remotely as brutal as ~9% proposed-to-built?</a:t>
-            </a:r>
-          </a:p>
-        </p:txBody>
-      </p:sp>
-      <p:sp>
-        <p:nvSpPr>
-          <p:cNvPr id="15" name="Rectangle 14"/>
-          <p:cNvSpPr/>
-          <p:nvPr/>
-        </p:nvSpPr>
-        <p:spPr>
-          <a:xfrm>
-            <a:off x="548640" y="4123944"/>
-            <a:ext cx="457200" cy="457200"/>
-          </a:xfrm>
-          <a:prstGeom prst="rect">
-            <a:avLst/>
-          </a:prstGeom>
-          <a:solidFill>
-            <a:srgbClr val="2F7D3A"/>
-          </a:solidFill>
-          <a:ln>
-            <a:noFill/>
-          </a:ln>
-          <a:effectLst/>
-        </p:spPr>
-        <p:style>
-          <a:lnRef idx="1">
-            <a:schemeClr val="accent1"/>
-          </a:lnRef>
-          <a:fillRef idx="3">
-            <a:schemeClr val="accent1"/>
-          </a:fillRef>
-          <a:effectRef idx="2">
-            <a:schemeClr val="accent1"/>
-          </a:effectRef>
-          <a:fontRef idx="minor">
-            <a:schemeClr val="lt1"/>
-          </a:fontRef>
-        </p:style>
-        <p:txBody>
-          <a:bodyPr rtlCol="0" anchor="ctr"/>
-          <a:lstStyle/>
-          <a:p>
-            <a:pPr algn="ctr"/>
-          </a:p>
-        </p:txBody>
-      </p:sp>
-      <p:sp>
-        <p:nvSpPr>
-          <p:cNvPr id="16" name="TextBox 15"/>
-          <p:cNvSpPr txBox="1"/>
-          <p:nvPr/>
-        </p:nvSpPr>
-        <p:spPr>
-          <a:xfrm>
-            <a:off x="548640" y="4123944"/>
-            <a:ext cx="457200" cy="457200"/>
-          </a:xfrm>
-          <a:prstGeom prst="rect">
-            <a:avLst/>
-          </a:prstGeom>
-          <a:noFill/>
-        </p:spPr>
-        <p:txBody>
-          <a:bodyPr wrap="square" anchor="ctr" lIns="0" rIns="0" tIns="0" bIns="0">
-            <a:spAutoFit/>
-          </a:bodyPr>
-          <a:lstStyle/>
-          <a:p>
-            <a:pPr algn="ctr">
-              <a:lnSpc>
-                <a:spcPct val="106000"/>
-              </a:lnSpc>
-              <a:spcBef>
-                <a:spcPts val="0"/>
-              </a:spcBef>
-              <a:spcAft>
-                <a:spcPts val="600"/>
-              </a:spcAft>
-            </a:pPr>
-            <a:r>
-              <a:rPr sz="1800" b="1" i="0">
-                <a:solidFill>
-                  <a:srgbClr val="FFFFFF"/>
-                </a:solidFill>
-                <a:latin typeface="Calibri"/>
-              </a:rPr>
-              <a:t>D</a:t>
-            </a:r>
-          </a:p>
-        </p:txBody>
-      </p:sp>
-      <p:sp>
-        <p:nvSpPr>
-          <p:cNvPr id="17" name="TextBox 16"/>
-          <p:cNvSpPr txBox="1"/>
-          <p:nvPr/>
-        </p:nvSpPr>
-        <p:spPr>
-          <a:xfrm>
-            <a:off x="1188720" y="4142232"/>
-            <a:ext cx="10332720" cy="731520"/>
-          </a:xfrm>
-          <a:prstGeom prst="rect">
-            <a:avLst/>
-          </a:prstGeom>
-          <a:noFill/>
-        </p:spPr>
-        <p:txBody>
-          <a:bodyPr wrap="square" anchor="ctr" lIns="0" rIns="0" tIns="0" bIns="0">
-            <a:spAutoFit/>
-          </a:bodyPr>
-          <a:lstStyle/>
-          <a:p>
-            <a:pPr algn="l">
-              <a:lnSpc>
-                <a:spcPct val="106000"/>
-              </a:lnSpc>
-              <a:spcBef>
-                <a:spcPts val="0"/>
-              </a:spcBef>
-              <a:spcAft>
-                <a:spcPts val="600"/>
-              </a:spcAft>
-            </a:pPr>
-            <a:r>
-              <a:rPr sz="1600" b="0" i="0">
-                <a:solidFill>
-                  <a:srgbClr val="37424F"/>
-                </a:solidFill>
-                <a:latin typeface="Calibri"/>
-              </a:rPr>
-              <a:t>If you could unlock one transmission line, which frees the most generation?</a:t>
-            </a:r>
-          </a:p>
-        </p:txBody>
-      </p:sp>
-      <p:sp>
-        <p:nvSpPr>
-          <p:cNvPr id="18" name="Rectangle 17"/>
-          <p:cNvSpPr/>
-          <p:nvPr/>
-        </p:nvSpPr>
-        <p:spPr>
-          <a:xfrm>
-            <a:off x="548640" y="5532120"/>
-            <a:ext cx="11064240" cy="777240"/>
-          </a:xfrm>
-          <a:prstGeom prst="rect">
-            <a:avLst/>
-          </a:prstGeom>
-          <a:solidFill>
-            <a:srgbClr val="F4F6F9"/>
-          </a:solidFill>
-          <a:ln w="9525">
-            <a:solidFill>
-              <a:srgbClr val="2F7D3A"/>
-            </a:solidFill>
-          </a:ln>
-          <a:effectLst/>
-        </p:spPr>
-        <p:style>
-          <a:lnRef idx="1">
-            <a:schemeClr val="accent1"/>
-          </a:lnRef>
-          <a:fillRef idx="3">
-            <a:schemeClr val="accent1"/>
-          </a:fillRef>
-          <a:effectRef idx="2">
-            <a:schemeClr val="accent1"/>
-          </a:effectRef>
-          <a:fontRef idx="minor">
-            <a:schemeClr val="lt1"/>
-          </a:fontRef>
-        </p:style>
-        <p:txBody>
-          <a:bodyPr rtlCol="0" anchor="ctr"/>
-          <a:lstStyle/>
-          <a:p>
-            <a:pPr algn="ctr"/>
-          </a:p>
-        </p:txBody>
-      </p:sp>
-      <p:sp>
-        <p:nvSpPr>
-          <p:cNvPr id="19" name="TextBox 18"/>
-          <p:cNvSpPr txBox="1"/>
-          <p:nvPr/>
-        </p:nvSpPr>
-        <p:spPr>
-          <a:xfrm>
-            <a:off x="731520" y="5632704"/>
-            <a:ext cx="10698480" cy="320040"/>
-          </a:xfrm>
-          <a:prstGeom prst="rect">
-            <a:avLst/>
-          </a:prstGeom>
-          <a:noFill/>
-        </p:spPr>
-        <p:txBody>
-          <a:bodyPr wrap="square" anchor="t" lIns="0" rIns="0" tIns="0" bIns="0">
-            <a:spAutoFit/>
-          </a:bodyPr>
-          <a:lstStyle/>
-          <a:p>
-            <a:pPr algn="l">
-              <a:lnSpc>
-                <a:spcPct val="106000"/>
-              </a:lnSpc>
-              <a:spcBef>
-                <a:spcPts val="0"/>
-              </a:spcBef>
-              <a:spcAft>
-                <a:spcPts val="600"/>
-              </a:spcAft>
-            </a:pPr>
-            <a:r>
-              <a:rPr sz="1100" b="1" i="0">
-                <a:solidFill>
-                  <a:srgbClr val="2F7D3A"/>
-                </a:solidFill>
-                <a:latin typeface="Consolas"/>
-              </a:rPr>
-              <a:t>YOUR HYPOTHESIS</a:t>
-            </a:r>
-          </a:p>
-        </p:txBody>
-      </p:sp>
-      <p:sp>
-        <p:nvSpPr>
-          <p:cNvPr id="20" name="TextBox 19"/>
-          <p:cNvSpPr txBox="1"/>
-          <p:nvPr/>
-        </p:nvSpPr>
-        <p:spPr>
-          <a:xfrm>
-            <a:off x="731520" y="5897880"/>
-            <a:ext cx="10698480" cy="365760"/>
-          </a:xfrm>
-          <a:prstGeom prst="rect">
-            <a:avLst/>
-          </a:prstGeom>
-          <a:noFill/>
-        </p:spPr>
-        <p:txBody>
-          <a:bodyPr wrap="square" anchor="t" lIns="0" rIns="0" tIns="0" bIns="0">
-            <a:spAutoFit/>
-          </a:bodyPr>
-          <a:lstStyle/>
-          <a:p>
-            <a:pPr algn="l">
-              <a:lnSpc>
-                <a:spcPct val="106000"/>
-              </a:lnSpc>
-              <a:spcBef>
-                <a:spcPts val="0"/>
-              </a:spcBef>
-              <a:spcAft>
-                <a:spcPts val="600"/>
-              </a:spcAft>
-            </a:pPr>
-            <a:r>
-              <a:rPr sz="1500" b="0" i="1">
-                <a:solidFill>
-                  <a:srgbClr val="111820"/>
-                </a:solidFill>
-                <a:latin typeface="Calibri"/>
-              </a:rPr>
-              <a:t>What's the one signal you'll check before believing a “pipeline” number?</a:t>
-            </a:r>
-          </a:p>
-        </p:txBody>
-      </p:sp>
-      <p:sp>
-        <p:nvSpPr>
-          <p:cNvPr id="21" name="TextBox 20"/>
+              <a:t>The back-test is the crown jewel: “Committed” is a probability, not a promise — and the data can price it.</a:t>
+            </a:r>
+          </a:p>
+        </p:txBody>
+      </p:sp>
+      <p:sp>
+        <p:nvSpPr>
+          <p:cNvPr id="9" name="TextBox 8"/>
           <p:cNvSpPr txBox="1"/>
           <p:nvPr/>
         </p:nvSpPr>
@@ -19874,7 +19808,7 @@
             <a:avLst/>
           </a:prstGeom>
           <a:solidFill>
-            <a:srgbClr val="0D7D74"/>
+            <a:srgbClr val="2F7D3A"/>
           </a:solidFill>
           <a:ln>
             <a:noFill/>
@@ -19911,7 +19845,7 @@
         </p:nvSpPr>
         <p:spPr>
           <a:xfrm>
-            <a:off x="548640" y="457200"/>
+            <a:off x="548640" y="411480"/>
             <a:ext cx="9144000" cy="274320"/>
           </a:xfrm>
           <a:prstGeom prst="rect">
@@ -19939,11 +19873,11 @@
             <a:r>
               <a:rPr sz="1200" b="1" i="0">
                 <a:solidFill>
-                  <a:srgbClr val="0D7D74"/>
+                  <a:srgbClr val="2F7D3A"/>
                 </a:solidFill>
                 <a:latin typeface="Consolas"/>
               </a:rPr>
-              <a:t>REPORT BACK</a:t>
+              <a:t>TOPIC 5 · PIPELINE</a:t>
             </a:r>
           </a:p>
         </p:txBody>
@@ -19956,8 +19890,8 @@
         </p:nvSpPr>
         <p:spPr>
           <a:xfrm>
-            <a:off x="502920" y="777240"/>
-            <a:ext cx="10972800" cy="822960"/>
+            <a:off x="502920" y="713232"/>
+            <a:ext cx="11155680" cy="640080"/>
           </a:xfrm>
           <a:prstGeom prst="rect">
             <a:avLst/>
@@ -19982,13 +19916,13 @@
               </a:spcAft>
             </a:pPr>
             <a:r>
-              <a:rPr sz="3400" b="1" i="0">
+              <a:rPr sz="2800" b="1" i="0">
                 <a:solidFill>
                   <a:srgbClr val="111820"/>
                 </a:solidFill>
                 <a:latin typeface="Calibri"/>
               </a:rPr>
-              <a:t>Three things — not a summary</a:t>
+              <a:t>Provocations — take a position</a:t>
             </a:r>
           </a:p>
         </p:txBody>
@@ -20001,19 +19935,17 @@
         </p:nvSpPr>
         <p:spPr>
           <a:xfrm>
-            <a:off x="548640" y="1828800"/>
-            <a:ext cx="3566160" cy="2011680"/>
+            <a:off x="548640" y="1600200"/>
+            <a:ext cx="457200" cy="457200"/>
           </a:xfrm>
           <a:prstGeom prst="rect">
             <a:avLst/>
           </a:prstGeom>
           <a:solidFill>
-            <a:srgbClr val="F4F6F9"/>
+            <a:srgbClr val="2F7D3A"/>
           </a:solidFill>
-          <a:ln w="9525">
-            <a:solidFill>
-              <a:srgbClr val="4A4BD6"/>
-            </a:solidFill>
+          <a:ln>
+            <a:noFill/>
           </a:ln>
           <a:effectLst/>
         </p:spPr>
@@ -20041,45 +19973,46 @@
       </p:sp>
       <p:sp>
         <p:nvSpPr>
-          <p:cNvPr id="7" name="Rectangle 6"/>
-          <p:cNvSpPr/>
-          <p:nvPr/>
-        </p:nvSpPr>
-        <p:spPr>
-          <a:xfrm>
-            <a:off x="548640" y="1828800"/>
-            <a:ext cx="3566160" cy="109728"/>
-          </a:xfrm>
-          <a:prstGeom prst="rect">
-            <a:avLst/>
-          </a:prstGeom>
-          <a:solidFill>
-            <a:srgbClr val="4A4BD6"/>
-          </a:solidFill>
-          <a:ln>
-            <a:noFill/>
-          </a:ln>
-          <a:effectLst/>
-        </p:spPr>
-        <p:style>
-          <a:lnRef idx="1">
-            <a:schemeClr val="accent1"/>
-          </a:lnRef>
-          <a:fillRef idx="3">
-            <a:schemeClr val="accent1"/>
-          </a:fillRef>
-          <a:effectRef idx="2">
-            <a:schemeClr val="accent1"/>
-          </a:effectRef>
-          <a:fontRef idx="minor">
-            <a:schemeClr val="lt1"/>
-          </a:fontRef>
-        </p:style>
-        <p:txBody>
-          <a:bodyPr rtlCol="0" anchor="ctr"/>
-          <a:lstStyle/>
-          <a:p>
-            <a:pPr algn="ctr"/>
+          <p:cNvPr id="7" name="TextBox 6"/>
+          <p:cNvSpPr txBox="1"/>
+          <p:nvPr/>
+        </p:nvSpPr>
+        <p:spPr>
+          <a:xfrm>
+            <a:off x="548640" y="1600200"/>
+            <a:ext cx="457200" cy="457200"/>
+          </a:xfrm>
+          <a:prstGeom prst="rect">
+            <a:avLst/>
+          </a:prstGeom>
+          <a:noFill/>
+        </p:spPr>
+        <p:txBody>
+          <a:bodyPr wrap="square" anchor="ctr" lIns="0" rIns="0" tIns="0" bIns="0">
+            <a:spAutoFit/>
+          </a:bodyPr>
+          <a:lstStyle/>
+          <a:p>
+            <a:pPr algn="ctr">
+              <a:lnSpc>
+                <a:spcPct val="106000"/>
+              </a:lnSpc>
+              <a:spcBef>
+                <a:spcPts val="0"/>
+              </a:spcBef>
+              <a:spcAft>
+                <a:spcPts val="600"/>
+              </a:spcAft>
+            </a:pPr>
+            <a:r>
+              <a:rPr sz="1800" b="1" i="0">
+                <a:solidFill>
+                  <a:srgbClr val="FFFFFF"/>
+                </a:solidFill>
+                <a:latin typeface="Calibri"/>
+              </a:rPr>
+              <a:t>A</a:t>
+            </a:r>
           </a:p>
         </p:txBody>
       </p:sp>
@@ -20091,8 +20024,8 @@
         </p:nvSpPr>
         <p:spPr>
           <a:xfrm>
-            <a:off x="822960" y="2148840"/>
-            <a:ext cx="3017520" cy="457200"/>
+            <a:off x="1188720" y="1618488"/>
+            <a:ext cx="10332720" cy="731520"/>
           </a:xfrm>
           <a:prstGeom prst="rect">
             <a:avLst/>
@@ -20100,7 +20033,7 @@
           <a:noFill/>
         </p:spPr>
         <p:txBody>
-          <a:bodyPr wrap="square" anchor="t" lIns="0" rIns="0" tIns="0" bIns="0">
+          <a:bodyPr wrap="square" anchor="ctr" lIns="0" rIns="0" tIns="0" bIns="0">
             <a:spAutoFit/>
           </a:bodyPr>
           <a:lstStyle/>
@@ -20117,27 +20050,71 @@
               </a:spcAft>
             </a:pPr>
             <a:r>
-              <a:rPr sz="2000" b="1" i="0">
-                <a:solidFill>
-                  <a:srgbClr val="111820"/>
-                </a:solidFill>
-                <a:latin typeface="Calibri"/>
-              </a:rPr>
-              <a:t>The call</a:t>
-            </a:r>
-          </a:p>
-        </p:txBody>
-      </p:sp>
-      <p:sp>
-        <p:nvSpPr>
-          <p:cNvPr id="9" name="TextBox 8"/>
+              <a:rPr sz="1600" b="0" i="0">
+                <a:solidFill>
+                  <a:srgbClr val="37424F"/>
+                </a:solidFill>
+                <a:latin typeface="Calibri"/>
+              </a:rPr>
+              <a:t>Which gate kills the most megawatts — connection, transmission, offtake, or planning?</a:t>
+            </a:r>
+          </a:p>
+        </p:txBody>
+      </p:sp>
+      <p:sp>
+        <p:nvSpPr>
+          <p:cNvPr id="9" name="Rectangle 8"/>
+          <p:cNvSpPr/>
+          <p:nvPr/>
+        </p:nvSpPr>
+        <p:spPr>
+          <a:xfrm>
+            <a:off x="548640" y="2441448"/>
+            <a:ext cx="457200" cy="457200"/>
+          </a:xfrm>
+          <a:prstGeom prst="rect">
+            <a:avLst/>
+          </a:prstGeom>
+          <a:solidFill>
+            <a:srgbClr val="2F7D3A"/>
+          </a:solidFill>
+          <a:ln>
+            <a:noFill/>
+          </a:ln>
+          <a:effectLst/>
+        </p:spPr>
+        <p:style>
+          <a:lnRef idx="1">
+            <a:schemeClr val="accent1"/>
+          </a:lnRef>
+          <a:fillRef idx="3">
+            <a:schemeClr val="accent1"/>
+          </a:fillRef>
+          <a:effectRef idx="2">
+            <a:schemeClr val="accent1"/>
+          </a:effectRef>
+          <a:fontRef idx="minor">
+            <a:schemeClr val="lt1"/>
+          </a:fontRef>
+        </p:style>
+        <p:txBody>
+          <a:bodyPr rtlCol="0" anchor="ctr"/>
+          <a:lstStyle/>
+          <a:p>
+            <a:pPr algn="ctr"/>
+          </a:p>
+        </p:txBody>
+      </p:sp>
+      <p:sp>
+        <p:nvSpPr>
+          <p:cNvPr id="10" name="TextBox 9"/>
           <p:cNvSpPr txBox="1"/>
           <p:nvPr/>
         </p:nvSpPr>
         <p:spPr>
           <a:xfrm>
-            <a:off x="822960" y="2697480"/>
-            <a:ext cx="3063240" cy="1005840"/>
+            <a:off x="548640" y="2441448"/>
+            <a:ext cx="457200" cy="457200"/>
           </a:xfrm>
           <a:prstGeom prst="rect">
             <a:avLst/>
@@ -20145,7 +20122,52 @@
           <a:noFill/>
         </p:spPr>
         <p:txBody>
-          <a:bodyPr wrap="square" anchor="t" lIns="0" rIns="0" tIns="0" bIns="0">
+          <a:bodyPr wrap="square" anchor="ctr" lIns="0" rIns="0" tIns="0" bIns="0">
+            <a:spAutoFit/>
+          </a:bodyPr>
+          <a:lstStyle/>
+          <a:p>
+            <a:pPr algn="ctr">
+              <a:lnSpc>
+                <a:spcPct val="106000"/>
+              </a:lnSpc>
+              <a:spcBef>
+                <a:spcPts val="0"/>
+              </a:spcBef>
+              <a:spcAft>
+                <a:spcPts val="600"/>
+              </a:spcAft>
+            </a:pPr>
+            <a:r>
+              <a:rPr sz="1800" b="1" i="0">
+                <a:solidFill>
+                  <a:srgbClr val="FFFFFF"/>
+                </a:solidFill>
+                <a:latin typeface="Calibri"/>
+              </a:rPr>
+              <a:t>B</a:t>
+            </a:r>
+          </a:p>
+        </p:txBody>
+      </p:sp>
+      <p:sp>
+        <p:nvSpPr>
+          <p:cNvPr id="11" name="TextBox 10"/>
+          <p:cNvSpPr txBox="1"/>
+          <p:nvPr/>
+        </p:nvSpPr>
+        <p:spPr>
+          <a:xfrm>
+            <a:off x="1188720" y="2459736"/>
+            <a:ext cx="10332720" cy="731520"/>
+          </a:xfrm>
+          <a:prstGeom prst="rect">
+            <a:avLst/>
+          </a:prstGeom>
+          <a:noFill/>
+        </p:spPr>
+        <p:txBody>
+          <a:bodyPr wrap="square" anchor="ctr" lIns="0" rIns="0" tIns="0" bIns="0">
             <a:spAutoFit/>
           </a:bodyPr>
           <a:lstStyle/>
@@ -20162,38 +20184,36 @@
               </a:spcAft>
             </a:pPr>
             <a:r>
-              <a:rPr sz="1450" b="0" i="0">
+              <a:rPr sz="1600" b="0" i="0">
                 <a:solidFill>
                   <a:srgbClr val="37424F"/>
                 </a:solidFill>
                 <a:latin typeface="Calibri"/>
               </a:rPr>
-              <a:t>Your position on the question — a view, not a recap.</a:t>
-            </a:r>
-          </a:p>
-        </p:txBody>
-      </p:sp>
-      <p:sp>
-        <p:nvSpPr>
-          <p:cNvPr id="10" name="Rectangle 9"/>
+              <a:t>What early signal best separates the real projects from the mirage?</a:t>
+            </a:r>
+          </a:p>
+        </p:txBody>
+      </p:sp>
+      <p:sp>
+        <p:nvSpPr>
+          <p:cNvPr id="12" name="Rectangle 11"/>
           <p:cNvSpPr/>
           <p:nvPr/>
         </p:nvSpPr>
         <p:spPr>
           <a:xfrm>
-            <a:off x="4297679" y="1828800"/>
-            <a:ext cx="3566160" cy="2011680"/>
+            <a:off x="548640" y="3282696"/>
+            <a:ext cx="457200" cy="457200"/>
           </a:xfrm>
           <a:prstGeom prst="rect">
             <a:avLst/>
           </a:prstGeom>
           <a:solidFill>
-            <a:srgbClr val="F4F6F9"/>
+            <a:srgbClr val="2F7D3A"/>
           </a:solidFill>
-          <a:ln w="9525">
-            <a:solidFill>
-              <a:srgbClr val="0D7D74"/>
-            </a:solidFill>
+          <a:ln>
+            <a:noFill/>
           </a:ln>
           <a:effectLst/>
         </p:spPr>
@@ -20221,58 +20241,14 @@
       </p:sp>
       <p:sp>
         <p:nvSpPr>
-          <p:cNvPr id="11" name="Rectangle 10"/>
-          <p:cNvSpPr/>
-          <p:nvPr/>
-        </p:nvSpPr>
-        <p:spPr>
-          <a:xfrm>
-            <a:off x="4297679" y="1828800"/>
-            <a:ext cx="3566160" cy="109728"/>
-          </a:xfrm>
-          <a:prstGeom prst="rect">
-            <a:avLst/>
-          </a:prstGeom>
-          <a:solidFill>
-            <a:srgbClr val="0D7D74"/>
-          </a:solidFill>
-          <a:ln>
-            <a:noFill/>
-          </a:ln>
-          <a:effectLst/>
-        </p:spPr>
-        <p:style>
-          <a:lnRef idx="1">
-            <a:schemeClr val="accent1"/>
-          </a:lnRef>
-          <a:fillRef idx="3">
-            <a:schemeClr val="accent1"/>
-          </a:fillRef>
-          <a:effectRef idx="2">
-            <a:schemeClr val="accent1"/>
-          </a:effectRef>
-          <a:fontRef idx="minor">
-            <a:schemeClr val="lt1"/>
-          </a:fontRef>
-        </p:style>
-        <p:txBody>
-          <a:bodyPr rtlCol="0" anchor="ctr"/>
-          <a:lstStyle/>
-          <a:p>
-            <a:pPr algn="ctr"/>
-          </a:p>
-        </p:txBody>
-      </p:sp>
-      <p:sp>
-        <p:nvSpPr>
-          <p:cNvPr id="12" name="TextBox 11"/>
+          <p:cNvPr id="13" name="TextBox 12"/>
           <p:cNvSpPr txBox="1"/>
           <p:nvPr/>
         </p:nvSpPr>
         <p:spPr>
           <a:xfrm>
-            <a:off x="4571999" y="2148840"/>
-            <a:ext cx="3017520" cy="457200"/>
+            <a:off x="548640" y="3282696"/>
+            <a:ext cx="457200" cy="457200"/>
           </a:xfrm>
           <a:prstGeom prst="rect">
             <a:avLst/>
@@ -20280,7 +20256,52 @@
           <a:noFill/>
         </p:spPr>
         <p:txBody>
-          <a:bodyPr wrap="square" anchor="t" lIns="0" rIns="0" tIns="0" bIns="0">
+          <a:bodyPr wrap="square" anchor="ctr" lIns="0" rIns="0" tIns="0" bIns="0">
+            <a:spAutoFit/>
+          </a:bodyPr>
+          <a:lstStyle/>
+          <a:p>
+            <a:pPr algn="ctr">
+              <a:lnSpc>
+                <a:spcPct val="106000"/>
+              </a:lnSpc>
+              <a:spcBef>
+                <a:spcPts val="0"/>
+              </a:spcBef>
+              <a:spcAft>
+                <a:spcPts val="600"/>
+              </a:spcAft>
+            </a:pPr>
+            <a:r>
+              <a:rPr sz="1800" b="1" i="0">
+                <a:solidFill>
+                  <a:srgbClr val="FFFFFF"/>
+                </a:solidFill>
+                <a:latin typeface="Calibri"/>
+              </a:rPr>
+              <a:t>C</a:t>
+            </a:r>
+          </a:p>
+        </p:txBody>
+      </p:sp>
+      <p:sp>
+        <p:nvSpPr>
+          <p:cNvPr id="14" name="TextBox 13"/>
+          <p:cNvSpPr txBox="1"/>
+          <p:nvPr/>
+        </p:nvSpPr>
+        <p:spPr>
+          <a:xfrm>
+            <a:off x="1188720" y="3300984"/>
+            <a:ext cx="10332720" cy="731520"/>
+          </a:xfrm>
+          <a:prstGeom prst="rect">
+            <a:avLst/>
+          </a:prstGeom>
+          <a:noFill/>
+        </p:spPr>
+        <p:txBody>
+          <a:bodyPr wrap="square" anchor="ctr" lIns="0" rIns="0" tIns="0" bIns="0">
             <a:spAutoFit/>
           </a:bodyPr>
           <a:lstStyle/>
@@ -20297,27 +20318,71 @@
               </a:spcAft>
             </a:pPr>
             <a:r>
-              <a:rPr sz="2000" b="1" i="0">
-                <a:solidFill>
-                  <a:srgbClr val="111820"/>
-                </a:solidFill>
-                <a:latin typeface="Calibri"/>
-              </a:rPr>
-              <a:t>The number</a:t>
-            </a:r>
-          </a:p>
-        </p:txBody>
-      </p:sp>
-      <p:sp>
-        <p:nvSpPr>
-          <p:cNvPr id="13" name="TextBox 12"/>
+              <a:rPr sz="1600" b="0" i="0">
+                <a:solidFill>
+                  <a:srgbClr val="37424F"/>
+                </a:solidFill>
+                <a:latin typeface="Calibri"/>
+              </a:rPr>
+              <a:t>Does our screening assume anything remotely as brutal as ~9% proposed-to-built?</a:t>
+            </a:r>
+          </a:p>
+        </p:txBody>
+      </p:sp>
+      <p:sp>
+        <p:nvSpPr>
+          <p:cNvPr id="15" name="Rectangle 14"/>
+          <p:cNvSpPr/>
+          <p:nvPr/>
+        </p:nvSpPr>
+        <p:spPr>
+          <a:xfrm>
+            <a:off x="548640" y="4123944"/>
+            <a:ext cx="457200" cy="457200"/>
+          </a:xfrm>
+          <a:prstGeom prst="rect">
+            <a:avLst/>
+          </a:prstGeom>
+          <a:solidFill>
+            <a:srgbClr val="2F7D3A"/>
+          </a:solidFill>
+          <a:ln>
+            <a:noFill/>
+          </a:ln>
+          <a:effectLst/>
+        </p:spPr>
+        <p:style>
+          <a:lnRef idx="1">
+            <a:schemeClr val="accent1"/>
+          </a:lnRef>
+          <a:fillRef idx="3">
+            <a:schemeClr val="accent1"/>
+          </a:fillRef>
+          <a:effectRef idx="2">
+            <a:schemeClr val="accent1"/>
+          </a:effectRef>
+          <a:fontRef idx="minor">
+            <a:schemeClr val="lt1"/>
+          </a:fontRef>
+        </p:style>
+        <p:txBody>
+          <a:bodyPr rtlCol="0" anchor="ctr"/>
+          <a:lstStyle/>
+          <a:p>
+            <a:pPr algn="ctr"/>
+          </a:p>
+        </p:txBody>
+      </p:sp>
+      <p:sp>
+        <p:nvSpPr>
+          <p:cNvPr id="16" name="TextBox 15"/>
           <p:cNvSpPr txBox="1"/>
           <p:nvPr/>
         </p:nvSpPr>
         <p:spPr>
           <a:xfrm>
-            <a:off x="4571999" y="2697480"/>
-            <a:ext cx="3063240" cy="1005840"/>
+            <a:off x="548640" y="4123944"/>
+            <a:ext cx="457200" cy="457200"/>
           </a:xfrm>
           <a:prstGeom prst="rect">
             <a:avLst/>
@@ -20325,7 +20390,52 @@
           <a:noFill/>
         </p:spPr>
         <p:txBody>
-          <a:bodyPr wrap="square" anchor="t" lIns="0" rIns="0" tIns="0" bIns="0">
+          <a:bodyPr wrap="square" anchor="ctr" lIns="0" rIns="0" tIns="0" bIns="0">
+            <a:spAutoFit/>
+          </a:bodyPr>
+          <a:lstStyle/>
+          <a:p>
+            <a:pPr algn="ctr">
+              <a:lnSpc>
+                <a:spcPct val="106000"/>
+              </a:lnSpc>
+              <a:spcBef>
+                <a:spcPts val="0"/>
+              </a:spcBef>
+              <a:spcAft>
+                <a:spcPts val="600"/>
+              </a:spcAft>
+            </a:pPr>
+            <a:r>
+              <a:rPr sz="1800" b="1" i="0">
+                <a:solidFill>
+                  <a:srgbClr val="FFFFFF"/>
+                </a:solidFill>
+                <a:latin typeface="Calibri"/>
+              </a:rPr>
+              <a:t>D</a:t>
+            </a:r>
+          </a:p>
+        </p:txBody>
+      </p:sp>
+      <p:sp>
+        <p:nvSpPr>
+          <p:cNvPr id="17" name="TextBox 16"/>
+          <p:cNvSpPr txBox="1"/>
+          <p:nvPr/>
+        </p:nvSpPr>
+        <p:spPr>
+          <a:xfrm>
+            <a:off x="1188720" y="4142232"/>
+            <a:ext cx="10332720" cy="731520"/>
+          </a:xfrm>
+          <a:prstGeom prst="rect">
+            <a:avLst/>
+          </a:prstGeom>
+          <a:noFill/>
+        </p:spPr>
+        <p:txBody>
+          <a:bodyPr wrap="square" anchor="ctr" lIns="0" rIns="0" tIns="0" bIns="0">
             <a:spAutoFit/>
           </a:bodyPr>
           <a:lstStyle/>
@@ -20342,27 +20452,27 @@
               </a:spcAft>
             </a:pPr>
             <a:r>
-              <a:rPr sz="1450" b="0" i="0">
+              <a:rPr sz="1600" b="0" i="0">
                 <a:solidFill>
                   <a:srgbClr val="37424F"/>
                 </a:solidFill>
                 <a:latin typeface="Calibri"/>
               </a:rPr>
-              <a:t>The single figure that changed your mind.</a:t>
-            </a:r>
-          </a:p>
-        </p:txBody>
-      </p:sp>
-      <p:sp>
-        <p:nvSpPr>
-          <p:cNvPr id="14" name="Rectangle 13"/>
+              <a:t>If you could unlock one transmission line, which frees the most generation?</a:t>
+            </a:r>
+          </a:p>
+        </p:txBody>
+      </p:sp>
+      <p:sp>
+        <p:nvSpPr>
+          <p:cNvPr id="18" name="Rectangle 17"/>
           <p:cNvSpPr/>
           <p:nvPr/>
         </p:nvSpPr>
         <p:spPr>
           <a:xfrm>
-            <a:off x="8046718" y="1828800"/>
-            <a:ext cx="3566160" cy="2011680"/>
+            <a:off x="548640" y="5532120"/>
+            <a:ext cx="11064240" cy="777240"/>
           </a:xfrm>
           <a:prstGeom prst="rect">
             <a:avLst/>
@@ -20372,7 +20482,7 @@
           </a:solidFill>
           <a:ln w="9525">
             <a:solidFill>
-              <a:srgbClr val="B4571F"/>
+              <a:srgbClr val="2F7D3A"/>
             </a:solidFill>
           </a:ln>
           <a:effectLst/>
@@ -20401,58 +20511,14 @@
       </p:sp>
       <p:sp>
         <p:nvSpPr>
-          <p:cNvPr id="15" name="Rectangle 14"/>
-          <p:cNvSpPr/>
-          <p:nvPr/>
-        </p:nvSpPr>
-        <p:spPr>
-          <a:xfrm>
-            <a:off x="8046718" y="1828800"/>
-            <a:ext cx="3566160" cy="109728"/>
-          </a:xfrm>
-          <a:prstGeom prst="rect">
-            <a:avLst/>
-          </a:prstGeom>
-          <a:solidFill>
-            <a:srgbClr val="B4571F"/>
-          </a:solidFill>
-          <a:ln>
-            <a:noFill/>
-          </a:ln>
-          <a:effectLst/>
-        </p:spPr>
-        <p:style>
-          <a:lnRef idx="1">
-            <a:schemeClr val="accent1"/>
-          </a:lnRef>
-          <a:fillRef idx="3">
-            <a:schemeClr val="accent1"/>
-          </a:fillRef>
-          <a:effectRef idx="2">
-            <a:schemeClr val="accent1"/>
-          </a:effectRef>
-          <a:fontRef idx="minor">
-            <a:schemeClr val="lt1"/>
-          </a:fontRef>
-        </p:style>
-        <p:txBody>
-          <a:bodyPr rtlCol="0" anchor="ctr"/>
-          <a:lstStyle/>
-          <a:p>
-            <a:pPr algn="ctr"/>
-          </a:p>
-        </p:txBody>
-      </p:sp>
-      <p:sp>
-        <p:nvSpPr>
-          <p:cNvPr id="16" name="TextBox 15"/>
+          <p:cNvPr id="19" name="TextBox 18"/>
           <p:cNvSpPr txBox="1"/>
           <p:nvPr/>
         </p:nvSpPr>
         <p:spPr>
           <a:xfrm>
-            <a:off x="8321038" y="2148840"/>
-            <a:ext cx="3017520" cy="457200"/>
+            <a:off x="731520" y="5632704"/>
+            <a:ext cx="10698480" cy="320040"/>
           </a:xfrm>
           <a:prstGeom prst="rect">
             <a:avLst/>
@@ -20477,27 +20543,27 @@
               </a:spcAft>
             </a:pPr>
             <a:r>
-              <a:rPr sz="2000" b="1" i="0">
-                <a:solidFill>
-                  <a:srgbClr val="111820"/>
-                </a:solidFill>
-                <a:latin typeface="Calibri"/>
-              </a:rPr>
-              <a:t>The surprise</a:t>
-            </a:r>
-          </a:p>
-        </p:txBody>
-      </p:sp>
-      <p:sp>
-        <p:nvSpPr>
-          <p:cNvPr id="17" name="TextBox 16"/>
+              <a:rPr sz="1100" b="1" i="0">
+                <a:solidFill>
+                  <a:srgbClr val="2F7D3A"/>
+                </a:solidFill>
+                <a:latin typeface="Consolas"/>
+              </a:rPr>
+              <a:t>YOUR HYPOTHESIS</a:t>
+            </a:r>
+          </a:p>
+        </p:txBody>
+      </p:sp>
+      <p:sp>
+        <p:nvSpPr>
+          <p:cNvPr id="20" name="TextBox 19"/>
           <p:cNvSpPr txBox="1"/>
           <p:nvPr/>
         </p:nvSpPr>
         <p:spPr>
           <a:xfrm>
-            <a:off x="8321038" y="2697480"/>
-            <a:ext cx="3063240" cy="1005840"/>
+            <a:off x="731520" y="5897880"/>
+            <a:ext cx="10698480" cy="365760"/>
           </a:xfrm>
           <a:prstGeom prst="rect">
             <a:avLst/>
@@ -20522,172 +20588,20 @@
               </a:spcAft>
             </a:pPr>
             <a:r>
-              <a:rPr sz="1450" b="0" i="0">
-                <a:solidFill>
-                  <a:srgbClr val="37424F"/>
-                </a:solidFill>
-                <a:latin typeface="Calibri"/>
-              </a:rPr>
-              <a:t>The one “I didn't realise that” moment.</a:t>
-            </a:r>
-          </a:p>
-        </p:txBody>
-      </p:sp>
-      <p:sp>
-        <p:nvSpPr>
-          <p:cNvPr id="18" name="TextBox 17"/>
-          <p:cNvSpPr txBox="1"/>
-          <p:nvPr/>
-        </p:nvSpPr>
-        <p:spPr>
-          <a:xfrm>
-            <a:off x="548640" y="4297680"/>
-            <a:ext cx="10972800" cy="457200"/>
-          </a:xfrm>
-          <a:prstGeom prst="rect">
-            <a:avLst/>
-          </a:prstGeom>
-          <a:noFill/>
-        </p:spPr>
-        <p:txBody>
-          <a:bodyPr wrap="square" anchor="t" lIns="0" rIns="0" tIns="0" bIns="0">
-            <a:spAutoFit/>
-          </a:bodyPr>
-          <a:lstStyle/>
-          <a:p>
-            <a:pPr algn="l">
-              <a:lnSpc>
-                <a:spcPct val="106000"/>
-              </a:lnSpc>
-              <a:spcBef>
-                <a:spcPts val="0"/>
-              </a:spcBef>
-              <a:spcAft>
-                <a:spcPts val="600"/>
-              </a:spcAft>
-            </a:pPr>
-            <a:r>
-              <a:rPr sz="1500" b="1" i="0">
+              <a:rPr sz="1500" b="0" i="1">
                 <a:solidFill>
                   <a:srgbClr val="111820"/>
                 </a:solidFill>
                 <a:latin typeface="Calibri"/>
               </a:rPr>
-              <a:t>Then, as a room:</a:t>
-            </a:r>
-          </a:p>
-        </p:txBody>
-      </p:sp>
-      <p:sp>
-        <p:nvSpPr>
-          <p:cNvPr id="19" name="TextBox 18"/>
-          <p:cNvSpPr txBox="1"/>
-          <p:nvPr/>
-        </p:nvSpPr>
-        <p:spPr>
-          <a:xfrm>
-            <a:off x="548640" y="4709160"/>
-            <a:ext cx="11064240" cy="1371600"/>
-          </a:xfrm>
-          <a:prstGeom prst="rect">
-            <a:avLst/>
-          </a:prstGeom>
-          <a:noFill/>
-        </p:spPr>
-        <p:txBody>
-          <a:bodyPr wrap="square" lIns="0" rIns="0" tIns="0" bIns="0">
-            <a:spAutoFit/>
-          </a:bodyPr>
-          <a:lstStyle/>
-          <a:p>
-            <a:pPr>
-              <a:lnSpc>
-                <a:spcPct val="105000"/>
-              </a:lnSpc>
-              <a:spcAft>
-                <a:spcPts val="800"/>
-              </a:spcAft>
-            </a:pPr>
-            <a:r>
-              <a:rPr sz="1500" b="1">
-                <a:solidFill>
-                  <a:srgbClr val="0D7D74"/>
-                </a:solidFill>
-                <a:latin typeface="Calibri"/>
-              </a:rPr>
-              <a:t>▸  </a:t>
-            </a:r>
-            <a:r>
-              <a:rPr sz="1500" b="0">
-                <a:solidFill>
-                  <a:srgbClr val="37424F"/>
-                </a:solidFill>
-                <a:latin typeface="Calibri"/>
-              </a:rPr>
-              <a:t>Is 100% renewable the right target — or do we plan for ~90% + firm gas?</a:t>
-            </a:r>
-          </a:p>
-          <a:p>
-            <a:pPr>
-              <a:lnSpc>
-                <a:spcPct val="105000"/>
-              </a:lnSpc>
-              <a:spcAft>
-                <a:spcPts val="800"/>
-              </a:spcAft>
-            </a:pPr>
-            <a:r>
-              <a:rPr sz="1500" b="1">
-                <a:solidFill>
-                  <a:srgbClr val="0D7D74"/>
-                </a:solidFill>
-                <a:latin typeface="Calibri"/>
-              </a:rPr>
-              <a:t>▸  </a:t>
-            </a:r>
-            <a:r>
-              <a:rPr sz="1500" b="0">
-                <a:solidFill>
-                  <a:srgbClr val="37424F"/>
-                </a:solidFill>
-                <a:latin typeface="Calibri"/>
-              </a:rPr>
-              <a:t>Would you build another unfirmed solar farm in this market?</a:t>
-            </a:r>
-          </a:p>
-          <a:p>
-            <a:pPr>
-              <a:lnSpc>
-                <a:spcPct val="105000"/>
-              </a:lnSpc>
-              <a:spcAft>
-                <a:spcPts val="800"/>
-              </a:spcAft>
-            </a:pPr>
-            <a:r>
-              <a:rPr sz="1500" b="1">
-                <a:solidFill>
-                  <a:srgbClr val="0D7D74"/>
-                </a:solidFill>
-                <a:latin typeface="Calibri"/>
-              </a:rPr>
-              <a:t>▸  </a:t>
-            </a:r>
-            <a:r>
-              <a:rPr sz="1500" b="0">
-                <a:solidFill>
-                  <a:srgbClr val="37424F"/>
-                </a:solidFill>
-                <a:latin typeface="Calibri"/>
-              </a:rPr>
-              <a:t>Heatwave, broken boiler, or data-centre boom — what's the biggest risk to the grid we're building for?</a:t>
-            </a:r>
-          </a:p>
-        </p:txBody>
-      </p:sp>
-      <p:sp>
-        <p:nvSpPr>
-          <p:cNvPr id="20" name="TextBox 19"/>
+              <a:t>What's the one signal you'll check before believing a “pipeline” number?</a:t>
+            </a:r>
+          </a:p>
+        </p:txBody>
+      </p:sp>
+      <p:sp>
+        <p:nvSpPr>
+          <p:cNvPr id="21" name="TextBox 20"/>
           <p:cNvSpPr txBox="1"/>
           <p:nvPr/>
         </p:nvSpPr>
@@ -20763,7 +20677,7 @@
             <a:avLst/>
           </a:prstGeom>
           <a:solidFill>
-            <a:srgbClr val="111820"/>
+            <a:srgbClr val="FFFFFF"/>
           </a:solidFill>
           <a:ln>
             <a:noFill/>
@@ -20801,7 +20715,7 @@
         <p:spPr>
           <a:xfrm>
             <a:off x="0" y="0"/>
-            <a:ext cx="12191695" cy="201168"/>
+            <a:ext cx="146304" cy="6858000"/>
           </a:xfrm>
           <a:prstGeom prst="rect">
             <a:avLst/>
@@ -20844,8 +20758,8 @@
         </p:nvSpPr>
         <p:spPr>
           <a:xfrm>
-            <a:off x="822960" y="2377440"/>
-            <a:ext cx="10515600" cy="914400"/>
+            <a:off x="548640" y="457200"/>
+            <a:ext cx="9144000" cy="274320"/>
           </a:xfrm>
           <a:prstGeom prst="rect">
             <a:avLst/>
@@ -20870,13 +20784,13 @@
               </a:spcAft>
             </a:pPr>
             <a:r>
-              <a:rPr sz="3400" b="1" i="0">
-                <a:solidFill>
-                  <a:srgbClr val="FFFFFF"/>
-                </a:solidFill>
-                <a:latin typeface="Calibri"/>
-              </a:rPr>
-              <a:t>Every figure is real</a:t>
+              <a:rPr sz="1200" b="1" i="0">
+                <a:solidFill>
+                  <a:srgbClr val="0D7D74"/>
+                </a:solidFill>
+                <a:latin typeface="Consolas"/>
+              </a:rPr>
+              <a:t>REPORT BACK</a:t>
             </a:r>
           </a:p>
         </p:txBody>
@@ -20889,53 +20803,8 @@
         </p:nvSpPr>
         <p:spPr>
           <a:xfrm>
-            <a:off x="822960" y="3291840"/>
-            <a:ext cx="10424160" cy="1828800"/>
-          </a:xfrm>
-          <a:prstGeom prst="rect">
-            <a:avLst/>
-          </a:prstGeom>
-          <a:noFill/>
-        </p:spPr>
-        <p:txBody>
-          <a:bodyPr wrap="square" anchor="t" lIns="0" rIns="0" tIns="0" bIns="0">
-            <a:spAutoFit/>
-          </a:bodyPr>
-          <a:lstStyle/>
-          <a:p>
-            <a:pPr algn="l">
-              <a:lnSpc>
-                <a:spcPct val="120000"/>
-              </a:lnSpc>
-              <a:spcBef>
-                <a:spcPts val="0"/>
-              </a:spcBef>
-              <a:spcAft>
-                <a:spcPts val="600"/>
-              </a:spcAft>
-            </a:pPr>
-            <a:r>
-              <a:rPr sz="1600" b="0" i="0">
-                <a:solidFill>
-                  <a:srgbClr val="C2CAD4"/>
-                </a:solidFill>
-                <a:latin typeface="Calibri"/>
-              </a:rPr>
-              <a:t>Sourced from the AusEnergy “Lens” — a live database over the AEMO dispatch decade (2015→2026), ISP 2026, Open Electricity and the CER. As-at August 2026. The calculators and the storage/leverage figures are transparent teaching models, not planning tools — the point is the shape of the answer.</a:t>
-            </a:r>
-          </a:p>
-        </p:txBody>
-      </p:sp>
-      <p:sp>
-        <p:nvSpPr>
-          <p:cNvPr id="6" name="TextBox 5"/>
-          <p:cNvSpPr txBox="1"/>
-          <p:nvPr/>
-        </p:nvSpPr>
-        <p:spPr>
-          <a:xfrm>
-            <a:off x="822960" y="5120640"/>
-            <a:ext cx="10058400" cy="457200"/>
+            <a:off x="502920" y="777240"/>
+            <a:ext cx="10972800" cy="822960"/>
           </a:xfrm>
           <a:prstGeom prst="rect">
             <a:avLst/>
@@ -20960,13 +20829,750 @@
               </a:spcAft>
             </a:pPr>
             <a:r>
-              <a:rPr sz="1400" b="1" i="0">
+              <a:rPr sz="3400" b="1" i="0">
+                <a:solidFill>
+                  <a:srgbClr val="111820"/>
+                </a:solidFill>
+                <a:latin typeface="Calibri"/>
+              </a:rPr>
+              <a:t>Three things — not a summary</a:t>
+            </a:r>
+          </a:p>
+        </p:txBody>
+      </p:sp>
+      <p:sp>
+        <p:nvSpPr>
+          <p:cNvPr id="6" name="Rectangle 5"/>
+          <p:cNvSpPr/>
+          <p:nvPr/>
+        </p:nvSpPr>
+        <p:spPr>
+          <a:xfrm>
+            <a:off x="548640" y="1828800"/>
+            <a:ext cx="3566160" cy="2011680"/>
+          </a:xfrm>
+          <a:prstGeom prst="rect">
+            <a:avLst/>
+          </a:prstGeom>
+          <a:solidFill>
+            <a:srgbClr val="F4F6F9"/>
+          </a:solidFill>
+          <a:ln w="9525">
+            <a:solidFill>
+              <a:srgbClr val="4A4BD6"/>
+            </a:solidFill>
+          </a:ln>
+          <a:effectLst/>
+        </p:spPr>
+        <p:style>
+          <a:lnRef idx="1">
+            <a:schemeClr val="accent1"/>
+          </a:lnRef>
+          <a:fillRef idx="3">
+            <a:schemeClr val="accent1"/>
+          </a:fillRef>
+          <a:effectRef idx="2">
+            <a:schemeClr val="accent1"/>
+          </a:effectRef>
+          <a:fontRef idx="minor">
+            <a:schemeClr val="lt1"/>
+          </a:fontRef>
+        </p:style>
+        <p:txBody>
+          <a:bodyPr rtlCol="0" anchor="ctr"/>
+          <a:lstStyle/>
+          <a:p>
+            <a:pPr algn="ctr"/>
+          </a:p>
+        </p:txBody>
+      </p:sp>
+      <p:sp>
+        <p:nvSpPr>
+          <p:cNvPr id="7" name="Rectangle 6"/>
+          <p:cNvSpPr/>
+          <p:nvPr/>
+        </p:nvSpPr>
+        <p:spPr>
+          <a:xfrm>
+            <a:off x="548640" y="1828800"/>
+            <a:ext cx="3566160" cy="109728"/>
+          </a:xfrm>
+          <a:prstGeom prst="rect">
+            <a:avLst/>
+          </a:prstGeom>
+          <a:solidFill>
+            <a:srgbClr val="4A4BD6"/>
+          </a:solidFill>
+          <a:ln>
+            <a:noFill/>
+          </a:ln>
+          <a:effectLst/>
+        </p:spPr>
+        <p:style>
+          <a:lnRef idx="1">
+            <a:schemeClr val="accent1"/>
+          </a:lnRef>
+          <a:fillRef idx="3">
+            <a:schemeClr val="accent1"/>
+          </a:fillRef>
+          <a:effectRef idx="2">
+            <a:schemeClr val="accent1"/>
+          </a:effectRef>
+          <a:fontRef idx="minor">
+            <a:schemeClr val="lt1"/>
+          </a:fontRef>
+        </p:style>
+        <p:txBody>
+          <a:bodyPr rtlCol="0" anchor="ctr"/>
+          <a:lstStyle/>
+          <a:p>
+            <a:pPr algn="ctr"/>
+          </a:p>
+        </p:txBody>
+      </p:sp>
+      <p:sp>
+        <p:nvSpPr>
+          <p:cNvPr id="8" name="TextBox 7"/>
+          <p:cNvSpPr txBox="1"/>
+          <p:nvPr/>
+        </p:nvSpPr>
+        <p:spPr>
+          <a:xfrm>
+            <a:off x="822960" y="2148840"/>
+            <a:ext cx="3017520" cy="457200"/>
+          </a:xfrm>
+          <a:prstGeom prst="rect">
+            <a:avLst/>
+          </a:prstGeom>
+          <a:noFill/>
+        </p:spPr>
+        <p:txBody>
+          <a:bodyPr wrap="square" anchor="t" lIns="0" rIns="0" tIns="0" bIns="0">
+            <a:spAutoFit/>
+          </a:bodyPr>
+          <a:lstStyle/>
+          <a:p>
+            <a:pPr algn="l">
+              <a:lnSpc>
+                <a:spcPct val="106000"/>
+              </a:lnSpc>
+              <a:spcBef>
+                <a:spcPts val="0"/>
+              </a:spcBef>
+              <a:spcAft>
+                <a:spcPts val="600"/>
+              </a:spcAft>
+            </a:pPr>
+            <a:r>
+              <a:rPr sz="2000" b="1" i="0">
+                <a:solidFill>
+                  <a:srgbClr val="111820"/>
+                </a:solidFill>
+                <a:latin typeface="Calibri"/>
+              </a:rPr>
+              <a:t>The call</a:t>
+            </a:r>
+          </a:p>
+        </p:txBody>
+      </p:sp>
+      <p:sp>
+        <p:nvSpPr>
+          <p:cNvPr id="9" name="TextBox 8"/>
+          <p:cNvSpPr txBox="1"/>
+          <p:nvPr/>
+        </p:nvSpPr>
+        <p:spPr>
+          <a:xfrm>
+            <a:off x="822960" y="2697480"/>
+            <a:ext cx="3063240" cy="1005840"/>
+          </a:xfrm>
+          <a:prstGeom prst="rect">
+            <a:avLst/>
+          </a:prstGeom>
+          <a:noFill/>
+        </p:spPr>
+        <p:txBody>
+          <a:bodyPr wrap="square" anchor="t" lIns="0" rIns="0" tIns="0" bIns="0">
+            <a:spAutoFit/>
+          </a:bodyPr>
+          <a:lstStyle/>
+          <a:p>
+            <a:pPr algn="l">
+              <a:lnSpc>
+                <a:spcPct val="106000"/>
+              </a:lnSpc>
+              <a:spcBef>
+                <a:spcPts val="0"/>
+              </a:spcBef>
+              <a:spcAft>
+                <a:spcPts val="600"/>
+              </a:spcAft>
+            </a:pPr>
+            <a:r>
+              <a:rPr sz="1450" b="0" i="0">
+                <a:solidFill>
+                  <a:srgbClr val="37424F"/>
+                </a:solidFill>
+                <a:latin typeface="Calibri"/>
+              </a:rPr>
+              <a:t>Your position on the question — a view, not a recap.</a:t>
+            </a:r>
+          </a:p>
+        </p:txBody>
+      </p:sp>
+      <p:sp>
+        <p:nvSpPr>
+          <p:cNvPr id="10" name="Rectangle 9"/>
+          <p:cNvSpPr/>
+          <p:nvPr/>
+        </p:nvSpPr>
+        <p:spPr>
+          <a:xfrm>
+            <a:off x="4297679" y="1828800"/>
+            <a:ext cx="3566160" cy="2011680"/>
+          </a:xfrm>
+          <a:prstGeom prst="rect">
+            <a:avLst/>
+          </a:prstGeom>
+          <a:solidFill>
+            <a:srgbClr val="F4F6F9"/>
+          </a:solidFill>
+          <a:ln w="9525">
+            <a:solidFill>
+              <a:srgbClr val="0D7D74"/>
+            </a:solidFill>
+          </a:ln>
+          <a:effectLst/>
+        </p:spPr>
+        <p:style>
+          <a:lnRef idx="1">
+            <a:schemeClr val="accent1"/>
+          </a:lnRef>
+          <a:fillRef idx="3">
+            <a:schemeClr val="accent1"/>
+          </a:fillRef>
+          <a:effectRef idx="2">
+            <a:schemeClr val="accent1"/>
+          </a:effectRef>
+          <a:fontRef idx="minor">
+            <a:schemeClr val="lt1"/>
+          </a:fontRef>
+        </p:style>
+        <p:txBody>
+          <a:bodyPr rtlCol="0" anchor="ctr"/>
+          <a:lstStyle/>
+          <a:p>
+            <a:pPr algn="ctr"/>
+          </a:p>
+        </p:txBody>
+      </p:sp>
+      <p:sp>
+        <p:nvSpPr>
+          <p:cNvPr id="11" name="Rectangle 10"/>
+          <p:cNvSpPr/>
+          <p:nvPr/>
+        </p:nvSpPr>
+        <p:spPr>
+          <a:xfrm>
+            <a:off x="4297679" y="1828800"/>
+            <a:ext cx="3566160" cy="109728"/>
+          </a:xfrm>
+          <a:prstGeom prst="rect">
+            <a:avLst/>
+          </a:prstGeom>
+          <a:solidFill>
+            <a:srgbClr val="0D7D74"/>
+          </a:solidFill>
+          <a:ln>
+            <a:noFill/>
+          </a:ln>
+          <a:effectLst/>
+        </p:spPr>
+        <p:style>
+          <a:lnRef idx="1">
+            <a:schemeClr val="accent1"/>
+          </a:lnRef>
+          <a:fillRef idx="3">
+            <a:schemeClr val="accent1"/>
+          </a:fillRef>
+          <a:effectRef idx="2">
+            <a:schemeClr val="accent1"/>
+          </a:effectRef>
+          <a:fontRef idx="minor">
+            <a:schemeClr val="lt1"/>
+          </a:fontRef>
+        </p:style>
+        <p:txBody>
+          <a:bodyPr rtlCol="0" anchor="ctr"/>
+          <a:lstStyle/>
+          <a:p>
+            <a:pPr algn="ctr"/>
+          </a:p>
+        </p:txBody>
+      </p:sp>
+      <p:sp>
+        <p:nvSpPr>
+          <p:cNvPr id="12" name="TextBox 11"/>
+          <p:cNvSpPr txBox="1"/>
+          <p:nvPr/>
+        </p:nvSpPr>
+        <p:spPr>
+          <a:xfrm>
+            <a:off x="4571999" y="2148840"/>
+            <a:ext cx="3017520" cy="457200"/>
+          </a:xfrm>
+          <a:prstGeom prst="rect">
+            <a:avLst/>
+          </a:prstGeom>
+          <a:noFill/>
+        </p:spPr>
+        <p:txBody>
+          <a:bodyPr wrap="square" anchor="t" lIns="0" rIns="0" tIns="0" bIns="0">
+            <a:spAutoFit/>
+          </a:bodyPr>
+          <a:lstStyle/>
+          <a:p>
+            <a:pPr algn="l">
+              <a:lnSpc>
+                <a:spcPct val="106000"/>
+              </a:lnSpc>
+              <a:spcBef>
+                <a:spcPts val="0"/>
+              </a:spcBef>
+              <a:spcAft>
+                <a:spcPts val="600"/>
+              </a:spcAft>
+            </a:pPr>
+            <a:r>
+              <a:rPr sz="2000" b="1" i="0">
+                <a:solidFill>
+                  <a:srgbClr val="111820"/>
+                </a:solidFill>
+                <a:latin typeface="Calibri"/>
+              </a:rPr>
+              <a:t>The number</a:t>
+            </a:r>
+          </a:p>
+        </p:txBody>
+      </p:sp>
+      <p:sp>
+        <p:nvSpPr>
+          <p:cNvPr id="13" name="TextBox 12"/>
+          <p:cNvSpPr txBox="1"/>
+          <p:nvPr/>
+        </p:nvSpPr>
+        <p:spPr>
+          <a:xfrm>
+            <a:off x="4571999" y="2697480"/>
+            <a:ext cx="3063240" cy="1005840"/>
+          </a:xfrm>
+          <a:prstGeom prst="rect">
+            <a:avLst/>
+          </a:prstGeom>
+          <a:noFill/>
+        </p:spPr>
+        <p:txBody>
+          <a:bodyPr wrap="square" anchor="t" lIns="0" rIns="0" tIns="0" bIns="0">
+            <a:spAutoFit/>
+          </a:bodyPr>
+          <a:lstStyle/>
+          <a:p>
+            <a:pPr algn="l">
+              <a:lnSpc>
+                <a:spcPct val="106000"/>
+              </a:lnSpc>
+              <a:spcBef>
+                <a:spcPts val="0"/>
+              </a:spcBef>
+              <a:spcAft>
+                <a:spcPts val="600"/>
+              </a:spcAft>
+            </a:pPr>
+            <a:r>
+              <a:rPr sz="1450" b="0" i="0">
+                <a:solidFill>
+                  <a:srgbClr val="37424F"/>
+                </a:solidFill>
+                <a:latin typeface="Calibri"/>
+              </a:rPr>
+              <a:t>The single figure that changed your mind.</a:t>
+            </a:r>
+          </a:p>
+        </p:txBody>
+      </p:sp>
+      <p:sp>
+        <p:nvSpPr>
+          <p:cNvPr id="14" name="Rectangle 13"/>
+          <p:cNvSpPr/>
+          <p:nvPr/>
+        </p:nvSpPr>
+        <p:spPr>
+          <a:xfrm>
+            <a:off x="8046718" y="1828800"/>
+            <a:ext cx="3566160" cy="2011680"/>
+          </a:xfrm>
+          <a:prstGeom prst="rect">
+            <a:avLst/>
+          </a:prstGeom>
+          <a:solidFill>
+            <a:srgbClr val="F4F6F9"/>
+          </a:solidFill>
+          <a:ln w="9525">
+            <a:solidFill>
+              <a:srgbClr val="B4571F"/>
+            </a:solidFill>
+          </a:ln>
+          <a:effectLst/>
+        </p:spPr>
+        <p:style>
+          <a:lnRef idx="1">
+            <a:schemeClr val="accent1"/>
+          </a:lnRef>
+          <a:fillRef idx="3">
+            <a:schemeClr val="accent1"/>
+          </a:fillRef>
+          <a:effectRef idx="2">
+            <a:schemeClr val="accent1"/>
+          </a:effectRef>
+          <a:fontRef idx="minor">
+            <a:schemeClr val="lt1"/>
+          </a:fontRef>
+        </p:style>
+        <p:txBody>
+          <a:bodyPr rtlCol="0" anchor="ctr"/>
+          <a:lstStyle/>
+          <a:p>
+            <a:pPr algn="ctr"/>
+          </a:p>
+        </p:txBody>
+      </p:sp>
+      <p:sp>
+        <p:nvSpPr>
+          <p:cNvPr id="15" name="Rectangle 14"/>
+          <p:cNvSpPr/>
+          <p:nvPr/>
+        </p:nvSpPr>
+        <p:spPr>
+          <a:xfrm>
+            <a:off x="8046718" y="1828800"/>
+            <a:ext cx="3566160" cy="109728"/>
+          </a:xfrm>
+          <a:prstGeom prst="rect">
+            <a:avLst/>
+          </a:prstGeom>
+          <a:solidFill>
+            <a:srgbClr val="B4571F"/>
+          </a:solidFill>
+          <a:ln>
+            <a:noFill/>
+          </a:ln>
+          <a:effectLst/>
+        </p:spPr>
+        <p:style>
+          <a:lnRef idx="1">
+            <a:schemeClr val="accent1"/>
+          </a:lnRef>
+          <a:fillRef idx="3">
+            <a:schemeClr val="accent1"/>
+          </a:fillRef>
+          <a:effectRef idx="2">
+            <a:schemeClr val="accent1"/>
+          </a:effectRef>
+          <a:fontRef idx="minor">
+            <a:schemeClr val="lt1"/>
+          </a:fontRef>
+        </p:style>
+        <p:txBody>
+          <a:bodyPr rtlCol="0" anchor="ctr"/>
+          <a:lstStyle/>
+          <a:p>
+            <a:pPr algn="ctr"/>
+          </a:p>
+        </p:txBody>
+      </p:sp>
+      <p:sp>
+        <p:nvSpPr>
+          <p:cNvPr id="16" name="TextBox 15"/>
+          <p:cNvSpPr txBox="1"/>
+          <p:nvPr/>
+        </p:nvSpPr>
+        <p:spPr>
+          <a:xfrm>
+            <a:off x="8321038" y="2148840"/>
+            <a:ext cx="3017520" cy="457200"/>
+          </a:xfrm>
+          <a:prstGeom prst="rect">
+            <a:avLst/>
+          </a:prstGeom>
+          <a:noFill/>
+        </p:spPr>
+        <p:txBody>
+          <a:bodyPr wrap="square" anchor="t" lIns="0" rIns="0" tIns="0" bIns="0">
+            <a:spAutoFit/>
+          </a:bodyPr>
+          <a:lstStyle/>
+          <a:p>
+            <a:pPr algn="l">
+              <a:lnSpc>
+                <a:spcPct val="106000"/>
+              </a:lnSpc>
+              <a:spcBef>
+                <a:spcPts val="0"/>
+              </a:spcBef>
+              <a:spcAft>
+                <a:spcPts val="600"/>
+              </a:spcAft>
+            </a:pPr>
+            <a:r>
+              <a:rPr sz="2000" b="1" i="0">
+                <a:solidFill>
+                  <a:srgbClr val="111820"/>
+                </a:solidFill>
+                <a:latin typeface="Calibri"/>
+              </a:rPr>
+              <a:t>The surprise</a:t>
+            </a:r>
+          </a:p>
+        </p:txBody>
+      </p:sp>
+      <p:sp>
+        <p:nvSpPr>
+          <p:cNvPr id="17" name="TextBox 16"/>
+          <p:cNvSpPr txBox="1"/>
+          <p:nvPr/>
+        </p:nvSpPr>
+        <p:spPr>
+          <a:xfrm>
+            <a:off x="8321038" y="2697480"/>
+            <a:ext cx="3063240" cy="1005840"/>
+          </a:xfrm>
+          <a:prstGeom prst="rect">
+            <a:avLst/>
+          </a:prstGeom>
+          <a:noFill/>
+        </p:spPr>
+        <p:txBody>
+          <a:bodyPr wrap="square" anchor="t" lIns="0" rIns="0" tIns="0" bIns="0">
+            <a:spAutoFit/>
+          </a:bodyPr>
+          <a:lstStyle/>
+          <a:p>
+            <a:pPr algn="l">
+              <a:lnSpc>
+                <a:spcPct val="106000"/>
+              </a:lnSpc>
+              <a:spcBef>
+                <a:spcPts val="0"/>
+              </a:spcBef>
+              <a:spcAft>
+                <a:spcPts val="600"/>
+              </a:spcAft>
+            </a:pPr>
+            <a:r>
+              <a:rPr sz="1450" b="0" i="0">
+                <a:solidFill>
+                  <a:srgbClr val="37424F"/>
+                </a:solidFill>
+                <a:latin typeface="Calibri"/>
+              </a:rPr>
+              <a:t>The one “I didn't realise that” moment.</a:t>
+            </a:r>
+          </a:p>
+        </p:txBody>
+      </p:sp>
+      <p:sp>
+        <p:nvSpPr>
+          <p:cNvPr id="18" name="TextBox 17"/>
+          <p:cNvSpPr txBox="1"/>
+          <p:nvPr/>
+        </p:nvSpPr>
+        <p:spPr>
+          <a:xfrm>
+            <a:off x="548640" y="4297680"/>
+            <a:ext cx="10972800" cy="457200"/>
+          </a:xfrm>
+          <a:prstGeom prst="rect">
+            <a:avLst/>
+          </a:prstGeom>
+          <a:noFill/>
+        </p:spPr>
+        <p:txBody>
+          <a:bodyPr wrap="square" anchor="t" lIns="0" rIns="0" tIns="0" bIns="0">
+            <a:spAutoFit/>
+          </a:bodyPr>
+          <a:lstStyle/>
+          <a:p>
+            <a:pPr algn="l">
+              <a:lnSpc>
+                <a:spcPct val="106000"/>
+              </a:lnSpc>
+              <a:spcBef>
+                <a:spcPts val="0"/>
+              </a:spcBef>
+              <a:spcAft>
+                <a:spcPts val="600"/>
+              </a:spcAft>
+            </a:pPr>
+            <a:r>
+              <a:rPr sz="1500" b="1" i="0">
+                <a:solidFill>
+                  <a:srgbClr val="111820"/>
+                </a:solidFill>
+                <a:latin typeface="Calibri"/>
+              </a:rPr>
+              <a:t>Then, as a room:</a:t>
+            </a:r>
+          </a:p>
+        </p:txBody>
+      </p:sp>
+      <p:sp>
+        <p:nvSpPr>
+          <p:cNvPr id="19" name="TextBox 18"/>
+          <p:cNvSpPr txBox="1"/>
+          <p:nvPr/>
+        </p:nvSpPr>
+        <p:spPr>
+          <a:xfrm>
+            <a:off x="548640" y="4709160"/>
+            <a:ext cx="11064240" cy="1371600"/>
+          </a:xfrm>
+          <a:prstGeom prst="rect">
+            <a:avLst/>
+          </a:prstGeom>
+          <a:noFill/>
+        </p:spPr>
+        <p:txBody>
+          <a:bodyPr wrap="square" lIns="0" rIns="0" tIns="0" bIns="0">
+            <a:spAutoFit/>
+          </a:bodyPr>
+          <a:lstStyle/>
+          <a:p>
+            <a:pPr>
+              <a:lnSpc>
+                <a:spcPct val="105000"/>
+              </a:lnSpc>
+              <a:spcAft>
+                <a:spcPts val="800"/>
+              </a:spcAft>
+            </a:pPr>
+            <a:r>
+              <a:rPr sz="1500" b="1">
                 <a:solidFill>
                   <a:srgbClr val="0D7D74"/>
                 </a:solidFill>
+                <a:latin typeface="Calibri"/>
+              </a:rPr>
+              <a:t>▸  </a:t>
+            </a:r>
+            <a:r>
+              <a:rPr sz="1500" b="0">
+                <a:solidFill>
+                  <a:srgbClr val="37424F"/>
+                </a:solidFill>
+                <a:latin typeface="Calibri"/>
+              </a:rPr>
+              <a:t>Is 100% renewable the right target — or do we plan for ~90% + firm gas?</a:t>
+            </a:r>
+          </a:p>
+          <a:p>
+            <a:pPr>
+              <a:lnSpc>
+                <a:spcPct val="105000"/>
+              </a:lnSpc>
+              <a:spcAft>
+                <a:spcPts val="800"/>
+              </a:spcAft>
+            </a:pPr>
+            <a:r>
+              <a:rPr sz="1500" b="1">
+                <a:solidFill>
+                  <a:srgbClr val="0D7D74"/>
+                </a:solidFill>
+                <a:latin typeface="Calibri"/>
+              </a:rPr>
+              <a:t>▸  </a:t>
+            </a:r>
+            <a:r>
+              <a:rPr sz="1500" b="0">
+                <a:solidFill>
+                  <a:srgbClr val="37424F"/>
+                </a:solidFill>
+                <a:latin typeface="Calibri"/>
+              </a:rPr>
+              <a:t>Would you build another unfirmed solar farm in this market?</a:t>
+            </a:r>
+          </a:p>
+          <a:p>
+            <a:pPr>
+              <a:lnSpc>
+                <a:spcPct val="105000"/>
+              </a:lnSpc>
+              <a:spcAft>
+                <a:spcPts val="800"/>
+              </a:spcAft>
+            </a:pPr>
+            <a:r>
+              <a:rPr sz="1500" b="1">
+                <a:solidFill>
+                  <a:srgbClr val="0D7D74"/>
+                </a:solidFill>
+                <a:latin typeface="Calibri"/>
+              </a:rPr>
+              <a:t>▸  </a:t>
+            </a:r>
+            <a:r>
+              <a:rPr sz="1500" b="0">
+                <a:solidFill>
+                  <a:srgbClr val="37424F"/>
+                </a:solidFill>
+                <a:latin typeface="Calibri"/>
+              </a:rPr>
+              <a:t>Heatwave, broken boiler, or data-centre boom — what's the biggest risk to the grid we're building for?</a:t>
+            </a:r>
+          </a:p>
+        </p:txBody>
+      </p:sp>
+      <p:sp>
+        <p:nvSpPr>
+          <p:cNvPr id="20" name="TextBox 19"/>
+          <p:cNvSpPr txBox="1"/>
+          <p:nvPr/>
+        </p:nvSpPr>
+        <p:spPr>
+          <a:xfrm>
+            <a:off x="502920" y="6419088"/>
+            <a:ext cx="8229600" cy="274320"/>
+          </a:xfrm>
+          <a:prstGeom prst="rect">
+            <a:avLst/>
+          </a:prstGeom>
+          <a:noFill/>
+        </p:spPr>
+        <p:txBody>
+          <a:bodyPr wrap="square" anchor="t" lIns="0" rIns="0" tIns="0" bIns="0">
+            <a:spAutoFit/>
+          </a:bodyPr>
+          <a:lstStyle/>
+          <a:p>
+            <a:pPr algn="l">
+              <a:lnSpc>
+                <a:spcPct val="106000"/>
+              </a:lnSpc>
+              <a:spcBef>
+                <a:spcPts val="0"/>
+              </a:spcBef>
+              <a:spcAft>
+                <a:spcPts val="600"/>
+              </a:spcAft>
+            </a:pPr>
+            <a:r>
+              <a:rPr sz="900" b="0" i="0">
+                <a:solidFill>
+                  <a:srgbClr val="66717F"/>
+                </a:solidFill>
                 <a:latin typeface="Consolas"/>
               </a:rPr>
-              <a:t>Explore it all live:  travis-coder712.github.io/studio/nem-team-day</a:t>
+              <a:t>Reading the NEM · Power Development Team Day · figures from the AusEnergy Lens (AEMO + ISP 2026), as-at Aug 2026</a:t>
             </a:r>
           </a:p>
         </p:txBody>
@@ -22323,6 +22929,247 @@
                 <a:latin typeface="Consolas"/>
               </a:rPr>
               <a:t>Reading the NEM · Power Development Team Day · figures from the AusEnergy Lens (AEMO + ISP 2026), as-at Aug 2026</a:t>
+            </a:r>
+          </a:p>
+        </p:txBody>
+      </p:sp>
+    </p:spTree>
+  </p:cSld>
+  <p:clrMapOvr>
+    <a:masterClrMapping/>
+  </p:clrMapOvr>
+</p:sld>
+</file>
+
+<file path=ppt/slides/slide30.xml><?xml version="1.0" encoding="utf-8"?>
+<p:sld xmlns:a="http://schemas.openxmlformats.org/drawingml/2006/main" xmlns:p="http://schemas.openxmlformats.org/presentationml/2006/main" xmlns:r="http://schemas.openxmlformats.org/officeDocument/2006/relationships">
+  <p:cSld>
+    <p:spTree>
+      <p:nvGrpSpPr>
+        <p:cNvPr id="1" name=""/>
+        <p:cNvGrpSpPr/>
+        <p:nvPr/>
+      </p:nvGrpSpPr>
+      <p:grpSpPr/>
+      <p:sp>
+        <p:nvSpPr>
+          <p:cNvPr id="2" name="Rectangle 1"/>
+          <p:cNvSpPr/>
+          <p:nvPr/>
+        </p:nvSpPr>
+        <p:spPr>
+          <a:xfrm>
+            <a:off x="0" y="0"/>
+            <a:ext cx="12191695" cy="6858000"/>
+          </a:xfrm>
+          <a:prstGeom prst="rect">
+            <a:avLst/>
+          </a:prstGeom>
+          <a:solidFill>
+            <a:srgbClr val="111820"/>
+          </a:solidFill>
+          <a:ln>
+            <a:noFill/>
+          </a:ln>
+          <a:effectLst/>
+        </p:spPr>
+        <p:style>
+          <a:lnRef idx="1">
+            <a:schemeClr val="accent1"/>
+          </a:lnRef>
+          <a:fillRef idx="3">
+            <a:schemeClr val="accent1"/>
+          </a:fillRef>
+          <a:effectRef idx="2">
+            <a:schemeClr val="accent1"/>
+          </a:effectRef>
+          <a:fontRef idx="minor">
+            <a:schemeClr val="lt1"/>
+          </a:fontRef>
+        </p:style>
+        <p:txBody>
+          <a:bodyPr rtlCol="0" anchor="ctr"/>
+          <a:lstStyle/>
+          <a:p>
+            <a:pPr algn="ctr"/>
+          </a:p>
+        </p:txBody>
+      </p:sp>
+      <p:sp>
+        <p:nvSpPr>
+          <p:cNvPr id="3" name="Rectangle 2"/>
+          <p:cNvSpPr/>
+          <p:nvPr/>
+        </p:nvSpPr>
+        <p:spPr>
+          <a:xfrm>
+            <a:off x="0" y="0"/>
+            <a:ext cx="12191695" cy="201168"/>
+          </a:xfrm>
+          <a:prstGeom prst="rect">
+            <a:avLst/>
+          </a:prstGeom>
+          <a:solidFill>
+            <a:srgbClr val="0D7D74"/>
+          </a:solidFill>
+          <a:ln>
+            <a:noFill/>
+          </a:ln>
+          <a:effectLst/>
+        </p:spPr>
+        <p:style>
+          <a:lnRef idx="1">
+            <a:schemeClr val="accent1"/>
+          </a:lnRef>
+          <a:fillRef idx="3">
+            <a:schemeClr val="accent1"/>
+          </a:fillRef>
+          <a:effectRef idx="2">
+            <a:schemeClr val="accent1"/>
+          </a:effectRef>
+          <a:fontRef idx="minor">
+            <a:schemeClr val="lt1"/>
+          </a:fontRef>
+        </p:style>
+        <p:txBody>
+          <a:bodyPr rtlCol="0" anchor="ctr"/>
+          <a:lstStyle/>
+          <a:p>
+            <a:pPr algn="ctr"/>
+          </a:p>
+        </p:txBody>
+      </p:sp>
+      <p:sp>
+        <p:nvSpPr>
+          <p:cNvPr id="4" name="TextBox 3"/>
+          <p:cNvSpPr txBox="1"/>
+          <p:nvPr/>
+        </p:nvSpPr>
+        <p:spPr>
+          <a:xfrm>
+            <a:off x="822960" y="2377440"/>
+            <a:ext cx="10515600" cy="914400"/>
+          </a:xfrm>
+          <a:prstGeom prst="rect">
+            <a:avLst/>
+          </a:prstGeom>
+          <a:noFill/>
+        </p:spPr>
+        <p:txBody>
+          <a:bodyPr wrap="square" anchor="t" lIns="0" rIns="0" tIns="0" bIns="0">
+            <a:spAutoFit/>
+          </a:bodyPr>
+          <a:lstStyle/>
+          <a:p>
+            <a:pPr algn="l">
+              <a:lnSpc>
+                <a:spcPct val="106000"/>
+              </a:lnSpc>
+              <a:spcBef>
+                <a:spcPts val="0"/>
+              </a:spcBef>
+              <a:spcAft>
+                <a:spcPts val="600"/>
+              </a:spcAft>
+            </a:pPr>
+            <a:r>
+              <a:rPr sz="3400" b="1" i="0">
+                <a:solidFill>
+                  <a:srgbClr val="FFFFFF"/>
+                </a:solidFill>
+                <a:latin typeface="Calibri"/>
+              </a:rPr>
+              <a:t>Every figure is real</a:t>
+            </a:r>
+          </a:p>
+        </p:txBody>
+      </p:sp>
+      <p:sp>
+        <p:nvSpPr>
+          <p:cNvPr id="5" name="TextBox 4"/>
+          <p:cNvSpPr txBox="1"/>
+          <p:nvPr/>
+        </p:nvSpPr>
+        <p:spPr>
+          <a:xfrm>
+            <a:off x="822960" y="3291840"/>
+            <a:ext cx="10424160" cy="1828800"/>
+          </a:xfrm>
+          <a:prstGeom prst="rect">
+            <a:avLst/>
+          </a:prstGeom>
+          <a:noFill/>
+        </p:spPr>
+        <p:txBody>
+          <a:bodyPr wrap="square" anchor="t" lIns="0" rIns="0" tIns="0" bIns="0">
+            <a:spAutoFit/>
+          </a:bodyPr>
+          <a:lstStyle/>
+          <a:p>
+            <a:pPr algn="l">
+              <a:lnSpc>
+                <a:spcPct val="120000"/>
+              </a:lnSpc>
+              <a:spcBef>
+                <a:spcPts val="0"/>
+              </a:spcBef>
+              <a:spcAft>
+                <a:spcPts val="600"/>
+              </a:spcAft>
+            </a:pPr>
+            <a:r>
+              <a:rPr sz="1600" b="0" i="0">
+                <a:solidFill>
+                  <a:srgbClr val="C2CAD4"/>
+                </a:solidFill>
+                <a:latin typeface="Calibri"/>
+              </a:rPr>
+              <a:t>Sourced from the AusEnergy “Lens” — a live database over the AEMO dispatch decade (2015→2026), ISP 2026, Open Electricity and the CER. As-at August 2026. The calculators and the storage/leverage figures are transparent teaching models, not planning tools — the point is the shape of the answer.</a:t>
+            </a:r>
+          </a:p>
+        </p:txBody>
+      </p:sp>
+      <p:sp>
+        <p:nvSpPr>
+          <p:cNvPr id="6" name="TextBox 5"/>
+          <p:cNvSpPr txBox="1"/>
+          <p:nvPr/>
+        </p:nvSpPr>
+        <p:spPr>
+          <a:xfrm>
+            <a:off x="822960" y="5120640"/>
+            <a:ext cx="10058400" cy="457200"/>
+          </a:xfrm>
+          <a:prstGeom prst="rect">
+            <a:avLst/>
+          </a:prstGeom>
+          <a:noFill/>
+        </p:spPr>
+        <p:txBody>
+          <a:bodyPr wrap="square" anchor="t" lIns="0" rIns="0" tIns="0" bIns="0">
+            <a:spAutoFit/>
+          </a:bodyPr>
+          <a:lstStyle/>
+          <a:p>
+            <a:pPr algn="l">
+              <a:lnSpc>
+                <a:spcPct val="106000"/>
+              </a:lnSpc>
+              <a:spcBef>
+                <a:spcPts val="0"/>
+              </a:spcBef>
+              <a:spcAft>
+                <a:spcPts val="600"/>
+              </a:spcAft>
+            </a:pPr>
+            <a:r>
+              <a:rPr sz="1400" b="1" i="0">
+                <a:solidFill>
+                  <a:srgbClr val="0D7D74"/>
+                </a:solidFill>
+                <a:latin typeface="Consolas"/>
+              </a:rPr>
+              <a:t>Explore it all live:  travis-coder712.github.io/studio/nem-team-day</a:t>
             </a:r>
           </a:p>
         </p:txBody>

--- a/nem-team-day/Reading-the-NEM-Team-Day.pptx
+++ b/nem-team-day/Reading-the-NEM-Team-Day.pptx
@@ -171,9 +171,9 @@
           </c:marker>
           <c:cat>
             <c:strRef>
-              <c:f>Sheet1!$A$2:$A$13</c:f>
+              <c:f>Sheet1!$A$2:$A$15</c:f>
               <c:strCache>
-                <c:ptCount val="12"/>
+                <c:ptCount val="14"/>
                 <c:pt idx="0">
                   <c:v>2015</c:v>
                 </c:pt>
@@ -209,16 +209,22 @@
                 </c:pt>
                 <c:pt idx="11">
                   <c:v>2026</c:v>
+                </c:pt>
+                <c:pt idx="12">
+                  <c:v>CY27f</c:v>
+                </c:pt>
+                <c:pt idx="13">
+                  <c:v>CY28f</c:v>
                 </c:pt>
               </c:strCache>
             </c:strRef>
           </c:cat>
           <c:val>
             <c:numRef>
-              <c:f>Sheet1!$B$2:$B$13</c:f>
+              <c:f>Sheet1!$B$2:$B$15</c:f>
               <c:numCache>
                 <c:formatCode>"$"0</c:formatCode>
-                <c:ptCount val="12"/>
+                <c:ptCount val="14"/>
                 <c:pt idx="0">
                   <c:v>39</c:v>
                 </c:pt>
@@ -254,6 +260,12 @@
                 </c:pt>
                 <c:pt idx="11">
                   <c:v>74</c:v>
+                </c:pt>
+                <c:pt idx="12">
+                  <c:v>85</c:v>
+                </c:pt>
+                <c:pt idx="13">
+                  <c:v>86</c:v>
                 </c:pt>
               </c:numCache>
             </c:numRef>
@@ -286,9 +298,9 @@
           </c:marker>
           <c:cat>
             <c:strRef>
-              <c:f>Sheet1!$A$2:$A$13</c:f>
+              <c:f>Sheet1!$A$2:$A$15</c:f>
               <c:strCache>
-                <c:ptCount val="12"/>
+                <c:ptCount val="14"/>
                 <c:pt idx="0">
                   <c:v>2015</c:v>
                 </c:pt>
@@ -324,16 +336,22 @@
                 </c:pt>
                 <c:pt idx="11">
                   <c:v>2026</c:v>
+                </c:pt>
+                <c:pt idx="12">
+                  <c:v>CY27f</c:v>
+                </c:pt>
+                <c:pt idx="13">
+                  <c:v>CY28f</c:v>
                 </c:pt>
               </c:strCache>
             </c:strRef>
           </c:cat>
           <c:val>
             <c:numRef>
-              <c:f>Sheet1!$C$2:$C$13</c:f>
+              <c:f>Sheet1!$C$2:$C$15</c:f>
               <c:numCache>
                 <c:formatCode>"$"0</c:formatCode>
-                <c:ptCount val="12"/>
+                <c:ptCount val="14"/>
                 <c:pt idx="0">
                   <c:v>52</c:v>
                 </c:pt>
@@ -369,6 +387,12 @@
                 </c:pt>
                 <c:pt idx="11">
                   <c:v>66</c:v>
+                </c:pt>
+                <c:pt idx="12">
+                  <c:v>75</c:v>
+                </c:pt>
+                <c:pt idx="13">
+                  <c:v>74</c:v>
                 </c:pt>
               </c:numCache>
             </c:numRef>
@@ -401,9 +425,9 @@
           </c:marker>
           <c:cat>
             <c:strRef>
-              <c:f>Sheet1!$A$2:$A$13</c:f>
+              <c:f>Sheet1!$A$2:$A$15</c:f>
               <c:strCache>
-                <c:ptCount val="12"/>
+                <c:ptCount val="14"/>
                 <c:pt idx="0">
                   <c:v>2015</c:v>
                 </c:pt>
@@ -439,16 +463,22 @@
                 </c:pt>
                 <c:pt idx="11">
                   <c:v>2026</c:v>
+                </c:pt>
+                <c:pt idx="12">
+                  <c:v>CY27f</c:v>
+                </c:pt>
+                <c:pt idx="13">
+                  <c:v>CY28f</c:v>
                 </c:pt>
               </c:strCache>
             </c:strRef>
           </c:cat>
           <c:val>
             <c:numRef>
-              <c:f>Sheet1!$D$2:$D$13</c:f>
+              <c:f>Sheet1!$D$2:$D$15</c:f>
               <c:numCache>
                 <c:formatCode>"$"0</c:formatCode>
-                <c:ptCount val="12"/>
+                <c:ptCount val="14"/>
                 <c:pt idx="0">
                   <c:v>50</c:v>
                 </c:pt>
@@ -484,6 +514,12 @@
                 </c:pt>
                 <c:pt idx="11">
                   <c:v>87</c:v>
+                </c:pt>
+                <c:pt idx="12">
+                  <c:v>80</c:v>
+                </c:pt>
+                <c:pt idx="13">
+                  <c:v>92</c:v>
                 </c:pt>
               </c:numCache>
             </c:numRef>
@@ -516,9 +552,9 @@
           </c:marker>
           <c:cat>
             <c:strRef>
-              <c:f>Sheet1!$A$2:$A$13</c:f>
+              <c:f>Sheet1!$A$2:$A$15</c:f>
               <c:strCache>
-                <c:ptCount val="12"/>
+                <c:ptCount val="14"/>
                 <c:pt idx="0">
                   <c:v>2015</c:v>
                 </c:pt>
@@ -554,16 +590,22 @@
                 </c:pt>
                 <c:pt idx="11">
                   <c:v>2026</c:v>
+                </c:pt>
+                <c:pt idx="12">
+                  <c:v>CY27f</c:v>
+                </c:pt>
+                <c:pt idx="13">
+                  <c:v>CY28f</c:v>
                 </c:pt>
               </c:strCache>
             </c:strRef>
           </c:cat>
           <c:val>
             <c:numRef>
-              <c:f>Sheet1!$E$2:$E$13</c:f>
+              <c:f>Sheet1!$E$2:$E$15</c:f>
               <c:numCache>
                 <c:formatCode>"$"0</c:formatCode>
-                <c:ptCount val="12"/>
+                <c:ptCount val="14"/>
                 <c:pt idx="0">
                   <c:v>34</c:v>
                 </c:pt>
@@ -599,6 +641,12 @@
                 </c:pt>
                 <c:pt idx="11">
                   <c:v>49</c:v>
+                </c:pt>
+                <c:pt idx="12">
+                  <c:v>62</c:v>
+                </c:pt>
+                <c:pt idx="13">
+                  <c:v>71</c:v>
                 </c:pt>
               </c:numCache>
             </c:numRef>
@@ -631,9 +679,9 @@
           </c:marker>
           <c:cat>
             <c:strRef>
-              <c:f>Sheet1!$A$2:$A$13</c:f>
+              <c:f>Sheet1!$A$2:$A$15</c:f>
               <c:strCache>
-                <c:ptCount val="12"/>
+                <c:ptCount val="14"/>
                 <c:pt idx="0">
                   <c:v>2015</c:v>
                 </c:pt>
@@ -669,16 +717,22 @@
                 </c:pt>
                 <c:pt idx="11">
                   <c:v>2026</c:v>
+                </c:pt>
+                <c:pt idx="12">
+                  <c:v>CY27f</c:v>
+                </c:pt>
+                <c:pt idx="13">
+                  <c:v>CY28f</c:v>
                 </c:pt>
               </c:strCache>
             </c:strRef>
           </c:cat>
           <c:val>
             <c:numRef>
-              <c:f>Sheet1!$F$2:$F$13</c:f>
+              <c:f>Sheet1!$F$2:$F$15</c:f>
               <c:numCache>
                 <c:formatCode>"$"0</c:formatCode>
-                <c:ptCount val="12"/>
+                <c:ptCount val="14"/>
                 <c:pt idx="0">
                   <c:v>48</c:v>
                 </c:pt>
@@ -23786,7 +23840,7 @@
                 </a:solidFill>
                 <a:latin typeface="Calibri"/>
               </a:rPr>
-              <a:t>The long view — a decade of prices</a:t>
+              <a:t>The long view — a decade of prices, and the forward</a:t>
             </a:r>
           </a:p>
         </p:txBody>
@@ -23904,7 +23958,7 @@
                 </a:solidFill>
                 <a:latin typeface="Calibri"/>
               </a:rPr>
-              <a:t>Wholesale prices move in shock-driven cycles; 2022's gas shock towers over the decade, and today has eased.</a:t>
+              <a:t>2022's gas shock towers over the decade; the last two points (CY27–28f) are the ASX forward — low and flat.</a:t>
             </a:r>
           </a:p>
         </p:txBody>
@@ -24343,7 +24397,7 @@
                 </a:solidFill>
                 <a:latin typeface="Calibri"/>
               </a:rPr>
-              <a:t>21 GW of coal</a:t>
+              <a:t>ASX forward (CY27–28):</a:t>
             </a:r>
             <a:r>
               <a:rPr sz="1600" b="0">
@@ -24352,7 +24406,25 @@
                 </a:solidFill>
                 <a:latin typeface="Calibri"/>
               </a:rPr>
-              <a:t> still operating; ~6 GW exits 2028–29 (Yallourn, Eraring, Gladstone).</a:t>
+              <a:t> NSW ~$85, VIC ~$62–71 (cheapest), </a:t>
+            </a:r>
+            <a:r>
+              <a:rPr sz="1600" b="1">
+                <a:solidFill>
+                  <a:srgbClr val="111820"/>
+                </a:solidFill>
+                <a:latin typeface="Calibri"/>
+              </a:rPr>
+              <a:t>SA in contango to ~$92</a:t>
+            </a:r>
+            <a:r>
+              <a:rPr sz="1600" b="0">
+                <a:solidFill>
+                  <a:srgbClr val="37424F"/>
+                </a:solidFill>
+                <a:latin typeface="Calibri"/>
+              </a:rPr>
+              <a:t> — where projects hedge and lenders price risk.</a:t>
             </a:r>
           </a:p>
           <a:p>
@@ -24374,31 +24446,22 @@
               <a:t>▸  </a:t>
             </a:r>
             <a:r>
+              <a:rPr sz="1600" b="1">
+                <a:solidFill>
+                  <a:srgbClr val="111820"/>
+                </a:solidFill>
+                <a:latin typeface="Calibri"/>
+              </a:rPr>
+              <a:t>21 GW of coal</a:t>
+            </a:r>
+            <a:r>
               <a:rPr sz="1600" b="0">
                 <a:solidFill>
                   <a:srgbClr val="37424F"/>
                 </a:solidFill>
                 <a:latin typeface="Calibri"/>
               </a:rPr>
-              <a:t>Rule of thumb: </a:t>
-            </a:r>
-            <a:r>
-              <a:rPr sz="1600" b="1">
-                <a:solidFill>
-                  <a:srgbClr val="111820"/>
-                </a:solidFill>
-                <a:latin typeface="Calibri"/>
-              </a:rPr>
-              <a:t>+1 GW of average demand ≈ +$20/MWh</a:t>
-            </a:r>
-            <a:r>
-              <a:rPr sz="1600" b="0">
-                <a:solidFill>
-                  <a:srgbClr val="37424F"/>
-                </a:solidFill>
-                <a:latin typeface="Calibri"/>
-              </a:rPr>
-              <a:t> — convex into scarcity (6 GW→$64, 9 GW→$246).</a:t>
+              <a:t> still operating; ~6 GW exits 2028–29 (Yallourn, Eraring, Gladstone).</a:t>
             </a:r>
           </a:p>
           <a:p>
@@ -24535,7 +24598,7 @@
                 </a:solidFill>
                 <a:latin typeface="Calibri"/>
               </a:rPr>
-              <a:t>These are market outturns — but they re-rate the ~3–4 yr forward curve and the long-term forecasts that underwrite FID.</a:t>
+              <a:t>Today's outturns re-rate the forward curve above and the long-term forecasts that underwrite FID.</a:t>
             </a:r>
           </a:p>
         </p:txBody>

--- a/nem-team-day/Reading-the-NEM-Team-Day.pptx
+++ b/nem-team-day/Reading-the-NEM-Team-Day.pptx
@@ -15850,7 +15850,7 @@
                 </a:solidFill>
                 <a:latin typeface="Calibri"/>
               </a:rPr>
-              <a:t>The trough is a 2023–25 story in every mainland state — and 2026 YTD charges back: QLD 0.28→0.50, VIC 0.34→0.57, NSW 0.43→0.63, SA 0.53→0.67. (2026 YTD is winter-weighted, so read the direction.)</a:t>
+              <a:t>Why 2025 was the trough: +2.8 GW of solar (a record) landed before storage caught up, so midday negative-price frequency roughly doubled (NSW 13→30%, QLD 39→53%). In 2026 new solar paused (+0.3 GW) and ~8 GW of batteries began soaking the midday trough — so capture recovered everywhere (QLD 0.28→0.50, NSW 0.43→0.63). 2026 is YTD, so read the direction.</a:t>
             </a:r>
           </a:p>
         </p:txBody>
@@ -18286,6 +18286,79 @@
               <a:t>▸  </a:t>
             </a:r>
             <a:r>
+              <a:rPr sz="1600" b="1">
+                <a:solidFill>
+                  <a:srgbClr val="111820"/>
+                </a:solidFill>
+                <a:latin typeface="Calibri"/>
+              </a:rPr>
+              <a:t>Why 2025 was the trough:</a:t>
+            </a:r>
+            <a:r>
+              <a:rPr sz="1600" b="0">
+                <a:solidFill>
+                  <a:srgbClr val="37424F"/>
+                </a:solidFill>
+                <a:latin typeface="Calibri"/>
+              </a:rPr>
+              <a:t> a record </a:t>
+            </a:r>
+            <a:r>
+              <a:rPr sz="1600" b="1">
+                <a:solidFill>
+                  <a:srgbClr val="111820"/>
+                </a:solidFill>
+                <a:latin typeface="Calibri"/>
+              </a:rPr>
+              <a:t>+2.8 GW</a:t>
+            </a:r>
+            <a:r>
+              <a:rPr sz="1600" b="0">
+                <a:solidFill>
+                  <a:srgbClr val="37424F"/>
+                </a:solidFill>
+                <a:latin typeface="Calibri"/>
+              </a:rPr>
+              <a:t> solar landed before storage caught up — </a:t>
+            </a:r>
+            <a:r>
+              <a:rPr sz="1600" b="1">
+                <a:solidFill>
+                  <a:srgbClr val="111820"/>
+                </a:solidFill>
+                <a:latin typeface="Calibri"/>
+              </a:rPr>
+              <a:t>midday negatives ~doubled</a:t>
+            </a:r>
+            <a:r>
+              <a:rPr sz="1600" b="0">
+                <a:solidFill>
+                  <a:srgbClr val="37424F"/>
+                </a:solidFill>
+                <a:latin typeface="Calibri"/>
+              </a:rPr>
+              <a:t> (NSW 13→30%); 2026's battery wave (~8 GW) soaked it back.</a:t>
+            </a:r>
+          </a:p>
+          <a:p>
+            <a:pPr>
+              <a:lnSpc>
+                <a:spcPct val="105000"/>
+              </a:lnSpc>
+              <a:spcAft>
+                <a:spcPts val="1100"/>
+              </a:spcAft>
+            </a:pPr>
+            <a:r>
+              <a:rPr sz="1600" b="1">
+                <a:solidFill>
+                  <a:srgbClr val="B21E46"/>
+                </a:solidFill>
+                <a:latin typeface="Calibri"/>
+              </a:rPr>
+              <a:t>▸  </a:t>
+            </a:r>
+            <a:r>
               <a:rPr sz="1600" b="0">
                 <a:solidFill>
                   <a:srgbClr val="37424F"/>

--- a/nem-team-day/Reading-the-NEM-Team-Day.pptx
+++ b/nem-team-day/Reading-the-NEM-Team-Day.pptx
@@ -37,6 +37,7 @@
     <p:sldId id="285" r:id="rId36"/>
     <p:sldId id="286" r:id="rId37"/>
     <p:sldId id="287" r:id="rId38"/>
+    <p:sldId id="288" r:id="rId39"/>
   </p:sldIdLst>
   <p:sldSz cx="12191695" cy="6858000" type="screen4x3"/>
   <p:notesSz cx="6858000" cy="9144000"/>
@@ -16091,6 +16092,997 @@
                 </a:solidFill>
                 <a:latin typeface="Calibri"/>
               </a:rPr>
+              <a:t>The proof — more batteries, fewer negative middays</a:t>
+            </a:r>
+          </a:p>
+        </p:txBody>
+      </p:sp>
+      <p:sp>
+        <p:nvSpPr>
+          <p:cNvPr id="6" name="TextBox 5"/>
+          <p:cNvSpPr txBox="1"/>
+          <p:nvPr/>
+        </p:nvSpPr>
+        <p:spPr>
+          <a:xfrm>
+            <a:off x="548640" y="1389888"/>
+            <a:ext cx="11064240" cy="457200"/>
+          </a:xfrm>
+          <a:prstGeom prst="rect">
+            <a:avLst/>
+          </a:prstGeom>
+          <a:noFill/>
+        </p:spPr>
+        <p:txBody>
+          <a:bodyPr wrap="square" anchor="t" lIns="0" rIns="0" tIns="0" bIns="0">
+            <a:spAutoFit/>
+          </a:bodyPr>
+          <a:lstStyle/>
+          <a:p>
+            <a:pPr algn="l">
+              <a:lnSpc>
+                <a:spcPct val="106000"/>
+              </a:lnSpc>
+              <a:spcBef>
+                <a:spcPts val="0"/>
+              </a:spcBef>
+              <a:spcAft>
+                <a:spcPts val="600"/>
+              </a:spcAft>
+            </a:pPr>
+            <a:r>
+              <a:rPr sz="1400" b="0" i="0">
+                <a:solidFill>
+                  <a:srgbClr val="37424F"/>
+                </a:solidFill>
+                <a:latin typeface="Calibri"/>
+              </a:rPr>
+              <a:t>The states that added the most midday battery charging in 2026 saw midday negative prices collapse the most — almost exactly in rank order.</a:t>
+            </a:r>
+          </a:p>
+        </p:txBody>
+      </p:sp>
+      <p:graphicFrame>
+        <p:nvGraphicFramePr>
+          <p:cNvPr id="7" name="Table 6"/>
+          <p:cNvGraphicFramePr>
+            <a:graphicFrameLocks noGrp="1"/>
+          </p:cNvGraphicFramePr>
+          <p:nvPr/>
+        </p:nvGraphicFramePr>
+        <p:xfrm>
+          <a:off x="822960" y="1965960"/>
+          <a:ext cx="10515600" cy="2432304"/>
+        </p:xfrm>
+        <a:graphic>
+          <a:graphicData uri="http://schemas.openxmlformats.org/drawingml/2006/table">
+            <a:tbl>
+              <a:tblPr>
+                <a:tableStyleId>{5C22544A-7EE6-4342-B048-85BDC9FD1C3A}</a:tableStyleId>
+              </a:tblPr>
+              <a:tblGrid>
+                <a:gridCol w="1463040"/>
+                <a:gridCol w="2263140"/>
+                <a:gridCol w="2263140"/>
+                <a:gridCol w="2263140"/>
+                <a:gridCol w="2263140"/>
+              </a:tblGrid>
+              <a:tr h="603504">
+                <a:tc>
+                  <a:txBody>
+                    <a:bodyPr wrap="square"/>
+                    <a:lstStyle/>
+                    <a:p>
+                      <a:pPr algn="l"/>
+                      <a:r>
+                        <a:rPr sz="1100" b="1">
+                          <a:solidFill>
+                            <a:srgbClr val="FFFFFF"/>
+                          </a:solidFill>
+                          <a:latin typeface="Calibri"/>
+                        </a:rPr>
+                        <a:t>State</a:t>
+                      </a:r>
+                    </a:p>
+                  </a:txBody>
+                  <a:tcPr marL="82296" marR="45720" marT="18288" marB="18288" anchor="ctr">
+                    <a:solidFill>
+                      <a:srgbClr val="B21E46"/>
+                    </a:solidFill>
+                  </a:tcPr>
+                </a:tc>
+                <a:tc>
+                  <a:txBody>
+                    <a:bodyPr wrap="square"/>
+                    <a:lstStyle/>
+                    <a:p>
+                      <a:pPr algn="ctr"/>
+                      <a:r>
+                        <a:rPr sz="1100" b="1">
+                          <a:solidFill>
+                            <a:srgbClr val="FFFFFF"/>
+                          </a:solidFill>
+                          <a:latin typeface="Calibri"/>
+                        </a:rPr>
+                        <a:t>Batteries added ’25–26</a:t>
+                      </a:r>
+                    </a:p>
+                  </a:txBody>
+                  <a:tcPr marL="82296" marR="45720" marT="18288" marB="18288" anchor="ctr">
+                    <a:solidFill>
+                      <a:srgbClr val="B21E46"/>
+                    </a:solidFill>
+                  </a:tcPr>
+                </a:tc>
+                <a:tc>
+                  <a:txBody>
+                    <a:bodyPr wrap="square"/>
+                    <a:lstStyle/>
+                    <a:p>
+                      <a:pPr algn="ctr"/>
+                      <a:r>
+                        <a:rPr sz="1100" b="1">
+                          <a:solidFill>
+                            <a:srgbClr val="FFFFFF"/>
+                          </a:solidFill>
+                          <a:latin typeface="Calibri"/>
+                        </a:rPr>
+                        <a:t>Midday charging added</a:t>
+                      </a:r>
+                    </a:p>
+                  </a:txBody>
+                  <a:tcPr marL="82296" marR="45720" marT="18288" marB="18288" anchor="ctr">
+                    <a:solidFill>
+                      <a:srgbClr val="B21E46"/>
+                    </a:solidFill>
+                  </a:tcPr>
+                </a:tc>
+                <a:tc>
+                  <a:txBody>
+                    <a:bodyPr wrap="square"/>
+                    <a:lstStyle/>
+                    <a:p>
+                      <a:pPr algn="ctr"/>
+                      <a:r>
+                        <a:rPr sz="1100" b="1">
+                          <a:solidFill>
+                            <a:srgbClr val="FFFFFF"/>
+                          </a:solidFill>
+                          <a:latin typeface="Calibri"/>
+                        </a:rPr>
+                        <a:t>Negative middays ’25→’26</a:t>
+                      </a:r>
+                    </a:p>
+                  </a:txBody>
+                  <a:tcPr marL="82296" marR="45720" marT="18288" marB="18288" anchor="ctr">
+                    <a:solidFill>
+                      <a:srgbClr val="B21E46"/>
+                    </a:solidFill>
+                  </a:tcPr>
+                </a:tc>
+                <a:tc>
+                  <a:txBody>
+                    <a:bodyPr wrap="square"/>
+                    <a:lstStyle/>
+                    <a:p>
+                      <a:pPr algn="ctr"/>
+                      <a:r>
+                        <a:rPr sz="1100" b="1">
+                          <a:solidFill>
+                            <a:srgbClr val="FFFFFF"/>
+                          </a:solidFill>
+                          <a:latin typeface="Calibri"/>
+                        </a:rPr>
+                        <a:t>Midday capture ’25→’26</a:t>
+                      </a:r>
+                    </a:p>
+                  </a:txBody>
+                  <a:tcPr marL="82296" marR="45720" marT="18288" marB="18288" anchor="ctr">
+                    <a:solidFill>
+                      <a:srgbClr val="B21E46"/>
+                    </a:solidFill>
+                  </a:tcPr>
+                </a:tc>
+              </a:tr>
+              <a:tr h="457200">
+                <a:tc>
+                  <a:txBody>
+                    <a:bodyPr wrap="square"/>
+                    <a:lstStyle/>
+                    <a:p>
+                      <a:pPr algn="l"/>
+                      <a:r>
+                        <a:rPr sz="1250" b="1">
+                          <a:solidFill>
+                            <a:srgbClr val="111820"/>
+                          </a:solidFill>
+                          <a:latin typeface="Calibri"/>
+                        </a:rPr>
+                        <a:t>QLD</a:t>
+                      </a:r>
+                    </a:p>
+                  </a:txBody>
+                  <a:tcPr marL="82296" marR="45720" marT="18288" marB="18288" anchor="ctr">
+                    <a:solidFill>
+                      <a:srgbClr val="FFFFFF"/>
+                    </a:solidFill>
+                  </a:tcPr>
+                </a:tc>
+                <a:tc>
+                  <a:txBody>
+                    <a:bodyPr wrap="square"/>
+                    <a:lstStyle/>
+                    <a:p>
+                      <a:pPr algn="ctr"/>
+                      <a:r>
+                        <a:rPr sz="1250" b="0">
+                          <a:solidFill>
+                            <a:srgbClr val="111820"/>
+                          </a:solidFill>
+                          <a:latin typeface="Calibri"/>
+                        </a:rPr>
+                        <a:t>+3.2 GW</a:t>
+                      </a:r>
+                    </a:p>
+                  </a:txBody>
+                  <a:tcPr marL="82296" marR="45720" marT="18288" marB="18288" anchor="ctr">
+                    <a:solidFill>
+                      <a:srgbClr val="FFFFFF"/>
+                    </a:solidFill>
+                  </a:tcPr>
+                </a:tc>
+                <a:tc>
+                  <a:txBody>
+                    <a:bodyPr wrap="square"/>
+                    <a:lstStyle/>
+                    <a:p>
+                      <a:pPr algn="ctr"/>
+                      <a:r>
+                        <a:rPr sz="1250" b="0">
+                          <a:solidFill>
+                            <a:srgbClr val="111820"/>
+                          </a:solidFill>
+                          <a:latin typeface="Calibri"/>
+                        </a:rPr>
+                        <a:t>+647 GWh</a:t>
+                      </a:r>
+                    </a:p>
+                  </a:txBody>
+                  <a:tcPr marL="82296" marR="45720" marT="18288" marB="18288" anchor="ctr">
+                    <a:solidFill>
+                      <a:srgbClr val="FFFFFF"/>
+                    </a:solidFill>
+                  </a:tcPr>
+                </a:tc>
+                <a:tc>
+                  <a:txBody>
+                    <a:bodyPr wrap="square"/>
+                    <a:lstStyle/>
+                    <a:p>
+                      <a:pPr algn="ctr"/>
+                      <a:r>
+                        <a:rPr sz="1250" b="0">
+                          <a:solidFill>
+                            <a:srgbClr val="111820"/>
+                          </a:solidFill>
+                          <a:latin typeface="Calibri"/>
+                        </a:rPr>
+                        <a:t>53% → 30%  (−23)</a:t>
+                      </a:r>
+                    </a:p>
+                  </a:txBody>
+                  <a:tcPr marL="82296" marR="45720" marT="18288" marB="18288" anchor="ctr">
+                    <a:solidFill>
+                      <a:srgbClr val="FFFFFF"/>
+                    </a:solidFill>
+                  </a:tcPr>
+                </a:tc>
+                <a:tc>
+                  <a:txBody>
+                    <a:bodyPr wrap="square"/>
+                    <a:lstStyle/>
+                    <a:p>
+                      <a:pPr algn="ctr"/>
+                      <a:r>
+                        <a:rPr sz="1250" b="0">
+                          <a:solidFill>
+                            <a:srgbClr val="111820"/>
+                          </a:solidFill>
+                          <a:latin typeface="Calibri"/>
+                        </a:rPr>
+                        <a:t>$14 → $26</a:t>
+                      </a:r>
+                    </a:p>
+                  </a:txBody>
+                  <a:tcPr marL="82296" marR="45720" marT="18288" marB="18288" anchor="ctr">
+                    <a:solidFill>
+                      <a:srgbClr val="FFFFFF"/>
+                    </a:solidFill>
+                  </a:tcPr>
+                </a:tc>
+              </a:tr>
+              <a:tr h="457200">
+                <a:tc>
+                  <a:txBody>
+                    <a:bodyPr wrap="square"/>
+                    <a:lstStyle/>
+                    <a:p>
+                      <a:pPr algn="l"/>
+                      <a:r>
+                        <a:rPr sz="1250" b="1">
+                          <a:solidFill>
+                            <a:srgbClr val="111820"/>
+                          </a:solidFill>
+                          <a:latin typeface="Calibri"/>
+                        </a:rPr>
+                        <a:t>NSW</a:t>
+                      </a:r>
+                    </a:p>
+                  </a:txBody>
+                  <a:tcPr marL="82296" marR="45720" marT="18288" marB="18288" anchor="ctr">
+                    <a:solidFill>
+                      <a:srgbClr val="F4F6F9"/>
+                    </a:solidFill>
+                  </a:tcPr>
+                </a:tc>
+                <a:tc>
+                  <a:txBody>
+                    <a:bodyPr wrap="square"/>
+                    <a:lstStyle/>
+                    <a:p>
+                      <a:pPr algn="ctr"/>
+                      <a:r>
+                        <a:rPr sz="1250" b="0">
+                          <a:solidFill>
+                            <a:srgbClr val="111820"/>
+                          </a:solidFill>
+                          <a:latin typeface="Calibri"/>
+                        </a:rPr>
+                        <a:t>+2.6 GW</a:t>
+                      </a:r>
+                    </a:p>
+                  </a:txBody>
+                  <a:tcPr marL="82296" marR="45720" marT="18288" marB="18288" anchor="ctr">
+                    <a:solidFill>
+                      <a:srgbClr val="F4F6F9"/>
+                    </a:solidFill>
+                  </a:tcPr>
+                </a:tc>
+                <a:tc>
+                  <a:txBody>
+                    <a:bodyPr wrap="square"/>
+                    <a:lstStyle/>
+                    <a:p>
+                      <a:pPr algn="ctr"/>
+                      <a:r>
+                        <a:rPr sz="1250" b="0">
+                          <a:solidFill>
+                            <a:srgbClr val="111820"/>
+                          </a:solidFill>
+                          <a:latin typeface="Calibri"/>
+                        </a:rPr>
+                        <a:t>+568 GWh</a:t>
+                      </a:r>
+                    </a:p>
+                  </a:txBody>
+                  <a:tcPr marL="82296" marR="45720" marT="18288" marB="18288" anchor="ctr">
+                    <a:solidFill>
+                      <a:srgbClr val="F4F6F9"/>
+                    </a:solidFill>
+                  </a:tcPr>
+                </a:tc>
+                <a:tc>
+                  <a:txBody>
+                    <a:bodyPr wrap="square"/>
+                    <a:lstStyle/>
+                    <a:p>
+                      <a:pPr algn="ctr"/>
+                      <a:r>
+                        <a:rPr sz="1250" b="0">
+                          <a:solidFill>
+                            <a:srgbClr val="111820"/>
+                          </a:solidFill>
+                          <a:latin typeface="Calibri"/>
+                        </a:rPr>
+                        <a:t>30% → 11%  (−19)</a:t>
+                      </a:r>
+                    </a:p>
+                  </a:txBody>
+                  <a:tcPr marL="82296" marR="45720" marT="18288" marB="18288" anchor="ctr">
+                    <a:solidFill>
+                      <a:srgbClr val="F4F6F9"/>
+                    </a:solidFill>
+                  </a:tcPr>
+                </a:tc>
+                <a:tc>
+                  <a:txBody>
+                    <a:bodyPr wrap="square"/>
+                    <a:lstStyle/>
+                    <a:p>
+                      <a:pPr algn="ctr"/>
+                      <a:r>
+                        <a:rPr sz="1250" b="0">
+                          <a:solidFill>
+                            <a:srgbClr val="111820"/>
+                          </a:solidFill>
+                          <a:latin typeface="Calibri"/>
+                        </a:rPr>
+                        <a:t>$33 → $43</a:t>
+                      </a:r>
+                    </a:p>
+                  </a:txBody>
+                  <a:tcPr marL="82296" marR="45720" marT="18288" marB="18288" anchor="ctr">
+                    <a:solidFill>
+                      <a:srgbClr val="F4F6F9"/>
+                    </a:solidFill>
+                  </a:tcPr>
+                </a:tc>
+              </a:tr>
+              <a:tr h="457200">
+                <a:tc>
+                  <a:txBody>
+                    <a:bodyPr wrap="square"/>
+                    <a:lstStyle/>
+                    <a:p>
+                      <a:pPr algn="l"/>
+                      <a:r>
+                        <a:rPr sz="1250" b="1">
+                          <a:solidFill>
+                            <a:srgbClr val="111820"/>
+                          </a:solidFill>
+                          <a:latin typeface="Calibri"/>
+                        </a:rPr>
+                        <a:t>VIC</a:t>
+                      </a:r>
+                    </a:p>
+                  </a:txBody>
+                  <a:tcPr marL="82296" marR="45720" marT="18288" marB="18288" anchor="ctr">
+                    <a:solidFill>
+                      <a:srgbClr val="FFFFFF"/>
+                    </a:solidFill>
+                  </a:tcPr>
+                </a:tc>
+                <a:tc>
+                  <a:txBody>
+                    <a:bodyPr wrap="square"/>
+                    <a:lstStyle/>
+                    <a:p>
+                      <a:pPr algn="ctr"/>
+                      <a:r>
+                        <a:rPr sz="1250" b="0">
+                          <a:solidFill>
+                            <a:srgbClr val="111820"/>
+                          </a:solidFill>
+                          <a:latin typeface="Calibri"/>
+                        </a:rPr>
+                        <a:t>+1.9 GW</a:t>
+                      </a:r>
+                    </a:p>
+                  </a:txBody>
+                  <a:tcPr marL="82296" marR="45720" marT="18288" marB="18288" anchor="ctr">
+                    <a:solidFill>
+                      <a:srgbClr val="FFFFFF"/>
+                    </a:solidFill>
+                  </a:tcPr>
+                </a:tc>
+                <a:tc>
+                  <a:txBody>
+                    <a:bodyPr wrap="square"/>
+                    <a:lstStyle/>
+                    <a:p>
+                      <a:pPr algn="ctr"/>
+                      <a:r>
+                        <a:rPr sz="1250" b="0">
+                          <a:solidFill>
+                            <a:srgbClr val="111820"/>
+                          </a:solidFill>
+                          <a:latin typeface="Calibri"/>
+                        </a:rPr>
+                        <a:t>+287 GWh</a:t>
+                      </a:r>
+                    </a:p>
+                  </a:txBody>
+                  <a:tcPr marL="82296" marR="45720" marT="18288" marB="18288" anchor="ctr">
+                    <a:solidFill>
+                      <a:srgbClr val="FFFFFF"/>
+                    </a:solidFill>
+                  </a:tcPr>
+                </a:tc>
+                <a:tc>
+                  <a:txBody>
+                    <a:bodyPr wrap="square"/>
+                    <a:lstStyle/>
+                    <a:p>
+                      <a:pPr algn="ctr"/>
+                      <a:r>
+                        <a:rPr sz="1250" b="0">
+                          <a:solidFill>
+                            <a:srgbClr val="111820"/>
+                          </a:solidFill>
+                          <a:latin typeface="Calibri"/>
+                        </a:rPr>
+                        <a:t>40% → 38%  (−2)</a:t>
+                      </a:r>
+                    </a:p>
+                  </a:txBody>
+                  <a:tcPr marL="82296" marR="45720" marT="18288" marB="18288" anchor="ctr">
+                    <a:solidFill>
+                      <a:srgbClr val="FFFFFF"/>
+                    </a:solidFill>
+                  </a:tcPr>
+                </a:tc>
+                <a:tc>
+                  <a:txBody>
+                    <a:bodyPr wrap="square"/>
+                    <a:lstStyle/>
+                    <a:p>
+                      <a:pPr algn="ctr"/>
+                      <a:r>
+                        <a:rPr sz="1250" b="0">
+                          <a:solidFill>
+                            <a:srgbClr val="111820"/>
+                          </a:solidFill>
+                          <a:latin typeface="Calibri"/>
+                        </a:rPr>
+                        <a:t>$24 → $25</a:t>
+                      </a:r>
+                    </a:p>
+                  </a:txBody>
+                  <a:tcPr marL="82296" marR="45720" marT="18288" marB="18288" anchor="ctr">
+                    <a:solidFill>
+                      <a:srgbClr val="FFFFFF"/>
+                    </a:solidFill>
+                  </a:tcPr>
+                </a:tc>
+              </a:tr>
+              <a:tr h="457200">
+                <a:tc>
+                  <a:txBody>
+                    <a:bodyPr wrap="square"/>
+                    <a:lstStyle/>
+                    <a:p>
+                      <a:pPr algn="l"/>
+                      <a:r>
+                        <a:rPr sz="1250" b="1">
+                          <a:solidFill>
+                            <a:srgbClr val="111820"/>
+                          </a:solidFill>
+                          <a:latin typeface="Calibri"/>
+                        </a:rPr>
+                        <a:t>SA</a:t>
+                      </a:r>
+                    </a:p>
+                  </a:txBody>
+                  <a:tcPr marL="82296" marR="45720" marT="18288" marB="18288" anchor="ctr">
+                    <a:solidFill>
+                      <a:srgbClr val="F4F6F9"/>
+                    </a:solidFill>
+                  </a:tcPr>
+                </a:tc>
+                <a:tc>
+                  <a:txBody>
+                    <a:bodyPr wrap="square"/>
+                    <a:lstStyle/>
+                    <a:p>
+                      <a:pPr algn="ctr"/>
+                      <a:r>
+                        <a:rPr sz="1250" b="0">
+                          <a:solidFill>
+                            <a:srgbClr val="111820"/>
+                          </a:solidFill>
+                          <a:latin typeface="Calibri"/>
+                        </a:rPr>
+                        <a:t>+0.9 GW</a:t>
+                      </a:r>
+                    </a:p>
+                  </a:txBody>
+                  <a:tcPr marL="82296" marR="45720" marT="18288" marB="18288" anchor="ctr">
+                    <a:solidFill>
+                      <a:srgbClr val="F4F6F9"/>
+                    </a:solidFill>
+                  </a:tcPr>
+                </a:tc>
+                <a:tc>
+                  <a:txBody>
+                    <a:bodyPr wrap="square"/>
+                    <a:lstStyle/>
+                    <a:p>
+                      <a:pPr algn="ctr"/>
+                      <a:r>
+                        <a:rPr sz="1250" b="0">
+                          <a:solidFill>
+                            <a:srgbClr val="111820"/>
+                          </a:solidFill>
+                          <a:latin typeface="Calibri"/>
+                        </a:rPr>
+                        <a:t>+92 GWh</a:t>
+                      </a:r>
+                    </a:p>
+                  </a:txBody>
+                  <a:tcPr marL="82296" marR="45720" marT="18288" marB="18288" anchor="ctr">
+                    <a:solidFill>
+                      <a:srgbClr val="F4F6F9"/>
+                    </a:solidFill>
+                  </a:tcPr>
+                </a:tc>
+                <a:tc>
+                  <a:txBody>
+                    <a:bodyPr wrap="square"/>
+                    <a:lstStyle/>
+                    <a:p>
+                      <a:pPr algn="ctr"/>
+                      <a:r>
+                        <a:rPr sz="1250" b="0">
+                          <a:solidFill>
+                            <a:srgbClr val="111820"/>
+                          </a:solidFill>
+                          <a:latin typeface="Calibri"/>
+                        </a:rPr>
+                        <a:t>52% → 48%  (−4)</a:t>
+                      </a:r>
+                    </a:p>
+                  </a:txBody>
+                  <a:tcPr marL="82296" marR="45720" marT="18288" marB="18288" anchor="ctr">
+                    <a:solidFill>
+                      <a:srgbClr val="F4F6F9"/>
+                    </a:solidFill>
+                  </a:tcPr>
+                </a:tc>
+                <a:tc>
+                  <a:txBody>
+                    <a:bodyPr wrap="square"/>
+                    <a:lstStyle/>
+                    <a:p>
+                      <a:pPr algn="ctr"/>
+                      <a:r>
+                        <a:rPr sz="1250" b="0">
+                          <a:solidFill>
+                            <a:srgbClr val="111820"/>
+                          </a:solidFill>
+                          <a:latin typeface="Calibri"/>
+                        </a:rPr>
+                        <a:t>$17 → $27</a:t>
+                      </a:r>
+                    </a:p>
+                  </a:txBody>
+                  <a:tcPr marL="82296" marR="45720" marT="18288" marB="18288" anchor="ctr">
+                    <a:solidFill>
+                      <a:srgbClr val="F4F6F9"/>
+                    </a:solidFill>
+                  </a:tcPr>
+                </a:tc>
+              </a:tr>
+            </a:tbl>
+          </a:graphicData>
+        </a:graphic>
+      </p:graphicFrame>
+      <p:sp>
+        <p:nvSpPr>
+          <p:cNvPr id="8" name="Rectangle 7"/>
+          <p:cNvSpPr/>
+          <p:nvPr/>
+        </p:nvSpPr>
+        <p:spPr>
+          <a:xfrm>
+            <a:off x="822960" y="5166360"/>
+            <a:ext cx="10515600" cy="1051560"/>
+          </a:xfrm>
+          <a:prstGeom prst="rect">
+            <a:avLst/>
+          </a:prstGeom>
+          <a:solidFill>
+            <a:srgbClr val="F4F6F9"/>
+          </a:solidFill>
+          <a:ln w="9525">
+            <a:solidFill>
+              <a:srgbClr val="B21E46"/>
+            </a:solidFill>
+          </a:ln>
+          <a:effectLst/>
+        </p:spPr>
+        <p:style>
+          <a:lnRef idx="1">
+            <a:schemeClr val="accent1"/>
+          </a:lnRef>
+          <a:fillRef idx="3">
+            <a:schemeClr val="accent1"/>
+          </a:fillRef>
+          <a:effectRef idx="2">
+            <a:schemeClr val="accent1"/>
+          </a:effectRef>
+          <a:fontRef idx="minor">
+            <a:schemeClr val="lt1"/>
+          </a:fontRef>
+        </p:style>
+        <p:txBody>
+          <a:bodyPr rtlCol="0" anchor="ctr"/>
+          <a:lstStyle/>
+          <a:p>
+            <a:pPr algn="ctr"/>
+          </a:p>
+        </p:txBody>
+      </p:sp>
+      <p:sp>
+        <p:nvSpPr>
+          <p:cNvPr id="9" name="TextBox 8"/>
+          <p:cNvSpPr txBox="1"/>
+          <p:nvPr/>
+        </p:nvSpPr>
+        <p:spPr>
+          <a:xfrm>
+            <a:off x="1005840" y="5276088"/>
+            <a:ext cx="10149840" cy="822960"/>
+          </a:xfrm>
+          <a:prstGeom prst="rect">
+            <a:avLst/>
+          </a:prstGeom>
+          <a:noFill/>
+        </p:spPr>
+        <p:txBody>
+          <a:bodyPr wrap="square" anchor="t" lIns="0" rIns="0" tIns="0" bIns="0">
+            <a:spAutoFit/>
+          </a:bodyPr>
+          <a:lstStyle/>
+          <a:p>
+            <a:pPr algn="l">
+              <a:lnSpc>
+                <a:spcPct val="122000"/>
+              </a:lnSpc>
+              <a:spcBef>
+                <a:spcPts val="0"/>
+              </a:spcBef>
+              <a:spcAft>
+                <a:spcPts val="600"/>
+              </a:spcAft>
+            </a:pPr>
+            <a:r>
+              <a:rPr sz="1350" b="0" i="0">
+                <a:solidFill>
+                  <a:srgbClr val="37424F"/>
+                </a:solidFill>
+                <a:latin typeface="Calibri"/>
+              </a:rPr>
+              <a:t>Read the negative-midday drop — the direct “soaking” signal: QLD &amp; NSW built the most storage and got the biggest recovery. (Absolute prices also eased with a softer 2026 pool; SA's jump is off a tiny base, not battery-driven.) Midday = 9am–3pm, matched Jan–Aug.</a:t>
+            </a:r>
+          </a:p>
+        </p:txBody>
+      </p:sp>
+      <p:sp>
+        <p:nvSpPr>
+          <p:cNvPr id="10" name="TextBox 9"/>
+          <p:cNvSpPr txBox="1"/>
+          <p:nvPr/>
+        </p:nvSpPr>
+        <p:spPr>
+          <a:xfrm>
+            <a:off x="502920" y="6419088"/>
+            <a:ext cx="8229600" cy="274320"/>
+          </a:xfrm>
+          <a:prstGeom prst="rect">
+            <a:avLst/>
+          </a:prstGeom>
+          <a:noFill/>
+        </p:spPr>
+        <p:txBody>
+          <a:bodyPr wrap="square" anchor="t" lIns="0" rIns="0" tIns="0" bIns="0">
+            <a:spAutoFit/>
+          </a:bodyPr>
+          <a:lstStyle/>
+          <a:p>
+            <a:pPr algn="l">
+              <a:lnSpc>
+                <a:spcPct val="106000"/>
+              </a:lnSpc>
+              <a:spcBef>
+                <a:spcPts val="0"/>
+              </a:spcBef>
+              <a:spcAft>
+                <a:spcPts val="600"/>
+              </a:spcAft>
+            </a:pPr>
+            <a:r>
+              <a:rPr sz="900" b="0" i="0">
+                <a:solidFill>
+                  <a:srgbClr val="66717F"/>
+                </a:solidFill>
+                <a:latin typeface="Consolas"/>
+              </a:rPr>
+              <a:t>Reading the NEM · Power Development Team Day · figures from the AusEnergy Lens (AEMO + ISP 2026), as-at Aug 2026</a:t>
+            </a:r>
+          </a:p>
+        </p:txBody>
+      </p:sp>
+    </p:spTree>
+  </p:cSld>
+  <p:clrMapOvr>
+    <a:masterClrMapping/>
+  </p:clrMapOvr>
+</p:sld>
+</file>
+
+<file path=ppt/slides/slide23.xml><?xml version="1.0" encoding="utf-8"?>
+<p:sld xmlns:a="http://schemas.openxmlformats.org/drawingml/2006/main" xmlns:p="http://schemas.openxmlformats.org/presentationml/2006/main" xmlns:r="http://schemas.openxmlformats.org/officeDocument/2006/relationships">
+  <p:cSld>
+    <p:spTree>
+      <p:nvGrpSpPr>
+        <p:cNvPr id="1" name=""/>
+        <p:cNvGrpSpPr/>
+        <p:nvPr/>
+      </p:nvGrpSpPr>
+      <p:grpSpPr/>
+      <p:sp>
+        <p:nvSpPr>
+          <p:cNvPr id="2" name="Rectangle 1"/>
+          <p:cNvSpPr/>
+          <p:nvPr/>
+        </p:nvSpPr>
+        <p:spPr>
+          <a:xfrm>
+            <a:off x="0" y="0"/>
+            <a:ext cx="12191695" cy="6858000"/>
+          </a:xfrm>
+          <a:prstGeom prst="rect">
+            <a:avLst/>
+          </a:prstGeom>
+          <a:solidFill>
+            <a:srgbClr val="FFFFFF"/>
+          </a:solidFill>
+          <a:ln>
+            <a:noFill/>
+          </a:ln>
+          <a:effectLst/>
+        </p:spPr>
+        <p:style>
+          <a:lnRef idx="1">
+            <a:schemeClr val="accent1"/>
+          </a:lnRef>
+          <a:fillRef idx="3">
+            <a:schemeClr val="accent1"/>
+          </a:fillRef>
+          <a:effectRef idx="2">
+            <a:schemeClr val="accent1"/>
+          </a:effectRef>
+          <a:fontRef idx="minor">
+            <a:schemeClr val="lt1"/>
+          </a:fontRef>
+        </p:style>
+        <p:txBody>
+          <a:bodyPr rtlCol="0" anchor="ctr"/>
+          <a:lstStyle/>
+          <a:p>
+            <a:pPr algn="ctr"/>
+          </a:p>
+        </p:txBody>
+      </p:sp>
+      <p:sp>
+        <p:nvSpPr>
+          <p:cNvPr id="3" name="Rectangle 2"/>
+          <p:cNvSpPr/>
+          <p:nvPr/>
+        </p:nvSpPr>
+        <p:spPr>
+          <a:xfrm>
+            <a:off x="0" y="0"/>
+            <a:ext cx="146304" cy="6858000"/>
+          </a:xfrm>
+          <a:prstGeom prst="rect">
+            <a:avLst/>
+          </a:prstGeom>
+          <a:solidFill>
+            <a:srgbClr val="B21E46"/>
+          </a:solidFill>
+          <a:ln>
+            <a:noFill/>
+          </a:ln>
+          <a:effectLst/>
+        </p:spPr>
+        <p:style>
+          <a:lnRef idx="1">
+            <a:schemeClr val="accent1"/>
+          </a:lnRef>
+          <a:fillRef idx="3">
+            <a:schemeClr val="accent1"/>
+          </a:fillRef>
+          <a:effectRef idx="2">
+            <a:schemeClr val="accent1"/>
+          </a:effectRef>
+          <a:fontRef idx="minor">
+            <a:schemeClr val="lt1"/>
+          </a:fontRef>
+        </p:style>
+        <p:txBody>
+          <a:bodyPr rtlCol="0" anchor="ctr"/>
+          <a:lstStyle/>
+          <a:p>
+            <a:pPr algn="ctr"/>
+          </a:p>
+        </p:txBody>
+      </p:sp>
+      <p:sp>
+        <p:nvSpPr>
+          <p:cNvPr id="4" name="TextBox 3"/>
+          <p:cNvSpPr txBox="1"/>
+          <p:nvPr/>
+        </p:nvSpPr>
+        <p:spPr>
+          <a:xfrm>
+            <a:off x="548640" y="411480"/>
+            <a:ext cx="9144000" cy="274320"/>
+          </a:xfrm>
+          <a:prstGeom prst="rect">
+            <a:avLst/>
+          </a:prstGeom>
+          <a:noFill/>
+        </p:spPr>
+        <p:txBody>
+          <a:bodyPr wrap="square" anchor="t" lIns="0" rIns="0" tIns="0" bIns="0">
+            <a:spAutoFit/>
+          </a:bodyPr>
+          <a:lstStyle/>
+          <a:p>
+            <a:pPr algn="l">
+              <a:lnSpc>
+                <a:spcPct val="106000"/>
+              </a:lnSpc>
+              <a:spcBef>
+                <a:spcPts val="0"/>
+              </a:spcBef>
+              <a:spcAft>
+                <a:spcPts val="600"/>
+              </a:spcAft>
+            </a:pPr>
+            <a:r>
+              <a:rPr sz="1200" b="1" i="0">
+                <a:solidFill>
+                  <a:srgbClr val="B21E46"/>
+                </a:solidFill>
+                <a:latin typeface="Consolas"/>
+              </a:rPr>
+              <a:t>TOPIC 4 · ECONOMICS</a:t>
+            </a:r>
+          </a:p>
+        </p:txBody>
+      </p:sp>
+      <p:sp>
+        <p:nvSpPr>
+          <p:cNvPr id="5" name="TextBox 4"/>
+          <p:cNvSpPr txBox="1"/>
+          <p:nvPr/>
+        </p:nvSpPr>
+        <p:spPr>
+          <a:xfrm>
+            <a:off x="502920" y="713232"/>
+            <a:ext cx="11155680" cy="640080"/>
+          </a:xfrm>
+          <a:prstGeom prst="rect">
+            <a:avLst/>
+          </a:prstGeom>
+          <a:noFill/>
+        </p:spPr>
+        <p:txBody>
+          <a:bodyPr wrap="square" anchor="t" lIns="0" rIns="0" tIns="0" bIns="0">
+            <a:spAutoFit/>
+          </a:bodyPr>
+          <a:lstStyle/>
+          <a:p>
+            <a:pPr algn="l">
+              <a:lnSpc>
+                <a:spcPct val="106000"/>
+              </a:lnSpc>
+              <a:spcBef>
+                <a:spcPts val="0"/>
+              </a:spcBef>
+              <a:spcAft>
+                <a:spcPts val="600"/>
+              </a:spcAft>
+            </a:pPr>
+            <a:r>
+              <a:rPr sz="2800" b="1" i="0">
+                <a:solidFill>
+                  <a:srgbClr val="111820"/>
+                </a:solidFill>
+                <a:latin typeface="Calibri"/>
+              </a:rPr>
               <a:t>The battery mirror — spread, not value factor</a:t>
             </a:r>
           </a:p>
@@ -16267,7 +17259,7 @@
 </p:sld>
 </file>
 
-<file path=ppt/slides/slide23.xml><?xml version="1.0" encoding="utf-8"?>
+<file path=ppt/slides/slide24.xml><?xml version="1.0" encoding="utf-8"?>
 <p:sld xmlns:a="http://schemas.openxmlformats.org/drawingml/2006/main" xmlns:p="http://schemas.openxmlformats.org/presentationml/2006/main" xmlns:r="http://schemas.openxmlformats.org/officeDocument/2006/relationships">
   <p:cSld>
     <p:spTree>
@@ -17653,7 +18645,7 @@
 </p:sld>
 </file>
 
-<file path=ppt/slides/slide24.xml><?xml version="1.0" encoding="utf-8"?>
+<file path=ppt/slides/slide25.xml><?xml version="1.0" encoding="utf-8"?>
 <p:sld xmlns:a="http://schemas.openxmlformats.org/drawingml/2006/main" xmlns:p="http://schemas.openxmlformats.org/presentationml/2006/main" xmlns:r="http://schemas.openxmlformats.org/officeDocument/2006/relationships">
   <p:cSld>
     <p:spTree>
@@ -17955,701 +18947,6 @@
                 <a:latin typeface="Calibri"/>
               </a:rPr>
               <a:t>SA stays the widest and most volatile; NSW, QLD and VIC have converged toward ~$100 as their fleets filled in.</a:t>
-            </a:r>
-          </a:p>
-        </p:txBody>
-      </p:sp>
-      <p:sp>
-        <p:nvSpPr>
-          <p:cNvPr id="9" name="TextBox 8"/>
-          <p:cNvSpPr txBox="1"/>
-          <p:nvPr/>
-        </p:nvSpPr>
-        <p:spPr>
-          <a:xfrm>
-            <a:off x="502920" y="6419088"/>
-            <a:ext cx="8229600" cy="274320"/>
-          </a:xfrm>
-          <a:prstGeom prst="rect">
-            <a:avLst/>
-          </a:prstGeom>
-          <a:noFill/>
-        </p:spPr>
-        <p:txBody>
-          <a:bodyPr wrap="square" anchor="t" lIns="0" rIns="0" tIns="0" bIns="0">
-            <a:spAutoFit/>
-          </a:bodyPr>
-          <a:lstStyle/>
-          <a:p>
-            <a:pPr algn="l">
-              <a:lnSpc>
-                <a:spcPct val="106000"/>
-              </a:lnSpc>
-              <a:spcBef>
-                <a:spcPts val="0"/>
-              </a:spcBef>
-              <a:spcAft>
-                <a:spcPts val="600"/>
-              </a:spcAft>
-            </a:pPr>
-            <a:r>
-              <a:rPr sz="900" b="0" i="0">
-                <a:solidFill>
-                  <a:srgbClr val="66717F"/>
-                </a:solidFill>
-                <a:latin typeface="Consolas"/>
-              </a:rPr>
-              <a:t>Reading the NEM · Power Development Team Day · figures from the AusEnergy Lens (AEMO + ISP 2026), as-at Aug 2026</a:t>
-            </a:r>
-          </a:p>
-        </p:txBody>
-      </p:sp>
-    </p:spTree>
-  </p:cSld>
-  <p:clrMapOvr>
-    <a:masterClrMapping/>
-  </p:clrMapOvr>
-</p:sld>
-</file>
-
-<file path=ppt/slides/slide25.xml><?xml version="1.0" encoding="utf-8"?>
-<p:sld xmlns:a="http://schemas.openxmlformats.org/drawingml/2006/main" xmlns:p="http://schemas.openxmlformats.org/presentationml/2006/main" xmlns:r="http://schemas.openxmlformats.org/officeDocument/2006/relationships">
-  <p:cSld>
-    <p:spTree>
-      <p:nvGrpSpPr>
-        <p:cNvPr id="1" name=""/>
-        <p:cNvGrpSpPr/>
-        <p:nvPr/>
-      </p:nvGrpSpPr>
-      <p:grpSpPr/>
-      <p:sp>
-        <p:nvSpPr>
-          <p:cNvPr id="2" name="Rectangle 1"/>
-          <p:cNvSpPr/>
-          <p:nvPr/>
-        </p:nvSpPr>
-        <p:spPr>
-          <a:xfrm>
-            <a:off x="0" y="0"/>
-            <a:ext cx="12191695" cy="6858000"/>
-          </a:xfrm>
-          <a:prstGeom prst="rect">
-            <a:avLst/>
-          </a:prstGeom>
-          <a:solidFill>
-            <a:srgbClr val="FFFFFF"/>
-          </a:solidFill>
-          <a:ln>
-            <a:noFill/>
-          </a:ln>
-          <a:effectLst/>
-        </p:spPr>
-        <p:style>
-          <a:lnRef idx="1">
-            <a:schemeClr val="accent1"/>
-          </a:lnRef>
-          <a:fillRef idx="3">
-            <a:schemeClr val="accent1"/>
-          </a:fillRef>
-          <a:effectRef idx="2">
-            <a:schemeClr val="accent1"/>
-          </a:effectRef>
-          <a:fontRef idx="minor">
-            <a:schemeClr val="lt1"/>
-          </a:fontRef>
-        </p:style>
-        <p:txBody>
-          <a:bodyPr rtlCol="0" anchor="ctr"/>
-          <a:lstStyle/>
-          <a:p>
-            <a:pPr algn="ctr"/>
-          </a:p>
-        </p:txBody>
-      </p:sp>
-      <p:sp>
-        <p:nvSpPr>
-          <p:cNvPr id="3" name="Rectangle 2"/>
-          <p:cNvSpPr/>
-          <p:nvPr/>
-        </p:nvSpPr>
-        <p:spPr>
-          <a:xfrm>
-            <a:off x="0" y="0"/>
-            <a:ext cx="146304" cy="6858000"/>
-          </a:xfrm>
-          <a:prstGeom prst="rect">
-            <a:avLst/>
-          </a:prstGeom>
-          <a:solidFill>
-            <a:srgbClr val="B21E46"/>
-          </a:solidFill>
-          <a:ln>
-            <a:noFill/>
-          </a:ln>
-          <a:effectLst/>
-        </p:spPr>
-        <p:style>
-          <a:lnRef idx="1">
-            <a:schemeClr val="accent1"/>
-          </a:lnRef>
-          <a:fillRef idx="3">
-            <a:schemeClr val="accent1"/>
-          </a:fillRef>
-          <a:effectRef idx="2">
-            <a:schemeClr val="accent1"/>
-          </a:effectRef>
-          <a:fontRef idx="minor">
-            <a:schemeClr val="lt1"/>
-          </a:fontRef>
-        </p:style>
-        <p:txBody>
-          <a:bodyPr rtlCol="0" anchor="ctr"/>
-          <a:lstStyle/>
-          <a:p>
-            <a:pPr algn="ctr"/>
-          </a:p>
-        </p:txBody>
-      </p:sp>
-      <p:sp>
-        <p:nvSpPr>
-          <p:cNvPr id="4" name="TextBox 3"/>
-          <p:cNvSpPr txBox="1"/>
-          <p:nvPr/>
-        </p:nvSpPr>
-        <p:spPr>
-          <a:xfrm>
-            <a:off x="548640" y="411480"/>
-            <a:ext cx="9144000" cy="274320"/>
-          </a:xfrm>
-          <a:prstGeom prst="rect">
-            <a:avLst/>
-          </a:prstGeom>
-          <a:noFill/>
-        </p:spPr>
-        <p:txBody>
-          <a:bodyPr wrap="square" anchor="t" lIns="0" rIns="0" tIns="0" bIns="0">
-            <a:spAutoFit/>
-          </a:bodyPr>
-          <a:lstStyle/>
-          <a:p>
-            <a:pPr algn="l">
-              <a:lnSpc>
-                <a:spcPct val="106000"/>
-              </a:lnSpc>
-              <a:spcBef>
-                <a:spcPts val="0"/>
-              </a:spcBef>
-              <a:spcAft>
-                <a:spcPts val="600"/>
-              </a:spcAft>
-            </a:pPr>
-            <a:r>
-              <a:rPr sz="1200" b="1" i="0">
-                <a:solidFill>
-                  <a:srgbClr val="B21E46"/>
-                </a:solidFill>
-                <a:latin typeface="Consolas"/>
-              </a:rPr>
-              <a:t>TOPIC 4 · ECONOMICS</a:t>
-            </a:r>
-          </a:p>
-        </p:txBody>
-      </p:sp>
-      <p:sp>
-        <p:nvSpPr>
-          <p:cNvPr id="5" name="TextBox 4"/>
-          <p:cNvSpPr txBox="1"/>
-          <p:nvPr/>
-        </p:nvSpPr>
-        <p:spPr>
-          <a:xfrm>
-            <a:off x="502920" y="713232"/>
-            <a:ext cx="11155680" cy="640080"/>
-          </a:xfrm>
-          <a:prstGeom prst="rect">
-            <a:avLst/>
-          </a:prstGeom>
-          <a:noFill/>
-        </p:spPr>
-        <p:txBody>
-          <a:bodyPr wrap="square" anchor="t" lIns="0" rIns="0" tIns="0" bIns="0">
-            <a:spAutoFit/>
-          </a:bodyPr>
-          <a:lstStyle/>
-          <a:p>
-            <a:pPr algn="l">
-              <a:lnSpc>
-                <a:spcPct val="106000"/>
-              </a:lnSpc>
-              <a:spcBef>
-                <a:spcPts val="0"/>
-              </a:spcBef>
-              <a:spcAft>
-                <a:spcPts val="600"/>
-              </a:spcAft>
-            </a:pPr>
-            <a:r>
-              <a:rPr sz="2800" b="1" i="0">
-                <a:solidFill>
-                  <a:srgbClr val="111820"/>
-                </a:solidFill>
-                <a:latin typeface="Calibri"/>
-              </a:rPr>
-              <a:t>The data on the table</a:t>
-            </a:r>
-          </a:p>
-        </p:txBody>
-      </p:sp>
-      <p:sp>
-        <p:nvSpPr>
-          <p:cNvPr id="6" name="TextBox 5"/>
-          <p:cNvSpPr txBox="1"/>
-          <p:nvPr/>
-        </p:nvSpPr>
-        <p:spPr>
-          <a:xfrm>
-            <a:off x="548640" y="1600200"/>
-            <a:ext cx="11064240" cy="4206240"/>
-          </a:xfrm>
-          <a:prstGeom prst="rect">
-            <a:avLst/>
-          </a:prstGeom>
-          <a:noFill/>
-        </p:spPr>
-        <p:txBody>
-          <a:bodyPr wrap="square" lIns="0" rIns="0" tIns="0" bIns="0">
-            <a:spAutoFit/>
-          </a:bodyPr>
-          <a:lstStyle/>
-          <a:p>
-            <a:pPr>
-              <a:lnSpc>
-                <a:spcPct val="105000"/>
-              </a:lnSpc>
-              <a:spcAft>
-                <a:spcPts val="1100"/>
-              </a:spcAft>
-            </a:pPr>
-            <a:r>
-              <a:rPr sz="1600" b="1">
-                <a:solidFill>
-                  <a:srgbClr val="B21E46"/>
-                </a:solidFill>
-                <a:latin typeface="Calibri"/>
-              </a:rPr>
-              <a:t>▸  </a:t>
-            </a:r>
-            <a:r>
-              <a:rPr sz="1600" b="0">
-                <a:solidFill>
-                  <a:srgbClr val="37424F"/>
-                </a:solidFill>
-                <a:latin typeface="Calibri"/>
-              </a:rPr>
-              <a:t>VIC </a:t>
-            </a:r>
-            <a:r>
-              <a:rPr sz="1600" b="1">
-                <a:solidFill>
-                  <a:srgbClr val="111820"/>
-                </a:solidFill>
-                <a:latin typeface="Calibri"/>
-              </a:rPr>
-              <a:t>solar value factor: 1.06× (2019) → 0.37× (2023–24 trough) → 0.67× (2026 YTD)</a:t>
-            </a:r>
-            <a:r>
-              <a:rPr sz="1600" b="0">
-                <a:solidFill>
-                  <a:srgbClr val="37424F"/>
-                </a:solidFill>
-                <a:latin typeface="Calibri"/>
-              </a:rPr>
-              <a:t>. It cycles.</a:t>
-            </a:r>
-          </a:p>
-          <a:p>
-            <a:pPr>
-              <a:lnSpc>
-                <a:spcPct val="105000"/>
-              </a:lnSpc>
-              <a:spcAft>
-                <a:spcPts val="1100"/>
-              </a:spcAft>
-            </a:pPr>
-            <a:r>
-              <a:rPr sz="1600" b="1">
-                <a:solidFill>
-                  <a:srgbClr val="B21E46"/>
-                </a:solidFill>
-                <a:latin typeface="Calibri"/>
-              </a:rPr>
-              <a:t>▸  </a:t>
-            </a:r>
-            <a:r>
-              <a:rPr sz="1600" b="1">
-                <a:solidFill>
-                  <a:srgbClr val="111820"/>
-                </a:solidFill>
-                <a:latin typeface="Calibri"/>
-              </a:rPr>
-              <a:t>Why 2025 was the trough:</a:t>
-            </a:r>
-            <a:r>
-              <a:rPr sz="1600" b="0">
-                <a:solidFill>
-                  <a:srgbClr val="37424F"/>
-                </a:solidFill>
-                <a:latin typeface="Calibri"/>
-              </a:rPr>
-              <a:t> a record </a:t>
-            </a:r>
-            <a:r>
-              <a:rPr sz="1600" b="1">
-                <a:solidFill>
-                  <a:srgbClr val="111820"/>
-                </a:solidFill>
-                <a:latin typeface="Calibri"/>
-              </a:rPr>
-              <a:t>+2.8 GW</a:t>
-            </a:r>
-            <a:r>
-              <a:rPr sz="1600" b="0">
-                <a:solidFill>
-                  <a:srgbClr val="37424F"/>
-                </a:solidFill>
-                <a:latin typeface="Calibri"/>
-              </a:rPr>
-              <a:t> solar landed before storage caught up — </a:t>
-            </a:r>
-            <a:r>
-              <a:rPr sz="1600" b="1">
-                <a:solidFill>
-                  <a:srgbClr val="111820"/>
-                </a:solidFill>
-                <a:latin typeface="Calibri"/>
-              </a:rPr>
-              <a:t>midday negatives ~doubled</a:t>
-            </a:r>
-            <a:r>
-              <a:rPr sz="1600" b="0">
-                <a:solidFill>
-                  <a:srgbClr val="37424F"/>
-                </a:solidFill>
-                <a:latin typeface="Calibri"/>
-              </a:rPr>
-              <a:t> (NSW 13→30%); 2026's battery wave (~8 GW) soaked it back.</a:t>
-            </a:r>
-          </a:p>
-          <a:p>
-            <a:pPr>
-              <a:lnSpc>
-                <a:spcPct val="105000"/>
-              </a:lnSpc>
-              <a:spcAft>
-                <a:spcPts val="1100"/>
-              </a:spcAft>
-            </a:pPr>
-            <a:r>
-              <a:rPr sz="1600" b="1">
-                <a:solidFill>
-                  <a:srgbClr val="B21E46"/>
-                </a:solidFill>
-                <a:latin typeface="Calibri"/>
-              </a:rPr>
-              <a:t>▸  </a:t>
-            </a:r>
-            <a:r>
-              <a:rPr sz="1600" b="0">
-                <a:solidFill>
-                  <a:srgbClr val="37424F"/>
-                </a:solidFill>
-                <a:latin typeface="Calibri"/>
-              </a:rPr>
-              <a:t>“</a:t>
-            </a:r>
-            <a:r>
-              <a:rPr sz="1600" b="1">
-                <a:solidFill>
-                  <a:srgbClr val="111820"/>
-                </a:solidFill>
-                <a:latin typeface="Calibri"/>
-              </a:rPr>
-              <a:t>Darkest before dawn</a:t>
-            </a:r>
-            <a:r>
-              <a:rPr sz="1600" b="0">
-                <a:solidFill>
-                  <a:srgbClr val="37424F"/>
-                </a:solidFill>
-                <a:latin typeface="Calibri"/>
-              </a:rPr>
-              <a:t>”: worst while coal floods the midday; as coal exits, evening scarcity returns value.</a:t>
-            </a:r>
-          </a:p>
-          <a:p>
-            <a:pPr>
-              <a:lnSpc>
-                <a:spcPct val="105000"/>
-              </a:lnSpc>
-              <a:spcAft>
-                <a:spcPts val="1100"/>
-              </a:spcAft>
-            </a:pPr>
-            <a:r>
-              <a:rPr sz="1600" b="1">
-                <a:solidFill>
-                  <a:srgbClr val="B21E46"/>
-                </a:solidFill>
-                <a:latin typeface="Calibri"/>
-              </a:rPr>
-              <a:t>▸  </a:t>
-            </a:r>
-            <a:r>
-              <a:rPr sz="1600" b="0">
-                <a:solidFill>
-                  <a:srgbClr val="37424F"/>
-                </a:solidFill>
-                <a:latin typeface="Calibri"/>
-              </a:rPr>
-              <a:t>Batteries: </a:t>
-            </a:r>
-            <a:r>
-              <a:rPr sz="1600" b="1">
-                <a:solidFill>
-                  <a:srgbClr val="111820"/>
-                </a:solidFill>
-                <a:latin typeface="Calibri"/>
-              </a:rPr>
-              <a:t>top-2hr spread ~$500–880 → ~$100–200</a:t>
-            </a:r>
-            <a:r>
-              <a:rPr sz="1600" b="0">
-                <a:solidFill>
-                  <a:srgbClr val="37424F"/>
-                </a:solidFill>
-                <a:latin typeface="Calibri"/>
-              </a:rPr>
-              <a:t> as the fleet grew 4 → 60 — but it spikes in volatile months.</a:t>
-            </a:r>
-          </a:p>
-          <a:p>
-            <a:pPr>
-              <a:lnSpc>
-                <a:spcPct val="105000"/>
-              </a:lnSpc>
-              <a:spcAft>
-                <a:spcPts val="1100"/>
-              </a:spcAft>
-            </a:pPr>
-            <a:r>
-              <a:rPr sz="1600" b="1">
-                <a:solidFill>
-                  <a:srgbClr val="B21E46"/>
-                </a:solidFill>
-                <a:latin typeface="Calibri"/>
-              </a:rPr>
-              <a:t>▸  </a:t>
-            </a:r>
-            <a:r>
-              <a:rPr sz="1600" b="0">
-                <a:solidFill>
-                  <a:srgbClr val="37424F"/>
-                </a:solidFill>
-                <a:latin typeface="Calibri"/>
-              </a:rPr>
-              <a:t>Compression is BESS </a:t>
-            </a:r>
-            <a:r>
-              <a:rPr sz="1600" b="1">
-                <a:solidFill>
-                  <a:srgbClr val="111820"/>
-                </a:solidFill>
-                <a:latin typeface="Calibri"/>
-              </a:rPr>
-              <a:t>and</a:t>
-            </a:r>
-            <a:r>
-              <a:rPr sz="1600" b="0">
-                <a:solidFill>
-                  <a:srgbClr val="37424F"/>
-                </a:solidFill>
-                <a:latin typeface="Calibri"/>
-              </a:rPr>
-              <a:t> benign conditions — coal still in, mild weather, high unit availability.</a:t>
-            </a:r>
-          </a:p>
-          <a:p>
-            <a:pPr>
-              <a:lnSpc>
-                <a:spcPct val="105000"/>
-              </a:lnSpc>
-              <a:spcAft>
-                <a:spcPts val="1100"/>
-              </a:spcAft>
-            </a:pPr>
-            <a:r>
-              <a:rPr sz="1600" b="1">
-                <a:solidFill>
-                  <a:srgbClr val="B21E46"/>
-                </a:solidFill>
-                <a:latin typeface="Calibri"/>
-              </a:rPr>
-              <a:t>▸  </a:t>
-            </a:r>
-            <a:r>
-              <a:rPr sz="1600" b="0">
-                <a:solidFill>
-                  <a:srgbClr val="37424F"/>
-                </a:solidFill>
-                <a:latin typeface="Calibri"/>
-              </a:rPr>
-              <a:t>The fleet: </a:t>
-            </a:r>
-            <a:r>
-              <a:rPr sz="1600" b="1">
-                <a:solidFill>
-                  <a:srgbClr val="111820"/>
-                </a:solidFill>
-                <a:latin typeface="Calibri"/>
-              </a:rPr>
-              <a:t>~65 batteries / 12.3 GW / 24 GWh operating; ~8 GW / 21 GWh committed</a:t>
-            </a:r>
-            <a:r>
-              <a:rPr sz="1600" b="0">
-                <a:solidFill>
-                  <a:srgbClr val="37424F"/>
-                </a:solidFill>
-                <a:latin typeface="Calibri"/>
-              </a:rPr>
-              <a:t> and building.</a:t>
-            </a:r>
-          </a:p>
-          <a:p>
-            <a:pPr>
-              <a:lnSpc>
-                <a:spcPct val="105000"/>
-              </a:lnSpc>
-              <a:spcAft>
-                <a:spcPts val="1100"/>
-              </a:spcAft>
-            </a:pPr>
-            <a:r>
-              <a:rPr sz="1600" b="1">
-                <a:solidFill>
-                  <a:srgbClr val="B21E46"/>
-                </a:solidFill>
-                <a:latin typeface="Calibri"/>
-              </a:rPr>
-              <a:t>▸  </a:t>
-            </a:r>
-            <a:r>
-              <a:rPr sz="1600" b="1">
-                <a:solidFill>
-                  <a:srgbClr val="111820"/>
-                </a:solidFill>
-                <a:latin typeface="Calibri"/>
-              </a:rPr>
-              <a:t>FCAS revenue fell ~90–95%</a:t>
-            </a:r>
-            <a:r>
-              <a:rPr sz="1600" b="0">
-                <a:solidFill>
-                  <a:srgbClr val="37424F"/>
-                </a:solidFill>
-                <a:latin typeface="Calibri"/>
-              </a:rPr>
-              <a:t> in five years — a whole stream competed to near-zero.</a:t>
-            </a:r>
-          </a:p>
-        </p:txBody>
-      </p:sp>
-      <p:sp>
-        <p:nvSpPr>
-          <p:cNvPr id="7" name="Rectangle 6"/>
-          <p:cNvSpPr/>
-          <p:nvPr/>
-        </p:nvSpPr>
-        <p:spPr>
-          <a:xfrm>
-            <a:off x="548640" y="5669280"/>
-            <a:ext cx="11064240" cy="685800"/>
-          </a:xfrm>
-          <a:prstGeom prst="rect">
-            <a:avLst/>
-          </a:prstGeom>
-          <a:solidFill>
-            <a:srgbClr val="F4F6F9"/>
-          </a:solidFill>
-          <a:ln w="9525">
-            <a:solidFill>
-              <a:srgbClr val="D8DEE6"/>
-            </a:solidFill>
-          </a:ln>
-          <a:effectLst/>
-        </p:spPr>
-        <p:style>
-          <a:lnRef idx="1">
-            <a:schemeClr val="accent1"/>
-          </a:lnRef>
-          <a:fillRef idx="3">
-            <a:schemeClr val="accent1"/>
-          </a:fillRef>
-          <a:effectRef idx="2">
-            <a:schemeClr val="accent1"/>
-          </a:effectRef>
-          <a:fontRef idx="minor">
-            <a:schemeClr val="lt1"/>
-          </a:fontRef>
-        </p:style>
-        <p:txBody>
-          <a:bodyPr rtlCol="0" anchor="ctr"/>
-          <a:lstStyle/>
-          <a:p>
-            <a:pPr algn="ctr"/>
-          </a:p>
-        </p:txBody>
-      </p:sp>
-      <p:sp>
-        <p:nvSpPr>
-          <p:cNvPr id="8" name="TextBox 7"/>
-          <p:cNvSpPr txBox="1"/>
-          <p:nvPr/>
-        </p:nvSpPr>
-        <p:spPr>
-          <a:xfrm>
-            <a:off x="731520" y="5779008"/>
-            <a:ext cx="10698480" cy="457200"/>
-          </a:xfrm>
-          <a:prstGeom prst="rect">
-            <a:avLst/>
-          </a:prstGeom>
-          <a:noFill/>
-        </p:spPr>
-        <p:txBody>
-          <a:bodyPr wrap="square" anchor="ctr" lIns="0" rIns="0" tIns="0" bIns="0">
-            <a:spAutoFit/>
-          </a:bodyPr>
-          <a:lstStyle/>
-          <a:p>
-            <a:pPr algn="l">
-              <a:lnSpc>
-                <a:spcPct val="106000"/>
-              </a:lnSpc>
-              <a:spcBef>
-                <a:spcPts val="0"/>
-              </a:spcBef>
-              <a:spcAft>
-                <a:spcPts val="600"/>
-              </a:spcAft>
-            </a:pPr>
-            <a:r>
-              <a:rPr sz="1350" b="0" i="1">
-                <a:solidFill>
-                  <a:srgbClr val="37424F"/>
-                </a:solidFill>
-                <a:latin typeface="Calibri"/>
-              </a:rPr>
-              <a:t>Value factor is a generation idea; a battery's analog is the spread. Both erode as you build — and both cycle.</a:t>
             </a:r>
           </a:p>
         </p:txBody>
@@ -18890,30 +19187,395 @@
                 </a:solidFill>
                 <a:latin typeface="Calibri"/>
               </a:rPr>
-              <a:t>Provocations — take a position</a:t>
-            </a:r>
-          </a:p>
-        </p:txBody>
-      </p:sp>
-      <p:sp>
-        <p:nvSpPr>
-          <p:cNvPr id="6" name="Rectangle 5"/>
+              <a:t>The data on the table</a:t>
+            </a:r>
+          </a:p>
+        </p:txBody>
+      </p:sp>
+      <p:sp>
+        <p:nvSpPr>
+          <p:cNvPr id="6" name="TextBox 5"/>
+          <p:cNvSpPr txBox="1"/>
+          <p:nvPr/>
+        </p:nvSpPr>
+        <p:spPr>
+          <a:xfrm>
+            <a:off x="548640" y="1600200"/>
+            <a:ext cx="11064240" cy="4206240"/>
+          </a:xfrm>
+          <a:prstGeom prst="rect">
+            <a:avLst/>
+          </a:prstGeom>
+          <a:noFill/>
+        </p:spPr>
+        <p:txBody>
+          <a:bodyPr wrap="square" lIns="0" rIns="0" tIns="0" bIns="0">
+            <a:spAutoFit/>
+          </a:bodyPr>
+          <a:lstStyle/>
+          <a:p>
+            <a:pPr>
+              <a:lnSpc>
+                <a:spcPct val="105000"/>
+              </a:lnSpc>
+              <a:spcAft>
+                <a:spcPts val="1100"/>
+              </a:spcAft>
+            </a:pPr>
+            <a:r>
+              <a:rPr sz="1600" b="1">
+                <a:solidFill>
+                  <a:srgbClr val="B21E46"/>
+                </a:solidFill>
+                <a:latin typeface="Calibri"/>
+              </a:rPr>
+              <a:t>▸  </a:t>
+            </a:r>
+            <a:r>
+              <a:rPr sz="1600" b="0">
+                <a:solidFill>
+                  <a:srgbClr val="37424F"/>
+                </a:solidFill>
+                <a:latin typeface="Calibri"/>
+              </a:rPr>
+              <a:t>VIC </a:t>
+            </a:r>
+            <a:r>
+              <a:rPr sz="1600" b="1">
+                <a:solidFill>
+                  <a:srgbClr val="111820"/>
+                </a:solidFill>
+                <a:latin typeface="Calibri"/>
+              </a:rPr>
+              <a:t>solar value factor: 1.06× (2019) → 0.37× (2023–24 trough) → 0.67× (2026 YTD)</a:t>
+            </a:r>
+            <a:r>
+              <a:rPr sz="1600" b="0">
+                <a:solidFill>
+                  <a:srgbClr val="37424F"/>
+                </a:solidFill>
+                <a:latin typeface="Calibri"/>
+              </a:rPr>
+              <a:t>. It cycles.</a:t>
+            </a:r>
+          </a:p>
+          <a:p>
+            <a:pPr>
+              <a:lnSpc>
+                <a:spcPct val="105000"/>
+              </a:lnSpc>
+              <a:spcAft>
+                <a:spcPts val="1100"/>
+              </a:spcAft>
+            </a:pPr>
+            <a:r>
+              <a:rPr sz="1600" b="1">
+                <a:solidFill>
+                  <a:srgbClr val="B21E46"/>
+                </a:solidFill>
+                <a:latin typeface="Calibri"/>
+              </a:rPr>
+              <a:t>▸  </a:t>
+            </a:r>
+            <a:r>
+              <a:rPr sz="1600" b="1">
+                <a:solidFill>
+                  <a:srgbClr val="111820"/>
+                </a:solidFill>
+                <a:latin typeface="Calibri"/>
+              </a:rPr>
+              <a:t>Why 2025 was the trough:</a:t>
+            </a:r>
+            <a:r>
+              <a:rPr sz="1600" b="0">
+                <a:solidFill>
+                  <a:srgbClr val="37424F"/>
+                </a:solidFill>
+                <a:latin typeface="Calibri"/>
+              </a:rPr>
+              <a:t> a record </a:t>
+            </a:r>
+            <a:r>
+              <a:rPr sz="1600" b="1">
+                <a:solidFill>
+                  <a:srgbClr val="111820"/>
+                </a:solidFill>
+                <a:latin typeface="Calibri"/>
+              </a:rPr>
+              <a:t>+2.8 GW</a:t>
+            </a:r>
+            <a:r>
+              <a:rPr sz="1600" b="0">
+                <a:solidFill>
+                  <a:srgbClr val="37424F"/>
+                </a:solidFill>
+                <a:latin typeface="Calibri"/>
+              </a:rPr>
+              <a:t> solar landed before storage caught up — </a:t>
+            </a:r>
+            <a:r>
+              <a:rPr sz="1600" b="1">
+                <a:solidFill>
+                  <a:srgbClr val="111820"/>
+                </a:solidFill>
+                <a:latin typeface="Calibri"/>
+              </a:rPr>
+              <a:t>midday negatives ~doubled</a:t>
+            </a:r>
+            <a:r>
+              <a:rPr sz="1600" b="0">
+                <a:solidFill>
+                  <a:srgbClr val="37424F"/>
+                </a:solidFill>
+                <a:latin typeface="Calibri"/>
+              </a:rPr>
+              <a:t> (NSW 13→30%); 2026's battery wave (~8 GW) soaked it back.</a:t>
+            </a:r>
+          </a:p>
+          <a:p>
+            <a:pPr>
+              <a:lnSpc>
+                <a:spcPct val="105000"/>
+              </a:lnSpc>
+              <a:spcAft>
+                <a:spcPts val="1100"/>
+              </a:spcAft>
+            </a:pPr>
+            <a:r>
+              <a:rPr sz="1600" b="1">
+                <a:solidFill>
+                  <a:srgbClr val="B21E46"/>
+                </a:solidFill>
+                <a:latin typeface="Calibri"/>
+              </a:rPr>
+              <a:t>▸  </a:t>
+            </a:r>
+            <a:r>
+              <a:rPr sz="1600" b="0">
+                <a:solidFill>
+                  <a:srgbClr val="37424F"/>
+                </a:solidFill>
+                <a:latin typeface="Calibri"/>
+              </a:rPr>
+              <a:t>“</a:t>
+            </a:r>
+            <a:r>
+              <a:rPr sz="1600" b="1">
+                <a:solidFill>
+                  <a:srgbClr val="111820"/>
+                </a:solidFill>
+                <a:latin typeface="Calibri"/>
+              </a:rPr>
+              <a:t>Darkest before dawn</a:t>
+            </a:r>
+            <a:r>
+              <a:rPr sz="1600" b="0">
+                <a:solidFill>
+                  <a:srgbClr val="37424F"/>
+                </a:solidFill>
+                <a:latin typeface="Calibri"/>
+              </a:rPr>
+              <a:t>”: worst while coal floods the midday; as coal exits, evening scarcity returns value.</a:t>
+            </a:r>
+          </a:p>
+          <a:p>
+            <a:pPr>
+              <a:lnSpc>
+                <a:spcPct val="105000"/>
+              </a:lnSpc>
+              <a:spcAft>
+                <a:spcPts val="1100"/>
+              </a:spcAft>
+            </a:pPr>
+            <a:r>
+              <a:rPr sz="1600" b="1">
+                <a:solidFill>
+                  <a:srgbClr val="B21E46"/>
+                </a:solidFill>
+                <a:latin typeface="Calibri"/>
+              </a:rPr>
+              <a:t>▸  </a:t>
+            </a:r>
+            <a:r>
+              <a:rPr sz="1600" b="0">
+                <a:solidFill>
+                  <a:srgbClr val="37424F"/>
+                </a:solidFill>
+                <a:latin typeface="Calibri"/>
+              </a:rPr>
+              <a:t>Batteries: </a:t>
+            </a:r>
+            <a:r>
+              <a:rPr sz="1600" b="1">
+                <a:solidFill>
+                  <a:srgbClr val="111820"/>
+                </a:solidFill>
+                <a:latin typeface="Calibri"/>
+              </a:rPr>
+              <a:t>top-2hr spread ~$500–880 → ~$100–200</a:t>
+            </a:r>
+            <a:r>
+              <a:rPr sz="1600" b="0">
+                <a:solidFill>
+                  <a:srgbClr val="37424F"/>
+                </a:solidFill>
+                <a:latin typeface="Calibri"/>
+              </a:rPr>
+              <a:t> as the fleet grew 4 → 60 — but it spikes in volatile months.</a:t>
+            </a:r>
+          </a:p>
+          <a:p>
+            <a:pPr>
+              <a:lnSpc>
+                <a:spcPct val="105000"/>
+              </a:lnSpc>
+              <a:spcAft>
+                <a:spcPts val="1100"/>
+              </a:spcAft>
+            </a:pPr>
+            <a:r>
+              <a:rPr sz="1600" b="1">
+                <a:solidFill>
+                  <a:srgbClr val="B21E46"/>
+                </a:solidFill>
+                <a:latin typeface="Calibri"/>
+              </a:rPr>
+              <a:t>▸  </a:t>
+            </a:r>
+            <a:r>
+              <a:rPr sz="1600" b="0">
+                <a:solidFill>
+                  <a:srgbClr val="37424F"/>
+                </a:solidFill>
+                <a:latin typeface="Calibri"/>
+              </a:rPr>
+              <a:t>Compression is BESS </a:t>
+            </a:r>
+            <a:r>
+              <a:rPr sz="1600" b="1">
+                <a:solidFill>
+                  <a:srgbClr val="111820"/>
+                </a:solidFill>
+                <a:latin typeface="Calibri"/>
+              </a:rPr>
+              <a:t>and</a:t>
+            </a:r>
+            <a:r>
+              <a:rPr sz="1600" b="0">
+                <a:solidFill>
+                  <a:srgbClr val="37424F"/>
+                </a:solidFill>
+                <a:latin typeface="Calibri"/>
+              </a:rPr>
+              <a:t> benign conditions — coal still in, mild weather, high unit availability.</a:t>
+            </a:r>
+          </a:p>
+          <a:p>
+            <a:pPr>
+              <a:lnSpc>
+                <a:spcPct val="105000"/>
+              </a:lnSpc>
+              <a:spcAft>
+                <a:spcPts val="1100"/>
+              </a:spcAft>
+            </a:pPr>
+            <a:r>
+              <a:rPr sz="1600" b="1">
+                <a:solidFill>
+                  <a:srgbClr val="B21E46"/>
+                </a:solidFill>
+                <a:latin typeface="Calibri"/>
+              </a:rPr>
+              <a:t>▸  </a:t>
+            </a:r>
+            <a:r>
+              <a:rPr sz="1600" b="0">
+                <a:solidFill>
+                  <a:srgbClr val="37424F"/>
+                </a:solidFill>
+                <a:latin typeface="Calibri"/>
+              </a:rPr>
+              <a:t>The fleet: </a:t>
+            </a:r>
+            <a:r>
+              <a:rPr sz="1600" b="1">
+                <a:solidFill>
+                  <a:srgbClr val="111820"/>
+                </a:solidFill>
+                <a:latin typeface="Calibri"/>
+              </a:rPr>
+              <a:t>~65 batteries / 12.3 GW / 24 GWh operating; ~8 GW / 21 GWh committed</a:t>
+            </a:r>
+            <a:r>
+              <a:rPr sz="1600" b="0">
+                <a:solidFill>
+                  <a:srgbClr val="37424F"/>
+                </a:solidFill>
+                <a:latin typeface="Calibri"/>
+              </a:rPr>
+              <a:t> and building.</a:t>
+            </a:r>
+          </a:p>
+          <a:p>
+            <a:pPr>
+              <a:lnSpc>
+                <a:spcPct val="105000"/>
+              </a:lnSpc>
+              <a:spcAft>
+                <a:spcPts val="1100"/>
+              </a:spcAft>
+            </a:pPr>
+            <a:r>
+              <a:rPr sz="1600" b="1">
+                <a:solidFill>
+                  <a:srgbClr val="B21E46"/>
+                </a:solidFill>
+                <a:latin typeface="Calibri"/>
+              </a:rPr>
+              <a:t>▸  </a:t>
+            </a:r>
+            <a:r>
+              <a:rPr sz="1600" b="1">
+                <a:solidFill>
+                  <a:srgbClr val="111820"/>
+                </a:solidFill>
+                <a:latin typeface="Calibri"/>
+              </a:rPr>
+              <a:t>FCAS revenue fell ~90–95%</a:t>
+            </a:r>
+            <a:r>
+              <a:rPr sz="1600" b="0">
+                <a:solidFill>
+                  <a:srgbClr val="37424F"/>
+                </a:solidFill>
+                <a:latin typeface="Calibri"/>
+              </a:rPr>
+              <a:t> in five years — a whole stream competed to near-zero.</a:t>
+            </a:r>
+          </a:p>
+        </p:txBody>
+      </p:sp>
+      <p:sp>
+        <p:nvSpPr>
+          <p:cNvPr id="7" name="Rectangle 6"/>
           <p:cNvSpPr/>
           <p:nvPr/>
         </p:nvSpPr>
         <p:spPr>
           <a:xfrm>
-            <a:off x="548640" y="1600200"/>
-            <a:ext cx="457200" cy="457200"/>
+            <a:off x="548640" y="5669280"/>
+            <a:ext cx="11064240" cy="685800"/>
           </a:xfrm>
           <a:prstGeom prst="rect">
             <a:avLst/>
           </a:prstGeom>
           <a:solidFill>
-            <a:srgbClr val="B21E46"/>
+            <a:srgbClr val="F4F6F9"/>
           </a:solidFill>
-          <a:ln>
-            <a:noFill/>
+          <a:ln w="9525">
+            <a:solidFill>
+              <a:srgbClr val="D8DEE6"/>
+            </a:solidFill>
           </a:ln>
           <a:effectLst/>
         </p:spPr>
@@ -18941,59 +19603,14 @@
       </p:sp>
       <p:sp>
         <p:nvSpPr>
-          <p:cNvPr id="7" name="TextBox 6"/>
-          <p:cNvSpPr txBox="1"/>
-          <p:nvPr/>
-        </p:nvSpPr>
-        <p:spPr>
-          <a:xfrm>
-            <a:off x="548640" y="1600200"/>
-            <a:ext cx="457200" cy="457200"/>
-          </a:xfrm>
-          <a:prstGeom prst="rect">
-            <a:avLst/>
-          </a:prstGeom>
-          <a:noFill/>
-        </p:spPr>
-        <p:txBody>
-          <a:bodyPr wrap="square" anchor="ctr" lIns="0" rIns="0" tIns="0" bIns="0">
-            <a:spAutoFit/>
-          </a:bodyPr>
-          <a:lstStyle/>
-          <a:p>
-            <a:pPr algn="ctr">
-              <a:lnSpc>
-                <a:spcPct val="106000"/>
-              </a:lnSpc>
-              <a:spcBef>
-                <a:spcPts val="0"/>
-              </a:spcBef>
-              <a:spcAft>
-                <a:spcPts val="600"/>
-              </a:spcAft>
-            </a:pPr>
-            <a:r>
-              <a:rPr sz="1800" b="1" i="0">
-                <a:solidFill>
-                  <a:srgbClr val="FFFFFF"/>
-                </a:solidFill>
-                <a:latin typeface="Calibri"/>
-              </a:rPr>
-              <a:t>A</a:t>
-            </a:r>
-          </a:p>
-        </p:txBody>
-      </p:sp>
-      <p:sp>
-        <p:nvSpPr>
           <p:cNvPr id="8" name="TextBox 7"/>
           <p:cNvSpPr txBox="1"/>
           <p:nvPr/>
         </p:nvSpPr>
         <p:spPr>
           <a:xfrm>
-            <a:off x="1188720" y="1618488"/>
-            <a:ext cx="10332720" cy="731520"/>
+            <a:off x="731520" y="5779008"/>
+            <a:ext cx="10698480" cy="457200"/>
           </a:xfrm>
           <a:prstGeom prst="rect">
             <a:avLst/>
@@ -19018,558 +19635,20 @@
               </a:spcAft>
             </a:pPr>
             <a:r>
-              <a:rPr sz="1600" b="0" i="0">
+              <a:rPr sz="1350" b="0" i="1">
                 <a:solidFill>
                   <a:srgbClr val="37424F"/>
                 </a:solidFill>
                 <a:latin typeface="Calibri"/>
               </a:rPr>
-              <a:t>Is the value-factor trough permanent, or does coal-exit evening scarcity bring it back?</a:t>
-            </a:r>
-          </a:p>
-        </p:txBody>
-      </p:sp>
-      <p:sp>
-        <p:nvSpPr>
-          <p:cNvPr id="9" name="Rectangle 8"/>
-          <p:cNvSpPr/>
-          <p:nvPr/>
-        </p:nvSpPr>
-        <p:spPr>
-          <a:xfrm>
-            <a:off x="548640" y="2441448"/>
-            <a:ext cx="457200" cy="457200"/>
-          </a:xfrm>
-          <a:prstGeom prst="rect">
-            <a:avLst/>
-          </a:prstGeom>
-          <a:solidFill>
-            <a:srgbClr val="B21E46"/>
-          </a:solidFill>
-          <a:ln>
-            <a:noFill/>
-          </a:ln>
-          <a:effectLst/>
-        </p:spPr>
-        <p:style>
-          <a:lnRef idx="1">
-            <a:schemeClr val="accent1"/>
-          </a:lnRef>
-          <a:fillRef idx="3">
-            <a:schemeClr val="accent1"/>
-          </a:fillRef>
-          <a:effectRef idx="2">
-            <a:schemeClr val="accent1"/>
-          </a:effectRef>
-          <a:fontRef idx="minor">
-            <a:schemeClr val="lt1"/>
-          </a:fontRef>
-        </p:style>
-        <p:txBody>
-          <a:bodyPr rtlCol="0" anchor="ctr"/>
-          <a:lstStyle/>
-          <a:p>
-            <a:pPr algn="ctr"/>
-          </a:p>
-        </p:txBody>
-      </p:sp>
-      <p:sp>
-        <p:nvSpPr>
-          <p:cNvPr id="10" name="TextBox 9"/>
-          <p:cNvSpPr txBox="1"/>
-          <p:nvPr/>
-        </p:nvSpPr>
-        <p:spPr>
-          <a:xfrm>
-            <a:off x="548640" y="2441448"/>
-            <a:ext cx="457200" cy="457200"/>
-          </a:xfrm>
-          <a:prstGeom prst="rect">
-            <a:avLst/>
-          </a:prstGeom>
-          <a:noFill/>
-        </p:spPr>
-        <p:txBody>
-          <a:bodyPr wrap="square" anchor="ctr" lIns="0" rIns="0" tIns="0" bIns="0">
-            <a:spAutoFit/>
-          </a:bodyPr>
-          <a:lstStyle/>
-          <a:p>
-            <a:pPr algn="ctr">
-              <a:lnSpc>
-                <a:spcPct val="106000"/>
-              </a:lnSpc>
-              <a:spcBef>
-                <a:spcPts val="0"/>
-              </a:spcBef>
-              <a:spcAft>
-                <a:spcPts val="600"/>
-              </a:spcAft>
-            </a:pPr>
-            <a:r>
-              <a:rPr sz="1800" b="1" i="0">
-                <a:solidFill>
-                  <a:srgbClr val="FFFFFF"/>
-                </a:solidFill>
-                <a:latin typeface="Calibri"/>
-              </a:rPr>
-              <a:t>B</a:t>
-            </a:r>
-          </a:p>
-        </p:txBody>
-      </p:sp>
-      <p:sp>
-        <p:nvSpPr>
-          <p:cNvPr id="11" name="TextBox 10"/>
-          <p:cNvSpPr txBox="1"/>
-          <p:nvPr/>
-        </p:nvSpPr>
-        <p:spPr>
-          <a:xfrm>
-            <a:off x="1188720" y="2459736"/>
-            <a:ext cx="10332720" cy="731520"/>
-          </a:xfrm>
-          <a:prstGeom prst="rect">
-            <a:avLst/>
-          </a:prstGeom>
-          <a:noFill/>
-        </p:spPr>
-        <p:txBody>
-          <a:bodyPr wrap="square" anchor="ctr" lIns="0" rIns="0" tIns="0" bIns="0">
-            <a:spAutoFit/>
-          </a:bodyPr>
-          <a:lstStyle/>
-          <a:p>
-            <a:pPr algn="l">
-              <a:lnSpc>
-                <a:spcPct val="106000"/>
-              </a:lnSpc>
-              <a:spcBef>
-                <a:spcPts val="0"/>
-              </a:spcBef>
-              <a:spcAft>
-                <a:spcPts val="600"/>
-              </a:spcAft>
-            </a:pPr>
-            <a:r>
-              <a:rPr sz="1600" b="0" i="0">
-                <a:solidFill>
-                  <a:srgbClr val="37424F"/>
-                </a:solidFill>
-                <a:latin typeface="Calibri"/>
-              </a:rPr>
-              <a:t>Does that change whether — or when — you build, and whether to firm it?</a:t>
-            </a:r>
-          </a:p>
-        </p:txBody>
-      </p:sp>
-      <p:sp>
-        <p:nvSpPr>
-          <p:cNvPr id="12" name="Rectangle 11"/>
-          <p:cNvSpPr/>
-          <p:nvPr/>
-        </p:nvSpPr>
-        <p:spPr>
-          <a:xfrm>
-            <a:off x="548640" y="3282696"/>
-            <a:ext cx="457200" cy="457200"/>
-          </a:xfrm>
-          <a:prstGeom prst="rect">
-            <a:avLst/>
-          </a:prstGeom>
-          <a:solidFill>
-            <a:srgbClr val="B21E46"/>
-          </a:solidFill>
-          <a:ln>
-            <a:noFill/>
-          </a:ln>
-          <a:effectLst/>
-        </p:spPr>
-        <p:style>
-          <a:lnRef idx="1">
-            <a:schemeClr val="accent1"/>
-          </a:lnRef>
-          <a:fillRef idx="3">
-            <a:schemeClr val="accent1"/>
-          </a:fillRef>
-          <a:effectRef idx="2">
-            <a:schemeClr val="accent1"/>
-          </a:effectRef>
-          <a:fontRef idx="minor">
-            <a:schemeClr val="lt1"/>
-          </a:fontRef>
-        </p:style>
-        <p:txBody>
-          <a:bodyPr rtlCol="0" anchor="ctr"/>
-          <a:lstStyle/>
-          <a:p>
-            <a:pPr algn="ctr"/>
-          </a:p>
-        </p:txBody>
-      </p:sp>
-      <p:sp>
-        <p:nvSpPr>
-          <p:cNvPr id="13" name="TextBox 12"/>
-          <p:cNvSpPr txBox="1"/>
-          <p:nvPr/>
-        </p:nvSpPr>
-        <p:spPr>
-          <a:xfrm>
-            <a:off x="548640" y="3282696"/>
-            <a:ext cx="457200" cy="457200"/>
-          </a:xfrm>
-          <a:prstGeom prst="rect">
-            <a:avLst/>
-          </a:prstGeom>
-          <a:noFill/>
-        </p:spPr>
-        <p:txBody>
-          <a:bodyPr wrap="square" anchor="ctr" lIns="0" rIns="0" tIns="0" bIns="0">
-            <a:spAutoFit/>
-          </a:bodyPr>
-          <a:lstStyle/>
-          <a:p>
-            <a:pPr algn="ctr">
-              <a:lnSpc>
-                <a:spcPct val="106000"/>
-              </a:lnSpc>
-              <a:spcBef>
-                <a:spcPts val="0"/>
-              </a:spcBef>
-              <a:spcAft>
-                <a:spcPts val="600"/>
-              </a:spcAft>
-            </a:pPr>
-            <a:r>
-              <a:rPr sz="1800" b="1" i="0">
-                <a:solidFill>
-                  <a:srgbClr val="FFFFFF"/>
-                </a:solidFill>
-                <a:latin typeface="Calibri"/>
-              </a:rPr>
-              <a:t>C</a:t>
-            </a:r>
-          </a:p>
-        </p:txBody>
-      </p:sp>
-      <p:sp>
-        <p:nvSpPr>
-          <p:cNvPr id="14" name="TextBox 13"/>
-          <p:cNvSpPr txBox="1"/>
-          <p:nvPr/>
-        </p:nvSpPr>
-        <p:spPr>
-          <a:xfrm>
-            <a:off x="1188720" y="3300984"/>
-            <a:ext cx="10332720" cy="731520"/>
-          </a:xfrm>
-          <a:prstGeom prst="rect">
-            <a:avLst/>
-          </a:prstGeom>
-          <a:noFill/>
-        </p:spPr>
-        <p:txBody>
-          <a:bodyPr wrap="square" anchor="ctr" lIns="0" rIns="0" tIns="0" bIns="0">
-            <a:spAutoFit/>
-          </a:bodyPr>
-          <a:lstStyle/>
-          <a:p>
-            <a:pPr algn="l">
-              <a:lnSpc>
-                <a:spcPct val="106000"/>
-              </a:lnSpc>
-              <a:spcBef>
-                <a:spcPts val="0"/>
-              </a:spcBef>
-              <a:spcAft>
-                <a:spcPts val="600"/>
-              </a:spcAft>
-            </a:pPr>
-            <a:r>
-              <a:rPr sz="1600" b="0" i="0">
-                <a:solidFill>
-                  <a:srgbClr val="37424F"/>
-                </a:solidFill>
-                <a:latin typeface="Calibri"/>
-              </a:rPr>
-              <a:t>The battery spread is compressing — is it BESS, benign conditions, or both? What happens next cycle?</a:t>
-            </a:r>
-          </a:p>
-        </p:txBody>
-      </p:sp>
-      <p:sp>
-        <p:nvSpPr>
-          <p:cNvPr id="15" name="Rectangle 14"/>
-          <p:cNvSpPr/>
-          <p:nvPr/>
-        </p:nvSpPr>
-        <p:spPr>
-          <a:xfrm>
-            <a:off x="548640" y="4123944"/>
-            <a:ext cx="457200" cy="457200"/>
-          </a:xfrm>
-          <a:prstGeom prst="rect">
-            <a:avLst/>
-          </a:prstGeom>
-          <a:solidFill>
-            <a:srgbClr val="B21E46"/>
-          </a:solidFill>
-          <a:ln>
-            <a:noFill/>
-          </a:ln>
-          <a:effectLst/>
-        </p:spPr>
-        <p:style>
-          <a:lnRef idx="1">
-            <a:schemeClr val="accent1"/>
-          </a:lnRef>
-          <a:fillRef idx="3">
-            <a:schemeClr val="accent1"/>
-          </a:fillRef>
-          <a:effectRef idx="2">
-            <a:schemeClr val="accent1"/>
-          </a:effectRef>
-          <a:fontRef idx="minor">
-            <a:schemeClr val="lt1"/>
-          </a:fontRef>
-        </p:style>
-        <p:txBody>
-          <a:bodyPr rtlCol="0" anchor="ctr"/>
-          <a:lstStyle/>
-          <a:p>
-            <a:pPr algn="ctr"/>
-          </a:p>
-        </p:txBody>
-      </p:sp>
-      <p:sp>
-        <p:nvSpPr>
-          <p:cNvPr id="16" name="TextBox 15"/>
-          <p:cNvSpPr txBox="1"/>
-          <p:nvPr/>
-        </p:nvSpPr>
-        <p:spPr>
-          <a:xfrm>
-            <a:off x="548640" y="4123944"/>
-            <a:ext cx="457200" cy="457200"/>
-          </a:xfrm>
-          <a:prstGeom prst="rect">
-            <a:avLst/>
-          </a:prstGeom>
-          <a:noFill/>
-        </p:spPr>
-        <p:txBody>
-          <a:bodyPr wrap="square" anchor="ctr" lIns="0" rIns="0" tIns="0" bIns="0">
-            <a:spAutoFit/>
-          </a:bodyPr>
-          <a:lstStyle/>
-          <a:p>
-            <a:pPr algn="ctr">
-              <a:lnSpc>
-                <a:spcPct val="106000"/>
-              </a:lnSpc>
-              <a:spcBef>
-                <a:spcPts val="0"/>
-              </a:spcBef>
-              <a:spcAft>
-                <a:spcPts val="600"/>
-              </a:spcAft>
-            </a:pPr>
-            <a:r>
-              <a:rPr sz="1800" b="1" i="0">
-                <a:solidFill>
-                  <a:srgbClr val="FFFFFF"/>
-                </a:solidFill>
-                <a:latin typeface="Calibri"/>
-              </a:rPr>
-              <a:t>D</a:t>
-            </a:r>
-          </a:p>
-        </p:txBody>
-      </p:sp>
-      <p:sp>
-        <p:nvSpPr>
-          <p:cNvPr id="17" name="TextBox 16"/>
-          <p:cNvSpPr txBox="1"/>
-          <p:nvPr/>
-        </p:nvSpPr>
-        <p:spPr>
-          <a:xfrm>
-            <a:off x="1188720" y="4142232"/>
-            <a:ext cx="10332720" cy="731520"/>
-          </a:xfrm>
-          <a:prstGeom prst="rect">
-            <a:avLst/>
-          </a:prstGeom>
-          <a:noFill/>
-        </p:spPr>
-        <p:txBody>
-          <a:bodyPr wrap="square" anchor="ctr" lIns="0" rIns="0" tIns="0" bIns="0">
-            <a:spAutoFit/>
-          </a:bodyPr>
-          <a:lstStyle/>
-          <a:p>
-            <a:pPr algn="l">
-              <a:lnSpc>
-                <a:spcPct val="106000"/>
-              </a:lnSpc>
-              <a:spcBef>
-                <a:spcPts val="0"/>
-              </a:spcBef>
-              <a:spcAft>
-                <a:spcPts val="600"/>
-              </a:spcAft>
-            </a:pPr>
-            <a:r>
-              <a:rPr sz="1600" b="0" i="0">
-                <a:solidFill>
-                  <a:srgbClr val="37424F"/>
-                </a:solidFill>
-                <a:latin typeface="Calibri"/>
-              </a:rPr>
-              <a:t>Would you build another unfirmed solar farm in this market?</a:t>
-            </a:r>
-          </a:p>
-        </p:txBody>
-      </p:sp>
-      <p:sp>
-        <p:nvSpPr>
-          <p:cNvPr id="18" name="Rectangle 17"/>
-          <p:cNvSpPr/>
-          <p:nvPr/>
-        </p:nvSpPr>
-        <p:spPr>
-          <a:xfrm>
-            <a:off x="548640" y="5532120"/>
-            <a:ext cx="11064240" cy="777240"/>
-          </a:xfrm>
-          <a:prstGeom prst="rect">
-            <a:avLst/>
-          </a:prstGeom>
-          <a:solidFill>
-            <a:srgbClr val="F4F6F9"/>
-          </a:solidFill>
-          <a:ln w="9525">
-            <a:solidFill>
-              <a:srgbClr val="B21E46"/>
-            </a:solidFill>
-          </a:ln>
-          <a:effectLst/>
-        </p:spPr>
-        <p:style>
-          <a:lnRef idx="1">
-            <a:schemeClr val="accent1"/>
-          </a:lnRef>
-          <a:fillRef idx="3">
-            <a:schemeClr val="accent1"/>
-          </a:fillRef>
-          <a:effectRef idx="2">
-            <a:schemeClr val="accent1"/>
-          </a:effectRef>
-          <a:fontRef idx="minor">
-            <a:schemeClr val="lt1"/>
-          </a:fontRef>
-        </p:style>
-        <p:txBody>
-          <a:bodyPr rtlCol="0" anchor="ctr"/>
-          <a:lstStyle/>
-          <a:p>
-            <a:pPr algn="ctr"/>
-          </a:p>
-        </p:txBody>
-      </p:sp>
-      <p:sp>
-        <p:nvSpPr>
-          <p:cNvPr id="19" name="TextBox 18"/>
-          <p:cNvSpPr txBox="1"/>
-          <p:nvPr/>
-        </p:nvSpPr>
-        <p:spPr>
-          <a:xfrm>
-            <a:off x="731520" y="5632704"/>
-            <a:ext cx="10698480" cy="320040"/>
-          </a:xfrm>
-          <a:prstGeom prst="rect">
-            <a:avLst/>
-          </a:prstGeom>
-          <a:noFill/>
-        </p:spPr>
-        <p:txBody>
-          <a:bodyPr wrap="square" anchor="t" lIns="0" rIns="0" tIns="0" bIns="0">
-            <a:spAutoFit/>
-          </a:bodyPr>
-          <a:lstStyle/>
-          <a:p>
-            <a:pPr algn="l">
-              <a:lnSpc>
-                <a:spcPct val="106000"/>
-              </a:lnSpc>
-              <a:spcBef>
-                <a:spcPts val="0"/>
-              </a:spcBef>
-              <a:spcAft>
-                <a:spcPts val="600"/>
-              </a:spcAft>
-            </a:pPr>
-            <a:r>
-              <a:rPr sz="1100" b="1" i="0">
-                <a:solidFill>
-                  <a:srgbClr val="B21E46"/>
-                </a:solidFill>
-                <a:latin typeface="Consolas"/>
-              </a:rPr>
-              <a:t>YOUR HYPOTHESIS</a:t>
-            </a:r>
-          </a:p>
-        </p:txBody>
-      </p:sp>
-      <p:sp>
-        <p:nvSpPr>
-          <p:cNvPr id="20" name="TextBox 19"/>
-          <p:cNvSpPr txBox="1"/>
-          <p:nvPr/>
-        </p:nvSpPr>
-        <p:spPr>
-          <a:xfrm>
-            <a:off x="731520" y="5897880"/>
-            <a:ext cx="10698480" cy="365760"/>
-          </a:xfrm>
-          <a:prstGeom prst="rect">
-            <a:avLst/>
-          </a:prstGeom>
-          <a:noFill/>
-        </p:spPr>
-        <p:txBody>
-          <a:bodyPr wrap="square" anchor="t" lIns="0" rIns="0" tIns="0" bIns="0">
-            <a:spAutoFit/>
-          </a:bodyPr>
-          <a:lstStyle/>
-          <a:p>
-            <a:pPr algn="l">
-              <a:lnSpc>
-                <a:spcPct val="106000"/>
-              </a:lnSpc>
-              <a:spcBef>
-                <a:spcPts val="0"/>
-              </a:spcBef>
-              <a:spcAft>
-                <a:spcPts val="600"/>
-              </a:spcAft>
-            </a:pPr>
-            <a:r>
-              <a:rPr sz="1500" b="0" i="1">
-                <a:solidFill>
-                  <a:srgbClr val="111820"/>
-                </a:solidFill>
-                <a:latin typeface="Calibri"/>
-              </a:rPr>
-              <a:t>Where's the value in 5 years — in energy, or in flexibility?</a:t>
-            </a:r>
-          </a:p>
-        </p:txBody>
-      </p:sp>
-      <p:sp>
-        <p:nvSpPr>
-          <p:cNvPr id="21" name="TextBox 20"/>
+              <a:t>Value factor is a generation idea; a battery's analog is the spread. Both erode as you build — and both cycle.</a:t>
+            </a:r>
+          </a:p>
+        </p:txBody>
+      </p:sp>
+      <p:sp>
+        <p:nvSpPr>
+          <p:cNvPr id="9" name="TextBox 8"/>
           <p:cNvSpPr txBox="1"/>
           <p:nvPr/>
         </p:nvSpPr>
@@ -19645,7 +19724,7 @@
             <a:avLst/>
           </a:prstGeom>
           <a:solidFill>
-            <a:srgbClr val="111820"/>
+            <a:srgbClr val="FFFFFF"/>
           </a:solidFill>
           <a:ln>
             <a:noFill/>
@@ -19683,13 +19762,13 @@
         <p:spPr>
           <a:xfrm>
             <a:off x="0" y="0"/>
-            <a:ext cx="12191695" cy="201168"/>
+            <a:ext cx="146304" cy="6858000"/>
           </a:xfrm>
           <a:prstGeom prst="rect">
             <a:avLst/>
           </a:prstGeom>
           <a:solidFill>
-            <a:srgbClr val="2F7D3A"/>
+            <a:srgbClr val="B21E46"/>
           </a:solidFill>
           <a:ln>
             <a:noFill/>
@@ -19720,57 +19799,13 @@
       </p:sp>
       <p:sp>
         <p:nvSpPr>
-          <p:cNvPr id="4" name="Rectangle 3"/>
-          <p:cNvSpPr/>
-          <p:nvPr/>
-        </p:nvSpPr>
-        <p:spPr>
-          <a:xfrm>
-            <a:off x="841248" y="1170432"/>
-            <a:ext cx="548640" cy="45720"/>
-          </a:xfrm>
-          <a:prstGeom prst="rect">
-            <a:avLst/>
-          </a:prstGeom>
-          <a:solidFill>
-            <a:srgbClr val="2F7D3A"/>
-          </a:solidFill>
-          <a:ln>
-            <a:noFill/>
-          </a:ln>
-          <a:effectLst/>
-        </p:spPr>
-        <p:style>
-          <a:lnRef idx="1">
-            <a:schemeClr val="accent1"/>
-          </a:lnRef>
-          <a:fillRef idx="3">
-            <a:schemeClr val="accent1"/>
-          </a:fillRef>
-          <a:effectRef idx="2">
-            <a:schemeClr val="accent1"/>
-          </a:effectRef>
-          <a:fontRef idx="minor">
-            <a:schemeClr val="lt1"/>
-          </a:fontRef>
-        </p:style>
-        <p:txBody>
-          <a:bodyPr rtlCol="0" anchor="ctr"/>
-          <a:lstStyle/>
-          <a:p>
-            <a:pPr algn="ctr"/>
-          </a:p>
-        </p:txBody>
-      </p:sp>
-      <p:sp>
-        <p:nvSpPr>
-          <p:cNvPr id="5" name="TextBox 4"/>
+          <p:cNvPr id="4" name="TextBox 3"/>
           <p:cNvSpPr txBox="1"/>
           <p:nvPr/>
         </p:nvSpPr>
         <p:spPr>
           <a:xfrm>
-            <a:off x="822960" y="1353312"/>
+            <a:off x="548640" y="411480"/>
             <a:ext cx="9144000" cy="274320"/>
           </a:xfrm>
           <a:prstGeom prst="rect">
@@ -19798,25 +19833,25 @@
             <a:r>
               <a:rPr sz="1200" b="1" i="0">
                 <a:solidFill>
-                  <a:srgbClr val="2F7D3A"/>
+                  <a:srgbClr val="B21E46"/>
                 </a:solidFill>
                 <a:latin typeface="Consolas"/>
               </a:rPr>
-              <a:t>TOPIC 5</a:t>
-            </a:r>
-          </a:p>
-        </p:txBody>
-      </p:sp>
-      <p:sp>
-        <p:nvSpPr>
-          <p:cNvPr id="6" name="TextBox 5"/>
+              <a:t>TOPIC 4 · ECONOMICS</a:t>
+            </a:r>
+          </a:p>
+        </p:txBody>
+      </p:sp>
+      <p:sp>
+        <p:nvSpPr>
+          <p:cNvPr id="5" name="TextBox 4"/>
           <p:cNvSpPr txBox="1"/>
           <p:nvPr/>
         </p:nvSpPr>
         <p:spPr>
           <a:xfrm>
-            <a:off x="777240" y="1691640"/>
-            <a:ext cx="10607040" cy="1097280"/>
+            <a:off x="502920" y="713232"/>
+            <a:ext cx="11155680" cy="640080"/>
           </a:xfrm>
           <a:prstGeom prst="rect">
             <a:avLst/>
@@ -19841,14 +19876,58 @@
               </a:spcAft>
             </a:pPr>
             <a:r>
-              <a:rPr sz="4000" b="1" i="0">
-                <a:solidFill>
-                  <a:srgbClr val="FFFFFF"/>
-                </a:solidFill>
-                <a:latin typeface="Calibri"/>
-              </a:rPr>
-              <a:t>Award vs concrete vs electrons</a:t>
-            </a:r>
+              <a:rPr sz="2800" b="1" i="0">
+                <a:solidFill>
+                  <a:srgbClr val="111820"/>
+                </a:solidFill>
+                <a:latin typeface="Calibri"/>
+              </a:rPr>
+              <a:t>Provocations — take a position</a:t>
+            </a:r>
+          </a:p>
+        </p:txBody>
+      </p:sp>
+      <p:sp>
+        <p:nvSpPr>
+          <p:cNvPr id="6" name="Rectangle 5"/>
+          <p:cNvSpPr/>
+          <p:nvPr/>
+        </p:nvSpPr>
+        <p:spPr>
+          <a:xfrm>
+            <a:off x="548640" y="1600200"/>
+            <a:ext cx="457200" cy="457200"/>
+          </a:xfrm>
+          <a:prstGeom prst="rect">
+            <a:avLst/>
+          </a:prstGeom>
+          <a:solidFill>
+            <a:srgbClr val="B21E46"/>
+          </a:solidFill>
+          <a:ln>
+            <a:noFill/>
+          </a:ln>
+          <a:effectLst/>
+        </p:spPr>
+        <p:style>
+          <a:lnRef idx="1">
+            <a:schemeClr val="accent1"/>
+          </a:lnRef>
+          <a:fillRef idx="3">
+            <a:schemeClr val="accent1"/>
+          </a:fillRef>
+          <a:effectRef idx="2">
+            <a:schemeClr val="accent1"/>
+          </a:effectRef>
+          <a:fontRef idx="minor">
+            <a:schemeClr val="lt1"/>
+          </a:fontRef>
+        </p:style>
+        <p:txBody>
+          <a:bodyPr rtlCol="0" anchor="ctr"/>
+          <a:lstStyle/>
+          <a:p>
+            <a:pPr algn="ctr"/>
           </a:p>
         </p:txBody>
       </p:sp>
@@ -19860,8 +19939,8 @@
         </p:nvSpPr>
         <p:spPr>
           <a:xfrm>
-            <a:off x="822960" y="2697480"/>
-            <a:ext cx="10241280" cy="1188720"/>
+            <a:off x="548640" y="1600200"/>
+            <a:ext cx="457200" cy="457200"/>
           </a:xfrm>
           <a:prstGeom prst="rect">
             <a:avLst/>
@@ -19869,7 +19948,52 @@
           <a:noFill/>
         </p:spPr>
         <p:txBody>
-          <a:bodyPr wrap="square" anchor="t" lIns="0" rIns="0" tIns="0" bIns="0">
+          <a:bodyPr wrap="square" anchor="ctr" lIns="0" rIns="0" tIns="0" bIns="0">
+            <a:spAutoFit/>
+          </a:bodyPr>
+          <a:lstStyle/>
+          <a:p>
+            <a:pPr algn="ctr">
+              <a:lnSpc>
+                <a:spcPct val="106000"/>
+              </a:lnSpc>
+              <a:spcBef>
+                <a:spcPts val="0"/>
+              </a:spcBef>
+              <a:spcAft>
+                <a:spcPts val="600"/>
+              </a:spcAft>
+            </a:pPr>
+            <a:r>
+              <a:rPr sz="1800" b="1" i="0">
+                <a:solidFill>
+                  <a:srgbClr val="FFFFFF"/>
+                </a:solidFill>
+                <a:latin typeface="Calibri"/>
+              </a:rPr>
+              <a:t>A</a:t>
+            </a:r>
+          </a:p>
+        </p:txBody>
+      </p:sp>
+      <p:sp>
+        <p:nvSpPr>
+          <p:cNvPr id="8" name="TextBox 7"/>
+          <p:cNvSpPr txBox="1"/>
+          <p:nvPr/>
+        </p:nvSpPr>
+        <p:spPr>
+          <a:xfrm>
+            <a:off x="1188720" y="1618488"/>
+            <a:ext cx="10332720" cy="731520"/>
+          </a:xfrm>
+          <a:prstGeom prst="rect">
+            <a:avLst/>
+          </a:prstGeom>
+          <a:noFill/>
+        </p:spPr>
+        <p:txBody>
+          <a:bodyPr wrap="square" anchor="ctr" lIns="0" rIns="0" tIns="0" bIns="0">
             <a:spAutoFit/>
           </a:bodyPr>
           <a:lstStyle/>
@@ -19886,38 +20010,36 @@
               </a:spcAft>
             </a:pPr>
             <a:r>
-              <a:rPr sz="2100" b="0" i="0">
-                <a:solidFill>
-                  <a:srgbClr val="C2CAD4"/>
-                </a:solidFill>
-                <a:latin typeface="Calibri"/>
-              </a:rPr>
-              <a:t>Most of the pipeline is a mirage — the gap between proposed, committed and built is enormous.</a:t>
-            </a:r>
-          </a:p>
-        </p:txBody>
-      </p:sp>
-      <p:sp>
-        <p:nvSpPr>
-          <p:cNvPr id="8" name="Rectangle 7"/>
+              <a:rPr sz="1600" b="0" i="0">
+                <a:solidFill>
+                  <a:srgbClr val="37424F"/>
+                </a:solidFill>
+                <a:latin typeface="Calibri"/>
+              </a:rPr>
+              <a:t>Is the value-factor trough permanent, or does coal-exit evening scarcity bring it back?</a:t>
+            </a:r>
+          </a:p>
+        </p:txBody>
+      </p:sp>
+      <p:sp>
+        <p:nvSpPr>
+          <p:cNvPr id="9" name="Rectangle 8"/>
           <p:cNvSpPr/>
           <p:nvPr/>
         </p:nvSpPr>
         <p:spPr>
           <a:xfrm>
-            <a:off x="822960" y="3977639"/>
-            <a:ext cx="10515600" cy="1371600"/>
+            <a:off x="548640" y="2441448"/>
+            <a:ext cx="457200" cy="457200"/>
           </a:xfrm>
           <a:prstGeom prst="rect">
             <a:avLst/>
           </a:prstGeom>
           <a:solidFill>
-            <a:srgbClr val="1C222C"/>
+            <a:srgbClr val="B21E46"/>
           </a:solidFill>
-          <a:ln w="9525">
-            <a:solidFill>
-              <a:srgbClr val="2F7D3A"/>
-            </a:solidFill>
+          <a:ln>
+            <a:noFill/>
           </a:ln>
           <a:effectLst/>
         </p:spPr>
@@ -19945,14 +20067,14 @@
       </p:sp>
       <p:sp>
         <p:nvSpPr>
-          <p:cNvPr id="9" name="TextBox 8"/>
+          <p:cNvPr id="10" name="TextBox 9"/>
           <p:cNvSpPr txBox="1"/>
           <p:nvPr/>
         </p:nvSpPr>
         <p:spPr>
           <a:xfrm>
-            <a:off x="1051560" y="4114800"/>
-            <a:ext cx="10058400" cy="320040"/>
+            <a:off x="548640" y="2441448"/>
+            <a:ext cx="457200" cy="457200"/>
           </a:xfrm>
           <a:prstGeom prst="rect">
             <a:avLst/>
@@ -19960,7 +20082,52 @@
           <a:noFill/>
         </p:spPr>
         <p:txBody>
-          <a:bodyPr wrap="square" anchor="t" lIns="0" rIns="0" tIns="0" bIns="0">
+          <a:bodyPr wrap="square" anchor="ctr" lIns="0" rIns="0" tIns="0" bIns="0">
+            <a:spAutoFit/>
+          </a:bodyPr>
+          <a:lstStyle/>
+          <a:p>
+            <a:pPr algn="ctr">
+              <a:lnSpc>
+                <a:spcPct val="106000"/>
+              </a:lnSpc>
+              <a:spcBef>
+                <a:spcPts val="0"/>
+              </a:spcBef>
+              <a:spcAft>
+                <a:spcPts val="600"/>
+              </a:spcAft>
+            </a:pPr>
+            <a:r>
+              <a:rPr sz="1800" b="1" i="0">
+                <a:solidFill>
+                  <a:srgbClr val="FFFFFF"/>
+                </a:solidFill>
+                <a:latin typeface="Calibri"/>
+              </a:rPr>
+              <a:t>B</a:t>
+            </a:r>
+          </a:p>
+        </p:txBody>
+      </p:sp>
+      <p:sp>
+        <p:nvSpPr>
+          <p:cNvPr id="11" name="TextBox 10"/>
+          <p:cNvSpPr txBox="1"/>
+          <p:nvPr/>
+        </p:nvSpPr>
+        <p:spPr>
+          <a:xfrm>
+            <a:off x="1188720" y="2459736"/>
+            <a:ext cx="10332720" cy="731520"/>
+          </a:xfrm>
+          <a:prstGeom prst="rect">
+            <a:avLst/>
+          </a:prstGeom>
+          <a:noFill/>
+        </p:spPr>
+        <p:txBody>
+          <a:bodyPr wrap="square" anchor="ctr" lIns="0" rIns="0" tIns="0" bIns="0">
             <a:spAutoFit/>
           </a:bodyPr>
           <a:lstStyle/>
@@ -19977,27 +20144,71 @@
               </a:spcAft>
             </a:pPr>
             <a:r>
-              <a:rPr sz="1100" b="1" i="0">
-                <a:solidFill>
-                  <a:srgbClr val="2F7D3A"/>
-                </a:solidFill>
-                <a:latin typeface="Consolas"/>
-              </a:rPr>
-              <a:t>START HERE</a:t>
-            </a:r>
-          </a:p>
-        </p:txBody>
-      </p:sp>
-      <p:sp>
-        <p:nvSpPr>
-          <p:cNvPr id="10" name="TextBox 9"/>
+              <a:rPr sz="1600" b="0" i="0">
+                <a:solidFill>
+                  <a:srgbClr val="37424F"/>
+                </a:solidFill>
+                <a:latin typeface="Calibri"/>
+              </a:rPr>
+              <a:t>Does that change whether — or when — you build, and whether to firm it?</a:t>
+            </a:r>
+          </a:p>
+        </p:txBody>
+      </p:sp>
+      <p:sp>
+        <p:nvSpPr>
+          <p:cNvPr id="12" name="Rectangle 11"/>
+          <p:cNvSpPr/>
+          <p:nvPr/>
+        </p:nvSpPr>
+        <p:spPr>
+          <a:xfrm>
+            <a:off x="548640" y="3282696"/>
+            <a:ext cx="457200" cy="457200"/>
+          </a:xfrm>
+          <a:prstGeom prst="rect">
+            <a:avLst/>
+          </a:prstGeom>
+          <a:solidFill>
+            <a:srgbClr val="B21E46"/>
+          </a:solidFill>
+          <a:ln>
+            <a:noFill/>
+          </a:ln>
+          <a:effectLst/>
+        </p:spPr>
+        <p:style>
+          <a:lnRef idx="1">
+            <a:schemeClr val="accent1"/>
+          </a:lnRef>
+          <a:fillRef idx="3">
+            <a:schemeClr val="accent1"/>
+          </a:fillRef>
+          <a:effectRef idx="2">
+            <a:schemeClr val="accent1"/>
+          </a:effectRef>
+          <a:fontRef idx="minor">
+            <a:schemeClr val="lt1"/>
+          </a:fontRef>
+        </p:style>
+        <p:txBody>
+          <a:bodyPr rtlCol="0" anchor="ctr"/>
+          <a:lstStyle/>
+          <a:p>
+            <a:pPr algn="ctr"/>
+          </a:p>
+        </p:txBody>
+      </p:sp>
+      <p:sp>
+        <p:nvSpPr>
+          <p:cNvPr id="13" name="TextBox 12"/>
           <p:cNvSpPr txBox="1"/>
           <p:nvPr/>
         </p:nvSpPr>
         <p:spPr>
           <a:xfrm>
-            <a:off x="1051560" y="4407408"/>
-            <a:ext cx="10058400" cy="822960"/>
+            <a:off x="548640" y="3282696"/>
+            <a:ext cx="457200" cy="457200"/>
           </a:xfrm>
           <a:prstGeom prst="rect">
             <a:avLst/>
@@ -20005,7 +20216,52 @@
           <a:noFill/>
         </p:spPr>
         <p:txBody>
-          <a:bodyPr wrap="square" anchor="t" lIns="0" rIns="0" tIns="0" bIns="0">
+          <a:bodyPr wrap="square" anchor="ctr" lIns="0" rIns="0" tIns="0" bIns="0">
+            <a:spAutoFit/>
+          </a:bodyPr>
+          <a:lstStyle/>
+          <a:p>
+            <a:pPr algn="ctr">
+              <a:lnSpc>
+                <a:spcPct val="106000"/>
+              </a:lnSpc>
+              <a:spcBef>
+                <a:spcPts val="0"/>
+              </a:spcBef>
+              <a:spcAft>
+                <a:spcPts val="600"/>
+              </a:spcAft>
+            </a:pPr>
+            <a:r>
+              <a:rPr sz="1800" b="1" i="0">
+                <a:solidFill>
+                  <a:srgbClr val="FFFFFF"/>
+                </a:solidFill>
+                <a:latin typeface="Calibri"/>
+              </a:rPr>
+              <a:t>C</a:t>
+            </a:r>
+          </a:p>
+        </p:txBody>
+      </p:sp>
+      <p:sp>
+        <p:nvSpPr>
+          <p:cNvPr id="14" name="TextBox 13"/>
+          <p:cNvSpPr txBox="1"/>
+          <p:nvPr/>
+        </p:nvSpPr>
+        <p:spPr>
+          <a:xfrm>
+            <a:off x="1188720" y="3300984"/>
+            <a:ext cx="10332720" cy="731520"/>
+          </a:xfrm>
+          <a:prstGeom prst="rect">
+            <a:avLst/>
+          </a:prstGeom>
+          <a:noFill/>
+        </p:spPr>
+        <p:txBody>
+          <a:bodyPr wrap="square" anchor="ctr" lIns="0" rIns="0" tIns="0" bIns="0">
             <a:spAutoFit/>
           </a:bodyPr>
           <a:lstStyle/>
@@ -20022,13 +20278,328 @@
               </a:spcAft>
             </a:pPr>
             <a:r>
-              <a:rPr sz="1800" b="0" i="1">
+              <a:rPr sz="1600" b="0" i="0">
+                <a:solidFill>
+                  <a:srgbClr val="37424F"/>
+                </a:solidFill>
+                <a:latin typeface="Calibri"/>
+              </a:rPr>
+              <a:t>The battery spread is compressing — is it BESS, benign conditions, or both? What happens next cycle?</a:t>
+            </a:r>
+          </a:p>
+        </p:txBody>
+      </p:sp>
+      <p:sp>
+        <p:nvSpPr>
+          <p:cNvPr id="15" name="Rectangle 14"/>
+          <p:cNvSpPr/>
+          <p:nvPr/>
+        </p:nvSpPr>
+        <p:spPr>
+          <a:xfrm>
+            <a:off x="548640" y="4123944"/>
+            <a:ext cx="457200" cy="457200"/>
+          </a:xfrm>
+          <a:prstGeom prst="rect">
+            <a:avLst/>
+          </a:prstGeom>
+          <a:solidFill>
+            <a:srgbClr val="B21E46"/>
+          </a:solidFill>
+          <a:ln>
+            <a:noFill/>
+          </a:ln>
+          <a:effectLst/>
+        </p:spPr>
+        <p:style>
+          <a:lnRef idx="1">
+            <a:schemeClr val="accent1"/>
+          </a:lnRef>
+          <a:fillRef idx="3">
+            <a:schemeClr val="accent1"/>
+          </a:fillRef>
+          <a:effectRef idx="2">
+            <a:schemeClr val="accent1"/>
+          </a:effectRef>
+          <a:fontRef idx="minor">
+            <a:schemeClr val="lt1"/>
+          </a:fontRef>
+        </p:style>
+        <p:txBody>
+          <a:bodyPr rtlCol="0" anchor="ctr"/>
+          <a:lstStyle/>
+          <a:p>
+            <a:pPr algn="ctr"/>
+          </a:p>
+        </p:txBody>
+      </p:sp>
+      <p:sp>
+        <p:nvSpPr>
+          <p:cNvPr id="16" name="TextBox 15"/>
+          <p:cNvSpPr txBox="1"/>
+          <p:nvPr/>
+        </p:nvSpPr>
+        <p:spPr>
+          <a:xfrm>
+            <a:off x="548640" y="4123944"/>
+            <a:ext cx="457200" cy="457200"/>
+          </a:xfrm>
+          <a:prstGeom prst="rect">
+            <a:avLst/>
+          </a:prstGeom>
+          <a:noFill/>
+        </p:spPr>
+        <p:txBody>
+          <a:bodyPr wrap="square" anchor="ctr" lIns="0" rIns="0" tIns="0" bIns="0">
+            <a:spAutoFit/>
+          </a:bodyPr>
+          <a:lstStyle/>
+          <a:p>
+            <a:pPr algn="ctr">
+              <a:lnSpc>
+                <a:spcPct val="106000"/>
+              </a:lnSpc>
+              <a:spcBef>
+                <a:spcPts val="0"/>
+              </a:spcBef>
+              <a:spcAft>
+                <a:spcPts val="600"/>
+              </a:spcAft>
+            </a:pPr>
+            <a:r>
+              <a:rPr sz="1800" b="1" i="0">
                 <a:solidFill>
                   <a:srgbClr val="FFFFFF"/>
                 </a:solidFill>
                 <a:latin typeface="Calibri"/>
               </a:rPr>
-              <a:t>Of 105 GW “proposed” in 2022, only ~9 GW got built. Which signals separate the real projects from the mirage?</a:t>
+              <a:t>D</a:t>
+            </a:r>
+          </a:p>
+        </p:txBody>
+      </p:sp>
+      <p:sp>
+        <p:nvSpPr>
+          <p:cNvPr id="17" name="TextBox 16"/>
+          <p:cNvSpPr txBox="1"/>
+          <p:nvPr/>
+        </p:nvSpPr>
+        <p:spPr>
+          <a:xfrm>
+            <a:off x="1188720" y="4142232"/>
+            <a:ext cx="10332720" cy="731520"/>
+          </a:xfrm>
+          <a:prstGeom prst="rect">
+            <a:avLst/>
+          </a:prstGeom>
+          <a:noFill/>
+        </p:spPr>
+        <p:txBody>
+          <a:bodyPr wrap="square" anchor="ctr" lIns="0" rIns="0" tIns="0" bIns="0">
+            <a:spAutoFit/>
+          </a:bodyPr>
+          <a:lstStyle/>
+          <a:p>
+            <a:pPr algn="l">
+              <a:lnSpc>
+                <a:spcPct val="106000"/>
+              </a:lnSpc>
+              <a:spcBef>
+                <a:spcPts val="0"/>
+              </a:spcBef>
+              <a:spcAft>
+                <a:spcPts val="600"/>
+              </a:spcAft>
+            </a:pPr>
+            <a:r>
+              <a:rPr sz="1600" b="0" i="0">
+                <a:solidFill>
+                  <a:srgbClr val="37424F"/>
+                </a:solidFill>
+                <a:latin typeface="Calibri"/>
+              </a:rPr>
+              <a:t>Would you build another unfirmed solar farm in this market?</a:t>
+            </a:r>
+          </a:p>
+        </p:txBody>
+      </p:sp>
+      <p:sp>
+        <p:nvSpPr>
+          <p:cNvPr id="18" name="Rectangle 17"/>
+          <p:cNvSpPr/>
+          <p:nvPr/>
+        </p:nvSpPr>
+        <p:spPr>
+          <a:xfrm>
+            <a:off x="548640" y="5532120"/>
+            <a:ext cx="11064240" cy="777240"/>
+          </a:xfrm>
+          <a:prstGeom prst="rect">
+            <a:avLst/>
+          </a:prstGeom>
+          <a:solidFill>
+            <a:srgbClr val="F4F6F9"/>
+          </a:solidFill>
+          <a:ln w="9525">
+            <a:solidFill>
+              <a:srgbClr val="B21E46"/>
+            </a:solidFill>
+          </a:ln>
+          <a:effectLst/>
+        </p:spPr>
+        <p:style>
+          <a:lnRef idx="1">
+            <a:schemeClr val="accent1"/>
+          </a:lnRef>
+          <a:fillRef idx="3">
+            <a:schemeClr val="accent1"/>
+          </a:fillRef>
+          <a:effectRef idx="2">
+            <a:schemeClr val="accent1"/>
+          </a:effectRef>
+          <a:fontRef idx="minor">
+            <a:schemeClr val="lt1"/>
+          </a:fontRef>
+        </p:style>
+        <p:txBody>
+          <a:bodyPr rtlCol="0" anchor="ctr"/>
+          <a:lstStyle/>
+          <a:p>
+            <a:pPr algn="ctr"/>
+          </a:p>
+        </p:txBody>
+      </p:sp>
+      <p:sp>
+        <p:nvSpPr>
+          <p:cNvPr id="19" name="TextBox 18"/>
+          <p:cNvSpPr txBox="1"/>
+          <p:nvPr/>
+        </p:nvSpPr>
+        <p:spPr>
+          <a:xfrm>
+            <a:off x="731520" y="5632704"/>
+            <a:ext cx="10698480" cy="320040"/>
+          </a:xfrm>
+          <a:prstGeom prst="rect">
+            <a:avLst/>
+          </a:prstGeom>
+          <a:noFill/>
+        </p:spPr>
+        <p:txBody>
+          <a:bodyPr wrap="square" anchor="t" lIns="0" rIns="0" tIns="0" bIns="0">
+            <a:spAutoFit/>
+          </a:bodyPr>
+          <a:lstStyle/>
+          <a:p>
+            <a:pPr algn="l">
+              <a:lnSpc>
+                <a:spcPct val="106000"/>
+              </a:lnSpc>
+              <a:spcBef>
+                <a:spcPts val="0"/>
+              </a:spcBef>
+              <a:spcAft>
+                <a:spcPts val="600"/>
+              </a:spcAft>
+            </a:pPr>
+            <a:r>
+              <a:rPr sz="1100" b="1" i="0">
+                <a:solidFill>
+                  <a:srgbClr val="B21E46"/>
+                </a:solidFill>
+                <a:latin typeface="Consolas"/>
+              </a:rPr>
+              <a:t>YOUR HYPOTHESIS</a:t>
+            </a:r>
+          </a:p>
+        </p:txBody>
+      </p:sp>
+      <p:sp>
+        <p:nvSpPr>
+          <p:cNvPr id="20" name="TextBox 19"/>
+          <p:cNvSpPr txBox="1"/>
+          <p:nvPr/>
+        </p:nvSpPr>
+        <p:spPr>
+          <a:xfrm>
+            <a:off x="731520" y="5897880"/>
+            <a:ext cx="10698480" cy="365760"/>
+          </a:xfrm>
+          <a:prstGeom prst="rect">
+            <a:avLst/>
+          </a:prstGeom>
+          <a:noFill/>
+        </p:spPr>
+        <p:txBody>
+          <a:bodyPr wrap="square" anchor="t" lIns="0" rIns="0" tIns="0" bIns="0">
+            <a:spAutoFit/>
+          </a:bodyPr>
+          <a:lstStyle/>
+          <a:p>
+            <a:pPr algn="l">
+              <a:lnSpc>
+                <a:spcPct val="106000"/>
+              </a:lnSpc>
+              <a:spcBef>
+                <a:spcPts val="0"/>
+              </a:spcBef>
+              <a:spcAft>
+                <a:spcPts val="600"/>
+              </a:spcAft>
+            </a:pPr>
+            <a:r>
+              <a:rPr sz="1500" b="0" i="1">
+                <a:solidFill>
+                  <a:srgbClr val="111820"/>
+                </a:solidFill>
+                <a:latin typeface="Calibri"/>
+              </a:rPr>
+              <a:t>Where's the value in 5 years — in energy, or in flexibility?</a:t>
+            </a:r>
+          </a:p>
+        </p:txBody>
+      </p:sp>
+      <p:sp>
+        <p:nvSpPr>
+          <p:cNvPr id="21" name="TextBox 20"/>
+          <p:cNvSpPr txBox="1"/>
+          <p:nvPr/>
+        </p:nvSpPr>
+        <p:spPr>
+          <a:xfrm>
+            <a:off x="502920" y="6419088"/>
+            <a:ext cx="8229600" cy="274320"/>
+          </a:xfrm>
+          <a:prstGeom prst="rect">
+            <a:avLst/>
+          </a:prstGeom>
+          <a:noFill/>
+        </p:spPr>
+        <p:txBody>
+          <a:bodyPr wrap="square" anchor="t" lIns="0" rIns="0" tIns="0" bIns="0">
+            <a:spAutoFit/>
+          </a:bodyPr>
+          <a:lstStyle/>
+          <a:p>
+            <a:pPr algn="l">
+              <a:lnSpc>
+                <a:spcPct val="106000"/>
+              </a:lnSpc>
+              <a:spcBef>
+                <a:spcPts val="0"/>
+              </a:spcBef>
+              <a:spcAft>
+                <a:spcPts val="600"/>
+              </a:spcAft>
+            </a:pPr>
+            <a:r>
+              <a:rPr sz="900" b="0" i="0">
+                <a:solidFill>
+                  <a:srgbClr val="66717F"/>
+                </a:solidFill>
+                <a:latin typeface="Consolas"/>
+              </a:rPr>
+              <a:t>Reading the NEM · Power Development Team Day · figures from the AusEnergy Lens (AEMO + ISP 2026), as-at Aug 2026</a:t>
             </a:r>
           </a:p>
         </p:txBody>
@@ -20066,7 +20637,7 @@
             <a:avLst/>
           </a:prstGeom>
           <a:solidFill>
-            <a:srgbClr val="FFFFFF"/>
+            <a:srgbClr val="111820"/>
           </a:solidFill>
           <a:ln>
             <a:noFill/>
@@ -20104,7 +20675,7 @@
         <p:spPr>
           <a:xfrm>
             <a:off x="0" y="0"/>
-            <a:ext cx="146304" cy="6858000"/>
+            <a:ext cx="12191695" cy="201168"/>
           </a:xfrm>
           <a:prstGeom prst="rect">
             <a:avLst/>
@@ -20141,13 +20712,57 @@
       </p:sp>
       <p:sp>
         <p:nvSpPr>
-          <p:cNvPr id="4" name="TextBox 3"/>
+          <p:cNvPr id="4" name="Rectangle 3"/>
+          <p:cNvSpPr/>
+          <p:nvPr/>
+        </p:nvSpPr>
+        <p:spPr>
+          <a:xfrm>
+            <a:off x="841248" y="1170432"/>
+            <a:ext cx="548640" cy="45720"/>
+          </a:xfrm>
+          <a:prstGeom prst="rect">
+            <a:avLst/>
+          </a:prstGeom>
+          <a:solidFill>
+            <a:srgbClr val="2F7D3A"/>
+          </a:solidFill>
+          <a:ln>
+            <a:noFill/>
+          </a:ln>
+          <a:effectLst/>
+        </p:spPr>
+        <p:style>
+          <a:lnRef idx="1">
+            <a:schemeClr val="accent1"/>
+          </a:lnRef>
+          <a:fillRef idx="3">
+            <a:schemeClr val="accent1"/>
+          </a:fillRef>
+          <a:effectRef idx="2">
+            <a:schemeClr val="accent1"/>
+          </a:effectRef>
+          <a:fontRef idx="minor">
+            <a:schemeClr val="lt1"/>
+          </a:fontRef>
+        </p:style>
+        <p:txBody>
+          <a:bodyPr rtlCol="0" anchor="ctr"/>
+          <a:lstStyle/>
+          <a:p>
+            <a:pPr algn="ctr"/>
+          </a:p>
+        </p:txBody>
+      </p:sp>
+      <p:sp>
+        <p:nvSpPr>
+          <p:cNvPr id="5" name="TextBox 4"/>
           <p:cNvSpPr txBox="1"/>
           <p:nvPr/>
         </p:nvSpPr>
         <p:spPr>
           <a:xfrm>
-            <a:off x="548640" y="411480"/>
+            <a:off x="822960" y="1353312"/>
             <a:ext cx="9144000" cy="274320"/>
           </a:xfrm>
           <a:prstGeom prst="rect">
@@ -20179,21 +20794,21 @@
                 </a:solidFill>
                 <a:latin typeface="Consolas"/>
               </a:rPr>
-              <a:t>TOPIC 5 · PIPELINE</a:t>
-            </a:r>
-          </a:p>
-        </p:txBody>
-      </p:sp>
-      <p:sp>
-        <p:nvSpPr>
-          <p:cNvPr id="5" name="TextBox 4"/>
+              <a:t>TOPIC 5</a:t>
+            </a:r>
+          </a:p>
+        </p:txBody>
+      </p:sp>
+      <p:sp>
+        <p:nvSpPr>
+          <p:cNvPr id="6" name="TextBox 5"/>
           <p:cNvSpPr txBox="1"/>
           <p:nvPr/>
         </p:nvSpPr>
         <p:spPr>
           <a:xfrm>
-            <a:off x="502920" y="713232"/>
-            <a:ext cx="11155680" cy="640080"/>
+            <a:off x="777240" y="1691640"/>
+            <a:ext cx="10607040" cy="1097280"/>
           </a:xfrm>
           <a:prstGeom prst="rect">
             <a:avLst/>
@@ -20218,91 +20833,27 @@
               </a:spcAft>
             </a:pPr>
             <a:r>
-              <a:rPr sz="2800" b="1" i="0">
-                <a:solidFill>
-                  <a:srgbClr val="111820"/>
-                </a:solidFill>
-                <a:latin typeface="Calibri"/>
-              </a:rPr>
-              <a:t>The long view — the mirage growing</a:t>
-            </a:r>
-          </a:p>
-        </p:txBody>
-      </p:sp>
-      <p:graphicFrame>
-        <p:nvGraphicFramePr>
-          <p:cNvPr id="6" name="Chart 5"/>
-          <p:cNvGraphicFramePr>
-            <a:graphicFrameLocks noGrp="1"/>
-          </p:cNvGraphicFramePr>
-          <p:nvPr/>
-        </p:nvGraphicFramePr>
-        <p:xfrm>
-          <a:off x="548640" y="1554480"/>
-          <a:ext cx="11064240" cy="4114800"/>
-        </p:xfrm>
-        <a:graphic>
-          <a:graphicData uri="http://schemas.openxmlformats.org/drawingml/2006/chart">
-            <c:chart xmlns:c="http://schemas.openxmlformats.org/drawingml/2006/chart" r:id="rId2"/>
-          </a:graphicData>
-        </a:graphic>
-      </p:graphicFrame>
-      <p:sp>
-        <p:nvSpPr>
-          <p:cNvPr id="7" name="Rectangle 6"/>
-          <p:cNvSpPr/>
-          <p:nvPr/>
-        </p:nvSpPr>
-        <p:spPr>
-          <a:xfrm>
-            <a:off x="548640" y="5806440"/>
-            <a:ext cx="11064240" cy="566928"/>
-          </a:xfrm>
-          <a:prstGeom prst="rect">
-            <a:avLst/>
-          </a:prstGeom>
-          <a:solidFill>
-            <a:srgbClr val="F4F6F9"/>
-          </a:solidFill>
-          <a:ln w="9525">
-            <a:solidFill>
-              <a:srgbClr val="2F7D3A"/>
-            </a:solidFill>
-          </a:ln>
-          <a:effectLst/>
-        </p:spPr>
-        <p:style>
-          <a:lnRef idx="1">
-            <a:schemeClr val="accent1"/>
-          </a:lnRef>
-          <a:fillRef idx="3">
-            <a:schemeClr val="accent1"/>
-          </a:fillRef>
-          <a:effectRef idx="2">
-            <a:schemeClr val="accent1"/>
-          </a:effectRef>
-          <a:fontRef idx="minor">
-            <a:schemeClr val="lt1"/>
-          </a:fontRef>
-        </p:style>
-        <p:txBody>
-          <a:bodyPr rtlCol="0" anchor="ctr"/>
-          <a:lstStyle/>
-          <a:p>
-            <a:pPr algn="ctr"/>
-          </a:p>
-        </p:txBody>
-      </p:sp>
-      <p:sp>
-        <p:nvSpPr>
-          <p:cNvPr id="8" name="TextBox 7"/>
+              <a:rPr sz="4000" b="1" i="0">
+                <a:solidFill>
+                  <a:srgbClr val="FFFFFF"/>
+                </a:solidFill>
+                <a:latin typeface="Calibri"/>
+              </a:rPr>
+              <a:t>Award vs concrete vs electrons</a:t>
+            </a:r>
+          </a:p>
+        </p:txBody>
+      </p:sp>
+      <p:sp>
+        <p:nvSpPr>
+          <p:cNvPr id="7" name="TextBox 6"/>
           <p:cNvSpPr txBox="1"/>
           <p:nvPr/>
         </p:nvSpPr>
         <p:spPr>
           <a:xfrm>
-            <a:off x="731520" y="5852160"/>
-            <a:ext cx="10698480" cy="457200"/>
+            <a:off x="822960" y="2697480"/>
+            <a:ext cx="10241280" cy="1188720"/>
           </a:xfrm>
           <a:prstGeom prst="rect">
             <a:avLst/>
@@ -20310,7 +20861,7 @@
           <a:noFill/>
         </p:spPr>
         <p:txBody>
-          <a:bodyPr wrap="square" anchor="ctr" lIns="0" rIns="0" tIns="0" bIns="0">
+          <a:bodyPr wrap="square" anchor="t" lIns="0" rIns="0" tIns="0" bIns="0">
             <a:spAutoFit/>
           </a:bodyPr>
           <a:lstStyle/>
@@ -20327,23 +20878,60 @@
               </a:spcAft>
             </a:pPr>
             <a:r>
-              <a:rPr sz="1200" b="1" i="0">
-                <a:solidFill>
-                  <a:srgbClr val="2F7D3A"/>
-                </a:solidFill>
-                <a:latin typeface="Consolas"/>
-              </a:rPr>
-              <a:t>Takeaway  </a:t>
-            </a:r>
-            <a:r>
-              <a:rPr sz="1400" b="0" i="0">
-                <a:solidFill>
-                  <a:srgbClr val="37424F"/>
-                </a:solidFill>
-                <a:latin typeface="Calibri"/>
-              </a:rPr>
-              <a:t>Proposed capacity multiplied ~7× to 346 GW while committed and built crawled — the gap is the mirage.</a:t>
-            </a:r>
+              <a:rPr sz="2100" b="0" i="0">
+                <a:solidFill>
+                  <a:srgbClr val="C2CAD4"/>
+                </a:solidFill>
+                <a:latin typeface="Calibri"/>
+              </a:rPr>
+              <a:t>Most of the pipeline is a mirage — the gap between proposed, committed and built is enormous.</a:t>
+            </a:r>
+          </a:p>
+        </p:txBody>
+      </p:sp>
+      <p:sp>
+        <p:nvSpPr>
+          <p:cNvPr id="8" name="Rectangle 7"/>
+          <p:cNvSpPr/>
+          <p:nvPr/>
+        </p:nvSpPr>
+        <p:spPr>
+          <a:xfrm>
+            <a:off x="822960" y="3977639"/>
+            <a:ext cx="10515600" cy="1371600"/>
+          </a:xfrm>
+          <a:prstGeom prst="rect">
+            <a:avLst/>
+          </a:prstGeom>
+          <a:solidFill>
+            <a:srgbClr val="1C222C"/>
+          </a:solidFill>
+          <a:ln w="9525">
+            <a:solidFill>
+              <a:srgbClr val="2F7D3A"/>
+            </a:solidFill>
+          </a:ln>
+          <a:effectLst/>
+        </p:spPr>
+        <p:style>
+          <a:lnRef idx="1">
+            <a:schemeClr val="accent1"/>
+          </a:lnRef>
+          <a:fillRef idx="3">
+            <a:schemeClr val="accent1"/>
+          </a:fillRef>
+          <a:effectRef idx="2">
+            <a:schemeClr val="accent1"/>
+          </a:effectRef>
+          <a:fontRef idx="minor">
+            <a:schemeClr val="lt1"/>
+          </a:fontRef>
+        </p:style>
+        <p:txBody>
+          <a:bodyPr rtlCol="0" anchor="ctr"/>
+          <a:lstStyle/>
+          <a:p>
+            <a:pPr algn="ctr"/>
           </a:p>
         </p:txBody>
       </p:sp>
@@ -20355,8 +20943,8 @@
         </p:nvSpPr>
         <p:spPr>
           <a:xfrm>
-            <a:off x="502920" y="6419088"/>
-            <a:ext cx="8229600" cy="274320"/>
+            <a:off x="1051560" y="4114800"/>
+            <a:ext cx="10058400" cy="320040"/>
           </a:xfrm>
           <a:prstGeom prst="rect">
             <a:avLst/>
@@ -20381,13 +20969,58 @@
               </a:spcAft>
             </a:pPr>
             <a:r>
-              <a:rPr sz="900" b="0" i="0">
-                <a:solidFill>
-                  <a:srgbClr val="66717F"/>
+              <a:rPr sz="1100" b="1" i="0">
+                <a:solidFill>
+                  <a:srgbClr val="2F7D3A"/>
                 </a:solidFill>
                 <a:latin typeface="Consolas"/>
               </a:rPr>
-              <a:t>Reading the NEM · Power Development Team Day · figures from the AusEnergy Lens (AEMO + ISP 2026), as-at Aug 2026</a:t>
+              <a:t>START HERE</a:t>
+            </a:r>
+          </a:p>
+        </p:txBody>
+      </p:sp>
+      <p:sp>
+        <p:nvSpPr>
+          <p:cNvPr id="10" name="TextBox 9"/>
+          <p:cNvSpPr txBox="1"/>
+          <p:nvPr/>
+        </p:nvSpPr>
+        <p:spPr>
+          <a:xfrm>
+            <a:off x="1051560" y="4407408"/>
+            <a:ext cx="10058400" cy="822960"/>
+          </a:xfrm>
+          <a:prstGeom prst="rect">
+            <a:avLst/>
+          </a:prstGeom>
+          <a:noFill/>
+        </p:spPr>
+        <p:txBody>
+          <a:bodyPr wrap="square" anchor="t" lIns="0" rIns="0" tIns="0" bIns="0">
+            <a:spAutoFit/>
+          </a:bodyPr>
+          <a:lstStyle/>
+          <a:p>
+            <a:pPr algn="l">
+              <a:lnSpc>
+                <a:spcPct val="106000"/>
+              </a:lnSpc>
+              <a:spcBef>
+                <a:spcPts val="0"/>
+              </a:spcBef>
+              <a:spcAft>
+                <a:spcPts val="600"/>
+              </a:spcAft>
+            </a:pPr>
+            <a:r>
+              <a:rPr sz="1800" b="0" i="1">
+                <a:solidFill>
+                  <a:srgbClr val="FFFFFF"/>
+                </a:solidFill>
+                <a:latin typeface="Calibri"/>
+              </a:rPr>
+              <a:t>Of 105 GW “proposed” in 2022, only ~9 GW got built. Which signals separate the real projects from the mirage?</a:t>
             </a:r>
           </a:p>
         </p:txBody>
@@ -20583,292 +21216,29 @@
                 </a:solidFill>
                 <a:latin typeface="Calibri"/>
               </a:rPr>
-              <a:t>The data on the table</a:t>
-            </a:r>
-          </a:p>
-        </p:txBody>
-      </p:sp>
-      <p:sp>
-        <p:nvSpPr>
-          <p:cNvPr id="6" name="TextBox 5"/>
-          <p:cNvSpPr txBox="1"/>
-          <p:nvPr/>
-        </p:nvSpPr>
-        <p:spPr>
-          <a:xfrm>
-            <a:off x="548640" y="1600200"/>
-            <a:ext cx="11064240" cy="4206240"/>
-          </a:xfrm>
-          <a:prstGeom prst="rect">
-            <a:avLst/>
-          </a:prstGeom>
-          <a:noFill/>
-        </p:spPr>
-        <p:txBody>
-          <a:bodyPr wrap="square" lIns="0" rIns="0" tIns="0" bIns="0">
-            <a:spAutoFit/>
-          </a:bodyPr>
-          <a:lstStyle/>
-          <a:p>
-            <a:pPr>
-              <a:lnSpc>
-                <a:spcPct val="105000"/>
-              </a:lnSpc>
-              <a:spcAft>
-                <a:spcPts val="1100"/>
-              </a:spcAft>
-            </a:pPr>
-            <a:r>
-              <a:rPr sz="1600" b="1">
-                <a:solidFill>
-                  <a:srgbClr val="2F7D3A"/>
-                </a:solidFill>
-                <a:latin typeface="Calibri"/>
-              </a:rPr>
-              <a:t>▸  </a:t>
-            </a:r>
-            <a:r>
-              <a:rPr sz="1600" b="1">
-                <a:solidFill>
-                  <a:srgbClr val="111820"/>
-                </a:solidFill>
-                <a:latin typeface="Calibri"/>
-              </a:rPr>
-              <a:t>Proposed 346 GW vs committed ~13 GW vs built ~70 GW</a:t>
-            </a:r>
-            <a:r>
-              <a:rPr sz="1600" b="0">
-                <a:solidFill>
-                  <a:srgbClr val="37424F"/>
-                </a:solidFill>
-                <a:latin typeface="Calibri"/>
-              </a:rPr>
-              <a:t> (2026) — a ~19:1 funnel.</a:t>
-            </a:r>
-          </a:p>
-          <a:p>
-            <a:pPr>
-              <a:lnSpc>
-                <a:spcPct val="105000"/>
-              </a:lnSpc>
-              <a:spcAft>
-                <a:spcPts val="1100"/>
-              </a:spcAft>
-            </a:pPr>
-            <a:r>
-              <a:rPr sz="1600" b="1">
-                <a:solidFill>
-                  <a:srgbClr val="2F7D3A"/>
-                </a:solidFill>
-                <a:latin typeface="Calibri"/>
-              </a:rPr>
-              <a:t>▸  </a:t>
-            </a:r>
-            <a:r>
-              <a:rPr sz="1600" b="0">
-                <a:solidFill>
-                  <a:srgbClr val="37424F"/>
-                </a:solidFill>
-                <a:latin typeface="Calibri"/>
-              </a:rPr>
-              <a:t>Back-test: of </a:t>
-            </a:r>
-            <a:r>
-              <a:rPr sz="1600" b="1">
-                <a:solidFill>
-                  <a:srgbClr val="111820"/>
-                </a:solidFill>
-                <a:latin typeface="Calibri"/>
-              </a:rPr>
-              <a:t>105.7 GW proposed in 2022, only ~9.6 GW built, 52.6 GW dropped</a:t>
-            </a:r>
-            <a:r>
-              <a:rPr sz="1600" b="0">
-                <a:solidFill>
-                  <a:srgbClr val="37424F"/>
-                </a:solidFill>
-                <a:latin typeface="Calibri"/>
-              </a:rPr>
-              <a:t> by 2026 (~9% conversion).</a:t>
-            </a:r>
-          </a:p>
-          <a:p>
-            <a:pPr>
-              <a:lnSpc>
-                <a:spcPct val="105000"/>
-              </a:lnSpc>
-              <a:spcAft>
-                <a:spcPts val="1100"/>
-              </a:spcAft>
-            </a:pPr>
-            <a:r>
-              <a:rPr sz="1600" b="1">
-                <a:solidFill>
-                  <a:srgbClr val="2F7D3A"/>
-                </a:solidFill>
-                <a:latin typeface="Calibri"/>
-              </a:rPr>
-              <a:t>▸  </a:t>
-            </a:r>
-            <a:r>
-              <a:rPr sz="1600" b="0">
-                <a:solidFill>
-                  <a:srgbClr val="37424F"/>
-                </a:solidFill>
-                <a:latin typeface="Calibri"/>
-              </a:rPr>
-              <a:t>Even “</a:t>
-            </a:r>
-            <a:r>
-              <a:rPr sz="1600" b="1">
-                <a:solidFill>
-                  <a:srgbClr val="111820"/>
-                </a:solidFill>
-                <a:latin typeface="Calibri"/>
-              </a:rPr>
-              <a:t>Committed</a:t>
-            </a:r>
-            <a:r>
-              <a:rPr sz="1600" b="0">
-                <a:solidFill>
-                  <a:srgbClr val="37424F"/>
-                </a:solidFill>
-                <a:latin typeface="Calibri"/>
-              </a:rPr>
-              <a:t>” isn't concrete: Snowy 2.0 has been committed 4+ years and still isn't built.</a:t>
-            </a:r>
-          </a:p>
-          <a:p>
-            <a:pPr>
-              <a:lnSpc>
-                <a:spcPct val="105000"/>
-              </a:lnSpc>
-              <a:spcAft>
-                <a:spcPts val="1100"/>
-              </a:spcAft>
-            </a:pPr>
-            <a:r>
-              <a:rPr sz="1600" b="1">
-                <a:solidFill>
-                  <a:srgbClr val="2F7D3A"/>
-                </a:solidFill>
-                <a:latin typeface="Calibri"/>
-              </a:rPr>
-              <a:t>▸  </a:t>
-            </a:r>
-            <a:r>
-              <a:rPr sz="1600" b="1">
-                <a:solidFill>
-                  <a:srgbClr val="111820"/>
-                </a:solidFill>
-                <a:latin typeface="Calibri"/>
-              </a:rPr>
-              <a:t>CIS: ~32 GW contracted, just 0.29 GW operating</a:t>
-            </a:r>
-            <a:r>
-              <a:rPr sz="1600" b="0">
-                <a:solidFill>
-                  <a:srgbClr val="37424F"/>
-                </a:solidFill>
-                <a:latin typeface="Calibri"/>
-              </a:rPr>
-              <a:t> — a floor price is not a built asset.</a:t>
-            </a:r>
-          </a:p>
-          <a:p>
-            <a:pPr>
-              <a:lnSpc>
-                <a:spcPct val="105000"/>
-              </a:lnSpc>
-              <a:spcAft>
-                <a:spcPts val="1100"/>
-              </a:spcAft>
-            </a:pPr>
-            <a:r>
-              <a:rPr sz="1600" b="1">
-                <a:solidFill>
-                  <a:srgbClr val="2F7D3A"/>
-                </a:solidFill>
-                <a:latin typeface="Calibri"/>
-              </a:rPr>
-              <a:t>▸  </a:t>
-            </a:r>
-            <a:r>
-              <a:rPr sz="1600" b="0">
-                <a:solidFill>
-                  <a:srgbClr val="37424F"/>
-                </a:solidFill>
-                <a:latin typeface="Calibri"/>
-              </a:rPr>
-              <a:t>Only </a:t>
-            </a:r>
-            <a:r>
-              <a:rPr sz="1600" b="1">
-                <a:solidFill>
-                  <a:srgbClr val="111820"/>
-                </a:solidFill>
-                <a:latin typeface="Calibri"/>
-              </a:rPr>
-              <a:t>3 major transmission lines</a:t>
-            </a:r>
-            <a:r>
-              <a:rPr sz="1600" b="0">
-                <a:solidFill>
-                  <a:srgbClr val="37424F"/>
-                </a:solidFill>
-                <a:latin typeface="Calibri"/>
-              </a:rPr>
-              <a:t> are in construction; ~30% of projects draw a full EPBC assessment.</a:t>
-            </a:r>
-          </a:p>
-          <a:p>
-            <a:pPr>
-              <a:lnSpc>
-                <a:spcPct val="105000"/>
-              </a:lnSpc>
-              <a:spcAft>
-                <a:spcPts val="1100"/>
-              </a:spcAft>
-            </a:pPr>
-            <a:r>
-              <a:rPr sz="1600" b="1">
-                <a:solidFill>
-                  <a:srgbClr val="2F7D3A"/>
-                </a:solidFill>
-                <a:latin typeface="Calibri"/>
-              </a:rPr>
-              <a:t>▸  </a:t>
-            </a:r>
-            <a:r>
-              <a:rPr sz="1600" b="0">
-                <a:solidFill>
-                  <a:srgbClr val="37424F"/>
-                </a:solidFill>
-                <a:latin typeface="Calibri"/>
-              </a:rPr>
-              <a:t>Commissioning takes real time: </a:t>
-            </a:r>
-            <a:r>
-              <a:rPr sz="1600" b="1">
-                <a:solidFill>
-                  <a:srgbClr val="111820"/>
-                </a:solidFill>
-                <a:latin typeface="Calibri"/>
-              </a:rPr>
-              <a:t>wind ~10 months, batteries ~7</a:t>
-            </a:r>
-            <a:r>
-              <a:rPr sz="1600" b="0">
-                <a:solidFill>
-                  <a:srgbClr val="37424F"/>
-                </a:solidFill>
-                <a:latin typeface="Calibri"/>
-              </a:rPr>
-              <a:t> from first energisation.</a:t>
-            </a:r>
-          </a:p>
-        </p:txBody>
-      </p:sp>
+              <a:t>The long view — the mirage growing</a:t>
+            </a:r>
+          </a:p>
+        </p:txBody>
+      </p:sp>
+      <p:graphicFrame>
+        <p:nvGraphicFramePr>
+          <p:cNvPr id="6" name="Chart 5"/>
+          <p:cNvGraphicFramePr>
+            <a:graphicFrameLocks noGrp="1"/>
+          </p:cNvGraphicFramePr>
+          <p:nvPr/>
+        </p:nvGraphicFramePr>
+        <p:xfrm>
+          <a:off x="548640" y="1554480"/>
+          <a:ext cx="11064240" cy="4114800"/>
+        </p:xfrm>
+        <a:graphic>
+          <a:graphicData uri="http://schemas.openxmlformats.org/drawingml/2006/chart">
+            <c:chart xmlns:c="http://schemas.openxmlformats.org/drawingml/2006/chart" r:id="rId2"/>
+          </a:graphicData>
+        </a:graphic>
+      </p:graphicFrame>
       <p:sp>
         <p:nvSpPr>
           <p:cNvPr id="7" name="Rectangle 6"/>
@@ -20877,8 +21247,8 @@
         </p:nvSpPr>
         <p:spPr>
           <a:xfrm>
-            <a:off x="548640" y="5669280"/>
-            <a:ext cx="11064240" cy="685800"/>
+            <a:off x="548640" y="5806440"/>
+            <a:ext cx="11064240" cy="566928"/>
           </a:xfrm>
           <a:prstGeom prst="rect">
             <a:avLst/>
@@ -20888,7 +21258,7 @@
           </a:solidFill>
           <a:ln w="9525">
             <a:solidFill>
-              <a:srgbClr val="D8DEE6"/>
+              <a:srgbClr val="2F7D3A"/>
             </a:solidFill>
           </a:ln>
           <a:effectLst/>
@@ -20923,7 +21293,7 @@
         </p:nvSpPr>
         <p:spPr>
           <a:xfrm>
-            <a:off x="731520" y="5779008"/>
+            <a:off x="731520" y="5852160"/>
             <a:ext cx="10698480" cy="457200"/>
           </a:xfrm>
           <a:prstGeom prst="rect">
@@ -20949,13 +21319,22 @@
               </a:spcAft>
             </a:pPr>
             <a:r>
-              <a:rPr sz="1350" b="0" i="1">
+              <a:rPr sz="1200" b="1" i="0">
+                <a:solidFill>
+                  <a:srgbClr val="2F7D3A"/>
+                </a:solidFill>
+                <a:latin typeface="Consolas"/>
+              </a:rPr>
+              <a:t>Takeaway  </a:t>
+            </a:r>
+            <a:r>
+              <a:rPr sz="1400" b="0" i="0">
                 <a:solidFill>
                   <a:srgbClr val="37424F"/>
                 </a:solidFill>
                 <a:latin typeface="Calibri"/>
               </a:rPr>
-              <a:t>The back-test is the crown jewel: “Committed” is a probability, not a promise — and the data can price it.</a:t>
+              <a:t>Proposed capacity multiplied ~7× to 346 GW while committed and built crawled — the gap is the mirage.</a:t>
             </a:r>
           </a:p>
         </p:txBody>
@@ -22552,30 +22931,313 @@
                 </a:solidFill>
                 <a:latin typeface="Calibri"/>
               </a:rPr>
-              <a:t>Provocations — take a position</a:t>
-            </a:r>
-          </a:p>
-        </p:txBody>
-      </p:sp>
-      <p:sp>
-        <p:nvSpPr>
-          <p:cNvPr id="6" name="Rectangle 5"/>
+              <a:t>The data on the table</a:t>
+            </a:r>
+          </a:p>
+        </p:txBody>
+      </p:sp>
+      <p:sp>
+        <p:nvSpPr>
+          <p:cNvPr id="6" name="TextBox 5"/>
+          <p:cNvSpPr txBox="1"/>
+          <p:nvPr/>
+        </p:nvSpPr>
+        <p:spPr>
+          <a:xfrm>
+            <a:off x="548640" y="1600200"/>
+            <a:ext cx="11064240" cy="4206240"/>
+          </a:xfrm>
+          <a:prstGeom prst="rect">
+            <a:avLst/>
+          </a:prstGeom>
+          <a:noFill/>
+        </p:spPr>
+        <p:txBody>
+          <a:bodyPr wrap="square" lIns="0" rIns="0" tIns="0" bIns="0">
+            <a:spAutoFit/>
+          </a:bodyPr>
+          <a:lstStyle/>
+          <a:p>
+            <a:pPr>
+              <a:lnSpc>
+                <a:spcPct val="105000"/>
+              </a:lnSpc>
+              <a:spcAft>
+                <a:spcPts val="1100"/>
+              </a:spcAft>
+            </a:pPr>
+            <a:r>
+              <a:rPr sz="1600" b="1">
+                <a:solidFill>
+                  <a:srgbClr val="2F7D3A"/>
+                </a:solidFill>
+                <a:latin typeface="Calibri"/>
+              </a:rPr>
+              <a:t>▸  </a:t>
+            </a:r>
+            <a:r>
+              <a:rPr sz="1600" b="1">
+                <a:solidFill>
+                  <a:srgbClr val="111820"/>
+                </a:solidFill>
+                <a:latin typeface="Calibri"/>
+              </a:rPr>
+              <a:t>Proposed 346 GW vs committed ~13 GW vs built ~70 GW</a:t>
+            </a:r>
+            <a:r>
+              <a:rPr sz="1600" b="0">
+                <a:solidFill>
+                  <a:srgbClr val="37424F"/>
+                </a:solidFill>
+                <a:latin typeface="Calibri"/>
+              </a:rPr>
+              <a:t> (2026) — a ~19:1 funnel.</a:t>
+            </a:r>
+          </a:p>
+          <a:p>
+            <a:pPr>
+              <a:lnSpc>
+                <a:spcPct val="105000"/>
+              </a:lnSpc>
+              <a:spcAft>
+                <a:spcPts val="1100"/>
+              </a:spcAft>
+            </a:pPr>
+            <a:r>
+              <a:rPr sz="1600" b="1">
+                <a:solidFill>
+                  <a:srgbClr val="2F7D3A"/>
+                </a:solidFill>
+                <a:latin typeface="Calibri"/>
+              </a:rPr>
+              <a:t>▸  </a:t>
+            </a:r>
+            <a:r>
+              <a:rPr sz="1600" b="0">
+                <a:solidFill>
+                  <a:srgbClr val="37424F"/>
+                </a:solidFill>
+                <a:latin typeface="Calibri"/>
+              </a:rPr>
+              <a:t>Back-test: of </a:t>
+            </a:r>
+            <a:r>
+              <a:rPr sz="1600" b="1">
+                <a:solidFill>
+                  <a:srgbClr val="111820"/>
+                </a:solidFill>
+                <a:latin typeface="Calibri"/>
+              </a:rPr>
+              <a:t>105.7 GW proposed in 2022, only ~9.6 GW built, 52.6 GW dropped</a:t>
+            </a:r>
+            <a:r>
+              <a:rPr sz="1600" b="0">
+                <a:solidFill>
+                  <a:srgbClr val="37424F"/>
+                </a:solidFill>
+                <a:latin typeface="Calibri"/>
+              </a:rPr>
+              <a:t> by 2026 (~9% conversion).</a:t>
+            </a:r>
+          </a:p>
+          <a:p>
+            <a:pPr>
+              <a:lnSpc>
+                <a:spcPct val="105000"/>
+              </a:lnSpc>
+              <a:spcAft>
+                <a:spcPts val="1100"/>
+              </a:spcAft>
+            </a:pPr>
+            <a:r>
+              <a:rPr sz="1600" b="1">
+                <a:solidFill>
+                  <a:srgbClr val="2F7D3A"/>
+                </a:solidFill>
+                <a:latin typeface="Calibri"/>
+              </a:rPr>
+              <a:t>▸  </a:t>
+            </a:r>
+            <a:r>
+              <a:rPr sz="1600" b="0">
+                <a:solidFill>
+                  <a:srgbClr val="37424F"/>
+                </a:solidFill>
+                <a:latin typeface="Calibri"/>
+              </a:rPr>
+              <a:t>Even “</a:t>
+            </a:r>
+            <a:r>
+              <a:rPr sz="1600" b="1">
+                <a:solidFill>
+                  <a:srgbClr val="111820"/>
+                </a:solidFill>
+                <a:latin typeface="Calibri"/>
+              </a:rPr>
+              <a:t>Committed</a:t>
+            </a:r>
+            <a:r>
+              <a:rPr sz="1600" b="0">
+                <a:solidFill>
+                  <a:srgbClr val="37424F"/>
+                </a:solidFill>
+                <a:latin typeface="Calibri"/>
+              </a:rPr>
+              <a:t>” isn't concrete: Snowy 2.0 has been committed 4+ years and still isn't built.</a:t>
+            </a:r>
+          </a:p>
+          <a:p>
+            <a:pPr>
+              <a:lnSpc>
+                <a:spcPct val="105000"/>
+              </a:lnSpc>
+              <a:spcAft>
+                <a:spcPts val="1100"/>
+              </a:spcAft>
+            </a:pPr>
+            <a:r>
+              <a:rPr sz="1600" b="1">
+                <a:solidFill>
+                  <a:srgbClr val="2F7D3A"/>
+                </a:solidFill>
+                <a:latin typeface="Calibri"/>
+              </a:rPr>
+              <a:t>▸  </a:t>
+            </a:r>
+            <a:r>
+              <a:rPr sz="1600" b="1">
+                <a:solidFill>
+                  <a:srgbClr val="111820"/>
+                </a:solidFill>
+                <a:latin typeface="Calibri"/>
+              </a:rPr>
+              <a:t>CIS: ~32 GW contracted, just 0.29 GW operating</a:t>
+            </a:r>
+            <a:r>
+              <a:rPr sz="1600" b="0">
+                <a:solidFill>
+                  <a:srgbClr val="37424F"/>
+                </a:solidFill>
+                <a:latin typeface="Calibri"/>
+              </a:rPr>
+              <a:t> — a floor price is not a built asset.</a:t>
+            </a:r>
+          </a:p>
+          <a:p>
+            <a:pPr>
+              <a:lnSpc>
+                <a:spcPct val="105000"/>
+              </a:lnSpc>
+              <a:spcAft>
+                <a:spcPts val="1100"/>
+              </a:spcAft>
+            </a:pPr>
+            <a:r>
+              <a:rPr sz="1600" b="1">
+                <a:solidFill>
+                  <a:srgbClr val="2F7D3A"/>
+                </a:solidFill>
+                <a:latin typeface="Calibri"/>
+              </a:rPr>
+              <a:t>▸  </a:t>
+            </a:r>
+            <a:r>
+              <a:rPr sz="1600" b="0">
+                <a:solidFill>
+                  <a:srgbClr val="37424F"/>
+                </a:solidFill>
+                <a:latin typeface="Calibri"/>
+              </a:rPr>
+              <a:t>Only </a:t>
+            </a:r>
+            <a:r>
+              <a:rPr sz="1600" b="1">
+                <a:solidFill>
+                  <a:srgbClr val="111820"/>
+                </a:solidFill>
+                <a:latin typeface="Calibri"/>
+              </a:rPr>
+              <a:t>3 major transmission lines</a:t>
+            </a:r>
+            <a:r>
+              <a:rPr sz="1600" b="0">
+                <a:solidFill>
+                  <a:srgbClr val="37424F"/>
+                </a:solidFill>
+                <a:latin typeface="Calibri"/>
+              </a:rPr>
+              <a:t> are in construction; ~30% of projects draw a full EPBC assessment.</a:t>
+            </a:r>
+          </a:p>
+          <a:p>
+            <a:pPr>
+              <a:lnSpc>
+                <a:spcPct val="105000"/>
+              </a:lnSpc>
+              <a:spcAft>
+                <a:spcPts val="1100"/>
+              </a:spcAft>
+            </a:pPr>
+            <a:r>
+              <a:rPr sz="1600" b="1">
+                <a:solidFill>
+                  <a:srgbClr val="2F7D3A"/>
+                </a:solidFill>
+                <a:latin typeface="Calibri"/>
+              </a:rPr>
+              <a:t>▸  </a:t>
+            </a:r>
+            <a:r>
+              <a:rPr sz="1600" b="0">
+                <a:solidFill>
+                  <a:srgbClr val="37424F"/>
+                </a:solidFill>
+                <a:latin typeface="Calibri"/>
+              </a:rPr>
+              <a:t>Commissioning takes real time: </a:t>
+            </a:r>
+            <a:r>
+              <a:rPr sz="1600" b="1">
+                <a:solidFill>
+                  <a:srgbClr val="111820"/>
+                </a:solidFill>
+                <a:latin typeface="Calibri"/>
+              </a:rPr>
+              <a:t>wind ~10 months, batteries ~7</a:t>
+            </a:r>
+            <a:r>
+              <a:rPr sz="1600" b="0">
+                <a:solidFill>
+                  <a:srgbClr val="37424F"/>
+                </a:solidFill>
+                <a:latin typeface="Calibri"/>
+              </a:rPr>
+              <a:t> from first energisation.</a:t>
+            </a:r>
+          </a:p>
+        </p:txBody>
+      </p:sp>
+      <p:sp>
+        <p:nvSpPr>
+          <p:cNvPr id="7" name="Rectangle 6"/>
           <p:cNvSpPr/>
           <p:nvPr/>
         </p:nvSpPr>
         <p:spPr>
           <a:xfrm>
-            <a:off x="548640" y="1600200"/>
-            <a:ext cx="457200" cy="457200"/>
+            <a:off x="548640" y="5669280"/>
+            <a:ext cx="11064240" cy="685800"/>
           </a:xfrm>
           <a:prstGeom prst="rect">
             <a:avLst/>
           </a:prstGeom>
           <a:solidFill>
-            <a:srgbClr val="2F7D3A"/>
+            <a:srgbClr val="F4F6F9"/>
           </a:solidFill>
-          <a:ln>
-            <a:noFill/>
+          <a:ln w="9525">
+            <a:solidFill>
+              <a:srgbClr val="D8DEE6"/>
+            </a:solidFill>
           </a:ln>
           <a:effectLst/>
         </p:spPr>
@@ -22603,59 +23265,14 @@
       </p:sp>
       <p:sp>
         <p:nvSpPr>
-          <p:cNvPr id="7" name="TextBox 6"/>
-          <p:cNvSpPr txBox="1"/>
-          <p:nvPr/>
-        </p:nvSpPr>
-        <p:spPr>
-          <a:xfrm>
-            <a:off x="548640" y="1600200"/>
-            <a:ext cx="457200" cy="457200"/>
-          </a:xfrm>
-          <a:prstGeom prst="rect">
-            <a:avLst/>
-          </a:prstGeom>
-          <a:noFill/>
-        </p:spPr>
-        <p:txBody>
-          <a:bodyPr wrap="square" anchor="ctr" lIns="0" rIns="0" tIns="0" bIns="0">
-            <a:spAutoFit/>
-          </a:bodyPr>
-          <a:lstStyle/>
-          <a:p>
-            <a:pPr algn="ctr">
-              <a:lnSpc>
-                <a:spcPct val="106000"/>
-              </a:lnSpc>
-              <a:spcBef>
-                <a:spcPts val="0"/>
-              </a:spcBef>
-              <a:spcAft>
-                <a:spcPts val="600"/>
-              </a:spcAft>
-            </a:pPr>
-            <a:r>
-              <a:rPr sz="1800" b="1" i="0">
-                <a:solidFill>
-                  <a:srgbClr val="FFFFFF"/>
-                </a:solidFill>
-                <a:latin typeface="Calibri"/>
-              </a:rPr>
-              <a:t>A</a:t>
-            </a:r>
-          </a:p>
-        </p:txBody>
-      </p:sp>
-      <p:sp>
-        <p:nvSpPr>
           <p:cNvPr id="8" name="TextBox 7"/>
           <p:cNvSpPr txBox="1"/>
           <p:nvPr/>
         </p:nvSpPr>
         <p:spPr>
           <a:xfrm>
-            <a:off x="1188720" y="1618488"/>
-            <a:ext cx="10332720" cy="731520"/>
+            <a:off x="731520" y="5779008"/>
+            <a:ext cx="10698480" cy="457200"/>
           </a:xfrm>
           <a:prstGeom prst="rect">
             <a:avLst/>
@@ -22680,558 +23297,20 @@
               </a:spcAft>
             </a:pPr>
             <a:r>
-              <a:rPr sz="1600" b="0" i="0">
+              <a:rPr sz="1350" b="0" i="1">
                 <a:solidFill>
                   <a:srgbClr val="37424F"/>
                 </a:solidFill>
                 <a:latin typeface="Calibri"/>
               </a:rPr>
-              <a:t>Which gate kills the most megawatts — connection, transmission, offtake, or planning?</a:t>
-            </a:r>
-          </a:p>
-        </p:txBody>
-      </p:sp>
-      <p:sp>
-        <p:nvSpPr>
-          <p:cNvPr id="9" name="Rectangle 8"/>
-          <p:cNvSpPr/>
-          <p:nvPr/>
-        </p:nvSpPr>
-        <p:spPr>
-          <a:xfrm>
-            <a:off x="548640" y="2441448"/>
-            <a:ext cx="457200" cy="457200"/>
-          </a:xfrm>
-          <a:prstGeom prst="rect">
-            <a:avLst/>
-          </a:prstGeom>
-          <a:solidFill>
-            <a:srgbClr val="2F7D3A"/>
-          </a:solidFill>
-          <a:ln>
-            <a:noFill/>
-          </a:ln>
-          <a:effectLst/>
-        </p:spPr>
-        <p:style>
-          <a:lnRef idx="1">
-            <a:schemeClr val="accent1"/>
-          </a:lnRef>
-          <a:fillRef idx="3">
-            <a:schemeClr val="accent1"/>
-          </a:fillRef>
-          <a:effectRef idx="2">
-            <a:schemeClr val="accent1"/>
-          </a:effectRef>
-          <a:fontRef idx="minor">
-            <a:schemeClr val="lt1"/>
-          </a:fontRef>
-        </p:style>
-        <p:txBody>
-          <a:bodyPr rtlCol="0" anchor="ctr"/>
-          <a:lstStyle/>
-          <a:p>
-            <a:pPr algn="ctr"/>
-          </a:p>
-        </p:txBody>
-      </p:sp>
-      <p:sp>
-        <p:nvSpPr>
-          <p:cNvPr id="10" name="TextBox 9"/>
-          <p:cNvSpPr txBox="1"/>
-          <p:nvPr/>
-        </p:nvSpPr>
-        <p:spPr>
-          <a:xfrm>
-            <a:off x="548640" y="2441448"/>
-            <a:ext cx="457200" cy="457200"/>
-          </a:xfrm>
-          <a:prstGeom prst="rect">
-            <a:avLst/>
-          </a:prstGeom>
-          <a:noFill/>
-        </p:spPr>
-        <p:txBody>
-          <a:bodyPr wrap="square" anchor="ctr" lIns="0" rIns="0" tIns="0" bIns="0">
-            <a:spAutoFit/>
-          </a:bodyPr>
-          <a:lstStyle/>
-          <a:p>
-            <a:pPr algn="ctr">
-              <a:lnSpc>
-                <a:spcPct val="106000"/>
-              </a:lnSpc>
-              <a:spcBef>
-                <a:spcPts val="0"/>
-              </a:spcBef>
-              <a:spcAft>
-                <a:spcPts val="600"/>
-              </a:spcAft>
-            </a:pPr>
-            <a:r>
-              <a:rPr sz="1800" b="1" i="0">
-                <a:solidFill>
-                  <a:srgbClr val="FFFFFF"/>
-                </a:solidFill>
-                <a:latin typeface="Calibri"/>
-              </a:rPr>
-              <a:t>B</a:t>
-            </a:r>
-          </a:p>
-        </p:txBody>
-      </p:sp>
-      <p:sp>
-        <p:nvSpPr>
-          <p:cNvPr id="11" name="TextBox 10"/>
-          <p:cNvSpPr txBox="1"/>
-          <p:nvPr/>
-        </p:nvSpPr>
-        <p:spPr>
-          <a:xfrm>
-            <a:off x="1188720" y="2459736"/>
-            <a:ext cx="10332720" cy="731520"/>
-          </a:xfrm>
-          <a:prstGeom prst="rect">
-            <a:avLst/>
-          </a:prstGeom>
-          <a:noFill/>
-        </p:spPr>
-        <p:txBody>
-          <a:bodyPr wrap="square" anchor="ctr" lIns="0" rIns="0" tIns="0" bIns="0">
-            <a:spAutoFit/>
-          </a:bodyPr>
-          <a:lstStyle/>
-          <a:p>
-            <a:pPr algn="l">
-              <a:lnSpc>
-                <a:spcPct val="106000"/>
-              </a:lnSpc>
-              <a:spcBef>
-                <a:spcPts val="0"/>
-              </a:spcBef>
-              <a:spcAft>
-                <a:spcPts val="600"/>
-              </a:spcAft>
-            </a:pPr>
-            <a:r>
-              <a:rPr sz="1600" b="0" i="0">
-                <a:solidFill>
-                  <a:srgbClr val="37424F"/>
-                </a:solidFill>
-                <a:latin typeface="Calibri"/>
-              </a:rPr>
-              <a:t>What early signal best separates the real projects from the mirage?</a:t>
-            </a:r>
-          </a:p>
-        </p:txBody>
-      </p:sp>
-      <p:sp>
-        <p:nvSpPr>
-          <p:cNvPr id="12" name="Rectangle 11"/>
-          <p:cNvSpPr/>
-          <p:nvPr/>
-        </p:nvSpPr>
-        <p:spPr>
-          <a:xfrm>
-            <a:off x="548640" y="3282696"/>
-            <a:ext cx="457200" cy="457200"/>
-          </a:xfrm>
-          <a:prstGeom prst="rect">
-            <a:avLst/>
-          </a:prstGeom>
-          <a:solidFill>
-            <a:srgbClr val="2F7D3A"/>
-          </a:solidFill>
-          <a:ln>
-            <a:noFill/>
-          </a:ln>
-          <a:effectLst/>
-        </p:spPr>
-        <p:style>
-          <a:lnRef idx="1">
-            <a:schemeClr val="accent1"/>
-          </a:lnRef>
-          <a:fillRef idx="3">
-            <a:schemeClr val="accent1"/>
-          </a:fillRef>
-          <a:effectRef idx="2">
-            <a:schemeClr val="accent1"/>
-          </a:effectRef>
-          <a:fontRef idx="minor">
-            <a:schemeClr val="lt1"/>
-          </a:fontRef>
-        </p:style>
-        <p:txBody>
-          <a:bodyPr rtlCol="0" anchor="ctr"/>
-          <a:lstStyle/>
-          <a:p>
-            <a:pPr algn="ctr"/>
-          </a:p>
-        </p:txBody>
-      </p:sp>
-      <p:sp>
-        <p:nvSpPr>
-          <p:cNvPr id="13" name="TextBox 12"/>
-          <p:cNvSpPr txBox="1"/>
-          <p:nvPr/>
-        </p:nvSpPr>
-        <p:spPr>
-          <a:xfrm>
-            <a:off x="548640" y="3282696"/>
-            <a:ext cx="457200" cy="457200"/>
-          </a:xfrm>
-          <a:prstGeom prst="rect">
-            <a:avLst/>
-          </a:prstGeom>
-          <a:noFill/>
-        </p:spPr>
-        <p:txBody>
-          <a:bodyPr wrap="square" anchor="ctr" lIns="0" rIns="0" tIns="0" bIns="0">
-            <a:spAutoFit/>
-          </a:bodyPr>
-          <a:lstStyle/>
-          <a:p>
-            <a:pPr algn="ctr">
-              <a:lnSpc>
-                <a:spcPct val="106000"/>
-              </a:lnSpc>
-              <a:spcBef>
-                <a:spcPts val="0"/>
-              </a:spcBef>
-              <a:spcAft>
-                <a:spcPts val="600"/>
-              </a:spcAft>
-            </a:pPr>
-            <a:r>
-              <a:rPr sz="1800" b="1" i="0">
-                <a:solidFill>
-                  <a:srgbClr val="FFFFFF"/>
-                </a:solidFill>
-                <a:latin typeface="Calibri"/>
-              </a:rPr>
-              <a:t>C</a:t>
-            </a:r>
-          </a:p>
-        </p:txBody>
-      </p:sp>
-      <p:sp>
-        <p:nvSpPr>
-          <p:cNvPr id="14" name="TextBox 13"/>
-          <p:cNvSpPr txBox="1"/>
-          <p:nvPr/>
-        </p:nvSpPr>
-        <p:spPr>
-          <a:xfrm>
-            <a:off x="1188720" y="3300984"/>
-            <a:ext cx="10332720" cy="731520"/>
-          </a:xfrm>
-          <a:prstGeom prst="rect">
-            <a:avLst/>
-          </a:prstGeom>
-          <a:noFill/>
-        </p:spPr>
-        <p:txBody>
-          <a:bodyPr wrap="square" anchor="ctr" lIns="0" rIns="0" tIns="0" bIns="0">
-            <a:spAutoFit/>
-          </a:bodyPr>
-          <a:lstStyle/>
-          <a:p>
-            <a:pPr algn="l">
-              <a:lnSpc>
-                <a:spcPct val="106000"/>
-              </a:lnSpc>
-              <a:spcBef>
-                <a:spcPts val="0"/>
-              </a:spcBef>
-              <a:spcAft>
-                <a:spcPts val="600"/>
-              </a:spcAft>
-            </a:pPr>
-            <a:r>
-              <a:rPr sz="1600" b="0" i="0">
-                <a:solidFill>
-                  <a:srgbClr val="37424F"/>
-                </a:solidFill>
-                <a:latin typeface="Calibri"/>
-              </a:rPr>
-              <a:t>Does our screening assume anything remotely as brutal as ~9% proposed-to-built?</a:t>
-            </a:r>
-          </a:p>
-        </p:txBody>
-      </p:sp>
-      <p:sp>
-        <p:nvSpPr>
-          <p:cNvPr id="15" name="Rectangle 14"/>
-          <p:cNvSpPr/>
-          <p:nvPr/>
-        </p:nvSpPr>
-        <p:spPr>
-          <a:xfrm>
-            <a:off x="548640" y="4123944"/>
-            <a:ext cx="457200" cy="457200"/>
-          </a:xfrm>
-          <a:prstGeom prst="rect">
-            <a:avLst/>
-          </a:prstGeom>
-          <a:solidFill>
-            <a:srgbClr val="2F7D3A"/>
-          </a:solidFill>
-          <a:ln>
-            <a:noFill/>
-          </a:ln>
-          <a:effectLst/>
-        </p:spPr>
-        <p:style>
-          <a:lnRef idx="1">
-            <a:schemeClr val="accent1"/>
-          </a:lnRef>
-          <a:fillRef idx="3">
-            <a:schemeClr val="accent1"/>
-          </a:fillRef>
-          <a:effectRef idx="2">
-            <a:schemeClr val="accent1"/>
-          </a:effectRef>
-          <a:fontRef idx="minor">
-            <a:schemeClr val="lt1"/>
-          </a:fontRef>
-        </p:style>
-        <p:txBody>
-          <a:bodyPr rtlCol="0" anchor="ctr"/>
-          <a:lstStyle/>
-          <a:p>
-            <a:pPr algn="ctr"/>
-          </a:p>
-        </p:txBody>
-      </p:sp>
-      <p:sp>
-        <p:nvSpPr>
-          <p:cNvPr id="16" name="TextBox 15"/>
-          <p:cNvSpPr txBox="1"/>
-          <p:nvPr/>
-        </p:nvSpPr>
-        <p:spPr>
-          <a:xfrm>
-            <a:off x="548640" y="4123944"/>
-            <a:ext cx="457200" cy="457200"/>
-          </a:xfrm>
-          <a:prstGeom prst="rect">
-            <a:avLst/>
-          </a:prstGeom>
-          <a:noFill/>
-        </p:spPr>
-        <p:txBody>
-          <a:bodyPr wrap="square" anchor="ctr" lIns="0" rIns="0" tIns="0" bIns="0">
-            <a:spAutoFit/>
-          </a:bodyPr>
-          <a:lstStyle/>
-          <a:p>
-            <a:pPr algn="ctr">
-              <a:lnSpc>
-                <a:spcPct val="106000"/>
-              </a:lnSpc>
-              <a:spcBef>
-                <a:spcPts val="0"/>
-              </a:spcBef>
-              <a:spcAft>
-                <a:spcPts val="600"/>
-              </a:spcAft>
-            </a:pPr>
-            <a:r>
-              <a:rPr sz="1800" b="1" i="0">
-                <a:solidFill>
-                  <a:srgbClr val="FFFFFF"/>
-                </a:solidFill>
-                <a:latin typeface="Calibri"/>
-              </a:rPr>
-              <a:t>D</a:t>
-            </a:r>
-          </a:p>
-        </p:txBody>
-      </p:sp>
-      <p:sp>
-        <p:nvSpPr>
-          <p:cNvPr id="17" name="TextBox 16"/>
-          <p:cNvSpPr txBox="1"/>
-          <p:nvPr/>
-        </p:nvSpPr>
-        <p:spPr>
-          <a:xfrm>
-            <a:off x="1188720" y="4142232"/>
-            <a:ext cx="10332720" cy="731520"/>
-          </a:xfrm>
-          <a:prstGeom prst="rect">
-            <a:avLst/>
-          </a:prstGeom>
-          <a:noFill/>
-        </p:spPr>
-        <p:txBody>
-          <a:bodyPr wrap="square" anchor="ctr" lIns="0" rIns="0" tIns="0" bIns="0">
-            <a:spAutoFit/>
-          </a:bodyPr>
-          <a:lstStyle/>
-          <a:p>
-            <a:pPr algn="l">
-              <a:lnSpc>
-                <a:spcPct val="106000"/>
-              </a:lnSpc>
-              <a:spcBef>
-                <a:spcPts val="0"/>
-              </a:spcBef>
-              <a:spcAft>
-                <a:spcPts val="600"/>
-              </a:spcAft>
-            </a:pPr>
-            <a:r>
-              <a:rPr sz="1600" b="0" i="0">
-                <a:solidFill>
-                  <a:srgbClr val="37424F"/>
-                </a:solidFill>
-                <a:latin typeface="Calibri"/>
-              </a:rPr>
-              <a:t>If you could unlock one transmission line, which frees the most generation?</a:t>
-            </a:r>
-          </a:p>
-        </p:txBody>
-      </p:sp>
-      <p:sp>
-        <p:nvSpPr>
-          <p:cNvPr id="18" name="Rectangle 17"/>
-          <p:cNvSpPr/>
-          <p:nvPr/>
-        </p:nvSpPr>
-        <p:spPr>
-          <a:xfrm>
-            <a:off x="548640" y="5532120"/>
-            <a:ext cx="11064240" cy="777240"/>
-          </a:xfrm>
-          <a:prstGeom prst="rect">
-            <a:avLst/>
-          </a:prstGeom>
-          <a:solidFill>
-            <a:srgbClr val="F4F6F9"/>
-          </a:solidFill>
-          <a:ln w="9525">
-            <a:solidFill>
-              <a:srgbClr val="2F7D3A"/>
-            </a:solidFill>
-          </a:ln>
-          <a:effectLst/>
-        </p:spPr>
-        <p:style>
-          <a:lnRef idx="1">
-            <a:schemeClr val="accent1"/>
-          </a:lnRef>
-          <a:fillRef idx="3">
-            <a:schemeClr val="accent1"/>
-          </a:fillRef>
-          <a:effectRef idx="2">
-            <a:schemeClr val="accent1"/>
-          </a:effectRef>
-          <a:fontRef idx="minor">
-            <a:schemeClr val="lt1"/>
-          </a:fontRef>
-        </p:style>
-        <p:txBody>
-          <a:bodyPr rtlCol="0" anchor="ctr"/>
-          <a:lstStyle/>
-          <a:p>
-            <a:pPr algn="ctr"/>
-          </a:p>
-        </p:txBody>
-      </p:sp>
-      <p:sp>
-        <p:nvSpPr>
-          <p:cNvPr id="19" name="TextBox 18"/>
-          <p:cNvSpPr txBox="1"/>
-          <p:nvPr/>
-        </p:nvSpPr>
-        <p:spPr>
-          <a:xfrm>
-            <a:off x="731520" y="5632704"/>
-            <a:ext cx="10698480" cy="320040"/>
-          </a:xfrm>
-          <a:prstGeom prst="rect">
-            <a:avLst/>
-          </a:prstGeom>
-          <a:noFill/>
-        </p:spPr>
-        <p:txBody>
-          <a:bodyPr wrap="square" anchor="t" lIns="0" rIns="0" tIns="0" bIns="0">
-            <a:spAutoFit/>
-          </a:bodyPr>
-          <a:lstStyle/>
-          <a:p>
-            <a:pPr algn="l">
-              <a:lnSpc>
-                <a:spcPct val="106000"/>
-              </a:lnSpc>
-              <a:spcBef>
-                <a:spcPts val="0"/>
-              </a:spcBef>
-              <a:spcAft>
-                <a:spcPts val="600"/>
-              </a:spcAft>
-            </a:pPr>
-            <a:r>
-              <a:rPr sz="1100" b="1" i="0">
-                <a:solidFill>
-                  <a:srgbClr val="2F7D3A"/>
-                </a:solidFill>
-                <a:latin typeface="Consolas"/>
-              </a:rPr>
-              <a:t>YOUR HYPOTHESIS</a:t>
-            </a:r>
-          </a:p>
-        </p:txBody>
-      </p:sp>
-      <p:sp>
-        <p:nvSpPr>
-          <p:cNvPr id="20" name="TextBox 19"/>
-          <p:cNvSpPr txBox="1"/>
-          <p:nvPr/>
-        </p:nvSpPr>
-        <p:spPr>
-          <a:xfrm>
-            <a:off x="731520" y="5897880"/>
-            <a:ext cx="10698480" cy="365760"/>
-          </a:xfrm>
-          <a:prstGeom prst="rect">
-            <a:avLst/>
-          </a:prstGeom>
-          <a:noFill/>
-        </p:spPr>
-        <p:txBody>
-          <a:bodyPr wrap="square" anchor="t" lIns="0" rIns="0" tIns="0" bIns="0">
-            <a:spAutoFit/>
-          </a:bodyPr>
-          <a:lstStyle/>
-          <a:p>
-            <a:pPr algn="l">
-              <a:lnSpc>
-                <a:spcPct val="106000"/>
-              </a:lnSpc>
-              <a:spcBef>
-                <a:spcPts val="0"/>
-              </a:spcBef>
-              <a:spcAft>
-                <a:spcPts val="600"/>
-              </a:spcAft>
-            </a:pPr>
-            <a:r>
-              <a:rPr sz="1500" b="0" i="1">
-                <a:solidFill>
-                  <a:srgbClr val="111820"/>
-                </a:solidFill>
-                <a:latin typeface="Calibri"/>
-              </a:rPr>
-              <a:t>What's the one signal you'll check before believing a “pipeline” number?</a:t>
-            </a:r>
-          </a:p>
-        </p:txBody>
-      </p:sp>
-      <p:sp>
-        <p:nvSpPr>
-          <p:cNvPr id="21" name="TextBox 20"/>
+              <a:t>The back-test is the crown jewel: “Committed” is a probability, not a promise — and the data can price it.</a:t>
+            </a:r>
+          </a:p>
+        </p:txBody>
+      </p:sp>
+      <p:sp>
+        <p:nvSpPr>
+          <p:cNvPr id="9" name="TextBox 8"/>
           <p:cNvSpPr txBox="1"/>
           <p:nvPr/>
         </p:nvSpPr>
@@ -23351,7 +23430,7 @@
             <a:avLst/>
           </a:prstGeom>
           <a:solidFill>
-            <a:srgbClr val="0D7D74"/>
+            <a:srgbClr val="2F7D3A"/>
           </a:solidFill>
           <a:ln>
             <a:noFill/>
@@ -23388,7 +23467,7 @@
         </p:nvSpPr>
         <p:spPr>
           <a:xfrm>
-            <a:off x="548640" y="457200"/>
+            <a:off x="548640" y="411480"/>
             <a:ext cx="9144000" cy="274320"/>
           </a:xfrm>
           <a:prstGeom prst="rect">
@@ -23416,11 +23495,11 @@
             <a:r>
               <a:rPr sz="1200" b="1" i="0">
                 <a:solidFill>
-                  <a:srgbClr val="0D7D74"/>
+                  <a:srgbClr val="2F7D3A"/>
                 </a:solidFill>
                 <a:latin typeface="Consolas"/>
               </a:rPr>
-              <a:t>REPORT BACK</a:t>
+              <a:t>TOPIC 5 · PIPELINE</a:t>
             </a:r>
           </a:p>
         </p:txBody>
@@ -23433,8 +23512,8 @@
         </p:nvSpPr>
         <p:spPr>
           <a:xfrm>
-            <a:off x="502920" y="777240"/>
-            <a:ext cx="10972800" cy="822960"/>
+            <a:off x="502920" y="713232"/>
+            <a:ext cx="11155680" cy="640080"/>
           </a:xfrm>
           <a:prstGeom prst="rect">
             <a:avLst/>
@@ -23459,13 +23538,13 @@
               </a:spcAft>
             </a:pPr>
             <a:r>
-              <a:rPr sz="3400" b="1" i="0">
+              <a:rPr sz="2800" b="1" i="0">
                 <a:solidFill>
                   <a:srgbClr val="111820"/>
                 </a:solidFill>
                 <a:latin typeface="Calibri"/>
               </a:rPr>
-              <a:t>Three things — not a summary</a:t>
+              <a:t>Provocations — take a position</a:t>
             </a:r>
           </a:p>
         </p:txBody>
@@ -23478,19 +23557,17 @@
         </p:nvSpPr>
         <p:spPr>
           <a:xfrm>
-            <a:off x="548640" y="1828800"/>
-            <a:ext cx="3566160" cy="2011680"/>
+            <a:off x="548640" y="1600200"/>
+            <a:ext cx="457200" cy="457200"/>
           </a:xfrm>
           <a:prstGeom prst="rect">
             <a:avLst/>
           </a:prstGeom>
           <a:solidFill>
-            <a:srgbClr val="F4F6F9"/>
+            <a:srgbClr val="2F7D3A"/>
           </a:solidFill>
-          <a:ln w="9525">
-            <a:solidFill>
-              <a:srgbClr val="4A4BD6"/>
-            </a:solidFill>
+          <a:ln>
+            <a:noFill/>
           </a:ln>
           <a:effectLst/>
         </p:spPr>
@@ -23518,45 +23595,46 @@
       </p:sp>
       <p:sp>
         <p:nvSpPr>
-          <p:cNvPr id="7" name="Rectangle 6"/>
-          <p:cNvSpPr/>
-          <p:nvPr/>
-        </p:nvSpPr>
-        <p:spPr>
-          <a:xfrm>
-            <a:off x="548640" y="1828800"/>
-            <a:ext cx="3566160" cy="109728"/>
-          </a:xfrm>
-          <a:prstGeom prst="rect">
-            <a:avLst/>
-          </a:prstGeom>
-          <a:solidFill>
-            <a:srgbClr val="4A4BD6"/>
-          </a:solidFill>
-          <a:ln>
-            <a:noFill/>
-          </a:ln>
-          <a:effectLst/>
-        </p:spPr>
-        <p:style>
-          <a:lnRef idx="1">
-            <a:schemeClr val="accent1"/>
-          </a:lnRef>
-          <a:fillRef idx="3">
-            <a:schemeClr val="accent1"/>
-          </a:fillRef>
-          <a:effectRef idx="2">
-            <a:schemeClr val="accent1"/>
-          </a:effectRef>
-          <a:fontRef idx="minor">
-            <a:schemeClr val="lt1"/>
-          </a:fontRef>
-        </p:style>
-        <p:txBody>
-          <a:bodyPr rtlCol="0" anchor="ctr"/>
-          <a:lstStyle/>
-          <a:p>
-            <a:pPr algn="ctr"/>
+          <p:cNvPr id="7" name="TextBox 6"/>
+          <p:cNvSpPr txBox="1"/>
+          <p:nvPr/>
+        </p:nvSpPr>
+        <p:spPr>
+          <a:xfrm>
+            <a:off x="548640" y="1600200"/>
+            <a:ext cx="457200" cy="457200"/>
+          </a:xfrm>
+          <a:prstGeom prst="rect">
+            <a:avLst/>
+          </a:prstGeom>
+          <a:noFill/>
+        </p:spPr>
+        <p:txBody>
+          <a:bodyPr wrap="square" anchor="ctr" lIns="0" rIns="0" tIns="0" bIns="0">
+            <a:spAutoFit/>
+          </a:bodyPr>
+          <a:lstStyle/>
+          <a:p>
+            <a:pPr algn="ctr">
+              <a:lnSpc>
+                <a:spcPct val="106000"/>
+              </a:lnSpc>
+              <a:spcBef>
+                <a:spcPts val="0"/>
+              </a:spcBef>
+              <a:spcAft>
+                <a:spcPts val="600"/>
+              </a:spcAft>
+            </a:pPr>
+            <a:r>
+              <a:rPr sz="1800" b="1" i="0">
+                <a:solidFill>
+                  <a:srgbClr val="FFFFFF"/>
+                </a:solidFill>
+                <a:latin typeface="Calibri"/>
+              </a:rPr>
+              <a:t>A</a:t>
+            </a:r>
           </a:p>
         </p:txBody>
       </p:sp>
@@ -23568,8 +23646,8 @@
         </p:nvSpPr>
         <p:spPr>
           <a:xfrm>
-            <a:off x="822960" y="2148840"/>
-            <a:ext cx="3017520" cy="457200"/>
+            <a:off x="1188720" y="1618488"/>
+            <a:ext cx="10332720" cy="731520"/>
           </a:xfrm>
           <a:prstGeom prst="rect">
             <a:avLst/>
@@ -23577,7 +23655,7 @@
           <a:noFill/>
         </p:spPr>
         <p:txBody>
-          <a:bodyPr wrap="square" anchor="t" lIns="0" rIns="0" tIns="0" bIns="0">
+          <a:bodyPr wrap="square" anchor="ctr" lIns="0" rIns="0" tIns="0" bIns="0">
             <a:spAutoFit/>
           </a:bodyPr>
           <a:lstStyle/>
@@ -23594,27 +23672,71 @@
               </a:spcAft>
             </a:pPr>
             <a:r>
-              <a:rPr sz="2000" b="1" i="0">
-                <a:solidFill>
-                  <a:srgbClr val="111820"/>
-                </a:solidFill>
-                <a:latin typeface="Calibri"/>
-              </a:rPr>
-              <a:t>The call</a:t>
-            </a:r>
-          </a:p>
-        </p:txBody>
-      </p:sp>
-      <p:sp>
-        <p:nvSpPr>
-          <p:cNvPr id="9" name="TextBox 8"/>
+              <a:rPr sz="1600" b="0" i="0">
+                <a:solidFill>
+                  <a:srgbClr val="37424F"/>
+                </a:solidFill>
+                <a:latin typeface="Calibri"/>
+              </a:rPr>
+              <a:t>Which gate kills the most megawatts — connection, transmission, offtake, or planning?</a:t>
+            </a:r>
+          </a:p>
+        </p:txBody>
+      </p:sp>
+      <p:sp>
+        <p:nvSpPr>
+          <p:cNvPr id="9" name="Rectangle 8"/>
+          <p:cNvSpPr/>
+          <p:nvPr/>
+        </p:nvSpPr>
+        <p:spPr>
+          <a:xfrm>
+            <a:off x="548640" y="2441448"/>
+            <a:ext cx="457200" cy="457200"/>
+          </a:xfrm>
+          <a:prstGeom prst="rect">
+            <a:avLst/>
+          </a:prstGeom>
+          <a:solidFill>
+            <a:srgbClr val="2F7D3A"/>
+          </a:solidFill>
+          <a:ln>
+            <a:noFill/>
+          </a:ln>
+          <a:effectLst/>
+        </p:spPr>
+        <p:style>
+          <a:lnRef idx="1">
+            <a:schemeClr val="accent1"/>
+          </a:lnRef>
+          <a:fillRef idx="3">
+            <a:schemeClr val="accent1"/>
+          </a:fillRef>
+          <a:effectRef idx="2">
+            <a:schemeClr val="accent1"/>
+          </a:effectRef>
+          <a:fontRef idx="minor">
+            <a:schemeClr val="lt1"/>
+          </a:fontRef>
+        </p:style>
+        <p:txBody>
+          <a:bodyPr rtlCol="0" anchor="ctr"/>
+          <a:lstStyle/>
+          <a:p>
+            <a:pPr algn="ctr"/>
+          </a:p>
+        </p:txBody>
+      </p:sp>
+      <p:sp>
+        <p:nvSpPr>
+          <p:cNvPr id="10" name="TextBox 9"/>
           <p:cNvSpPr txBox="1"/>
           <p:nvPr/>
         </p:nvSpPr>
         <p:spPr>
           <a:xfrm>
-            <a:off x="822960" y="2697480"/>
-            <a:ext cx="3063240" cy="1005840"/>
+            <a:off x="548640" y="2441448"/>
+            <a:ext cx="457200" cy="457200"/>
           </a:xfrm>
           <a:prstGeom prst="rect">
             <a:avLst/>
@@ -23622,7 +23744,52 @@
           <a:noFill/>
         </p:spPr>
         <p:txBody>
-          <a:bodyPr wrap="square" anchor="t" lIns="0" rIns="0" tIns="0" bIns="0">
+          <a:bodyPr wrap="square" anchor="ctr" lIns="0" rIns="0" tIns="0" bIns="0">
+            <a:spAutoFit/>
+          </a:bodyPr>
+          <a:lstStyle/>
+          <a:p>
+            <a:pPr algn="ctr">
+              <a:lnSpc>
+                <a:spcPct val="106000"/>
+              </a:lnSpc>
+              <a:spcBef>
+                <a:spcPts val="0"/>
+              </a:spcBef>
+              <a:spcAft>
+                <a:spcPts val="600"/>
+              </a:spcAft>
+            </a:pPr>
+            <a:r>
+              <a:rPr sz="1800" b="1" i="0">
+                <a:solidFill>
+                  <a:srgbClr val="FFFFFF"/>
+                </a:solidFill>
+                <a:latin typeface="Calibri"/>
+              </a:rPr>
+              <a:t>B</a:t>
+            </a:r>
+          </a:p>
+        </p:txBody>
+      </p:sp>
+      <p:sp>
+        <p:nvSpPr>
+          <p:cNvPr id="11" name="TextBox 10"/>
+          <p:cNvSpPr txBox="1"/>
+          <p:nvPr/>
+        </p:nvSpPr>
+        <p:spPr>
+          <a:xfrm>
+            <a:off x="1188720" y="2459736"/>
+            <a:ext cx="10332720" cy="731520"/>
+          </a:xfrm>
+          <a:prstGeom prst="rect">
+            <a:avLst/>
+          </a:prstGeom>
+          <a:noFill/>
+        </p:spPr>
+        <p:txBody>
+          <a:bodyPr wrap="square" anchor="ctr" lIns="0" rIns="0" tIns="0" bIns="0">
             <a:spAutoFit/>
           </a:bodyPr>
           <a:lstStyle/>
@@ -23639,38 +23806,36 @@
               </a:spcAft>
             </a:pPr>
             <a:r>
-              <a:rPr sz="1450" b="0" i="0">
+              <a:rPr sz="1600" b="0" i="0">
                 <a:solidFill>
                   <a:srgbClr val="37424F"/>
                 </a:solidFill>
                 <a:latin typeface="Calibri"/>
               </a:rPr>
-              <a:t>Your position on the question — a view, not a recap.</a:t>
-            </a:r>
-          </a:p>
-        </p:txBody>
-      </p:sp>
-      <p:sp>
-        <p:nvSpPr>
-          <p:cNvPr id="10" name="Rectangle 9"/>
+              <a:t>What early signal best separates the real projects from the mirage?</a:t>
+            </a:r>
+          </a:p>
+        </p:txBody>
+      </p:sp>
+      <p:sp>
+        <p:nvSpPr>
+          <p:cNvPr id="12" name="Rectangle 11"/>
           <p:cNvSpPr/>
           <p:nvPr/>
         </p:nvSpPr>
         <p:spPr>
           <a:xfrm>
-            <a:off x="4297679" y="1828800"/>
-            <a:ext cx="3566160" cy="2011680"/>
+            <a:off x="548640" y="3282696"/>
+            <a:ext cx="457200" cy="457200"/>
           </a:xfrm>
           <a:prstGeom prst="rect">
             <a:avLst/>
           </a:prstGeom>
           <a:solidFill>
-            <a:srgbClr val="F4F6F9"/>
+            <a:srgbClr val="2F7D3A"/>
           </a:solidFill>
-          <a:ln w="9525">
-            <a:solidFill>
-              <a:srgbClr val="0D7D74"/>
-            </a:solidFill>
+          <a:ln>
+            <a:noFill/>
           </a:ln>
           <a:effectLst/>
         </p:spPr>
@@ -23698,58 +23863,14 @@
       </p:sp>
       <p:sp>
         <p:nvSpPr>
-          <p:cNvPr id="11" name="Rectangle 10"/>
-          <p:cNvSpPr/>
-          <p:nvPr/>
-        </p:nvSpPr>
-        <p:spPr>
-          <a:xfrm>
-            <a:off x="4297679" y="1828800"/>
-            <a:ext cx="3566160" cy="109728"/>
-          </a:xfrm>
-          <a:prstGeom prst="rect">
-            <a:avLst/>
-          </a:prstGeom>
-          <a:solidFill>
-            <a:srgbClr val="0D7D74"/>
-          </a:solidFill>
-          <a:ln>
-            <a:noFill/>
-          </a:ln>
-          <a:effectLst/>
-        </p:spPr>
-        <p:style>
-          <a:lnRef idx="1">
-            <a:schemeClr val="accent1"/>
-          </a:lnRef>
-          <a:fillRef idx="3">
-            <a:schemeClr val="accent1"/>
-          </a:fillRef>
-          <a:effectRef idx="2">
-            <a:schemeClr val="accent1"/>
-          </a:effectRef>
-          <a:fontRef idx="minor">
-            <a:schemeClr val="lt1"/>
-          </a:fontRef>
-        </p:style>
-        <p:txBody>
-          <a:bodyPr rtlCol="0" anchor="ctr"/>
-          <a:lstStyle/>
-          <a:p>
-            <a:pPr algn="ctr"/>
-          </a:p>
-        </p:txBody>
-      </p:sp>
-      <p:sp>
-        <p:nvSpPr>
-          <p:cNvPr id="12" name="TextBox 11"/>
+          <p:cNvPr id="13" name="TextBox 12"/>
           <p:cNvSpPr txBox="1"/>
           <p:nvPr/>
         </p:nvSpPr>
         <p:spPr>
           <a:xfrm>
-            <a:off x="4571999" y="2148840"/>
-            <a:ext cx="3017520" cy="457200"/>
+            <a:off x="548640" y="3282696"/>
+            <a:ext cx="457200" cy="457200"/>
           </a:xfrm>
           <a:prstGeom prst="rect">
             <a:avLst/>
@@ -23757,7 +23878,52 @@
           <a:noFill/>
         </p:spPr>
         <p:txBody>
-          <a:bodyPr wrap="square" anchor="t" lIns="0" rIns="0" tIns="0" bIns="0">
+          <a:bodyPr wrap="square" anchor="ctr" lIns="0" rIns="0" tIns="0" bIns="0">
+            <a:spAutoFit/>
+          </a:bodyPr>
+          <a:lstStyle/>
+          <a:p>
+            <a:pPr algn="ctr">
+              <a:lnSpc>
+                <a:spcPct val="106000"/>
+              </a:lnSpc>
+              <a:spcBef>
+                <a:spcPts val="0"/>
+              </a:spcBef>
+              <a:spcAft>
+                <a:spcPts val="600"/>
+              </a:spcAft>
+            </a:pPr>
+            <a:r>
+              <a:rPr sz="1800" b="1" i="0">
+                <a:solidFill>
+                  <a:srgbClr val="FFFFFF"/>
+                </a:solidFill>
+                <a:latin typeface="Calibri"/>
+              </a:rPr>
+              <a:t>C</a:t>
+            </a:r>
+          </a:p>
+        </p:txBody>
+      </p:sp>
+      <p:sp>
+        <p:nvSpPr>
+          <p:cNvPr id="14" name="TextBox 13"/>
+          <p:cNvSpPr txBox="1"/>
+          <p:nvPr/>
+        </p:nvSpPr>
+        <p:spPr>
+          <a:xfrm>
+            <a:off x="1188720" y="3300984"/>
+            <a:ext cx="10332720" cy="731520"/>
+          </a:xfrm>
+          <a:prstGeom prst="rect">
+            <a:avLst/>
+          </a:prstGeom>
+          <a:noFill/>
+        </p:spPr>
+        <p:txBody>
+          <a:bodyPr wrap="square" anchor="ctr" lIns="0" rIns="0" tIns="0" bIns="0">
             <a:spAutoFit/>
           </a:bodyPr>
           <a:lstStyle/>
@@ -23774,27 +23940,71 @@
               </a:spcAft>
             </a:pPr>
             <a:r>
-              <a:rPr sz="2000" b="1" i="0">
-                <a:solidFill>
-                  <a:srgbClr val="111820"/>
-                </a:solidFill>
-                <a:latin typeface="Calibri"/>
-              </a:rPr>
-              <a:t>The number</a:t>
-            </a:r>
-          </a:p>
-        </p:txBody>
-      </p:sp>
-      <p:sp>
-        <p:nvSpPr>
-          <p:cNvPr id="13" name="TextBox 12"/>
+              <a:rPr sz="1600" b="0" i="0">
+                <a:solidFill>
+                  <a:srgbClr val="37424F"/>
+                </a:solidFill>
+                <a:latin typeface="Calibri"/>
+              </a:rPr>
+              <a:t>Does our screening assume anything remotely as brutal as ~9% proposed-to-built?</a:t>
+            </a:r>
+          </a:p>
+        </p:txBody>
+      </p:sp>
+      <p:sp>
+        <p:nvSpPr>
+          <p:cNvPr id="15" name="Rectangle 14"/>
+          <p:cNvSpPr/>
+          <p:nvPr/>
+        </p:nvSpPr>
+        <p:spPr>
+          <a:xfrm>
+            <a:off x="548640" y="4123944"/>
+            <a:ext cx="457200" cy="457200"/>
+          </a:xfrm>
+          <a:prstGeom prst="rect">
+            <a:avLst/>
+          </a:prstGeom>
+          <a:solidFill>
+            <a:srgbClr val="2F7D3A"/>
+          </a:solidFill>
+          <a:ln>
+            <a:noFill/>
+          </a:ln>
+          <a:effectLst/>
+        </p:spPr>
+        <p:style>
+          <a:lnRef idx="1">
+            <a:schemeClr val="accent1"/>
+          </a:lnRef>
+          <a:fillRef idx="3">
+            <a:schemeClr val="accent1"/>
+          </a:fillRef>
+          <a:effectRef idx="2">
+            <a:schemeClr val="accent1"/>
+          </a:effectRef>
+          <a:fontRef idx="minor">
+            <a:schemeClr val="lt1"/>
+          </a:fontRef>
+        </p:style>
+        <p:txBody>
+          <a:bodyPr rtlCol="0" anchor="ctr"/>
+          <a:lstStyle/>
+          <a:p>
+            <a:pPr algn="ctr"/>
+          </a:p>
+        </p:txBody>
+      </p:sp>
+      <p:sp>
+        <p:nvSpPr>
+          <p:cNvPr id="16" name="TextBox 15"/>
           <p:cNvSpPr txBox="1"/>
           <p:nvPr/>
         </p:nvSpPr>
         <p:spPr>
           <a:xfrm>
-            <a:off x="4571999" y="2697480"/>
-            <a:ext cx="3063240" cy="1005840"/>
+            <a:off x="548640" y="4123944"/>
+            <a:ext cx="457200" cy="457200"/>
           </a:xfrm>
           <a:prstGeom prst="rect">
             <a:avLst/>
@@ -23802,7 +24012,52 @@
           <a:noFill/>
         </p:spPr>
         <p:txBody>
-          <a:bodyPr wrap="square" anchor="t" lIns="0" rIns="0" tIns="0" bIns="0">
+          <a:bodyPr wrap="square" anchor="ctr" lIns="0" rIns="0" tIns="0" bIns="0">
+            <a:spAutoFit/>
+          </a:bodyPr>
+          <a:lstStyle/>
+          <a:p>
+            <a:pPr algn="ctr">
+              <a:lnSpc>
+                <a:spcPct val="106000"/>
+              </a:lnSpc>
+              <a:spcBef>
+                <a:spcPts val="0"/>
+              </a:spcBef>
+              <a:spcAft>
+                <a:spcPts val="600"/>
+              </a:spcAft>
+            </a:pPr>
+            <a:r>
+              <a:rPr sz="1800" b="1" i="0">
+                <a:solidFill>
+                  <a:srgbClr val="FFFFFF"/>
+                </a:solidFill>
+                <a:latin typeface="Calibri"/>
+              </a:rPr>
+              <a:t>D</a:t>
+            </a:r>
+          </a:p>
+        </p:txBody>
+      </p:sp>
+      <p:sp>
+        <p:nvSpPr>
+          <p:cNvPr id="17" name="TextBox 16"/>
+          <p:cNvSpPr txBox="1"/>
+          <p:nvPr/>
+        </p:nvSpPr>
+        <p:spPr>
+          <a:xfrm>
+            <a:off x="1188720" y="4142232"/>
+            <a:ext cx="10332720" cy="731520"/>
+          </a:xfrm>
+          <a:prstGeom prst="rect">
+            <a:avLst/>
+          </a:prstGeom>
+          <a:noFill/>
+        </p:spPr>
+        <p:txBody>
+          <a:bodyPr wrap="square" anchor="ctr" lIns="0" rIns="0" tIns="0" bIns="0">
             <a:spAutoFit/>
           </a:bodyPr>
           <a:lstStyle/>
@@ -23819,27 +24074,27 @@
               </a:spcAft>
             </a:pPr>
             <a:r>
-              <a:rPr sz="1450" b="0" i="0">
+              <a:rPr sz="1600" b="0" i="0">
                 <a:solidFill>
                   <a:srgbClr val="37424F"/>
                 </a:solidFill>
                 <a:latin typeface="Calibri"/>
               </a:rPr>
-              <a:t>The single figure that changed your mind.</a:t>
-            </a:r>
-          </a:p>
-        </p:txBody>
-      </p:sp>
-      <p:sp>
-        <p:nvSpPr>
-          <p:cNvPr id="14" name="Rectangle 13"/>
+              <a:t>If you could unlock one transmission line, which frees the most generation?</a:t>
+            </a:r>
+          </a:p>
+        </p:txBody>
+      </p:sp>
+      <p:sp>
+        <p:nvSpPr>
+          <p:cNvPr id="18" name="Rectangle 17"/>
           <p:cNvSpPr/>
           <p:nvPr/>
         </p:nvSpPr>
         <p:spPr>
           <a:xfrm>
-            <a:off x="8046718" y="1828800"/>
-            <a:ext cx="3566160" cy="2011680"/>
+            <a:off x="548640" y="5532120"/>
+            <a:ext cx="11064240" cy="777240"/>
           </a:xfrm>
           <a:prstGeom prst="rect">
             <a:avLst/>
@@ -23849,7 +24104,7 @@
           </a:solidFill>
           <a:ln w="9525">
             <a:solidFill>
-              <a:srgbClr val="B4571F"/>
+              <a:srgbClr val="2F7D3A"/>
             </a:solidFill>
           </a:ln>
           <a:effectLst/>
@@ -23878,58 +24133,14 @@
       </p:sp>
       <p:sp>
         <p:nvSpPr>
-          <p:cNvPr id="15" name="Rectangle 14"/>
-          <p:cNvSpPr/>
-          <p:nvPr/>
-        </p:nvSpPr>
-        <p:spPr>
-          <a:xfrm>
-            <a:off x="8046718" y="1828800"/>
-            <a:ext cx="3566160" cy="109728"/>
-          </a:xfrm>
-          <a:prstGeom prst="rect">
-            <a:avLst/>
-          </a:prstGeom>
-          <a:solidFill>
-            <a:srgbClr val="B4571F"/>
-          </a:solidFill>
-          <a:ln>
-            <a:noFill/>
-          </a:ln>
-          <a:effectLst/>
-        </p:spPr>
-        <p:style>
-          <a:lnRef idx="1">
-            <a:schemeClr val="accent1"/>
-          </a:lnRef>
-          <a:fillRef idx="3">
-            <a:schemeClr val="accent1"/>
-          </a:fillRef>
-          <a:effectRef idx="2">
-            <a:schemeClr val="accent1"/>
-          </a:effectRef>
-          <a:fontRef idx="minor">
-            <a:schemeClr val="lt1"/>
-          </a:fontRef>
-        </p:style>
-        <p:txBody>
-          <a:bodyPr rtlCol="0" anchor="ctr"/>
-          <a:lstStyle/>
-          <a:p>
-            <a:pPr algn="ctr"/>
-          </a:p>
-        </p:txBody>
-      </p:sp>
-      <p:sp>
-        <p:nvSpPr>
-          <p:cNvPr id="16" name="TextBox 15"/>
+          <p:cNvPr id="19" name="TextBox 18"/>
           <p:cNvSpPr txBox="1"/>
           <p:nvPr/>
         </p:nvSpPr>
         <p:spPr>
           <a:xfrm>
-            <a:off x="8321038" y="2148840"/>
-            <a:ext cx="3017520" cy="457200"/>
+            <a:off x="731520" y="5632704"/>
+            <a:ext cx="10698480" cy="320040"/>
           </a:xfrm>
           <a:prstGeom prst="rect">
             <a:avLst/>
@@ -23954,27 +24165,27 @@
               </a:spcAft>
             </a:pPr>
             <a:r>
-              <a:rPr sz="2000" b="1" i="0">
-                <a:solidFill>
-                  <a:srgbClr val="111820"/>
-                </a:solidFill>
-                <a:latin typeface="Calibri"/>
-              </a:rPr>
-              <a:t>The surprise</a:t>
-            </a:r>
-          </a:p>
-        </p:txBody>
-      </p:sp>
-      <p:sp>
-        <p:nvSpPr>
-          <p:cNvPr id="17" name="TextBox 16"/>
+              <a:rPr sz="1100" b="1" i="0">
+                <a:solidFill>
+                  <a:srgbClr val="2F7D3A"/>
+                </a:solidFill>
+                <a:latin typeface="Consolas"/>
+              </a:rPr>
+              <a:t>YOUR HYPOTHESIS</a:t>
+            </a:r>
+          </a:p>
+        </p:txBody>
+      </p:sp>
+      <p:sp>
+        <p:nvSpPr>
+          <p:cNvPr id="20" name="TextBox 19"/>
           <p:cNvSpPr txBox="1"/>
           <p:nvPr/>
         </p:nvSpPr>
         <p:spPr>
           <a:xfrm>
-            <a:off x="8321038" y="2697480"/>
-            <a:ext cx="3063240" cy="1005840"/>
+            <a:off x="731520" y="5897880"/>
+            <a:ext cx="10698480" cy="365760"/>
           </a:xfrm>
           <a:prstGeom prst="rect">
             <a:avLst/>
@@ -23999,27 +24210,27 @@
               </a:spcAft>
             </a:pPr>
             <a:r>
-              <a:rPr sz="1450" b="0" i="0">
-                <a:solidFill>
-                  <a:srgbClr val="37424F"/>
-                </a:solidFill>
-                <a:latin typeface="Calibri"/>
-              </a:rPr>
-              <a:t>The one “I didn't realise that” moment.</a:t>
-            </a:r>
-          </a:p>
-        </p:txBody>
-      </p:sp>
-      <p:sp>
-        <p:nvSpPr>
-          <p:cNvPr id="18" name="TextBox 17"/>
+              <a:rPr sz="1500" b="0" i="1">
+                <a:solidFill>
+                  <a:srgbClr val="111820"/>
+                </a:solidFill>
+                <a:latin typeface="Calibri"/>
+              </a:rPr>
+              <a:t>What's the one signal you'll check before believing a “pipeline” number?</a:t>
+            </a:r>
+          </a:p>
+        </p:txBody>
+      </p:sp>
+      <p:sp>
+        <p:nvSpPr>
+          <p:cNvPr id="21" name="TextBox 20"/>
           <p:cNvSpPr txBox="1"/>
           <p:nvPr/>
         </p:nvSpPr>
         <p:spPr>
           <a:xfrm>
-            <a:off x="548640" y="4297680"/>
-            <a:ext cx="10972800" cy="457200"/>
+            <a:off x="502920" y="6419088"/>
+            <a:ext cx="8229600" cy="274320"/>
           </a:xfrm>
           <a:prstGeom prst="rect">
             <a:avLst/>
@@ -24044,134 +24255,133 @@
               </a:spcAft>
             </a:pPr>
             <a:r>
-              <a:rPr sz="1500" b="1" i="0">
-                <a:solidFill>
-                  <a:srgbClr val="111820"/>
-                </a:solidFill>
-                <a:latin typeface="Calibri"/>
-              </a:rPr>
-              <a:t>Then, as a room:</a:t>
-            </a:r>
-          </a:p>
-        </p:txBody>
-      </p:sp>
-      <p:sp>
-        <p:nvSpPr>
-          <p:cNvPr id="19" name="TextBox 18"/>
+              <a:rPr sz="900" b="0" i="0">
+                <a:solidFill>
+                  <a:srgbClr val="66717F"/>
+                </a:solidFill>
+                <a:latin typeface="Consolas"/>
+              </a:rPr>
+              <a:t>Reading the NEM · Power Development Team Day · figures from the AusEnergy Lens (AEMO + ISP 2026), as-at Aug 2026</a:t>
+            </a:r>
+          </a:p>
+        </p:txBody>
+      </p:sp>
+    </p:spTree>
+  </p:cSld>
+  <p:clrMapOvr>
+    <a:masterClrMapping/>
+  </p:clrMapOvr>
+</p:sld>
+</file>
+
+<file path=ppt/slides/slide32.xml><?xml version="1.0" encoding="utf-8"?>
+<p:sld xmlns:a="http://schemas.openxmlformats.org/drawingml/2006/main" xmlns:p="http://schemas.openxmlformats.org/presentationml/2006/main" xmlns:r="http://schemas.openxmlformats.org/officeDocument/2006/relationships">
+  <p:cSld>
+    <p:spTree>
+      <p:nvGrpSpPr>
+        <p:cNvPr id="1" name=""/>
+        <p:cNvGrpSpPr/>
+        <p:nvPr/>
+      </p:nvGrpSpPr>
+      <p:grpSpPr/>
+      <p:sp>
+        <p:nvSpPr>
+          <p:cNvPr id="2" name="Rectangle 1"/>
+          <p:cNvSpPr/>
+          <p:nvPr/>
+        </p:nvSpPr>
+        <p:spPr>
+          <a:xfrm>
+            <a:off x="0" y="0"/>
+            <a:ext cx="12191695" cy="6858000"/>
+          </a:xfrm>
+          <a:prstGeom prst="rect">
+            <a:avLst/>
+          </a:prstGeom>
+          <a:solidFill>
+            <a:srgbClr val="FFFFFF"/>
+          </a:solidFill>
+          <a:ln>
+            <a:noFill/>
+          </a:ln>
+          <a:effectLst/>
+        </p:spPr>
+        <p:style>
+          <a:lnRef idx="1">
+            <a:schemeClr val="accent1"/>
+          </a:lnRef>
+          <a:fillRef idx="3">
+            <a:schemeClr val="accent1"/>
+          </a:fillRef>
+          <a:effectRef idx="2">
+            <a:schemeClr val="accent1"/>
+          </a:effectRef>
+          <a:fontRef idx="minor">
+            <a:schemeClr val="lt1"/>
+          </a:fontRef>
+        </p:style>
+        <p:txBody>
+          <a:bodyPr rtlCol="0" anchor="ctr"/>
+          <a:lstStyle/>
+          <a:p>
+            <a:pPr algn="ctr"/>
+          </a:p>
+        </p:txBody>
+      </p:sp>
+      <p:sp>
+        <p:nvSpPr>
+          <p:cNvPr id="3" name="Rectangle 2"/>
+          <p:cNvSpPr/>
+          <p:nvPr/>
+        </p:nvSpPr>
+        <p:spPr>
+          <a:xfrm>
+            <a:off x="0" y="0"/>
+            <a:ext cx="146304" cy="6858000"/>
+          </a:xfrm>
+          <a:prstGeom prst="rect">
+            <a:avLst/>
+          </a:prstGeom>
+          <a:solidFill>
+            <a:srgbClr val="0D7D74"/>
+          </a:solidFill>
+          <a:ln>
+            <a:noFill/>
+          </a:ln>
+          <a:effectLst/>
+        </p:spPr>
+        <p:style>
+          <a:lnRef idx="1">
+            <a:schemeClr val="accent1"/>
+          </a:lnRef>
+          <a:fillRef idx="3">
+            <a:schemeClr val="accent1"/>
+          </a:fillRef>
+          <a:effectRef idx="2">
+            <a:schemeClr val="accent1"/>
+          </a:effectRef>
+          <a:fontRef idx="minor">
+            <a:schemeClr val="lt1"/>
+          </a:fontRef>
+        </p:style>
+        <p:txBody>
+          <a:bodyPr rtlCol="0" anchor="ctr"/>
+          <a:lstStyle/>
+          <a:p>
+            <a:pPr algn="ctr"/>
+          </a:p>
+        </p:txBody>
+      </p:sp>
+      <p:sp>
+        <p:nvSpPr>
+          <p:cNvPr id="4" name="TextBox 3"/>
           <p:cNvSpPr txBox="1"/>
           <p:nvPr/>
         </p:nvSpPr>
         <p:spPr>
           <a:xfrm>
-            <a:off x="548640" y="4709160"/>
-            <a:ext cx="11064240" cy="1371600"/>
-          </a:xfrm>
-          <a:prstGeom prst="rect">
-            <a:avLst/>
-          </a:prstGeom>
-          <a:noFill/>
-        </p:spPr>
-        <p:txBody>
-          <a:bodyPr wrap="square" lIns="0" rIns="0" tIns="0" bIns="0">
-            <a:spAutoFit/>
-          </a:bodyPr>
-          <a:lstStyle/>
-          <a:p>
-            <a:pPr>
-              <a:lnSpc>
-                <a:spcPct val="105000"/>
-              </a:lnSpc>
-              <a:spcAft>
-                <a:spcPts val="800"/>
-              </a:spcAft>
-            </a:pPr>
-            <a:r>
-              <a:rPr sz="1500" b="1">
-                <a:solidFill>
-                  <a:srgbClr val="0D7D74"/>
-                </a:solidFill>
-                <a:latin typeface="Calibri"/>
-              </a:rPr>
-              <a:t>▸  </a:t>
-            </a:r>
-            <a:r>
-              <a:rPr sz="1500" b="0">
-                <a:solidFill>
-                  <a:srgbClr val="37424F"/>
-                </a:solidFill>
-                <a:latin typeface="Calibri"/>
-              </a:rPr>
-              <a:t>Is 100% renewable the right target — or do we plan for ~90% + firm gas?</a:t>
-            </a:r>
-          </a:p>
-          <a:p>
-            <a:pPr>
-              <a:lnSpc>
-                <a:spcPct val="105000"/>
-              </a:lnSpc>
-              <a:spcAft>
-                <a:spcPts val="800"/>
-              </a:spcAft>
-            </a:pPr>
-            <a:r>
-              <a:rPr sz="1500" b="1">
-                <a:solidFill>
-                  <a:srgbClr val="0D7D74"/>
-                </a:solidFill>
-                <a:latin typeface="Calibri"/>
-              </a:rPr>
-              <a:t>▸  </a:t>
-            </a:r>
-            <a:r>
-              <a:rPr sz="1500" b="0">
-                <a:solidFill>
-                  <a:srgbClr val="37424F"/>
-                </a:solidFill>
-                <a:latin typeface="Calibri"/>
-              </a:rPr>
-              <a:t>Would you build another unfirmed solar farm in this market?</a:t>
-            </a:r>
-          </a:p>
-          <a:p>
-            <a:pPr>
-              <a:lnSpc>
-                <a:spcPct val="105000"/>
-              </a:lnSpc>
-              <a:spcAft>
-                <a:spcPts val="800"/>
-              </a:spcAft>
-            </a:pPr>
-            <a:r>
-              <a:rPr sz="1500" b="1">
-                <a:solidFill>
-                  <a:srgbClr val="0D7D74"/>
-                </a:solidFill>
-                <a:latin typeface="Calibri"/>
-              </a:rPr>
-              <a:t>▸  </a:t>
-            </a:r>
-            <a:r>
-              <a:rPr sz="1500" b="0">
-                <a:solidFill>
-                  <a:srgbClr val="37424F"/>
-                </a:solidFill>
-                <a:latin typeface="Calibri"/>
-              </a:rPr>
-              <a:t>Heatwave, broken boiler, or data-centre boom — what's the biggest risk to the grid we're building for?</a:t>
-            </a:r>
-          </a:p>
-        </p:txBody>
-      </p:sp>
-      <p:sp>
-        <p:nvSpPr>
-          <p:cNvPr id="20" name="TextBox 19"/>
-          <p:cNvSpPr txBox="1"/>
-          <p:nvPr/>
-        </p:nvSpPr>
-        <p:spPr>
-          <a:xfrm>
-            <a:off x="502920" y="6419088"/>
-            <a:ext cx="8229600" cy="274320"/>
+            <a:off x="548640" y="457200"/>
+            <a:ext cx="9144000" cy="274320"/>
           </a:xfrm>
           <a:prstGeom prst="rect">
             <a:avLst/>
@@ -24196,6 +24406,788 @@
               </a:spcAft>
             </a:pPr>
             <a:r>
+              <a:rPr sz="1200" b="1" i="0">
+                <a:solidFill>
+                  <a:srgbClr val="0D7D74"/>
+                </a:solidFill>
+                <a:latin typeface="Consolas"/>
+              </a:rPr>
+              <a:t>REPORT BACK</a:t>
+            </a:r>
+          </a:p>
+        </p:txBody>
+      </p:sp>
+      <p:sp>
+        <p:nvSpPr>
+          <p:cNvPr id="5" name="TextBox 4"/>
+          <p:cNvSpPr txBox="1"/>
+          <p:nvPr/>
+        </p:nvSpPr>
+        <p:spPr>
+          <a:xfrm>
+            <a:off x="502920" y="777240"/>
+            <a:ext cx="10972800" cy="822960"/>
+          </a:xfrm>
+          <a:prstGeom prst="rect">
+            <a:avLst/>
+          </a:prstGeom>
+          <a:noFill/>
+        </p:spPr>
+        <p:txBody>
+          <a:bodyPr wrap="square" anchor="t" lIns="0" rIns="0" tIns="0" bIns="0">
+            <a:spAutoFit/>
+          </a:bodyPr>
+          <a:lstStyle/>
+          <a:p>
+            <a:pPr algn="l">
+              <a:lnSpc>
+                <a:spcPct val="106000"/>
+              </a:lnSpc>
+              <a:spcBef>
+                <a:spcPts val="0"/>
+              </a:spcBef>
+              <a:spcAft>
+                <a:spcPts val="600"/>
+              </a:spcAft>
+            </a:pPr>
+            <a:r>
+              <a:rPr sz="3400" b="1" i="0">
+                <a:solidFill>
+                  <a:srgbClr val="111820"/>
+                </a:solidFill>
+                <a:latin typeface="Calibri"/>
+              </a:rPr>
+              <a:t>Three things — not a summary</a:t>
+            </a:r>
+          </a:p>
+        </p:txBody>
+      </p:sp>
+      <p:sp>
+        <p:nvSpPr>
+          <p:cNvPr id="6" name="Rectangle 5"/>
+          <p:cNvSpPr/>
+          <p:nvPr/>
+        </p:nvSpPr>
+        <p:spPr>
+          <a:xfrm>
+            <a:off x="548640" y="1828800"/>
+            <a:ext cx="3566160" cy="2011680"/>
+          </a:xfrm>
+          <a:prstGeom prst="rect">
+            <a:avLst/>
+          </a:prstGeom>
+          <a:solidFill>
+            <a:srgbClr val="F4F6F9"/>
+          </a:solidFill>
+          <a:ln w="9525">
+            <a:solidFill>
+              <a:srgbClr val="4A4BD6"/>
+            </a:solidFill>
+          </a:ln>
+          <a:effectLst/>
+        </p:spPr>
+        <p:style>
+          <a:lnRef idx="1">
+            <a:schemeClr val="accent1"/>
+          </a:lnRef>
+          <a:fillRef idx="3">
+            <a:schemeClr val="accent1"/>
+          </a:fillRef>
+          <a:effectRef idx="2">
+            <a:schemeClr val="accent1"/>
+          </a:effectRef>
+          <a:fontRef idx="minor">
+            <a:schemeClr val="lt1"/>
+          </a:fontRef>
+        </p:style>
+        <p:txBody>
+          <a:bodyPr rtlCol="0" anchor="ctr"/>
+          <a:lstStyle/>
+          <a:p>
+            <a:pPr algn="ctr"/>
+          </a:p>
+        </p:txBody>
+      </p:sp>
+      <p:sp>
+        <p:nvSpPr>
+          <p:cNvPr id="7" name="Rectangle 6"/>
+          <p:cNvSpPr/>
+          <p:nvPr/>
+        </p:nvSpPr>
+        <p:spPr>
+          <a:xfrm>
+            <a:off x="548640" y="1828800"/>
+            <a:ext cx="3566160" cy="109728"/>
+          </a:xfrm>
+          <a:prstGeom prst="rect">
+            <a:avLst/>
+          </a:prstGeom>
+          <a:solidFill>
+            <a:srgbClr val="4A4BD6"/>
+          </a:solidFill>
+          <a:ln>
+            <a:noFill/>
+          </a:ln>
+          <a:effectLst/>
+        </p:spPr>
+        <p:style>
+          <a:lnRef idx="1">
+            <a:schemeClr val="accent1"/>
+          </a:lnRef>
+          <a:fillRef idx="3">
+            <a:schemeClr val="accent1"/>
+          </a:fillRef>
+          <a:effectRef idx="2">
+            <a:schemeClr val="accent1"/>
+          </a:effectRef>
+          <a:fontRef idx="minor">
+            <a:schemeClr val="lt1"/>
+          </a:fontRef>
+        </p:style>
+        <p:txBody>
+          <a:bodyPr rtlCol="0" anchor="ctr"/>
+          <a:lstStyle/>
+          <a:p>
+            <a:pPr algn="ctr"/>
+          </a:p>
+        </p:txBody>
+      </p:sp>
+      <p:sp>
+        <p:nvSpPr>
+          <p:cNvPr id="8" name="TextBox 7"/>
+          <p:cNvSpPr txBox="1"/>
+          <p:nvPr/>
+        </p:nvSpPr>
+        <p:spPr>
+          <a:xfrm>
+            <a:off x="822960" y="2148840"/>
+            <a:ext cx="3017520" cy="457200"/>
+          </a:xfrm>
+          <a:prstGeom prst="rect">
+            <a:avLst/>
+          </a:prstGeom>
+          <a:noFill/>
+        </p:spPr>
+        <p:txBody>
+          <a:bodyPr wrap="square" anchor="t" lIns="0" rIns="0" tIns="0" bIns="0">
+            <a:spAutoFit/>
+          </a:bodyPr>
+          <a:lstStyle/>
+          <a:p>
+            <a:pPr algn="l">
+              <a:lnSpc>
+                <a:spcPct val="106000"/>
+              </a:lnSpc>
+              <a:spcBef>
+                <a:spcPts val="0"/>
+              </a:spcBef>
+              <a:spcAft>
+                <a:spcPts val="600"/>
+              </a:spcAft>
+            </a:pPr>
+            <a:r>
+              <a:rPr sz="2000" b="1" i="0">
+                <a:solidFill>
+                  <a:srgbClr val="111820"/>
+                </a:solidFill>
+                <a:latin typeface="Calibri"/>
+              </a:rPr>
+              <a:t>The call</a:t>
+            </a:r>
+          </a:p>
+        </p:txBody>
+      </p:sp>
+      <p:sp>
+        <p:nvSpPr>
+          <p:cNvPr id="9" name="TextBox 8"/>
+          <p:cNvSpPr txBox="1"/>
+          <p:nvPr/>
+        </p:nvSpPr>
+        <p:spPr>
+          <a:xfrm>
+            <a:off x="822960" y="2697480"/>
+            <a:ext cx="3063240" cy="1005840"/>
+          </a:xfrm>
+          <a:prstGeom prst="rect">
+            <a:avLst/>
+          </a:prstGeom>
+          <a:noFill/>
+        </p:spPr>
+        <p:txBody>
+          <a:bodyPr wrap="square" anchor="t" lIns="0" rIns="0" tIns="0" bIns="0">
+            <a:spAutoFit/>
+          </a:bodyPr>
+          <a:lstStyle/>
+          <a:p>
+            <a:pPr algn="l">
+              <a:lnSpc>
+                <a:spcPct val="106000"/>
+              </a:lnSpc>
+              <a:spcBef>
+                <a:spcPts val="0"/>
+              </a:spcBef>
+              <a:spcAft>
+                <a:spcPts val="600"/>
+              </a:spcAft>
+            </a:pPr>
+            <a:r>
+              <a:rPr sz="1450" b="0" i="0">
+                <a:solidFill>
+                  <a:srgbClr val="37424F"/>
+                </a:solidFill>
+                <a:latin typeface="Calibri"/>
+              </a:rPr>
+              <a:t>Your position on the question — a view, not a recap.</a:t>
+            </a:r>
+          </a:p>
+        </p:txBody>
+      </p:sp>
+      <p:sp>
+        <p:nvSpPr>
+          <p:cNvPr id="10" name="Rectangle 9"/>
+          <p:cNvSpPr/>
+          <p:nvPr/>
+        </p:nvSpPr>
+        <p:spPr>
+          <a:xfrm>
+            <a:off x="4297679" y="1828800"/>
+            <a:ext cx="3566160" cy="2011680"/>
+          </a:xfrm>
+          <a:prstGeom prst="rect">
+            <a:avLst/>
+          </a:prstGeom>
+          <a:solidFill>
+            <a:srgbClr val="F4F6F9"/>
+          </a:solidFill>
+          <a:ln w="9525">
+            <a:solidFill>
+              <a:srgbClr val="0D7D74"/>
+            </a:solidFill>
+          </a:ln>
+          <a:effectLst/>
+        </p:spPr>
+        <p:style>
+          <a:lnRef idx="1">
+            <a:schemeClr val="accent1"/>
+          </a:lnRef>
+          <a:fillRef idx="3">
+            <a:schemeClr val="accent1"/>
+          </a:fillRef>
+          <a:effectRef idx="2">
+            <a:schemeClr val="accent1"/>
+          </a:effectRef>
+          <a:fontRef idx="minor">
+            <a:schemeClr val="lt1"/>
+          </a:fontRef>
+        </p:style>
+        <p:txBody>
+          <a:bodyPr rtlCol="0" anchor="ctr"/>
+          <a:lstStyle/>
+          <a:p>
+            <a:pPr algn="ctr"/>
+          </a:p>
+        </p:txBody>
+      </p:sp>
+      <p:sp>
+        <p:nvSpPr>
+          <p:cNvPr id="11" name="Rectangle 10"/>
+          <p:cNvSpPr/>
+          <p:nvPr/>
+        </p:nvSpPr>
+        <p:spPr>
+          <a:xfrm>
+            <a:off x="4297679" y="1828800"/>
+            <a:ext cx="3566160" cy="109728"/>
+          </a:xfrm>
+          <a:prstGeom prst="rect">
+            <a:avLst/>
+          </a:prstGeom>
+          <a:solidFill>
+            <a:srgbClr val="0D7D74"/>
+          </a:solidFill>
+          <a:ln>
+            <a:noFill/>
+          </a:ln>
+          <a:effectLst/>
+        </p:spPr>
+        <p:style>
+          <a:lnRef idx="1">
+            <a:schemeClr val="accent1"/>
+          </a:lnRef>
+          <a:fillRef idx="3">
+            <a:schemeClr val="accent1"/>
+          </a:fillRef>
+          <a:effectRef idx="2">
+            <a:schemeClr val="accent1"/>
+          </a:effectRef>
+          <a:fontRef idx="minor">
+            <a:schemeClr val="lt1"/>
+          </a:fontRef>
+        </p:style>
+        <p:txBody>
+          <a:bodyPr rtlCol="0" anchor="ctr"/>
+          <a:lstStyle/>
+          <a:p>
+            <a:pPr algn="ctr"/>
+          </a:p>
+        </p:txBody>
+      </p:sp>
+      <p:sp>
+        <p:nvSpPr>
+          <p:cNvPr id="12" name="TextBox 11"/>
+          <p:cNvSpPr txBox="1"/>
+          <p:nvPr/>
+        </p:nvSpPr>
+        <p:spPr>
+          <a:xfrm>
+            <a:off x="4571999" y="2148840"/>
+            <a:ext cx="3017520" cy="457200"/>
+          </a:xfrm>
+          <a:prstGeom prst="rect">
+            <a:avLst/>
+          </a:prstGeom>
+          <a:noFill/>
+        </p:spPr>
+        <p:txBody>
+          <a:bodyPr wrap="square" anchor="t" lIns="0" rIns="0" tIns="0" bIns="0">
+            <a:spAutoFit/>
+          </a:bodyPr>
+          <a:lstStyle/>
+          <a:p>
+            <a:pPr algn="l">
+              <a:lnSpc>
+                <a:spcPct val="106000"/>
+              </a:lnSpc>
+              <a:spcBef>
+                <a:spcPts val="0"/>
+              </a:spcBef>
+              <a:spcAft>
+                <a:spcPts val="600"/>
+              </a:spcAft>
+            </a:pPr>
+            <a:r>
+              <a:rPr sz="2000" b="1" i="0">
+                <a:solidFill>
+                  <a:srgbClr val="111820"/>
+                </a:solidFill>
+                <a:latin typeface="Calibri"/>
+              </a:rPr>
+              <a:t>The number</a:t>
+            </a:r>
+          </a:p>
+        </p:txBody>
+      </p:sp>
+      <p:sp>
+        <p:nvSpPr>
+          <p:cNvPr id="13" name="TextBox 12"/>
+          <p:cNvSpPr txBox="1"/>
+          <p:nvPr/>
+        </p:nvSpPr>
+        <p:spPr>
+          <a:xfrm>
+            <a:off x="4571999" y="2697480"/>
+            <a:ext cx="3063240" cy="1005840"/>
+          </a:xfrm>
+          <a:prstGeom prst="rect">
+            <a:avLst/>
+          </a:prstGeom>
+          <a:noFill/>
+        </p:spPr>
+        <p:txBody>
+          <a:bodyPr wrap="square" anchor="t" lIns="0" rIns="0" tIns="0" bIns="0">
+            <a:spAutoFit/>
+          </a:bodyPr>
+          <a:lstStyle/>
+          <a:p>
+            <a:pPr algn="l">
+              <a:lnSpc>
+                <a:spcPct val="106000"/>
+              </a:lnSpc>
+              <a:spcBef>
+                <a:spcPts val="0"/>
+              </a:spcBef>
+              <a:spcAft>
+                <a:spcPts val="600"/>
+              </a:spcAft>
+            </a:pPr>
+            <a:r>
+              <a:rPr sz="1450" b="0" i="0">
+                <a:solidFill>
+                  <a:srgbClr val="37424F"/>
+                </a:solidFill>
+                <a:latin typeface="Calibri"/>
+              </a:rPr>
+              <a:t>The single figure that changed your mind.</a:t>
+            </a:r>
+          </a:p>
+        </p:txBody>
+      </p:sp>
+      <p:sp>
+        <p:nvSpPr>
+          <p:cNvPr id="14" name="Rectangle 13"/>
+          <p:cNvSpPr/>
+          <p:nvPr/>
+        </p:nvSpPr>
+        <p:spPr>
+          <a:xfrm>
+            <a:off x="8046718" y="1828800"/>
+            <a:ext cx="3566160" cy="2011680"/>
+          </a:xfrm>
+          <a:prstGeom prst="rect">
+            <a:avLst/>
+          </a:prstGeom>
+          <a:solidFill>
+            <a:srgbClr val="F4F6F9"/>
+          </a:solidFill>
+          <a:ln w="9525">
+            <a:solidFill>
+              <a:srgbClr val="B4571F"/>
+            </a:solidFill>
+          </a:ln>
+          <a:effectLst/>
+        </p:spPr>
+        <p:style>
+          <a:lnRef idx="1">
+            <a:schemeClr val="accent1"/>
+          </a:lnRef>
+          <a:fillRef idx="3">
+            <a:schemeClr val="accent1"/>
+          </a:fillRef>
+          <a:effectRef idx="2">
+            <a:schemeClr val="accent1"/>
+          </a:effectRef>
+          <a:fontRef idx="minor">
+            <a:schemeClr val="lt1"/>
+          </a:fontRef>
+        </p:style>
+        <p:txBody>
+          <a:bodyPr rtlCol="0" anchor="ctr"/>
+          <a:lstStyle/>
+          <a:p>
+            <a:pPr algn="ctr"/>
+          </a:p>
+        </p:txBody>
+      </p:sp>
+      <p:sp>
+        <p:nvSpPr>
+          <p:cNvPr id="15" name="Rectangle 14"/>
+          <p:cNvSpPr/>
+          <p:nvPr/>
+        </p:nvSpPr>
+        <p:spPr>
+          <a:xfrm>
+            <a:off x="8046718" y="1828800"/>
+            <a:ext cx="3566160" cy="109728"/>
+          </a:xfrm>
+          <a:prstGeom prst="rect">
+            <a:avLst/>
+          </a:prstGeom>
+          <a:solidFill>
+            <a:srgbClr val="B4571F"/>
+          </a:solidFill>
+          <a:ln>
+            <a:noFill/>
+          </a:ln>
+          <a:effectLst/>
+        </p:spPr>
+        <p:style>
+          <a:lnRef idx="1">
+            <a:schemeClr val="accent1"/>
+          </a:lnRef>
+          <a:fillRef idx="3">
+            <a:schemeClr val="accent1"/>
+          </a:fillRef>
+          <a:effectRef idx="2">
+            <a:schemeClr val="accent1"/>
+          </a:effectRef>
+          <a:fontRef idx="minor">
+            <a:schemeClr val="lt1"/>
+          </a:fontRef>
+        </p:style>
+        <p:txBody>
+          <a:bodyPr rtlCol="0" anchor="ctr"/>
+          <a:lstStyle/>
+          <a:p>
+            <a:pPr algn="ctr"/>
+          </a:p>
+        </p:txBody>
+      </p:sp>
+      <p:sp>
+        <p:nvSpPr>
+          <p:cNvPr id="16" name="TextBox 15"/>
+          <p:cNvSpPr txBox="1"/>
+          <p:nvPr/>
+        </p:nvSpPr>
+        <p:spPr>
+          <a:xfrm>
+            <a:off x="8321038" y="2148840"/>
+            <a:ext cx="3017520" cy="457200"/>
+          </a:xfrm>
+          <a:prstGeom prst="rect">
+            <a:avLst/>
+          </a:prstGeom>
+          <a:noFill/>
+        </p:spPr>
+        <p:txBody>
+          <a:bodyPr wrap="square" anchor="t" lIns="0" rIns="0" tIns="0" bIns="0">
+            <a:spAutoFit/>
+          </a:bodyPr>
+          <a:lstStyle/>
+          <a:p>
+            <a:pPr algn="l">
+              <a:lnSpc>
+                <a:spcPct val="106000"/>
+              </a:lnSpc>
+              <a:spcBef>
+                <a:spcPts val="0"/>
+              </a:spcBef>
+              <a:spcAft>
+                <a:spcPts val="600"/>
+              </a:spcAft>
+            </a:pPr>
+            <a:r>
+              <a:rPr sz="2000" b="1" i="0">
+                <a:solidFill>
+                  <a:srgbClr val="111820"/>
+                </a:solidFill>
+                <a:latin typeface="Calibri"/>
+              </a:rPr>
+              <a:t>The surprise</a:t>
+            </a:r>
+          </a:p>
+        </p:txBody>
+      </p:sp>
+      <p:sp>
+        <p:nvSpPr>
+          <p:cNvPr id="17" name="TextBox 16"/>
+          <p:cNvSpPr txBox="1"/>
+          <p:nvPr/>
+        </p:nvSpPr>
+        <p:spPr>
+          <a:xfrm>
+            <a:off x="8321038" y="2697480"/>
+            <a:ext cx="3063240" cy="1005840"/>
+          </a:xfrm>
+          <a:prstGeom prst="rect">
+            <a:avLst/>
+          </a:prstGeom>
+          <a:noFill/>
+        </p:spPr>
+        <p:txBody>
+          <a:bodyPr wrap="square" anchor="t" lIns="0" rIns="0" tIns="0" bIns="0">
+            <a:spAutoFit/>
+          </a:bodyPr>
+          <a:lstStyle/>
+          <a:p>
+            <a:pPr algn="l">
+              <a:lnSpc>
+                <a:spcPct val="106000"/>
+              </a:lnSpc>
+              <a:spcBef>
+                <a:spcPts val="0"/>
+              </a:spcBef>
+              <a:spcAft>
+                <a:spcPts val="600"/>
+              </a:spcAft>
+            </a:pPr>
+            <a:r>
+              <a:rPr sz="1450" b="0" i="0">
+                <a:solidFill>
+                  <a:srgbClr val="37424F"/>
+                </a:solidFill>
+                <a:latin typeface="Calibri"/>
+              </a:rPr>
+              <a:t>The one “I didn't realise that” moment.</a:t>
+            </a:r>
+          </a:p>
+        </p:txBody>
+      </p:sp>
+      <p:sp>
+        <p:nvSpPr>
+          <p:cNvPr id="18" name="TextBox 17"/>
+          <p:cNvSpPr txBox="1"/>
+          <p:nvPr/>
+        </p:nvSpPr>
+        <p:spPr>
+          <a:xfrm>
+            <a:off x="548640" y="4297680"/>
+            <a:ext cx="10972800" cy="457200"/>
+          </a:xfrm>
+          <a:prstGeom prst="rect">
+            <a:avLst/>
+          </a:prstGeom>
+          <a:noFill/>
+        </p:spPr>
+        <p:txBody>
+          <a:bodyPr wrap="square" anchor="t" lIns="0" rIns="0" tIns="0" bIns="0">
+            <a:spAutoFit/>
+          </a:bodyPr>
+          <a:lstStyle/>
+          <a:p>
+            <a:pPr algn="l">
+              <a:lnSpc>
+                <a:spcPct val="106000"/>
+              </a:lnSpc>
+              <a:spcBef>
+                <a:spcPts val="0"/>
+              </a:spcBef>
+              <a:spcAft>
+                <a:spcPts val="600"/>
+              </a:spcAft>
+            </a:pPr>
+            <a:r>
+              <a:rPr sz="1500" b="1" i="0">
+                <a:solidFill>
+                  <a:srgbClr val="111820"/>
+                </a:solidFill>
+                <a:latin typeface="Calibri"/>
+              </a:rPr>
+              <a:t>Then, as a room:</a:t>
+            </a:r>
+          </a:p>
+        </p:txBody>
+      </p:sp>
+      <p:sp>
+        <p:nvSpPr>
+          <p:cNvPr id="19" name="TextBox 18"/>
+          <p:cNvSpPr txBox="1"/>
+          <p:nvPr/>
+        </p:nvSpPr>
+        <p:spPr>
+          <a:xfrm>
+            <a:off x="548640" y="4709160"/>
+            <a:ext cx="11064240" cy="1371600"/>
+          </a:xfrm>
+          <a:prstGeom prst="rect">
+            <a:avLst/>
+          </a:prstGeom>
+          <a:noFill/>
+        </p:spPr>
+        <p:txBody>
+          <a:bodyPr wrap="square" lIns="0" rIns="0" tIns="0" bIns="0">
+            <a:spAutoFit/>
+          </a:bodyPr>
+          <a:lstStyle/>
+          <a:p>
+            <a:pPr>
+              <a:lnSpc>
+                <a:spcPct val="105000"/>
+              </a:lnSpc>
+              <a:spcAft>
+                <a:spcPts val="800"/>
+              </a:spcAft>
+            </a:pPr>
+            <a:r>
+              <a:rPr sz="1500" b="1">
+                <a:solidFill>
+                  <a:srgbClr val="0D7D74"/>
+                </a:solidFill>
+                <a:latin typeface="Calibri"/>
+              </a:rPr>
+              <a:t>▸  </a:t>
+            </a:r>
+            <a:r>
+              <a:rPr sz="1500" b="0">
+                <a:solidFill>
+                  <a:srgbClr val="37424F"/>
+                </a:solidFill>
+                <a:latin typeface="Calibri"/>
+              </a:rPr>
+              <a:t>Is 100% renewable the right target — or do we plan for ~90% + firm gas?</a:t>
+            </a:r>
+          </a:p>
+          <a:p>
+            <a:pPr>
+              <a:lnSpc>
+                <a:spcPct val="105000"/>
+              </a:lnSpc>
+              <a:spcAft>
+                <a:spcPts val="800"/>
+              </a:spcAft>
+            </a:pPr>
+            <a:r>
+              <a:rPr sz="1500" b="1">
+                <a:solidFill>
+                  <a:srgbClr val="0D7D74"/>
+                </a:solidFill>
+                <a:latin typeface="Calibri"/>
+              </a:rPr>
+              <a:t>▸  </a:t>
+            </a:r>
+            <a:r>
+              <a:rPr sz="1500" b="0">
+                <a:solidFill>
+                  <a:srgbClr val="37424F"/>
+                </a:solidFill>
+                <a:latin typeface="Calibri"/>
+              </a:rPr>
+              <a:t>Would you build another unfirmed solar farm in this market?</a:t>
+            </a:r>
+          </a:p>
+          <a:p>
+            <a:pPr>
+              <a:lnSpc>
+                <a:spcPct val="105000"/>
+              </a:lnSpc>
+              <a:spcAft>
+                <a:spcPts val="800"/>
+              </a:spcAft>
+            </a:pPr>
+            <a:r>
+              <a:rPr sz="1500" b="1">
+                <a:solidFill>
+                  <a:srgbClr val="0D7D74"/>
+                </a:solidFill>
+                <a:latin typeface="Calibri"/>
+              </a:rPr>
+              <a:t>▸  </a:t>
+            </a:r>
+            <a:r>
+              <a:rPr sz="1500" b="0">
+                <a:solidFill>
+                  <a:srgbClr val="37424F"/>
+                </a:solidFill>
+                <a:latin typeface="Calibri"/>
+              </a:rPr>
+              <a:t>Heatwave, broken boiler, or data-centre boom — what's the biggest risk to the grid we're building for?</a:t>
+            </a:r>
+          </a:p>
+        </p:txBody>
+      </p:sp>
+      <p:sp>
+        <p:nvSpPr>
+          <p:cNvPr id="20" name="TextBox 19"/>
+          <p:cNvSpPr txBox="1"/>
+          <p:nvPr/>
+        </p:nvSpPr>
+        <p:spPr>
+          <a:xfrm>
+            <a:off x="502920" y="6419088"/>
+            <a:ext cx="8229600" cy="274320"/>
+          </a:xfrm>
+          <a:prstGeom prst="rect">
+            <a:avLst/>
+          </a:prstGeom>
+          <a:noFill/>
+        </p:spPr>
+        <p:txBody>
+          <a:bodyPr wrap="square" anchor="t" lIns="0" rIns="0" tIns="0" bIns="0">
+            <a:spAutoFit/>
+          </a:bodyPr>
+          <a:lstStyle/>
+          <a:p>
+            <a:pPr algn="l">
+              <a:lnSpc>
+                <a:spcPct val="106000"/>
+              </a:lnSpc>
+              <a:spcBef>
+                <a:spcPts val="0"/>
+              </a:spcBef>
+              <a:spcAft>
+                <a:spcPts val="600"/>
+              </a:spcAft>
+            </a:pPr>
+            <a:r>
               <a:rPr sz="900" b="0" i="0">
                 <a:solidFill>
                   <a:srgbClr val="66717F"/>
@@ -24215,7 +25207,7 @@
 </p:sld>
 </file>
 
-<file path=ppt/slides/slide32.xml><?xml version="1.0" encoding="utf-8"?>
+<file path=ppt/slides/slide33.xml><?xml version="1.0" encoding="utf-8"?>
 <p:sld xmlns:a="http://schemas.openxmlformats.org/drawingml/2006/main" xmlns:p="http://schemas.openxmlformats.org/presentationml/2006/main" xmlns:r="http://schemas.openxmlformats.org/officeDocument/2006/relationships">
   <p:cSld>
     <p:spTree>
